--- a/Objetivos Prioritarios/Salidas/informe_detenidos.pptx
+++ b/Objetivos Prioritarios/Salidas/informe_detenidos.pptx
@@ -1,15 +1,11 @@
 
 <file path=ppt/presentation.xml><?xml version="1.0" encoding="utf-8"?>
-<p:presentation xmlns:p15="http://schemas.microsoft.com/office/powerpoint/2012/main" xmlns:a="http://schemas.openxmlformats.org/drawingml/2006/main" xmlns:r="http://schemas.openxmlformats.org/officeDocument/2006/relationships" xmlns:p="http://schemas.openxmlformats.org/presentationml/2006/main" saveSubsetFonts="1">
+<p:presentation xmlns:a="http://schemas.openxmlformats.org/drawingml/2006/main" xmlns:r="http://schemas.openxmlformats.org/officeDocument/2006/relationships" xmlns:p="http://schemas.openxmlformats.org/presentationml/2006/main" saveSubsetFonts="1">
   <p:sldMasterIdLst>
     <p:sldMasterId id="2147483648" r:id="rId1"/>
   </p:sldMasterIdLst>
   <p:sldIdLst>
-    <p:sldId id="306" r:id="R76fffcd297264176"/>
-    <p:sldId id="307" r:id="Ra1213d6455054236"/>
-    <p:sldId id="308" r:id="R149cf5ec2c9b41ec"/>
-    <p:sldId id="309" r:id="R6bceae9a438a4ce4"/>
-    <p:sldId id="310" r:id="R40f5dbdc8e9f463c"/>
+    <p:sldId id="305" r:id="rId2"/>
   </p:sldIdLst>
   <p:sldSz cx="12192000" cy="6858000"/>
   <p:notesSz cx="6858000" cy="9144000"/>
@@ -749,7 +745,7 @@
 </file>
 
 <file path=ppt/slideLayouts/slideLayout2.xml><?xml version="1.0" encoding="utf-8"?>
-<p:sldLayout xmlns:a16="http://schemas.microsoft.com/office/drawing/2014/main" xmlns:p14="http://schemas.microsoft.com/office/powerpoint/2010/main" xmlns:a="http://schemas.openxmlformats.org/drawingml/2006/main" xmlns:r="http://schemas.openxmlformats.org/officeDocument/2006/relationships" xmlns:p="http://schemas.openxmlformats.org/presentationml/2006/main" type="obj" preserve="1">
+<p:sldLayout xmlns:a="http://schemas.openxmlformats.org/drawingml/2006/main" xmlns:r="http://schemas.openxmlformats.org/officeDocument/2006/relationships" xmlns:p="http://schemas.openxmlformats.org/presentationml/2006/main" type="obj" preserve="1">
   <p:cSld name="Título y objetos">
     <p:spTree>
       <p:nvGrpSpPr>
@@ -2765,7 +2761,7 @@
 </file>
 
 <file path=ppt/slideMasters/slideMaster1.xml><?xml version="1.0" encoding="utf-8"?>
-<p:sldMaster xmlns:a16="http://schemas.microsoft.com/office/drawing/2014/main" xmlns:p14="http://schemas.microsoft.com/office/powerpoint/2010/main" xmlns:a="http://schemas.openxmlformats.org/drawingml/2006/main" xmlns:r="http://schemas.openxmlformats.org/officeDocument/2006/relationships" xmlns:p="http://schemas.openxmlformats.org/presentationml/2006/main">
+<p:sldMaster xmlns:a="http://schemas.openxmlformats.org/drawingml/2006/main" xmlns:r="http://schemas.openxmlformats.org/officeDocument/2006/relationships" xmlns:p="http://schemas.openxmlformats.org/presentationml/2006/main">
   <p:cSld>
     <p:bg>
       <p:bgRef idx="1001">
@@ -4166,7 +4162,7 @@
 </file>
 
 <file path=ppt/slides/slide2.xml><?xml version="1.0" encoding="utf-8"?>
-<p:sld xmlns:a16="http://schemas.microsoft.com/office/drawing/2014/main" xmlns:p14="http://schemas.microsoft.com/office/powerpoint/2010/main" xmlns:a14="http://schemas.microsoft.com/office/drawing/2010/main" xmlns:a="http://schemas.openxmlformats.org/drawingml/2006/main" xmlns:r="http://schemas.openxmlformats.org/officeDocument/2006/relationships" xmlns:p="http://schemas.openxmlformats.org/presentationml/2006/main">
+<p:sld xmlns:a="http://schemas.openxmlformats.org/drawingml/2006/main" xmlns:r="http://schemas.openxmlformats.org/officeDocument/2006/relationships" xmlns:p="http://schemas.openxmlformats.org/presentationml/2006/main">
   <p:cSld>
     <p:spTree>
       <p:nvGrpSpPr>
@@ -4197,7 +4193,7 @@
           <p:nvPr/>
         </p:nvPicPr>
         <p:blipFill>
-          <a:blip r:embed="Reabcfbca4e4743e8"/>
+          <a:blip r:embed="rId2"/>
           <a:stretch>
             <a:fillRect/>
           </a:stretch>
@@ -4273,7 +4269,7 @@
                     <a:p>
                       <a:r>
                         <a:rPr lang="es-MX" sz="1600" dirty="0"/>
-                        <a:t>LUIS ARTURO PADILLA HERNANDEZ</a:t>
+                        <a:t>[C1]</a:t>
                       </a:r>
                     </a:p>
                   </a:txBody>
@@ -4336,7 +4332,7 @@
                     <a:p>
                       <a:r>
                         <a:rPr lang="es-MX" sz="1200" b="1" dirty="0"/>
-                        <a:t>CJNG</a:t>
+                        <a:t>[C2]</a:t>
                       </a:r>
                     </a:p>
                   </a:txBody>
@@ -4366,7 +4362,7 @@
                       </a:pPr>
                       <a:r>
                         <a:rPr lang="es-MX" sz="1200" b="1" dirty="0"/>
-                        <a:t>EJECUTOR</a:t>
+                        <a:t>[C3]</a:t>
                       </a:r>
                     </a:p>
                   </a:txBody>
@@ -4416,12 +4412,7 @@
                       </a:pPr>
                       <a:r>
                         <a:rPr lang="es-MX" sz="1100" dirty="0"/>
-                        <a:t>
-• Contra la Salud — 22/05/2020 17:50
-• Abigeato (Robo rual) — 19/05/2011 20:30
-• Abigeato (Robo rual) — 19/05/2011 20:00
-• Robo calificado / Sin Detalle — 08/11/2004 12:30
-• Robo calificado / Sin Detalle — 10/04/2003 16:00</a:t>
+                        <a:t>[C4]</a:t>
                       </a:r>
                     </a:p>
                   </a:txBody>
@@ -4488,12 +4479,7 @@
                           <a:ea typeface="+mn-ea"/>
                           <a:cs typeface="+mn-cs"/>
                         </a:rPr>
-                        <a:t>
-• CI/AGS/01228/01-23 Privación ilegal de la libertad
-• CI/AGS/01718/01-23 Contra la Salud
-• CI/AGS/06518/03-23 Privación ilegal de la libertad
-• CI/AGS/11529/05-20 Contra la Salud
-• DGAP/AGS/06938/05-11 Robo calificado</a:t>
+                        <a:t>[C5]</a:t>
                       </a:r>
                       <a:endParaRPr lang="es-MX" sz="1100" kern="1200" dirty="0">
                         <a:solidFill>
@@ -4582,12 +4568,7 @@
                           <a:ea typeface="+mn-ea"/>
                           <a:cs typeface="+mn-cs"/>
                         </a:rPr>
-                        <a:t>
-• ROBO CALIFICADO — CUMPLIMENTADA
-• ROBO CALIFICADO — CANCELADO
-• DESAPARICION FORZADA DE PERSONAS — CUMPLIMENTADA
-• CONTRA LA SALUD — CUMPLIMENTADA
-• PRIVACION ILEGAL DE LA LIBERTAD — CUMPLIMENTADA</a:t>
+                        <a:t>[C6]</a:t>
                       </a:r>
                     </a:p>
                   </a:txBody>
@@ -4668,7 +4649,7 @@
                           <a:ea typeface="+mn-ea"/>
                           <a:cs typeface="+mn-cs"/>
                         </a:rPr>
-                        <a:t>Sentenciado, se sentencio por violacion a la persona</a:t>
+                        <a:t>[C7], [C8]</a:t>
                       </a:r>
                     </a:p>
                   </a:txBody>
@@ -4735,8 +4716,7 @@
                           <a:ea typeface="+mn-ea"/>
                           <a:cs typeface="+mn-cs"/>
                         </a:rPr>
-                        <a:t>Caso doña Juana  LEO Occisos Ma. Juana Montoya Gonzáles y Juan Gabriel Gutiérrez Marín, hechos ocurridos el 27 de junio de 2022, cuando las victimas en primera instancia fueron privados de su libertad en su domicilio ubicado en el municipio de Rincón de Romos y posteriormente  localizados sin vida en las inmediaciones del predio rustico “el charquito
-LEO 588</a:t>
+                        <a:t>[C9]</a:t>
                       </a:r>
                     </a:p>
                     <a:p>
@@ -4794,846 +4774,7 @@
                           <a:ea typeface="+mn-ea"/>
                           <a:cs typeface="+mn-cs"/>
                         </a:rPr>
-                        <a:t>LEONARDO MORFIN ESQUIVEL </a:t>
-                      </a:r>
-                    </a:p>
-                    <a:p>
-                      <a:pPr marL="0" marR="0" lvl="0" indent="0" algn="just" defTabSz="914400" rtl="0" eaLnBrk="1" fontAlgn="auto" latinLnBrk="0" hangingPunct="1">
-                        <a:lnSpc>
-                          <a:spcPct val="100000"/>
-                        </a:lnSpc>
-                        <a:spcBef>
-                          <a:spcPts val="0"/>
-                        </a:spcBef>
-                        <a:spcAft>
-                          <a:spcPts val="0"/>
-                        </a:spcAft>
-                        <a:buClrTx/>
-                        <a:buSzTx/>
-                        <a:buFontTx/>
-                        <a:buNone/>
-                        <a:tabLst/>
-                        <a:defRPr/>
-                      </a:pPr>
-                      <a:endParaRPr lang="es-MX" sz="1100" kern="1200" dirty="0">
-                        <a:solidFill>
-                          <a:schemeClr val="dk1"/>
-                        </a:solidFill>
-                        <a:latin typeface="+mn-lt"/>
-                        <a:ea typeface="+mn-ea"/>
-                        <a:cs typeface="+mn-cs"/>
-                      </a:endParaRPr>
-                    </a:p>
-                    <a:p>
-                      <a:pPr marL="0" marR="0" lvl="0" indent="0" algn="just" defTabSz="914400" rtl="0" eaLnBrk="1" fontAlgn="auto" latinLnBrk="0" hangingPunct="1">
-                        <a:lnSpc>
-                          <a:spcPct val="100000"/>
-                        </a:lnSpc>
-                        <a:spcBef>
-                          <a:spcPts val="0"/>
-                        </a:spcBef>
-                        <a:spcAft>
-                          <a:spcPts val="0"/>
-                        </a:spcAft>
-                        <a:buClrTx/>
-                        <a:buSzTx/>
-                        <a:buFontTx/>
-                        <a:buNone/>
-                        <a:tabLst/>
-                        <a:defRPr/>
-                      </a:pPr>
-                      <a:r>
-                        <a:rPr lang="es-MX" sz="1100" kern="1200" dirty="0">
-                          <a:solidFill>
-                            <a:schemeClr val="dk1"/>
-                          </a:solidFill>
-                          <a:latin typeface="+mn-lt"/>
-                          <a:ea typeface="+mn-ea"/>
-                          <a:cs typeface="+mn-cs"/>
-                        </a:rPr>
-                        <a:t>CARLOS LEONARDO CRUZ CARRILLO </a:t>
-                      </a:r>
-                    </a:p>
-                    <a:p>
-                      <a:pPr marL="0" indent="0" algn="just">
-                        <a:buFontTx/>
-                        <a:buNone/>
-                      </a:pPr>
-                      <a:endParaRPr lang="es-MX" sz="1100" kern="1200" dirty="0">
-                        <a:solidFill>
-                          <a:schemeClr val="dk1"/>
-                        </a:solidFill>
-                        <a:latin typeface="+mn-lt"/>
-                        <a:ea typeface="+mn-ea"/>
-                        <a:cs typeface="+mn-cs"/>
-                      </a:endParaRPr>
-                    </a:p>
-                  </a:txBody>
-                  <a:tcPr/>
-                </a:tc>
-                <a:tc hMerge="1">
-                  <a:txBody>
-                    <a:bodyPr/>
-                    <a:lstStyle/>
-                    <a:p>
-                      <a:endParaRPr lang="es-MX"/>
-                    </a:p>
-                  </a:txBody>
-                  <a:tcPr/>
-                </a:tc>
-                <a:extLst>
-                  <a:ext uri="{0D108BD9-81ED-4DB2-BD59-A6C34878D82A}">
-                    <a16:rowId xmlns:a16="http://schemas.microsoft.com/office/drawing/2014/main" val="4024071236"/>
-                  </a:ext>
-                </a:extLst>
-              </a:tr>
-            </a:tbl>
-          </a:graphicData>
-        </a:graphic>
-      </p:graphicFrame>
-      <p:pic>
-        <p:nvPicPr>
-          <p:cNvPr id="7" name="[FP]" descr="[FP]">
-            <a:extLst>
-              <a:ext uri="{FF2B5EF4-FFF2-40B4-BE49-F238E27FC236}">
-                <a16:creationId xmlns:a16="http://schemas.microsoft.com/office/drawing/2014/main" id="{C80E713A-27D7-471A-9297-6CD4151A9971}"/>
-              </a:ext>
-            </a:extLst>
-          </p:cNvPr>
-          <p:cNvPicPr>
-            <a:picLocks noChangeAspect="1"/>
-          </p:cNvPicPr>
-          <p:nvPr/>
-        </p:nvPicPr>
-        <p:blipFill>
-          <a:blip r:embed="R698beb2b59794ac3">
-            <a:extLst>
-              <a:ext uri="{28A0092B-C50C-407E-A947-70E740481C1C}">
-                <a14:useLocalDpi xmlns:a14="http://schemas.microsoft.com/office/drawing/2010/main" val="0"/>
-              </a:ext>
-            </a:extLst>
-          </a:blip>
-          <a:stretch>
-            <a:fillRect/>
-          </a:stretch>
-        </p:blipFill>
-        <p:spPr>
-          <a:xfrm>
-            <a:off x="214361" y="1714348"/>
-            <a:ext cx="2902475" cy="4351338"/>
-          </a:xfrm>
-          <a:prstGeom prst="rect">
-            <a:avLst/>
-          </a:prstGeom>
-        </p:spPr>
-      </p:pic>
-      <p:pic>
-        <p:nvPicPr>
-          <p:cNvPr id="11" name="[FV1]" descr="[FV1]">
-            <a:extLst>
-              <a:ext uri="{FF2B5EF4-FFF2-40B4-BE49-F238E27FC236}">
-                <a16:creationId xmlns:a16="http://schemas.microsoft.com/office/drawing/2014/main" id="{95A1EC47-8063-435B-9340-91DBB33FE951}"/>
-              </a:ext>
-            </a:extLst>
-          </p:cNvPr>
-          <p:cNvPicPr>
-            <a:picLocks noChangeAspect="1"/>
-          </p:cNvPicPr>
-          <p:nvPr/>
-        </p:nvPicPr>
-        <p:blipFill>
-          <a:blip r:embed="rId3">
-            <a:extLst>
-              <a:ext uri="{28A0092B-C50C-407E-A947-70E740481C1C}">
-                <a14:useLocalDpi xmlns:a14="http://schemas.microsoft.com/office/drawing/2010/main" val="0"/>
-              </a:ext>
-            </a:extLst>
-          </a:blip>
-          <a:stretch>
-            <a:fillRect/>
-          </a:stretch>
-        </p:blipFill>
-        <p:spPr>
-          <a:xfrm>
-            <a:off x="7584982" y="5672321"/>
-            <a:ext cx="665008" cy="827694"/>
-          </a:xfrm>
-          <a:prstGeom prst="rect">
-            <a:avLst/>
-          </a:prstGeom>
-        </p:spPr>
-      </p:pic>
-      <p:pic>
-        <p:nvPicPr>
-          <p:cNvPr id="13" name="[FV2]" descr="[FV2]">
-            <a:extLst>
-              <a:ext uri="{FF2B5EF4-FFF2-40B4-BE49-F238E27FC236}">
-                <a16:creationId xmlns:a16="http://schemas.microsoft.com/office/drawing/2014/main" id="{65D6E13E-B1E1-4CA4-8F00-9E73059CD0BD}"/>
-              </a:ext>
-            </a:extLst>
-          </p:cNvPr>
-          <p:cNvPicPr>
-            <a:picLocks noChangeAspect="1"/>
-          </p:cNvPicPr>
-          <p:nvPr/>
-        </p:nvPicPr>
-        <p:blipFill>
-          <a:blip r:embed="rId3">
-            <a:extLst>
-              <a:ext uri="{28A0092B-C50C-407E-A947-70E740481C1C}">
-                <a14:useLocalDpi xmlns:a14="http://schemas.microsoft.com/office/drawing/2010/main" val="0"/>
-              </a:ext>
-            </a:extLst>
-          </a:blip>
-          <a:stretch>
-            <a:fillRect/>
-          </a:stretch>
-        </p:blipFill>
-        <p:spPr>
-          <a:xfrm>
-            <a:off x="9993131" y="5680558"/>
-            <a:ext cx="665008" cy="827694"/>
-          </a:xfrm>
-          <a:prstGeom prst="rect">
-            <a:avLst/>
-          </a:prstGeom>
-        </p:spPr>
-      </p:pic>
-    </p:spTree>
-    <p:extLst>
-      <p:ext uri="{BB962C8B-B14F-4D97-AF65-F5344CB8AC3E}">
-        <p14:creationId xmlns:p14="http://schemas.microsoft.com/office/powerpoint/2010/main" val="2124728287"/>
-      </p:ext>
-    </p:extLst>
-  </p:cSld>
-  <p:clrMapOvr>
-    <a:masterClrMapping/>
-  </p:clrMapOvr>
-</p:sld>
-</file>
-
-<file path=ppt/slides/slide3.xml><?xml version="1.0" encoding="utf-8"?>
-<p:sld xmlns:a16="http://schemas.microsoft.com/office/drawing/2014/main" xmlns:p14="http://schemas.microsoft.com/office/powerpoint/2010/main" xmlns:a14="http://schemas.microsoft.com/office/drawing/2010/main" xmlns:a="http://schemas.openxmlformats.org/drawingml/2006/main" xmlns:r="http://schemas.openxmlformats.org/officeDocument/2006/relationships" xmlns:p="http://schemas.openxmlformats.org/presentationml/2006/main">
-  <p:cSld>
-    <p:spTree>
-      <p:nvGrpSpPr>
-        <p:cNvPr id="1" name=""/>
-        <p:cNvGrpSpPr/>
-        <p:nvPr/>
-      </p:nvGrpSpPr>
-      <p:grpSpPr>
-        <a:xfrm>
-          <a:off x="0" y="0"/>
-          <a:ext cx="0" cy="0"/>
-          <a:chOff x="0" y="0"/>
-          <a:chExt cx="0" cy="0"/>
-        </a:xfrm>
-      </p:grpSpPr>
-      <p:pic>
-        <p:nvPicPr>
-          <p:cNvPr id="4" name="[FONDO]" descr="[FONDO]">
-            <a:extLst>
-              <a:ext uri="{FF2B5EF4-FFF2-40B4-BE49-F238E27FC236}">
-                <a16:creationId xmlns:a16="http://schemas.microsoft.com/office/drawing/2014/main" id="{AE2FEBDB-ED54-FF79-0EF8-AA9E7C8EA417}"/>
-              </a:ext>
-            </a:extLst>
-          </p:cNvPr>
-          <p:cNvPicPr>
-            <a:picLocks noChangeAspect="1"/>
-          </p:cNvPicPr>
-          <p:nvPr/>
-        </p:nvPicPr>
-        <p:blipFill>
-          <a:blip r:embed="Refe7a2935e814523"/>
-          <a:stretch>
-            <a:fillRect/>
-          </a:stretch>
-        </p:blipFill>
-        <p:spPr>
-          <a:xfrm>
-            <a:off x="1" y="0"/>
-            <a:ext cx="12401280" cy="6969519"/>
-          </a:xfrm>
-          <a:prstGeom prst="rect">
-            <a:avLst/>
-          </a:prstGeom>
-        </p:spPr>
-      </p:pic>
-      <p:graphicFrame>
-        <p:nvGraphicFramePr>
-          <p:cNvPr id="10" name="Tabla 9">
-            <a:extLst>
-              <a:ext uri="{FF2B5EF4-FFF2-40B4-BE49-F238E27FC236}">
-                <a16:creationId xmlns:a16="http://schemas.microsoft.com/office/drawing/2014/main" id="{BC4CEC18-7797-7786-F517-147A6AD7242D}"/>
-              </a:ext>
-            </a:extLst>
-          </p:cNvPr>
-          <p:cNvGraphicFramePr>
-            <a:graphicFrameLocks noGrp="1"/>
-          </p:cNvGraphicFramePr>
-          <p:nvPr>
-            <p:extLst>
-              <p:ext uri="{D42A27DB-BD31-4B8C-83A1-F6EECF244321}">
-                <p14:modId xmlns:p14="http://schemas.microsoft.com/office/powerpoint/2010/main" val="1791400885"/>
-              </p:ext>
-            </p:extLst>
-          </p:nvPr>
-        </p:nvGraphicFramePr>
-        <p:xfrm>
-          <a:off x="3252159" y="1370610"/>
-          <a:ext cx="9149122" cy="5266098"/>
-        </p:xfrm>
-        <a:graphic>
-          <a:graphicData uri="http://schemas.openxmlformats.org/drawingml/2006/table">
-            <a:tbl>
-              <a:tblPr firstRow="1" bandRow="1">
-                <a:tableStyleId>{5C22544A-7EE6-4342-B048-85BDC9FD1C3A}</a:tableStyleId>
-              </a:tblPr>
-              <a:tblGrid>
-                <a:gridCol w="2462314">
-                  <a:extLst>
-                    <a:ext uri="{9D8B030D-6E8A-4147-A177-3AD203B41FA5}">
-                      <a16:colId xmlns:a16="http://schemas.microsoft.com/office/drawing/2014/main" val="2746230745"/>
-                    </a:ext>
-                  </a:extLst>
-                </a:gridCol>
-                <a:gridCol w="3343404">
-                  <a:extLst>
-                    <a:ext uri="{9D8B030D-6E8A-4147-A177-3AD203B41FA5}">
-                      <a16:colId xmlns:a16="http://schemas.microsoft.com/office/drawing/2014/main" val="3075986152"/>
-                    </a:ext>
-                  </a:extLst>
-                </a:gridCol>
-                <a:gridCol w="3343404">
-                  <a:extLst>
-                    <a:ext uri="{9D8B030D-6E8A-4147-A177-3AD203B41FA5}">
-                      <a16:colId xmlns:a16="http://schemas.microsoft.com/office/drawing/2014/main" val="4044500939"/>
-                    </a:ext>
-                  </a:extLst>
-                </a:gridCol>
-              </a:tblGrid>
-              <a:tr h="319663">
-                <a:tc gridSpan="3">
-                  <a:txBody>
-                    <a:bodyPr/>
-                    <a:lstStyle/>
-                    <a:p>
-                      <a:r>
-                        <a:rPr lang="es-MX" sz="1600" dirty="0"/>
-                        <a:t>RICARDO OMAR HERRERA GUERRERO</a:t>
-                      </a:r>
-                    </a:p>
-                  </a:txBody>
-                  <a:tcPr/>
-                </a:tc>
-                <a:tc hMerge="1">
-                  <a:txBody>
-                    <a:bodyPr/>
-                    <a:lstStyle/>
-                    <a:p>
-                      <a:endParaRPr lang="es-MX" dirty="0"/>
-                    </a:p>
-                  </a:txBody>
-                  <a:tcPr/>
-                </a:tc>
-                <a:tc hMerge="1">
-                  <a:txBody>
-                    <a:bodyPr/>
-                    <a:lstStyle/>
-                    <a:p>
-                      <a:endParaRPr lang="es-MX"/>
-                    </a:p>
-                  </a:txBody>
-                  <a:tcPr/>
-                </a:tc>
-                <a:extLst>
-                  <a:ext uri="{0D108BD9-81ED-4DB2-BD59-A6C34878D82A}">
-                    <a16:rowId xmlns:a16="http://schemas.microsoft.com/office/drawing/2014/main" val="3979505418"/>
-                  </a:ext>
-                </a:extLst>
-              </a:tr>
-              <a:tr h="319663">
-                <a:tc>
-                  <a:txBody>
-                    <a:bodyPr/>
-                    <a:lstStyle/>
-                    <a:p>
-                      <a:r>
-                        <a:rPr lang="es-MX" sz="1100" b="1" dirty="0">
-                          <a:solidFill>
-                            <a:schemeClr val="bg1"/>
-                          </a:solidFill>
-                        </a:rPr>
-                        <a:t>GRUPO DELICTIVO</a:t>
-                      </a:r>
-                    </a:p>
-                  </a:txBody>
-                  <a:tcPr>
-                    <a:solidFill>
-                      <a:schemeClr val="accent1">
-                        <a:lumMod val="75000"/>
-                      </a:schemeClr>
-                    </a:solidFill>
-                  </a:tcPr>
-                </a:tc>
-                <a:tc>
-                  <a:txBody>
-                    <a:bodyPr/>
-                    <a:lstStyle/>
-                    <a:p>
-                      <a:r>
-                        <a:rPr lang="es-MX" sz="1200" b="1" dirty="0"/>
-                        <a:t>CJNG</a:t>
-                      </a:r>
-                    </a:p>
-                  </a:txBody>
-                  <a:tcPr/>
-                </a:tc>
-                <a:tc>
-                  <a:txBody>
-                    <a:bodyPr/>
-                    <a:lstStyle/>
-                    <a:p>
-                      <a:pPr marL="0" marR="0" lvl="0" indent="0" algn="l" defTabSz="914400" rtl="0" eaLnBrk="1" fontAlgn="auto" latinLnBrk="0" hangingPunct="1">
-                        <a:lnSpc>
-                          <a:spcPct val="100000"/>
-                        </a:lnSpc>
-                        <a:spcBef>
-                          <a:spcPts val="0"/>
-                        </a:spcBef>
-                        <a:spcAft>
-                          <a:spcPts val="0"/>
-                        </a:spcAft>
-                        <a:buClrTx/>
-                        <a:buSzTx/>
-                        <a:buFontTx/>
-                        <a:buNone/>
-                        <a:tabLst/>
-                        <a:defRPr/>
-                      </a:pPr>
-                      <a:r>
-                        <a:rPr lang="es-MX" sz="1200" b="1" dirty="0"/>
-                        <a:t>EJECUTOR</a:t>
-                      </a:r>
-                    </a:p>
-                  </a:txBody>
-                  <a:tcPr/>
-                </a:tc>
-                <a:extLst>
-                  <a:ext uri="{0D108BD9-81ED-4DB2-BD59-A6C34878D82A}">
-                    <a16:rowId xmlns:a16="http://schemas.microsoft.com/office/drawing/2014/main" val="201189607"/>
-                  </a:ext>
-                </a:extLst>
-              </a:tr>
-              <a:tr h="725435">
-                <a:tc>
-                  <a:txBody>
-                    <a:bodyPr/>
-                    <a:lstStyle/>
-                    <a:p>
-                      <a:r>
-                        <a:rPr lang="es-MX" sz="1100" b="1" kern="1200" dirty="0">
-                          <a:solidFill>
-                            <a:schemeClr val="bg1"/>
-                          </a:solidFill>
-                          <a:latin typeface="+mn-lt"/>
-                          <a:ea typeface="+mn-ea"/>
-                          <a:cs typeface="+mn-cs"/>
-                        </a:rPr>
-                        <a:t>DELITOS / INGRESOS</a:t>
-                      </a:r>
-                    </a:p>
-                  </a:txBody>
-                  <a:tcPr>
-                    <a:solidFill>
-                      <a:schemeClr val="accent1">
-                        <a:lumMod val="75000"/>
-                      </a:schemeClr>
-                    </a:solidFill>
-                  </a:tcPr>
-                </a:tc>
-                <a:tc gridSpan="2">
-                  <a:txBody>
-                    <a:bodyPr/>
-                    <a:lstStyle/>
-                    <a:p>
-                      <a:pPr marL="0" indent="0">
-                        <a:buFont typeface="Arial" panose="020B0604020202020204" pitchFamily="34" charset="0"/>
-                        <a:buNone/>
-                      </a:pPr>
-                      <a:r>
-                        <a:rPr lang="es-MX" sz="1100" dirty="0"/>
-                        <a:t>
-• Contra la Salud — 11/10/2019 10:10</a:t>
-                      </a:r>
-                    </a:p>
-                  </a:txBody>
-                  <a:tcPr/>
-                </a:tc>
-                <a:tc hMerge="1">
-                  <a:txBody>
-                    <a:bodyPr/>
-                    <a:lstStyle/>
-                    <a:p>
-                      <a:endParaRPr lang="es-MX"/>
-                    </a:p>
-                  </a:txBody>
-                  <a:tcPr/>
-                </a:tc>
-                <a:extLst>
-                  <a:ext uri="{0D108BD9-81ED-4DB2-BD59-A6C34878D82A}">
-                    <a16:rowId xmlns:a16="http://schemas.microsoft.com/office/drawing/2014/main" val="3340689267"/>
-                  </a:ext>
-                </a:extLst>
-              </a:tr>
-              <a:tr h="1044626">
-                <a:tc>
-                  <a:txBody>
-                    <a:bodyPr/>
-                    <a:lstStyle/>
-                    <a:p>
-                      <a:r>
-                        <a:rPr lang="es-MX" sz="1100" b="1" kern="1200" dirty="0">
-                          <a:solidFill>
-                            <a:schemeClr val="bg1"/>
-                          </a:solidFill>
-                          <a:latin typeface="+mn-lt"/>
-                          <a:ea typeface="+mn-ea"/>
-                          <a:cs typeface="+mn-cs"/>
-                        </a:rPr>
-                        <a:t>CARPETAS DE INVESTIGACIÓN</a:t>
-                      </a:r>
-                    </a:p>
-                  </a:txBody>
-                  <a:tcPr>
-                    <a:solidFill>
-                      <a:schemeClr val="accent1">
-                        <a:lumMod val="75000"/>
-                      </a:schemeClr>
-                    </a:solidFill>
-                  </a:tcPr>
-                </a:tc>
-                <a:tc gridSpan="2">
-                  <a:txBody>
-                    <a:bodyPr/>
-                    <a:lstStyle/>
-                    <a:p>
-                      <a:pPr marL="0" indent="0" algn="l" defTabSz="914400" rtl="0" eaLnBrk="1" latinLnBrk="0" hangingPunct="1">
-                        <a:buFont typeface="Arial" panose="020B0604020202020204" pitchFamily="34" charset="0"/>
-                        <a:buNone/>
-                      </a:pPr>
-                      <a:r>
-                        <a:rPr lang="es-MX" sz="1100" kern="1200">
-                          <a:solidFill>
-                            <a:schemeClr val="dk1"/>
-                          </a:solidFill>
-                          <a:latin typeface="+mn-lt"/>
-                          <a:ea typeface="+mn-ea"/>
-                          <a:cs typeface="+mn-cs"/>
-                        </a:rPr>
-                        <a:t>
-• CI/AGS/06518/03-23 Privación ilegal de la libertad
-• CI/RIN/00175/03-23 Contra la Salud
-• CI/RIN/00270/05-17 Robo calificado
-• CI/RIN/00343/05-23 Contra la Salud
-• CI/RIN/00351/06-22 Robo calificado</a:t>
-                      </a:r>
-                      <a:endParaRPr lang="es-MX" sz="1100" kern="1200" dirty="0">
-                        <a:solidFill>
-                          <a:schemeClr val="dk1"/>
-                        </a:solidFill>
-                        <a:latin typeface="+mn-lt"/>
-                        <a:ea typeface="+mn-ea"/>
-                        <a:cs typeface="+mn-cs"/>
-                      </a:endParaRPr>
-                    </a:p>
-                  </a:txBody>
-                  <a:tcPr/>
-                </a:tc>
-                <a:tc hMerge="1">
-                  <a:txBody>
-                    <a:bodyPr/>
-                    <a:lstStyle/>
-                    <a:p>
-                      <a:endParaRPr lang="es-MX"/>
-                    </a:p>
-                  </a:txBody>
-                  <a:tcPr/>
-                </a:tc>
-                <a:extLst>
-                  <a:ext uri="{0D108BD9-81ED-4DB2-BD59-A6C34878D82A}">
-                    <a16:rowId xmlns:a16="http://schemas.microsoft.com/office/drawing/2014/main" val="3218073216"/>
-                  </a:ext>
-                </a:extLst>
-              </a:tr>
-              <a:tr h="159387">
-                <a:tc>
-                  <a:txBody>
-                    <a:bodyPr/>
-                    <a:lstStyle/>
-                    <a:p>
-                      <a:pPr marL="0" marR="0" lvl="0" indent="0" algn="l" defTabSz="914400" rtl="0" eaLnBrk="1" fontAlgn="auto" latinLnBrk="0" hangingPunct="1">
-                        <a:lnSpc>
-                          <a:spcPct val="100000"/>
-                        </a:lnSpc>
-                        <a:spcBef>
-                          <a:spcPts val="0"/>
-                        </a:spcBef>
-                        <a:spcAft>
-                          <a:spcPts val="0"/>
-                        </a:spcAft>
-                        <a:buClrTx/>
-                        <a:buSzTx/>
-                        <a:buFontTx/>
-                        <a:buNone/>
-                        <a:tabLst/>
-                        <a:defRPr/>
-                      </a:pPr>
-                      <a:r>
-                        <a:rPr lang="es-MX" sz="1100" b="1" dirty="0">
-                          <a:solidFill>
-                            <a:schemeClr val="bg1"/>
-                          </a:solidFill>
-                        </a:rPr>
-                        <a:t>ORDENES DE APREHENSIÓN</a:t>
-                      </a:r>
-                    </a:p>
-                  </a:txBody>
-                  <a:tcPr>
-                    <a:solidFill>
-                      <a:schemeClr val="accent1">
-                        <a:lumMod val="75000"/>
-                      </a:schemeClr>
-                    </a:solidFill>
-                  </a:tcPr>
-                </a:tc>
-                <a:tc gridSpan="2">
-                  <a:txBody>
-                    <a:bodyPr/>
-                    <a:lstStyle/>
-                    <a:p>
-                      <a:pPr marL="0" indent="0" algn="l" defTabSz="914400" rtl="0" eaLnBrk="1" latinLnBrk="0" hangingPunct="1">
-                        <a:buFont typeface="Arial" panose="020B0604020202020204" pitchFamily="34" charset="0"/>
-                        <a:buNone/>
-                      </a:pPr>
-                      <a:r>
-                        <a:rPr lang="es-MX" sz="1100" kern="1200" dirty="0">
-                          <a:solidFill>
-                            <a:schemeClr val="dk1"/>
-                          </a:solidFill>
-                          <a:latin typeface="+mn-lt"/>
-                          <a:ea typeface="+mn-ea"/>
-                          <a:cs typeface="+mn-cs"/>
-                        </a:rPr>
-                        <a:t>
-• DESAPARICION FORZADA DE PERSONAS — CUMPLIMENTADA</a:t>
-                      </a:r>
-                    </a:p>
-                  </a:txBody>
-                  <a:tcPr/>
-                </a:tc>
-                <a:tc hMerge="1">
-                  <a:txBody>
-                    <a:bodyPr/>
-                    <a:lstStyle/>
-                    <a:p>
-                      <a:endParaRPr lang="es-MX"/>
-                    </a:p>
-                  </a:txBody>
-                  <a:tcPr/>
-                </a:tc>
-                <a:extLst>
-                  <a:ext uri="{0D108BD9-81ED-4DB2-BD59-A6C34878D82A}">
-                    <a16:rowId xmlns:a16="http://schemas.microsoft.com/office/drawing/2014/main" val="3169124086"/>
-                  </a:ext>
-                </a:extLst>
-              </a:tr>
-              <a:tr h="795285">
-                <a:tc>
-                  <a:txBody>
-                    <a:bodyPr/>
-                    <a:lstStyle/>
-                    <a:p>
-                      <a:r>
-                        <a:rPr lang="es-MX" sz="1100" b="1" dirty="0"/>
-                        <a:t> </a:t>
-                      </a:r>
-                      <a:r>
-                        <a:rPr lang="es-MX" sz="1100" b="1" dirty="0">
-                          <a:solidFill>
-                            <a:schemeClr val="bg1"/>
-                          </a:solidFill>
-                        </a:rPr>
-                        <a:t>ESTATUS </a:t>
-                      </a:r>
-                    </a:p>
-                  </a:txBody>
-                  <a:tcPr>
-                    <a:solidFill>
-                      <a:schemeClr val="accent1">
-                        <a:lumMod val="75000"/>
-                      </a:schemeClr>
-                    </a:solidFill>
-                  </a:tcPr>
-                </a:tc>
-                <a:tc gridSpan="2">
-                  <a:txBody>
-                    <a:bodyPr/>
-                    <a:lstStyle/>
-                    <a:p>
-                      <a:pPr marL="0" marR="0" lvl="0" indent="0" algn="just" defTabSz="914400" rtl="0" eaLnBrk="1" fontAlgn="auto" latinLnBrk="0" hangingPunct="1">
-                        <a:lnSpc>
-                          <a:spcPct val="100000"/>
-                        </a:lnSpc>
-                        <a:spcBef>
-                          <a:spcPts val="0"/>
-                        </a:spcBef>
-                        <a:spcAft>
-                          <a:spcPts val="0"/>
-                        </a:spcAft>
-                        <a:buClrTx/>
-                        <a:buSzTx/>
-                        <a:buFont typeface="Arial" panose="020B0604020202020204" pitchFamily="34" charset="0"/>
-                        <a:buNone/>
-                        <a:tabLst/>
-                        <a:defRPr/>
-                      </a:pPr>
-                      <a:r>
-                        <a:rPr lang="es-MX" sz="1100" kern="1200" dirty="0">
-                          <a:solidFill>
-                            <a:schemeClr val="dk1"/>
-                          </a:solidFill>
-                          <a:latin typeface="+mn-lt"/>
-                          <a:ea typeface="+mn-ea"/>
-                          <a:cs typeface="+mn-cs"/>
-                        </a:rPr>
-                        <a:t>Sentenciado, se sentencio por violacion</a:t>
-                      </a:r>
-                    </a:p>
-                  </a:txBody>
-                  <a:tcPr/>
-                </a:tc>
-                <a:tc hMerge="1">
-                  <a:txBody>
-                    <a:bodyPr/>
-                    <a:lstStyle/>
-                    <a:p>
-                      <a:endParaRPr lang="es-MX"/>
-                    </a:p>
-                  </a:txBody>
-                  <a:tcPr/>
-                </a:tc>
-                <a:extLst>
-                  <a:ext uri="{0D108BD9-81ED-4DB2-BD59-A6C34878D82A}">
-                    <a16:rowId xmlns:a16="http://schemas.microsoft.com/office/drawing/2014/main" val="3558537792"/>
-                  </a:ext>
-                </a:extLst>
-              </a:tr>
-              <a:tr h="1786729">
-                <a:tc>
-                  <a:txBody>
-                    <a:bodyPr/>
-                    <a:lstStyle/>
-                    <a:p>
-                      <a:r>
-                        <a:rPr lang="es-MX" sz="1100" b="1" kern="1200" dirty="0">
-                          <a:solidFill>
-                            <a:schemeClr val="bg1"/>
-                          </a:solidFill>
-                          <a:latin typeface="+mn-lt"/>
-                          <a:ea typeface="+mn-ea"/>
-                          <a:cs typeface="+mn-cs"/>
-                        </a:rPr>
-                        <a:t>ASUNTOS RELACIONADOS</a:t>
-                      </a:r>
-                    </a:p>
-                  </a:txBody>
-                  <a:tcPr>
-                    <a:solidFill>
-                      <a:schemeClr val="accent1">
-                        <a:lumMod val="75000"/>
-                      </a:schemeClr>
-                    </a:solidFill>
-                  </a:tcPr>
-                </a:tc>
-                <a:tc gridSpan="2">
-                  <a:txBody>
-                    <a:bodyPr/>
-                    <a:lstStyle/>
-                    <a:p>
-                      <a:pPr marL="171450" indent="-171450" algn="just">
-                        <a:buFontTx/>
-                        <a:buChar char="-"/>
-                      </a:pPr>
-                      <a:r>
-                        <a:rPr lang="es-MX" sz="1100" kern="1200" dirty="0">
-                          <a:solidFill>
-                            <a:schemeClr val="dk1"/>
-                          </a:solidFill>
-                          <a:latin typeface="+mn-lt"/>
-                          <a:ea typeface="+mn-ea"/>
-                          <a:cs typeface="+mn-cs"/>
-                        </a:rPr>
-                        <a:t>Sin Alias del Caso Hechos ocurridos el día 09 de marzo del 2023, cuando RICARDO OMAR HERRERA GUERRERO ALÍAS “PIOJO” Y/O “EL CHASCAS” Y/O “CHASQUERO”, irrumpió en el domicilio  ubicado en  calle 16 de septiembre Sur, número 706, en la Colonia Independencia, perteneciente al Municipio de Rincón de Romos, Aguascalientes, cuando las victimas de identidad reservada Victimas de identidad reservada A.G.P.H. y U.F.R.O. (Aún no localizadas) se encontraban en el interior. Sacándolas de dicho domicilio y llevándoselas a bordo de un vehículo, esto haciendo uso de la violencia, sin que hasta el momento se conozca su paradero. 
-</a:t>
-                      </a:r>
-                    </a:p>
-                    <a:p>
-                      <a:pPr marL="0" indent="0" algn="just">
-                        <a:buFontTx/>
-                        <a:buNone/>
-                      </a:pPr>
-                      <a:endParaRPr lang="es-MX" sz="1100" kern="1200" dirty="0">
-                        <a:solidFill>
-                          <a:schemeClr val="dk1"/>
-                        </a:solidFill>
-                        <a:latin typeface="+mn-lt"/>
-                        <a:ea typeface="+mn-ea"/>
-                        <a:cs typeface="+mn-cs"/>
-                      </a:endParaRPr>
-                    </a:p>
-                    <a:p>
-                      <a:pPr marL="0" indent="0" algn="just">
-                        <a:buFontTx/>
-                        <a:buNone/>
-                      </a:pPr>
-                      <a:endParaRPr lang="es-MX" sz="1100" kern="1200" dirty="0">
-                        <a:solidFill>
-                          <a:schemeClr val="dk1"/>
-                        </a:solidFill>
-                        <a:latin typeface="+mn-lt"/>
-                        <a:ea typeface="+mn-ea"/>
-                        <a:cs typeface="+mn-cs"/>
-                      </a:endParaRPr>
-                    </a:p>
-                    <a:p>
-                      <a:pPr marL="0" marR="0" lvl="0" indent="0" algn="just" defTabSz="914400" rtl="0" eaLnBrk="1" fontAlgn="auto" latinLnBrk="0" hangingPunct="1">
-                        <a:lnSpc>
-                          <a:spcPct val="100000"/>
-                        </a:lnSpc>
-                        <a:spcBef>
-                          <a:spcPts val="0"/>
-                        </a:spcBef>
-                        <a:spcAft>
-                          <a:spcPts val="0"/>
-                        </a:spcAft>
-                        <a:buClrTx/>
-                        <a:buSzTx/>
-                        <a:buFontTx/>
-                        <a:buNone/>
-                        <a:tabLst/>
-                        <a:defRPr/>
-                      </a:pPr>
-                      <a:r>
-                        <a:rPr lang="es-MX" sz="1100" kern="1200" dirty="0">
-                          <a:solidFill>
-                            <a:schemeClr val="dk1"/>
-                          </a:solidFill>
-                          <a:latin typeface="+mn-lt"/>
-                          <a:ea typeface="+mn-ea"/>
-                          <a:cs typeface="+mn-cs"/>
-                        </a:rPr>
-                        <a:t> </a:t>
+                        <a:t>[V1] </a:t>
                       </a:r>
                     </a:p>
                     <a:p>
@@ -5745,2525 +4886,7 @@
           <p:nvPr/>
         </p:nvPicPr>
         <p:blipFill>
-          <a:blip r:embed="R650d73c166434b82">
-            <a:extLst>
-              <a:ext uri="{28A0092B-C50C-407E-A947-70E740481C1C}">
-                <a14:useLocalDpi xmlns:a14="http://schemas.microsoft.com/office/drawing/2010/main" val="0"/>
-              </a:ext>
-            </a:extLst>
-          </a:blip>
-          <a:stretch>
-            <a:fillRect/>
-          </a:stretch>
-        </p:blipFill>
-        <p:spPr>
-          <a:xfrm>
-            <a:off x="214361" y="1714348"/>
-            <a:ext cx="2902475" cy="4351338"/>
-          </a:xfrm>
-          <a:prstGeom prst="rect">
-            <a:avLst/>
-          </a:prstGeom>
-        </p:spPr>
-      </p:pic>
-      <p:pic>
-        <p:nvPicPr>
-          <p:cNvPr id="11" name="[FV1]" descr="[FV1]">
-            <a:extLst>
-              <a:ext uri="{FF2B5EF4-FFF2-40B4-BE49-F238E27FC236}">
-                <a16:creationId xmlns:a16="http://schemas.microsoft.com/office/drawing/2014/main" id="{95A1EC47-8063-435B-9340-91DBB33FE951}"/>
-              </a:ext>
-            </a:extLst>
-          </p:cNvPr>
-          <p:cNvPicPr>
-            <a:picLocks noChangeAspect="1"/>
-          </p:cNvPicPr>
-          <p:nvPr/>
-        </p:nvPicPr>
-        <p:blipFill>
           <a:blip r:embed="rId3">
-            <a:extLst>
-              <a:ext uri="{28A0092B-C50C-407E-A947-70E740481C1C}">
-                <a14:useLocalDpi xmlns:a14="http://schemas.microsoft.com/office/drawing/2010/main" val="0"/>
-              </a:ext>
-            </a:extLst>
-          </a:blip>
-          <a:stretch>
-            <a:fillRect/>
-          </a:stretch>
-        </p:blipFill>
-        <p:spPr>
-          <a:xfrm>
-            <a:off x="7584982" y="5672321"/>
-            <a:ext cx="665008" cy="827694"/>
-          </a:xfrm>
-          <a:prstGeom prst="rect">
-            <a:avLst/>
-          </a:prstGeom>
-        </p:spPr>
-      </p:pic>
-      <p:pic>
-        <p:nvPicPr>
-          <p:cNvPr id="13" name="[FV2]" descr="[FV2]">
-            <a:extLst>
-              <a:ext uri="{FF2B5EF4-FFF2-40B4-BE49-F238E27FC236}">
-                <a16:creationId xmlns:a16="http://schemas.microsoft.com/office/drawing/2014/main" id="{65D6E13E-B1E1-4CA4-8F00-9E73059CD0BD}"/>
-              </a:ext>
-            </a:extLst>
-          </p:cNvPr>
-          <p:cNvPicPr>
-            <a:picLocks noChangeAspect="1"/>
-          </p:cNvPicPr>
-          <p:nvPr/>
-        </p:nvPicPr>
-        <p:blipFill>
-          <a:blip r:embed="rId3">
-            <a:extLst>
-              <a:ext uri="{28A0092B-C50C-407E-A947-70E740481C1C}">
-                <a14:useLocalDpi xmlns:a14="http://schemas.microsoft.com/office/drawing/2010/main" val="0"/>
-              </a:ext>
-            </a:extLst>
-          </a:blip>
-          <a:stretch>
-            <a:fillRect/>
-          </a:stretch>
-        </p:blipFill>
-        <p:spPr>
-          <a:xfrm>
-            <a:off x="9993131" y="5680558"/>
-            <a:ext cx="665008" cy="827694"/>
-          </a:xfrm>
-          <a:prstGeom prst="rect">
-            <a:avLst/>
-          </a:prstGeom>
-        </p:spPr>
-      </p:pic>
-    </p:spTree>
-    <p:extLst>
-      <p:ext uri="{BB962C8B-B14F-4D97-AF65-F5344CB8AC3E}">
-        <p14:creationId xmlns:p14="http://schemas.microsoft.com/office/powerpoint/2010/main" val="2124728287"/>
-      </p:ext>
-    </p:extLst>
-  </p:cSld>
-  <p:clrMapOvr>
-    <a:masterClrMapping/>
-  </p:clrMapOvr>
-</p:sld>
-</file>
-
-<file path=ppt/slides/slide4.xml><?xml version="1.0" encoding="utf-8"?>
-<p:sld xmlns:a16="http://schemas.microsoft.com/office/drawing/2014/main" xmlns:p14="http://schemas.microsoft.com/office/powerpoint/2010/main" xmlns:a14="http://schemas.microsoft.com/office/drawing/2010/main" xmlns:a="http://schemas.openxmlformats.org/drawingml/2006/main" xmlns:r="http://schemas.openxmlformats.org/officeDocument/2006/relationships" xmlns:p="http://schemas.openxmlformats.org/presentationml/2006/main">
-  <p:cSld>
-    <p:spTree>
-      <p:nvGrpSpPr>
-        <p:cNvPr id="1" name=""/>
-        <p:cNvGrpSpPr/>
-        <p:nvPr/>
-      </p:nvGrpSpPr>
-      <p:grpSpPr>
-        <a:xfrm>
-          <a:off x="0" y="0"/>
-          <a:ext cx="0" cy="0"/>
-          <a:chOff x="0" y="0"/>
-          <a:chExt cx="0" cy="0"/>
-        </a:xfrm>
-      </p:grpSpPr>
-      <p:pic>
-        <p:nvPicPr>
-          <p:cNvPr id="4" name="[FONDO]" descr="[FONDO]">
-            <a:extLst>
-              <a:ext uri="{FF2B5EF4-FFF2-40B4-BE49-F238E27FC236}">
-                <a16:creationId xmlns:a16="http://schemas.microsoft.com/office/drawing/2014/main" id="{AE2FEBDB-ED54-FF79-0EF8-AA9E7C8EA417}"/>
-              </a:ext>
-            </a:extLst>
-          </p:cNvPr>
-          <p:cNvPicPr>
-            <a:picLocks noChangeAspect="1"/>
-          </p:cNvPicPr>
-          <p:nvPr/>
-        </p:nvPicPr>
-        <p:blipFill>
-          <a:blip r:embed="R1fb77d11012a4612"/>
-          <a:stretch>
-            <a:fillRect/>
-          </a:stretch>
-        </p:blipFill>
-        <p:spPr>
-          <a:xfrm>
-            <a:off x="1" y="0"/>
-            <a:ext cx="12401280" cy="6969519"/>
-          </a:xfrm>
-          <a:prstGeom prst="rect">
-            <a:avLst/>
-          </a:prstGeom>
-        </p:spPr>
-      </p:pic>
-      <p:graphicFrame>
-        <p:nvGraphicFramePr>
-          <p:cNvPr id="10" name="Tabla 9">
-            <a:extLst>
-              <a:ext uri="{FF2B5EF4-FFF2-40B4-BE49-F238E27FC236}">
-                <a16:creationId xmlns:a16="http://schemas.microsoft.com/office/drawing/2014/main" id="{BC4CEC18-7797-7786-F517-147A6AD7242D}"/>
-              </a:ext>
-            </a:extLst>
-          </p:cNvPr>
-          <p:cNvGraphicFramePr>
-            <a:graphicFrameLocks noGrp="1"/>
-          </p:cNvGraphicFramePr>
-          <p:nvPr>
-            <p:extLst>
-              <p:ext uri="{D42A27DB-BD31-4B8C-83A1-F6EECF244321}">
-                <p14:modId xmlns:p14="http://schemas.microsoft.com/office/powerpoint/2010/main" val="1791400885"/>
-              </p:ext>
-            </p:extLst>
-          </p:nvPr>
-        </p:nvGraphicFramePr>
-        <p:xfrm>
-          <a:off x="3252159" y="1370610"/>
-          <a:ext cx="9149122" cy="5266098"/>
-        </p:xfrm>
-        <a:graphic>
-          <a:graphicData uri="http://schemas.openxmlformats.org/drawingml/2006/table">
-            <a:tbl>
-              <a:tblPr firstRow="1" bandRow="1">
-                <a:tableStyleId>{5C22544A-7EE6-4342-B048-85BDC9FD1C3A}</a:tableStyleId>
-              </a:tblPr>
-              <a:tblGrid>
-                <a:gridCol w="2462314">
-                  <a:extLst>
-                    <a:ext uri="{9D8B030D-6E8A-4147-A177-3AD203B41FA5}">
-                      <a16:colId xmlns:a16="http://schemas.microsoft.com/office/drawing/2014/main" val="2746230745"/>
-                    </a:ext>
-                  </a:extLst>
-                </a:gridCol>
-                <a:gridCol w="3343404">
-                  <a:extLst>
-                    <a:ext uri="{9D8B030D-6E8A-4147-A177-3AD203B41FA5}">
-                      <a16:colId xmlns:a16="http://schemas.microsoft.com/office/drawing/2014/main" val="3075986152"/>
-                    </a:ext>
-                  </a:extLst>
-                </a:gridCol>
-                <a:gridCol w="3343404">
-                  <a:extLst>
-                    <a:ext uri="{9D8B030D-6E8A-4147-A177-3AD203B41FA5}">
-                      <a16:colId xmlns:a16="http://schemas.microsoft.com/office/drawing/2014/main" val="4044500939"/>
-                    </a:ext>
-                  </a:extLst>
-                </a:gridCol>
-              </a:tblGrid>
-              <a:tr h="319663">
-                <a:tc gridSpan="3">
-                  <a:txBody>
-                    <a:bodyPr/>
-                    <a:lstStyle/>
-                    <a:p>
-                      <a:r>
-                        <a:rPr lang="es-MX" sz="1600" dirty="0"/>
-                        <a:t>JAVIER ESQUIVEL PADILLA</a:t>
-                      </a:r>
-                    </a:p>
-                  </a:txBody>
-                  <a:tcPr/>
-                </a:tc>
-                <a:tc hMerge="1">
-                  <a:txBody>
-                    <a:bodyPr/>
-                    <a:lstStyle/>
-                    <a:p>
-                      <a:endParaRPr lang="es-MX" dirty="0"/>
-                    </a:p>
-                  </a:txBody>
-                  <a:tcPr/>
-                </a:tc>
-                <a:tc hMerge="1">
-                  <a:txBody>
-                    <a:bodyPr/>
-                    <a:lstStyle/>
-                    <a:p>
-                      <a:endParaRPr lang="es-MX"/>
-                    </a:p>
-                  </a:txBody>
-                  <a:tcPr/>
-                </a:tc>
-                <a:extLst>
-                  <a:ext uri="{0D108BD9-81ED-4DB2-BD59-A6C34878D82A}">
-                    <a16:rowId xmlns:a16="http://schemas.microsoft.com/office/drawing/2014/main" val="3979505418"/>
-                  </a:ext>
-                </a:extLst>
-              </a:tr>
-              <a:tr h="319663">
-                <a:tc>
-                  <a:txBody>
-                    <a:bodyPr/>
-                    <a:lstStyle/>
-                    <a:p>
-                      <a:r>
-                        <a:rPr lang="es-MX" sz="1100" b="1" dirty="0">
-                          <a:solidFill>
-                            <a:schemeClr val="bg1"/>
-                          </a:solidFill>
-                        </a:rPr>
-                        <a:t>GRUPO DELICTIVO</a:t>
-                      </a:r>
-                    </a:p>
-                  </a:txBody>
-                  <a:tcPr>
-                    <a:solidFill>
-                      <a:schemeClr val="accent1">
-                        <a:lumMod val="75000"/>
-                      </a:schemeClr>
-                    </a:solidFill>
-                  </a:tcPr>
-                </a:tc>
-                <a:tc>
-                  <a:txBody>
-                    <a:bodyPr/>
-                    <a:lstStyle/>
-                    <a:p>
-                      <a:r>
-                        <a:rPr lang="es-MX" sz="1200" b="1" dirty="0"/>
-                        <a:t>CJNG</a:t>
-                      </a:r>
-                    </a:p>
-                  </a:txBody>
-                  <a:tcPr/>
-                </a:tc>
-                <a:tc>
-                  <a:txBody>
-                    <a:bodyPr/>
-                    <a:lstStyle/>
-                    <a:p>
-                      <a:pPr marL="0" marR="0" lvl="0" indent="0" algn="l" defTabSz="914400" rtl="0" eaLnBrk="1" fontAlgn="auto" latinLnBrk="0" hangingPunct="1">
-                        <a:lnSpc>
-                          <a:spcPct val="100000"/>
-                        </a:lnSpc>
-                        <a:spcBef>
-                          <a:spcPts val="0"/>
-                        </a:spcBef>
-                        <a:spcAft>
-                          <a:spcPts val="0"/>
-                        </a:spcAft>
-                        <a:buClrTx/>
-                        <a:buSzTx/>
-                        <a:buFontTx/>
-                        <a:buNone/>
-                        <a:tabLst/>
-                        <a:defRPr/>
-                      </a:pPr>
-                      <a:r>
-                        <a:rPr lang="es-MX" sz="1200" b="1" dirty="0"/>
-                        <a:t>EJECUTOR</a:t>
-                      </a:r>
-                    </a:p>
-                  </a:txBody>
-                  <a:tcPr/>
-                </a:tc>
-                <a:extLst>
-                  <a:ext uri="{0D108BD9-81ED-4DB2-BD59-A6C34878D82A}">
-                    <a16:rowId xmlns:a16="http://schemas.microsoft.com/office/drawing/2014/main" val="201189607"/>
-                  </a:ext>
-                </a:extLst>
-              </a:tr>
-              <a:tr h="725435">
-                <a:tc>
-                  <a:txBody>
-                    <a:bodyPr/>
-                    <a:lstStyle/>
-                    <a:p>
-                      <a:r>
-                        <a:rPr lang="es-MX" sz="1100" b="1" kern="1200" dirty="0">
-                          <a:solidFill>
-                            <a:schemeClr val="bg1"/>
-                          </a:solidFill>
-                          <a:latin typeface="+mn-lt"/>
-                          <a:ea typeface="+mn-ea"/>
-                          <a:cs typeface="+mn-cs"/>
-                        </a:rPr>
-                        <a:t>DELITOS / INGRESOS</a:t>
-                      </a:r>
-                    </a:p>
-                  </a:txBody>
-                  <a:tcPr>
-                    <a:solidFill>
-                      <a:schemeClr val="accent1">
-                        <a:lumMod val="75000"/>
-                      </a:schemeClr>
-                    </a:solidFill>
-                  </a:tcPr>
-                </a:tc>
-                <a:tc gridSpan="2">
-                  <a:txBody>
-                    <a:bodyPr/>
-                    <a:lstStyle/>
-                    <a:p>
-                      <a:pPr marL="0" indent="0">
-                        <a:buFont typeface="Arial" panose="020B0604020202020204" pitchFamily="34" charset="0"/>
-                        <a:buNone/>
-                      </a:pPr>
-                      <a:r>
-                        <a:rPr lang="es-MX" sz="1100" dirty="0"/>
-                        <a:t>
-• Lesiones Dolosas — 07/03/2008 21:12
-• Lesiones Dolosas — 22/01/2007 13:00
-• Mariposero — 13/05/2006 19:20
-• Lesiones Dolosas — 03/04/2004 15:00
-• Robo Simple — 28/06/1995 16:53</a:t>
-                      </a:r>
-                    </a:p>
-                  </a:txBody>
-                  <a:tcPr/>
-                </a:tc>
-                <a:tc hMerge="1">
-                  <a:txBody>
-                    <a:bodyPr/>
-                    <a:lstStyle/>
-                    <a:p>
-                      <a:endParaRPr lang="es-MX"/>
-                    </a:p>
-                  </a:txBody>
-                  <a:tcPr/>
-                </a:tc>
-                <a:extLst>
-                  <a:ext uri="{0D108BD9-81ED-4DB2-BD59-A6C34878D82A}">
-                    <a16:rowId xmlns:a16="http://schemas.microsoft.com/office/drawing/2014/main" val="3340689267"/>
-                  </a:ext>
-                </a:extLst>
-              </a:tr>
-              <a:tr h="1044626">
-                <a:tc>
-                  <a:txBody>
-                    <a:bodyPr/>
-                    <a:lstStyle/>
-                    <a:p>
-                      <a:r>
-                        <a:rPr lang="es-MX" sz="1100" b="1" kern="1200" dirty="0">
-                          <a:solidFill>
-                            <a:schemeClr val="bg1"/>
-                          </a:solidFill>
-                          <a:latin typeface="+mn-lt"/>
-                          <a:ea typeface="+mn-ea"/>
-                          <a:cs typeface="+mn-cs"/>
-                        </a:rPr>
-                        <a:t>CARPETAS DE INVESTIGACIÓN</a:t>
-                      </a:r>
-                    </a:p>
-                  </a:txBody>
-                  <a:tcPr>
-                    <a:solidFill>
-                      <a:schemeClr val="accent1">
-                        <a:lumMod val="75000"/>
-                      </a:schemeClr>
-                    </a:solidFill>
-                  </a:tcPr>
-                </a:tc>
-                <a:tc gridSpan="2">
-                  <a:txBody>
-                    <a:bodyPr/>
-                    <a:lstStyle/>
-                    <a:p>
-                      <a:pPr marL="0" indent="0" algn="l" defTabSz="914400" rtl="0" eaLnBrk="1" latinLnBrk="0" hangingPunct="1">
-                        <a:buFont typeface="Arial" panose="020B0604020202020204" pitchFamily="34" charset="0"/>
-                        <a:buNone/>
-                      </a:pPr>
-                      <a:r>
-                        <a:rPr lang="es-MX" sz="1100" kern="1200">
-                          <a:solidFill>
-                            <a:schemeClr val="dk1"/>
-                          </a:solidFill>
-                          <a:latin typeface="+mn-lt"/>
-                          <a:ea typeface="+mn-ea"/>
-                          <a:cs typeface="+mn-cs"/>
-                        </a:rPr>
-                        <a:t>
-• A-08/02876 Violacion equiparada
-• CI/PAB/00072/01-21 Amenazas
-• CI/RIN/00542/09-22 Violencia familiar
-• R-07/00017 Daño en las cosas doloso
-• R-07/00019 Robo calificado
-• R-07/00031 Daño en las cosas doloso
-• R-07/00102 Robo calificado
-• R-07/00147 Robo calificado
-• R-07/00182 Daño en las cosas doloso
-• R-07/00227 Lesiones dolosas calificadas por golpes</a:t>
-                      </a:r>
-                      <a:endParaRPr lang="es-MX" sz="1100" kern="1200" dirty="0">
-                        <a:solidFill>
-                          <a:schemeClr val="dk1"/>
-                        </a:solidFill>
-                        <a:latin typeface="+mn-lt"/>
-                        <a:ea typeface="+mn-ea"/>
-                        <a:cs typeface="+mn-cs"/>
-                      </a:endParaRPr>
-                    </a:p>
-                  </a:txBody>
-                  <a:tcPr/>
-                </a:tc>
-                <a:tc hMerge="1">
-                  <a:txBody>
-                    <a:bodyPr/>
-                    <a:lstStyle/>
-                    <a:p>
-                      <a:endParaRPr lang="es-MX"/>
-                    </a:p>
-                  </a:txBody>
-                  <a:tcPr/>
-                </a:tc>
-                <a:extLst>
-                  <a:ext uri="{0D108BD9-81ED-4DB2-BD59-A6C34878D82A}">
-                    <a16:rowId xmlns:a16="http://schemas.microsoft.com/office/drawing/2014/main" val="3218073216"/>
-                  </a:ext>
-                </a:extLst>
-              </a:tr>
-              <a:tr h="159387">
-                <a:tc>
-                  <a:txBody>
-                    <a:bodyPr/>
-                    <a:lstStyle/>
-                    <a:p>
-                      <a:pPr marL="0" marR="0" lvl="0" indent="0" algn="l" defTabSz="914400" rtl="0" eaLnBrk="1" fontAlgn="auto" latinLnBrk="0" hangingPunct="1">
-                        <a:lnSpc>
-                          <a:spcPct val="100000"/>
-                        </a:lnSpc>
-                        <a:spcBef>
-                          <a:spcPts val="0"/>
-                        </a:spcBef>
-                        <a:spcAft>
-                          <a:spcPts val="0"/>
-                        </a:spcAft>
-                        <a:buClrTx/>
-                        <a:buSzTx/>
-                        <a:buFontTx/>
-                        <a:buNone/>
-                        <a:tabLst/>
-                        <a:defRPr/>
-                      </a:pPr>
-                      <a:r>
-                        <a:rPr lang="es-MX" sz="1100" b="1" dirty="0">
-                          <a:solidFill>
-                            <a:schemeClr val="bg1"/>
-                          </a:solidFill>
-                        </a:rPr>
-                        <a:t>ORDENES DE APREHENSIÓN</a:t>
-                      </a:r>
-                    </a:p>
-                  </a:txBody>
-                  <a:tcPr>
-                    <a:solidFill>
-                      <a:schemeClr val="accent1">
-                        <a:lumMod val="75000"/>
-                      </a:schemeClr>
-                    </a:solidFill>
-                  </a:tcPr>
-                </a:tc>
-                <a:tc gridSpan="2">
-                  <a:txBody>
-                    <a:bodyPr/>
-                    <a:lstStyle/>
-                    <a:p>
-                      <a:pPr marL="0" indent="0" algn="l" defTabSz="914400" rtl="0" eaLnBrk="1" latinLnBrk="0" hangingPunct="1">
-                        <a:buFont typeface="Arial" panose="020B0604020202020204" pitchFamily="34" charset="0"/>
-                        <a:buNone/>
-                      </a:pPr>
-                      <a:r>
-                        <a:rPr lang="es-MX" sz="1100" kern="1200" dirty="0">
-                          <a:solidFill>
-                            <a:schemeClr val="dk1"/>
-                          </a:solidFill>
-                          <a:latin typeface="+mn-lt"/>
-                          <a:ea typeface="+mn-ea"/>
-                          <a:cs typeface="+mn-cs"/>
-                        </a:rPr>
-                        <a:t>
-• LESIONES DOLOSAS POR GOLPES — CUMPLIMENTADA
-• ROBO CALIFICADO — CUMPLIMENTADA</a:t>
-                      </a:r>
-                    </a:p>
-                  </a:txBody>
-                  <a:tcPr/>
-                </a:tc>
-                <a:tc hMerge="1">
-                  <a:txBody>
-                    <a:bodyPr/>
-                    <a:lstStyle/>
-                    <a:p>
-                      <a:endParaRPr lang="es-MX"/>
-                    </a:p>
-                  </a:txBody>
-                  <a:tcPr/>
-                </a:tc>
-                <a:extLst>
-                  <a:ext uri="{0D108BD9-81ED-4DB2-BD59-A6C34878D82A}">
-                    <a16:rowId xmlns:a16="http://schemas.microsoft.com/office/drawing/2014/main" val="3169124086"/>
-                  </a:ext>
-                </a:extLst>
-              </a:tr>
-              <a:tr h="795285">
-                <a:tc>
-                  <a:txBody>
-                    <a:bodyPr/>
-                    <a:lstStyle/>
-                    <a:p>
-                      <a:r>
-                        <a:rPr lang="es-MX" sz="1100" b="1" dirty="0"/>
-                        <a:t> </a:t>
-                      </a:r>
-                      <a:r>
-                        <a:rPr lang="es-MX" sz="1100" b="1" dirty="0">
-                          <a:solidFill>
-                            <a:schemeClr val="bg1"/>
-                          </a:solidFill>
-                        </a:rPr>
-                        <a:t>ESTATUS </a:t>
-                      </a:r>
-                    </a:p>
-                  </a:txBody>
-                  <a:tcPr>
-                    <a:solidFill>
-                      <a:schemeClr val="accent1">
-                        <a:lumMod val="75000"/>
-                      </a:schemeClr>
-                    </a:solidFill>
-                  </a:tcPr>
-                </a:tc>
-                <a:tc gridSpan="2">
-                  <a:txBody>
-                    <a:bodyPr/>
-                    <a:lstStyle/>
-                    <a:p>
-                      <a:pPr marL="0" marR="0" lvl="0" indent="0" algn="just" defTabSz="914400" rtl="0" eaLnBrk="1" fontAlgn="auto" latinLnBrk="0" hangingPunct="1">
-                        <a:lnSpc>
-                          <a:spcPct val="100000"/>
-                        </a:lnSpc>
-                        <a:spcBef>
-                          <a:spcPts val="0"/>
-                        </a:spcBef>
-                        <a:spcAft>
-                          <a:spcPts val="0"/>
-                        </a:spcAft>
-                        <a:buClrTx/>
-                        <a:buSzTx/>
-                        <a:buFont typeface="Arial" panose="020B0604020202020204" pitchFamily="34" charset="0"/>
-                        <a:buNone/>
-                        <a:tabLst/>
-                        <a:defRPr/>
-                      </a:pPr>
-                      <a:r>
-                        <a:rPr lang="es-MX" sz="1100" kern="1200" dirty="0">
-                          <a:solidFill>
-                            <a:schemeClr val="dk1"/>
-                          </a:solidFill>
-                          <a:latin typeface="+mn-lt"/>
-                          <a:ea typeface="+mn-ea"/>
-                          <a:cs typeface="+mn-cs"/>
-                        </a:rPr>
-                        <a:t>Sentenciado, se sentencio por violacion</a:t>
-                      </a:r>
-                    </a:p>
-                  </a:txBody>
-                  <a:tcPr/>
-                </a:tc>
-                <a:tc hMerge="1">
-                  <a:txBody>
-                    <a:bodyPr/>
-                    <a:lstStyle/>
-                    <a:p>
-                      <a:endParaRPr lang="es-MX"/>
-                    </a:p>
-                  </a:txBody>
-                  <a:tcPr/>
-                </a:tc>
-                <a:extLst>
-                  <a:ext uri="{0D108BD9-81ED-4DB2-BD59-A6C34878D82A}">
-                    <a16:rowId xmlns:a16="http://schemas.microsoft.com/office/drawing/2014/main" val="3558537792"/>
-                  </a:ext>
-                </a:extLst>
-              </a:tr>
-              <a:tr h="1786729">
-                <a:tc>
-                  <a:txBody>
-                    <a:bodyPr/>
-                    <a:lstStyle/>
-                    <a:p>
-                      <a:r>
-                        <a:rPr lang="es-MX" sz="1100" b="1" kern="1200" dirty="0">
-                          <a:solidFill>
-                            <a:schemeClr val="bg1"/>
-                          </a:solidFill>
-                          <a:latin typeface="+mn-lt"/>
-                          <a:ea typeface="+mn-ea"/>
-                          <a:cs typeface="+mn-cs"/>
-                        </a:rPr>
-                        <a:t>ASUNTOS RELACIONADOS</a:t>
-                      </a:r>
-                    </a:p>
-                  </a:txBody>
-                  <a:tcPr>
-                    <a:solidFill>
-                      <a:schemeClr val="accent1">
-                        <a:lumMod val="75000"/>
-                      </a:schemeClr>
-                    </a:solidFill>
-                  </a:tcPr>
-                </a:tc>
-                <a:tc gridSpan="2">
-                  <a:txBody>
-                    <a:bodyPr/>
-                    <a:lstStyle/>
-                    <a:p>
-                      <a:pPr marL="171450" indent="-171450" algn="just">
-                        <a:buFontTx/>
-                        <a:buChar char="-"/>
-                      </a:pPr>
-                      <a:r>
-                        <a:rPr lang="es-MX" sz="1100" kern="1200" dirty="0">
-                          <a:solidFill>
-                            <a:schemeClr val="dk1"/>
-                          </a:solidFill>
-                          <a:latin typeface="+mn-lt"/>
-                          <a:ea typeface="+mn-ea"/>
-                          <a:cs typeface="+mn-cs"/>
-                        </a:rPr>
-                        <a:t>Caso Jassiel Hechos en agravio de Jassiel Díaz Cardona, el pasado 30 de mayo de 2023, en el rancho conocido como  “la fogata” Potrero Salitrillo Monte, Rincón de Romos, Aguascalientes, cuando la victima viajaba a bordo de su automóvil Ford Focus sobre la carretera 22, fue perseguido por los responsables  Jonathan Josefath Castorena Rodríguez alias patroncito, Javier Esquivel Padilla alias “La Queta” y Ricardo Alberto Navarro Gonzales alias “El Ricas”, quienes lo alcanzaron para herirlo con disparos por arma de fuego, la victima falleció minutos mas tarde en el Hospital General de Rincón de Romos.</a:t>
-                      </a:r>
-                    </a:p>
-                    <a:p>
-                      <a:pPr marL="0" indent="0" algn="just">
-                        <a:buFontTx/>
-                        <a:buNone/>
-                      </a:pPr>
-                      <a:endParaRPr lang="es-MX" sz="1100" kern="1200" dirty="0">
-                        <a:solidFill>
-                          <a:schemeClr val="dk1"/>
-                        </a:solidFill>
-                        <a:latin typeface="+mn-lt"/>
-                        <a:ea typeface="+mn-ea"/>
-                        <a:cs typeface="+mn-cs"/>
-                      </a:endParaRPr>
-                    </a:p>
-                    <a:p>
-                      <a:pPr marL="0" indent="0" algn="just">
-                        <a:buFontTx/>
-                        <a:buNone/>
-                      </a:pPr>
-                      <a:endParaRPr lang="es-MX" sz="1100" kern="1200" dirty="0">
-                        <a:solidFill>
-                          <a:schemeClr val="dk1"/>
-                        </a:solidFill>
-                        <a:latin typeface="+mn-lt"/>
-                        <a:ea typeface="+mn-ea"/>
-                        <a:cs typeface="+mn-cs"/>
-                      </a:endParaRPr>
-                    </a:p>
-                    <a:p>
-                      <a:pPr marL="0" marR="0" lvl="0" indent="0" algn="just" defTabSz="914400" rtl="0" eaLnBrk="1" fontAlgn="auto" latinLnBrk="0" hangingPunct="1">
-                        <a:lnSpc>
-                          <a:spcPct val="100000"/>
-                        </a:lnSpc>
-                        <a:spcBef>
-                          <a:spcPts val="0"/>
-                        </a:spcBef>
-                        <a:spcAft>
-                          <a:spcPts val="0"/>
-                        </a:spcAft>
-                        <a:buClrTx/>
-                        <a:buSzTx/>
-                        <a:buFontTx/>
-                        <a:buNone/>
-                        <a:tabLst/>
-                        <a:defRPr/>
-                      </a:pPr>
-                      <a:r>
-                        <a:rPr lang="es-MX" sz="1100" kern="1200" dirty="0">
-                          <a:solidFill>
-                            <a:schemeClr val="dk1"/>
-                          </a:solidFill>
-                          <a:latin typeface="+mn-lt"/>
-                          <a:ea typeface="+mn-ea"/>
-                          <a:cs typeface="+mn-cs"/>
-                        </a:rPr>
-                        <a:t> </a:t>
-                      </a:r>
-                    </a:p>
-                    <a:p>
-                      <a:pPr marL="0" marR="0" lvl="0" indent="0" algn="just" defTabSz="914400" rtl="0" eaLnBrk="1" fontAlgn="auto" latinLnBrk="0" hangingPunct="1">
-                        <a:lnSpc>
-                          <a:spcPct val="100000"/>
-                        </a:lnSpc>
-                        <a:spcBef>
-                          <a:spcPts val="0"/>
-                        </a:spcBef>
-                        <a:spcAft>
-                          <a:spcPts val="0"/>
-                        </a:spcAft>
-                        <a:buClrTx/>
-                        <a:buSzTx/>
-                        <a:buFontTx/>
-                        <a:buNone/>
-                        <a:tabLst/>
-                        <a:defRPr/>
-                      </a:pPr>
-                      <a:endParaRPr lang="es-MX" sz="1100" kern="1200" dirty="0">
-                        <a:solidFill>
-                          <a:schemeClr val="dk1"/>
-                        </a:solidFill>
-                        <a:latin typeface="+mn-lt"/>
-                        <a:ea typeface="+mn-ea"/>
-                        <a:cs typeface="+mn-cs"/>
-                      </a:endParaRPr>
-                    </a:p>
-                    <a:p>
-                      <a:pPr marL="0" marR="0" lvl="0" indent="0" algn="just" defTabSz="914400" rtl="0" eaLnBrk="1" fontAlgn="auto" latinLnBrk="0" hangingPunct="1">
-                        <a:lnSpc>
-                          <a:spcPct val="100000"/>
-                        </a:lnSpc>
-                        <a:spcBef>
-                          <a:spcPts val="0"/>
-                        </a:spcBef>
-                        <a:spcAft>
-                          <a:spcPts val="0"/>
-                        </a:spcAft>
-                        <a:buClrTx/>
-                        <a:buSzTx/>
-                        <a:buFontTx/>
-                        <a:buNone/>
-                        <a:tabLst/>
-                        <a:defRPr/>
-                      </a:pPr>
-                      <a:r>
-                        <a:rPr lang="es-MX" sz="1100" kern="1200" dirty="0">
-                          <a:solidFill>
-                            <a:schemeClr val="dk1"/>
-                          </a:solidFill>
-                          <a:latin typeface="+mn-lt"/>
-                          <a:ea typeface="+mn-ea"/>
-                          <a:cs typeface="+mn-cs"/>
-                        </a:rPr>
-                        <a:t>[V2] </a:t>
-                      </a:r>
-                    </a:p>
-                    <a:p>
-                      <a:pPr marL="0" indent="0" algn="just">
-                        <a:buFontTx/>
-                        <a:buNone/>
-                      </a:pPr>
-                      <a:endParaRPr lang="es-MX" sz="1100" kern="1200" dirty="0">
-                        <a:solidFill>
-                          <a:schemeClr val="dk1"/>
-                        </a:solidFill>
-                        <a:latin typeface="+mn-lt"/>
-                        <a:ea typeface="+mn-ea"/>
-                        <a:cs typeface="+mn-cs"/>
-                      </a:endParaRPr>
-                    </a:p>
-                  </a:txBody>
-                  <a:tcPr/>
-                </a:tc>
-                <a:tc hMerge="1">
-                  <a:txBody>
-                    <a:bodyPr/>
-                    <a:lstStyle/>
-                    <a:p>
-                      <a:endParaRPr lang="es-MX"/>
-                    </a:p>
-                  </a:txBody>
-                  <a:tcPr/>
-                </a:tc>
-                <a:extLst>
-                  <a:ext uri="{0D108BD9-81ED-4DB2-BD59-A6C34878D82A}">
-                    <a16:rowId xmlns:a16="http://schemas.microsoft.com/office/drawing/2014/main" val="4024071236"/>
-                  </a:ext>
-                </a:extLst>
-              </a:tr>
-            </a:tbl>
-          </a:graphicData>
-        </a:graphic>
-      </p:graphicFrame>
-      <p:pic>
-        <p:nvPicPr>
-          <p:cNvPr id="7" name="[FP]" descr="[FP]">
-            <a:extLst>
-              <a:ext uri="{FF2B5EF4-FFF2-40B4-BE49-F238E27FC236}">
-                <a16:creationId xmlns:a16="http://schemas.microsoft.com/office/drawing/2014/main" id="{C80E713A-27D7-471A-9297-6CD4151A9971}"/>
-              </a:ext>
-            </a:extLst>
-          </p:cNvPr>
-          <p:cNvPicPr>
-            <a:picLocks noChangeAspect="1"/>
-          </p:cNvPicPr>
-          <p:nvPr/>
-        </p:nvPicPr>
-        <p:blipFill>
-          <a:blip r:embed="R0713db179adb4b02">
-            <a:extLst>
-              <a:ext uri="{28A0092B-C50C-407E-A947-70E740481C1C}">
-                <a14:useLocalDpi xmlns:a14="http://schemas.microsoft.com/office/drawing/2010/main" val="0"/>
-              </a:ext>
-            </a:extLst>
-          </a:blip>
-          <a:stretch>
-            <a:fillRect/>
-          </a:stretch>
-        </p:blipFill>
-        <p:spPr>
-          <a:xfrm>
-            <a:off x="214361" y="1714348"/>
-            <a:ext cx="2902475" cy="4351338"/>
-          </a:xfrm>
-          <a:prstGeom prst="rect">
-            <a:avLst/>
-          </a:prstGeom>
-        </p:spPr>
-      </p:pic>
-      <p:pic>
-        <p:nvPicPr>
-          <p:cNvPr id="11" name="[FV1]" descr="[FV1]">
-            <a:extLst>
-              <a:ext uri="{FF2B5EF4-FFF2-40B4-BE49-F238E27FC236}">
-                <a16:creationId xmlns:a16="http://schemas.microsoft.com/office/drawing/2014/main" id="{95A1EC47-8063-435B-9340-91DBB33FE951}"/>
-              </a:ext>
-            </a:extLst>
-          </p:cNvPr>
-          <p:cNvPicPr>
-            <a:picLocks noChangeAspect="1"/>
-          </p:cNvPicPr>
-          <p:nvPr/>
-        </p:nvPicPr>
-        <p:blipFill>
-          <a:blip r:embed="rId3">
-            <a:extLst>
-              <a:ext uri="{28A0092B-C50C-407E-A947-70E740481C1C}">
-                <a14:useLocalDpi xmlns:a14="http://schemas.microsoft.com/office/drawing/2010/main" val="0"/>
-              </a:ext>
-            </a:extLst>
-          </a:blip>
-          <a:stretch>
-            <a:fillRect/>
-          </a:stretch>
-        </p:blipFill>
-        <p:spPr>
-          <a:xfrm>
-            <a:off x="7584982" y="5672321"/>
-            <a:ext cx="665008" cy="827694"/>
-          </a:xfrm>
-          <a:prstGeom prst="rect">
-            <a:avLst/>
-          </a:prstGeom>
-        </p:spPr>
-      </p:pic>
-      <p:pic>
-        <p:nvPicPr>
-          <p:cNvPr id="13" name="[FV2]" descr="[FV2]">
-            <a:extLst>
-              <a:ext uri="{FF2B5EF4-FFF2-40B4-BE49-F238E27FC236}">
-                <a16:creationId xmlns:a16="http://schemas.microsoft.com/office/drawing/2014/main" id="{65D6E13E-B1E1-4CA4-8F00-9E73059CD0BD}"/>
-              </a:ext>
-            </a:extLst>
-          </p:cNvPr>
-          <p:cNvPicPr>
-            <a:picLocks noChangeAspect="1"/>
-          </p:cNvPicPr>
-          <p:nvPr/>
-        </p:nvPicPr>
-        <p:blipFill>
-          <a:blip r:embed="rId3">
-            <a:extLst>
-              <a:ext uri="{28A0092B-C50C-407E-A947-70E740481C1C}">
-                <a14:useLocalDpi xmlns:a14="http://schemas.microsoft.com/office/drawing/2010/main" val="0"/>
-              </a:ext>
-            </a:extLst>
-          </a:blip>
-          <a:stretch>
-            <a:fillRect/>
-          </a:stretch>
-        </p:blipFill>
-        <p:spPr>
-          <a:xfrm>
-            <a:off x="9993131" y="5680558"/>
-            <a:ext cx="665008" cy="827694"/>
-          </a:xfrm>
-          <a:prstGeom prst="rect">
-            <a:avLst/>
-          </a:prstGeom>
-        </p:spPr>
-      </p:pic>
-    </p:spTree>
-    <p:extLst>
-      <p:ext uri="{BB962C8B-B14F-4D97-AF65-F5344CB8AC3E}">
-        <p14:creationId xmlns:p14="http://schemas.microsoft.com/office/powerpoint/2010/main" val="2124728287"/>
-      </p:ext>
-    </p:extLst>
-  </p:cSld>
-  <p:clrMapOvr>
-    <a:masterClrMapping/>
-  </p:clrMapOvr>
-</p:sld>
-</file>
-
-<file path=ppt/slides/slide5.xml><?xml version="1.0" encoding="utf-8"?>
-<p:sld xmlns:a16="http://schemas.microsoft.com/office/drawing/2014/main" xmlns:p14="http://schemas.microsoft.com/office/powerpoint/2010/main" xmlns:a14="http://schemas.microsoft.com/office/drawing/2010/main" xmlns:a="http://schemas.openxmlformats.org/drawingml/2006/main" xmlns:r="http://schemas.openxmlformats.org/officeDocument/2006/relationships" xmlns:p="http://schemas.openxmlformats.org/presentationml/2006/main">
-  <p:cSld>
-    <p:spTree>
-      <p:nvGrpSpPr>
-        <p:cNvPr id="1" name=""/>
-        <p:cNvGrpSpPr/>
-        <p:nvPr/>
-      </p:nvGrpSpPr>
-      <p:grpSpPr>
-        <a:xfrm>
-          <a:off x="0" y="0"/>
-          <a:ext cx="0" cy="0"/>
-          <a:chOff x="0" y="0"/>
-          <a:chExt cx="0" cy="0"/>
-        </a:xfrm>
-      </p:grpSpPr>
-      <p:pic>
-        <p:nvPicPr>
-          <p:cNvPr id="4" name="[FONDO]" descr="[FONDO]">
-            <a:extLst>
-              <a:ext uri="{FF2B5EF4-FFF2-40B4-BE49-F238E27FC236}">
-                <a16:creationId xmlns:a16="http://schemas.microsoft.com/office/drawing/2014/main" id="{AE2FEBDB-ED54-FF79-0EF8-AA9E7C8EA417}"/>
-              </a:ext>
-            </a:extLst>
-          </p:cNvPr>
-          <p:cNvPicPr>
-            <a:picLocks noChangeAspect="1"/>
-          </p:cNvPicPr>
-          <p:nvPr/>
-        </p:nvPicPr>
-        <p:blipFill>
-          <a:blip r:embed="Rfd6c96fa8b084ba8"/>
-          <a:stretch>
-            <a:fillRect/>
-          </a:stretch>
-        </p:blipFill>
-        <p:spPr>
-          <a:xfrm>
-            <a:off x="1" y="0"/>
-            <a:ext cx="12401280" cy="6969519"/>
-          </a:xfrm>
-          <a:prstGeom prst="rect">
-            <a:avLst/>
-          </a:prstGeom>
-        </p:spPr>
-      </p:pic>
-      <p:graphicFrame>
-        <p:nvGraphicFramePr>
-          <p:cNvPr id="10" name="Tabla 9">
-            <a:extLst>
-              <a:ext uri="{FF2B5EF4-FFF2-40B4-BE49-F238E27FC236}">
-                <a16:creationId xmlns:a16="http://schemas.microsoft.com/office/drawing/2014/main" id="{BC4CEC18-7797-7786-F517-147A6AD7242D}"/>
-              </a:ext>
-            </a:extLst>
-          </p:cNvPr>
-          <p:cNvGraphicFramePr>
-            <a:graphicFrameLocks noGrp="1"/>
-          </p:cNvGraphicFramePr>
-          <p:nvPr>
-            <p:extLst>
-              <p:ext uri="{D42A27DB-BD31-4B8C-83A1-F6EECF244321}">
-                <p14:modId xmlns:p14="http://schemas.microsoft.com/office/powerpoint/2010/main" val="1791400885"/>
-              </p:ext>
-            </p:extLst>
-          </p:nvPr>
-        </p:nvGraphicFramePr>
-        <p:xfrm>
-          <a:off x="3252159" y="1370610"/>
-          <a:ext cx="9149122" cy="5266098"/>
-        </p:xfrm>
-        <a:graphic>
-          <a:graphicData uri="http://schemas.openxmlformats.org/drawingml/2006/table">
-            <a:tbl>
-              <a:tblPr firstRow="1" bandRow="1">
-                <a:tableStyleId>{5C22544A-7EE6-4342-B048-85BDC9FD1C3A}</a:tableStyleId>
-              </a:tblPr>
-              <a:tblGrid>
-                <a:gridCol w="2462314">
-                  <a:extLst>
-                    <a:ext uri="{9D8B030D-6E8A-4147-A177-3AD203B41FA5}">
-                      <a16:colId xmlns:a16="http://schemas.microsoft.com/office/drawing/2014/main" val="2746230745"/>
-                    </a:ext>
-                  </a:extLst>
-                </a:gridCol>
-                <a:gridCol w="3343404">
-                  <a:extLst>
-                    <a:ext uri="{9D8B030D-6E8A-4147-A177-3AD203B41FA5}">
-                      <a16:colId xmlns:a16="http://schemas.microsoft.com/office/drawing/2014/main" val="3075986152"/>
-                    </a:ext>
-                  </a:extLst>
-                </a:gridCol>
-                <a:gridCol w="3343404">
-                  <a:extLst>
-                    <a:ext uri="{9D8B030D-6E8A-4147-A177-3AD203B41FA5}">
-                      <a16:colId xmlns:a16="http://schemas.microsoft.com/office/drawing/2014/main" val="4044500939"/>
-                    </a:ext>
-                  </a:extLst>
-                </a:gridCol>
-              </a:tblGrid>
-              <a:tr h="319663">
-                <a:tc gridSpan="3">
-                  <a:txBody>
-                    <a:bodyPr/>
-                    <a:lstStyle/>
-                    <a:p>
-                      <a:r>
-                        <a:rPr lang="es-MX" sz="1600" dirty="0"/>
-                        <a:t>RICARDO ALBERTO NAVARRO GONZALEZ</a:t>
-                      </a:r>
-                    </a:p>
-                  </a:txBody>
-                  <a:tcPr/>
-                </a:tc>
-                <a:tc hMerge="1">
-                  <a:txBody>
-                    <a:bodyPr/>
-                    <a:lstStyle/>
-                    <a:p>
-                      <a:endParaRPr lang="es-MX" dirty="0"/>
-                    </a:p>
-                  </a:txBody>
-                  <a:tcPr/>
-                </a:tc>
-                <a:tc hMerge="1">
-                  <a:txBody>
-                    <a:bodyPr/>
-                    <a:lstStyle/>
-                    <a:p>
-                      <a:endParaRPr lang="es-MX"/>
-                    </a:p>
-                  </a:txBody>
-                  <a:tcPr/>
-                </a:tc>
-                <a:extLst>
-                  <a:ext uri="{0D108BD9-81ED-4DB2-BD59-A6C34878D82A}">
-                    <a16:rowId xmlns:a16="http://schemas.microsoft.com/office/drawing/2014/main" val="3979505418"/>
-                  </a:ext>
-                </a:extLst>
-              </a:tr>
-              <a:tr h="319663">
-                <a:tc>
-                  <a:txBody>
-                    <a:bodyPr/>
-                    <a:lstStyle/>
-                    <a:p>
-                      <a:r>
-                        <a:rPr lang="es-MX" sz="1100" b="1" dirty="0">
-                          <a:solidFill>
-                            <a:schemeClr val="bg1"/>
-                          </a:solidFill>
-                        </a:rPr>
-                        <a:t>GRUPO DELICTIVO</a:t>
-                      </a:r>
-                    </a:p>
-                  </a:txBody>
-                  <a:tcPr>
-                    <a:solidFill>
-                      <a:schemeClr val="accent1">
-                        <a:lumMod val="75000"/>
-                      </a:schemeClr>
-                    </a:solidFill>
-                  </a:tcPr>
-                </a:tc>
-                <a:tc>
-                  <a:txBody>
-                    <a:bodyPr/>
-                    <a:lstStyle/>
-                    <a:p>
-                      <a:r>
-                        <a:rPr lang="es-MX" sz="1200" b="1" dirty="0"/>
-                        <a:t>CJNG</a:t>
-                      </a:r>
-                    </a:p>
-                  </a:txBody>
-                  <a:tcPr/>
-                </a:tc>
-                <a:tc>
-                  <a:txBody>
-                    <a:bodyPr/>
-                    <a:lstStyle/>
-                    <a:p>
-                      <a:pPr marL="0" marR="0" lvl="0" indent="0" algn="l" defTabSz="914400" rtl="0" eaLnBrk="1" fontAlgn="auto" latinLnBrk="0" hangingPunct="1">
-                        <a:lnSpc>
-                          <a:spcPct val="100000"/>
-                        </a:lnSpc>
-                        <a:spcBef>
-                          <a:spcPts val="0"/>
-                        </a:spcBef>
-                        <a:spcAft>
-                          <a:spcPts val="0"/>
-                        </a:spcAft>
-                        <a:buClrTx/>
-                        <a:buSzTx/>
-                        <a:buFontTx/>
-                        <a:buNone/>
-                        <a:tabLst/>
-                        <a:defRPr/>
-                      </a:pPr>
-                      <a:r>
-                        <a:rPr lang="es-MX" sz="1200" b="1" dirty="0"/>
-                        <a:t>EJECUTOR</a:t>
-                      </a:r>
-                    </a:p>
-                  </a:txBody>
-                  <a:tcPr/>
-                </a:tc>
-                <a:extLst>
-                  <a:ext uri="{0D108BD9-81ED-4DB2-BD59-A6C34878D82A}">
-                    <a16:rowId xmlns:a16="http://schemas.microsoft.com/office/drawing/2014/main" val="201189607"/>
-                  </a:ext>
-                </a:extLst>
-              </a:tr>
-              <a:tr h="725435">
-                <a:tc>
-                  <a:txBody>
-                    <a:bodyPr/>
-                    <a:lstStyle/>
-                    <a:p>
-                      <a:r>
-                        <a:rPr lang="es-MX" sz="1100" b="1" kern="1200" dirty="0">
-                          <a:solidFill>
-                            <a:schemeClr val="bg1"/>
-                          </a:solidFill>
-                          <a:latin typeface="+mn-lt"/>
-                          <a:ea typeface="+mn-ea"/>
-                          <a:cs typeface="+mn-cs"/>
-                        </a:rPr>
-                        <a:t>DELITOS / INGRESOS</a:t>
-                      </a:r>
-                    </a:p>
-                  </a:txBody>
-                  <a:tcPr>
-                    <a:solidFill>
-                      <a:schemeClr val="accent1">
-                        <a:lumMod val="75000"/>
-                      </a:schemeClr>
-                    </a:solidFill>
-                  </a:tcPr>
-                </a:tc>
-                <a:tc gridSpan="2">
-                  <a:txBody>
-                    <a:bodyPr/>
-                    <a:lstStyle/>
-                    <a:p>
-                      <a:pPr marL="0" indent="0">
-                        <a:buFont typeface="Arial" panose="020B0604020202020204" pitchFamily="34" charset="0"/>
-                        <a:buNone/>
-                      </a:pPr>
-                      <a:r>
-                        <a:rPr lang="es-MX" sz="1100" dirty="0"/>
-                        <a:t>
-• Homicidio Doloso — 18/06/2020 19:10
-• Lesiones Dolosas — 12/05/2019 21:20</a:t>
-                      </a:r>
-                    </a:p>
-                  </a:txBody>
-                  <a:tcPr/>
-                </a:tc>
-                <a:tc hMerge="1">
-                  <a:txBody>
-                    <a:bodyPr/>
-                    <a:lstStyle/>
-                    <a:p>
-                      <a:endParaRPr lang="es-MX"/>
-                    </a:p>
-                  </a:txBody>
-                  <a:tcPr/>
-                </a:tc>
-                <a:extLst>
-                  <a:ext uri="{0D108BD9-81ED-4DB2-BD59-A6C34878D82A}">
-                    <a16:rowId xmlns:a16="http://schemas.microsoft.com/office/drawing/2014/main" val="3340689267"/>
-                  </a:ext>
-                </a:extLst>
-              </a:tr>
-              <a:tr h="1044626">
-                <a:tc>
-                  <a:txBody>
-                    <a:bodyPr/>
-                    <a:lstStyle/>
-                    <a:p>
-                      <a:r>
-                        <a:rPr lang="es-MX" sz="1100" b="1" kern="1200" dirty="0">
-                          <a:solidFill>
-                            <a:schemeClr val="bg1"/>
-                          </a:solidFill>
-                          <a:latin typeface="+mn-lt"/>
-                          <a:ea typeface="+mn-ea"/>
-                          <a:cs typeface="+mn-cs"/>
-                        </a:rPr>
-                        <a:t>CARPETAS DE INVESTIGACIÓN</a:t>
-                      </a:r>
-                    </a:p>
-                  </a:txBody>
-                  <a:tcPr>
-                    <a:solidFill>
-                      <a:schemeClr val="accent1">
-                        <a:lumMod val="75000"/>
-                      </a:schemeClr>
-                    </a:solidFill>
-                  </a:tcPr>
-                </a:tc>
-                <a:tc gridSpan="2">
-                  <a:txBody>
-                    <a:bodyPr/>
-                    <a:lstStyle/>
-                    <a:p>
-                      <a:pPr marL="0" indent="0" algn="l" defTabSz="914400" rtl="0" eaLnBrk="1" latinLnBrk="0" hangingPunct="1">
-                        <a:buFont typeface="Arial" panose="020B0604020202020204" pitchFamily="34" charset="0"/>
-                        <a:buNone/>
-                      </a:pPr>
-                      <a:r>
-                        <a:rPr lang="es-MX" sz="1100" kern="1200">
-                          <a:solidFill>
-                            <a:schemeClr val="dk1"/>
-                          </a:solidFill>
-                          <a:latin typeface="+mn-lt"/>
-                          <a:ea typeface="+mn-ea"/>
-                          <a:cs typeface="+mn-cs"/>
-                        </a:rPr>
-                        <a:t>
-• CI/AGS/10918/05-19 Lesiones dolosas calificadas por golpes</a:t>
-                      </a:r>
-                      <a:endParaRPr lang="es-MX" sz="1100" kern="1200" dirty="0">
-                        <a:solidFill>
-                          <a:schemeClr val="dk1"/>
-                        </a:solidFill>
-                        <a:latin typeface="+mn-lt"/>
-                        <a:ea typeface="+mn-ea"/>
-                        <a:cs typeface="+mn-cs"/>
-                      </a:endParaRPr>
-                    </a:p>
-                  </a:txBody>
-                  <a:tcPr/>
-                </a:tc>
-                <a:tc hMerge="1">
-                  <a:txBody>
-                    <a:bodyPr/>
-                    <a:lstStyle/>
-                    <a:p>
-                      <a:endParaRPr lang="es-MX"/>
-                    </a:p>
-                  </a:txBody>
-                  <a:tcPr/>
-                </a:tc>
-                <a:extLst>
-                  <a:ext uri="{0D108BD9-81ED-4DB2-BD59-A6C34878D82A}">
-                    <a16:rowId xmlns:a16="http://schemas.microsoft.com/office/drawing/2014/main" val="3218073216"/>
-                  </a:ext>
-                </a:extLst>
-              </a:tr>
-              <a:tr h="159387">
-                <a:tc>
-                  <a:txBody>
-                    <a:bodyPr/>
-                    <a:lstStyle/>
-                    <a:p>
-                      <a:pPr marL="0" marR="0" lvl="0" indent="0" algn="l" defTabSz="914400" rtl="0" eaLnBrk="1" fontAlgn="auto" latinLnBrk="0" hangingPunct="1">
-                        <a:lnSpc>
-                          <a:spcPct val="100000"/>
-                        </a:lnSpc>
-                        <a:spcBef>
-                          <a:spcPts val="0"/>
-                        </a:spcBef>
-                        <a:spcAft>
-                          <a:spcPts val="0"/>
-                        </a:spcAft>
-                        <a:buClrTx/>
-                        <a:buSzTx/>
-                        <a:buFontTx/>
-                        <a:buNone/>
-                        <a:tabLst/>
-                        <a:defRPr/>
-                      </a:pPr>
-                      <a:r>
-                        <a:rPr lang="es-MX" sz="1100" b="1" dirty="0">
-                          <a:solidFill>
-                            <a:schemeClr val="bg1"/>
-                          </a:solidFill>
-                        </a:rPr>
-                        <a:t>ORDENES DE APREHENSIÓN</a:t>
-                      </a:r>
-                    </a:p>
-                  </a:txBody>
-                  <a:tcPr>
-                    <a:solidFill>
-                      <a:schemeClr val="accent1">
-                        <a:lumMod val="75000"/>
-                      </a:schemeClr>
-                    </a:solidFill>
-                  </a:tcPr>
-                </a:tc>
-                <a:tc gridSpan="2">
-                  <a:txBody>
-                    <a:bodyPr/>
-                    <a:lstStyle/>
-                    <a:p>
-                      <a:pPr marL="0" indent="0" algn="l" defTabSz="914400" rtl="0" eaLnBrk="1" latinLnBrk="0" hangingPunct="1">
-                        <a:buFont typeface="Arial" panose="020B0604020202020204" pitchFamily="34" charset="0"/>
-                        <a:buNone/>
-                      </a:pPr>
-                      <a:r>
-                        <a:rPr lang="es-MX" sz="1100" kern="1200" dirty="0">
-                          <a:solidFill>
-                            <a:schemeClr val="dk1"/>
-                          </a:solidFill>
-                          <a:latin typeface="+mn-lt"/>
-                          <a:ea typeface="+mn-ea"/>
-                          <a:cs typeface="+mn-cs"/>
-                        </a:rPr>
-                        <a:t>
-• HOMICIDIO DOLOSO CALIFICADO — CUMPLIMENTADA</a:t>
-                      </a:r>
-                    </a:p>
-                  </a:txBody>
-                  <a:tcPr/>
-                </a:tc>
-                <a:tc hMerge="1">
-                  <a:txBody>
-                    <a:bodyPr/>
-                    <a:lstStyle/>
-                    <a:p>
-                      <a:endParaRPr lang="es-MX"/>
-                    </a:p>
-                  </a:txBody>
-                  <a:tcPr/>
-                </a:tc>
-                <a:extLst>
-                  <a:ext uri="{0D108BD9-81ED-4DB2-BD59-A6C34878D82A}">
-                    <a16:rowId xmlns:a16="http://schemas.microsoft.com/office/drawing/2014/main" val="3169124086"/>
-                  </a:ext>
-                </a:extLst>
-              </a:tr>
-              <a:tr h="795285">
-                <a:tc>
-                  <a:txBody>
-                    <a:bodyPr/>
-                    <a:lstStyle/>
-                    <a:p>
-                      <a:r>
-                        <a:rPr lang="es-MX" sz="1100" b="1" dirty="0"/>
-                        <a:t> </a:t>
-                      </a:r>
-                      <a:r>
-                        <a:rPr lang="es-MX" sz="1100" b="1" dirty="0">
-                          <a:solidFill>
-                            <a:schemeClr val="bg1"/>
-                          </a:solidFill>
-                        </a:rPr>
-                        <a:t>ESTATUS </a:t>
-                      </a:r>
-                    </a:p>
-                  </a:txBody>
-                  <a:tcPr>
-                    <a:solidFill>
-                      <a:schemeClr val="accent1">
-                        <a:lumMod val="75000"/>
-                      </a:schemeClr>
-                    </a:solidFill>
-                  </a:tcPr>
-                </a:tc>
-                <a:tc gridSpan="2">
-                  <a:txBody>
-                    <a:bodyPr/>
-                    <a:lstStyle/>
-                    <a:p>
-                      <a:pPr marL="0" marR="0" lvl="0" indent="0" algn="just" defTabSz="914400" rtl="0" eaLnBrk="1" fontAlgn="auto" latinLnBrk="0" hangingPunct="1">
-                        <a:lnSpc>
-                          <a:spcPct val="100000"/>
-                        </a:lnSpc>
-                        <a:spcBef>
-                          <a:spcPts val="0"/>
-                        </a:spcBef>
-                        <a:spcAft>
-                          <a:spcPts val="0"/>
-                        </a:spcAft>
-                        <a:buClrTx/>
-                        <a:buSzTx/>
-                        <a:buFont typeface="Arial" panose="020B0604020202020204" pitchFamily="34" charset="0"/>
-                        <a:buNone/>
-                        <a:tabLst/>
-                        <a:defRPr/>
-                      </a:pPr>
-                      <a:r>
-                        <a:rPr lang="es-MX" sz="1100" kern="1200" dirty="0">
-                          <a:solidFill>
-                            <a:schemeClr val="dk1"/>
-                          </a:solidFill>
-                          <a:latin typeface="+mn-lt"/>
-                          <a:ea typeface="+mn-ea"/>
-                          <a:cs typeface="+mn-cs"/>
-                        </a:rPr>
-                        <a:t>Sentenciado, se sentencio por violacion</a:t>
-                      </a:r>
-                    </a:p>
-                  </a:txBody>
-                  <a:tcPr/>
-                </a:tc>
-                <a:tc hMerge="1">
-                  <a:txBody>
-                    <a:bodyPr/>
-                    <a:lstStyle/>
-                    <a:p>
-                      <a:endParaRPr lang="es-MX"/>
-                    </a:p>
-                  </a:txBody>
-                  <a:tcPr/>
-                </a:tc>
-                <a:extLst>
-                  <a:ext uri="{0D108BD9-81ED-4DB2-BD59-A6C34878D82A}">
-                    <a16:rowId xmlns:a16="http://schemas.microsoft.com/office/drawing/2014/main" val="3558537792"/>
-                  </a:ext>
-                </a:extLst>
-              </a:tr>
-              <a:tr h="1786729">
-                <a:tc>
-                  <a:txBody>
-                    <a:bodyPr/>
-                    <a:lstStyle/>
-                    <a:p>
-                      <a:r>
-                        <a:rPr lang="es-MX" sz="1100" b="1" kern="1200" dirty="0">
-                          <a:solidFill>
-                            <a:schemeClr val="bg1"/>
-                          </a:solidFill>
-                          <a:latin typeface="+mn-lt"/>
-                          <a:ea typeface="+mn-ea"/>
-                          <a:cs typeface="+mn-cs"/>
-                        </a:rPr>
-                        <a:t>ASUNTOS RELACIONADOS</a:t>
-                      </a:r>
-                    </a:p>
-                  </a:txBody>
-                  <a:tcPr>
-                    <a:solidFill>
-                      <a:schemeClr val="accent1">
-                        <a:lumMod val="75000"/>
-                      </a:schemeClr>
-                    </a:solidFill>
-                  </a:tcPr>
-                </a:tc>
-                <a:tc gridSpan="2">
-                  <a:txBody>
-                    <a:bodyPr/>
-                    <a:lstStyle/>
-                    <a:p>
-                      <a:pPr marL="171450" indent="-171450" algn="just">
-                        <a:buFontTx/>
-                        <a:buChar char="-"/>
-                      </a:pPr>
-                      <a:r>
-                        <a:rPr lang="es-MX" sz="1100" kern="1200" dirty="0">
-                          <a:solidFill>
-                            <a:schemeClr val="dk1"/>
-                          </a:solidFill>
-                          <a:latin typeface="+mn-lt"/>
-                          <a:ea typeface="+mn-ea"/>
-                          <a:cs typeface="+mn-cs"/>
-                        </a:rPr>
-                        <a:t>Caso Jassiel Hechos en agravio de Jassiel Díaz Cardona, el pasado 30 de mayo de 2023, en el rancho conocido como  “la fogata” Potrero Salitrillo Monte, Rincón de Romos, Aguascalientes, cuando la victima viajaba a bordo de su automóvil Ford Focus sobre la carretera 22, fue perseguido por los responsables  Jonathan Josefath Castorena Rodríguez alias patroncito, Javier Esquivel Padilla alias “La Queta” y Ricardo Alberto Navarro Gonzales alias “El Ricas”, quienes lo alcanzaron para herirlo con disparos por arma de fuego, la victima falleció minutos mas tarde en el Hospital General de Rincón de Romos.</a:t>
-                      </a:r>
-                    </a:p>
-                    <a:p>
-                      <a:pPr marL="0" indent="0" algn="just">
-                        <a:buFontTx/>
-                        <a:buNone/>
-                      </a:pPr>
-                      <a:endParaRPr lang="es-MX" sz="1100" kern="1200" dirty="0">
-                        <a:solidFill>
-                          <a:schemeClr val="dk1"/>
-                        </a:solidFill>
-                        <a:latin typeface="+mn-lt"/>
-                        <a:ea typeface="+mn-ea"/>
-                        <a:cs typeface="+mn-cs"/>
-                      </a:endParaRPr>
-                    </a:p>
-                    <a:p>
-                      <a:pPr marL="0" indent="0" algn="just">
-                        <a:buFontTx/>
-                        <a:buNone/>
-                      </a:pPr>
-                      <a:endParaRPr lang="es-MX" sz="1100" kern="1200" dirty="0">
-                        <a:solidFill>
-                          <a:schemeClr val="dk1"/>
-                        </a:solidFill>
-                        <a:latin typeface="+mn-lt"/>
-                        <a:ea typeface="+mn-ea"/>
-                        <a:cs typeface="+mn-cs"/>
-                      </a:endParaRPr>
-                    </a:p>
-                    <a:p>
-                      <a:pPr marL="0" marR="0" lvl="0" indent="0" algn="just" defTabSz="914400" rtl="0" eaLnBrk="1" fontAlgn="auto" latinLnBrk="0" hangingPunct="1">
-                        <a:lnSpc>
-                          <a:spcPct val="100000"/>
-                        </a:lnSpc>
-                        <a:spcBef>
-                          <a:spcPts val="0"/>
-                        </a:spcBef>
-                        <a:spcAft>
-                          <a:spcPts val="0"/>
-                        </a:spcAft>
-                        <a:buClrTx/>
-                        <a:buSzTx/>
-                        <a:buFontTx/>
-                        <a:buNone/>
-                        <a:tabLst/>
-                        <a:defRPr/>
-                      </a:pPr>
-                      <a:r>
-                        <a:rPr lang="es-MX" sz="1100" kern="1200" dirty="0">
-                          <a:solidFill>
-                            <a:schemeClr val="dk1"/>
-                          </a:solidFill>
-                          <a:latin typeface="+mn-lt"/>
-                          <a:ea typeface="+mn-ea"/>
-                          <a:cs typeface="+mn-cs"/>
-                        </a:rPr>
-                        <a:t> </a:t>
-                      </a:r>
-                    </a:p>
-                    <a:p>
-                      <a:pPr marL="0" marR="0" lvl="0" indent="0" algn="just" defTabSz="914400" rtl="0" eaLnBrk="1" fontAlgn="auto" latinLnBrk="0" hangingPunct="1">
-                        <a:lnSpc>
-                          <a:spcPct val="100000"/>
-                        </a:lnSpc>
-                        <a:spcBef>
-                          <a:spcPts val="0"/>
-                        </a:spcBef>
-                        <a:spcAft>
-                          <a:spcPts val="0"/>
-                        </a:spcAft>
-                        <a:buClrTx/>
-                        <a:buSzTx/>
-                        <a:buFontTx/>
-                        <a:buNone/>
-                        <a:tabLst/>
-                        <a:defRPr/>
-                      </a:pPr>
-                      <a:endParaRPr lang="es-MX" sz="1100" kern="1200" dirty="0">
-                        <a:solidFill>
-                          <a:schemeClr val="dk1"/>
-                        </a:solidFill>
-                        <a:latin typeface="+mn-lt"/>
-                        <a:ea typeface="+mn-ea"/>
-                        <a:cs typeface="+mn-cs"/>
-                      </a:endParaRPr>
-                    </a:p>
-                    <a:p>
-                      <a:pPr marL="0" marR="0" lvl="0" indent="0" algn="just" defTabSz="914400" rtl="0" eaLnBrk="1" fontAlgn="auto" latinLnBrk="0" hangingPunct="1">
-                        <a:lnSpc>
-                          <a:spcPct val="100000"/>
-                        </a:lnSpc>
-                        <a:spcBef>
-                          <a:spcPts val="0"/>
-                        </a:spcBef>
-                        <a:spcAft>
-                          <a:spcPts val="0"/>
-                        </a:spcAft>
-                        <a:buClrTx/>
-                        <a:buSzTx/>
-                        <a:buFontTx/>
-                        <a:buNone/>
-                        <a:tabLst/>
-                        <a:defRPr/>
-                      </a:pPr>
-                      <a:r>
-                        <a:rPr lang="es-MX" sz="1100" kern="1200" dirty="0">
-                          <a:solidFill>
-                            <a:schemeClr val="dk1"/>
-                          </a:solidFill>
-                          <a:latin typeface="+mn-lt"/>
-                          <a:ea typeface="+mn-ea"/>
-                          <a:cs typeface="+mn-cs"/>
-                        </a:rPr>
-                        <a:t>[V2] </a:t>
-                      </a:r>
-                    </a:p>
-                    <a:p>
-                      <a:pPr marL="0" indent="0" algn="just">
-                        <a:buFontTx/>
-                        <a:buNone/>
-                      </a:pPr>
-                      <a:endParaRPr lang="es-MX" sz="1100" kern="1200" dirty="0">
-                        <a:solidFill>
-                          <a:schemeClr val="dk1"/>
-                        </a:solidFill>
-                        <a:latin typeface="+mn-lt"/>
-                        <a:ea typeface="+mn-ea"/>
-                        <a:cs typeface="+mn-cs"/>
-                      </a:endParaRPr>
-                    </a:p>
-                  </a:txBody>
-                  <a:tcPr/>
-                </a:tc>
-                <a:tc hMerge="1">
-                  <a:txBody>
-                    <a:bodyPr/>
-                    <a:lstStyle/>
-                    <a:p>
-                      <a:endParaRPr lang="es-MX"/>
-                    </a:p>
-                  </a:txBody>
-                  <a:tcPr/>
-                </a:tc>
-                <a:extLst>
-                  <a:ext uri="{0D108BD9-81ED-4DB2-BD59-A6C34878D82A}">
-                    <a16:rowId xmlns:a16="http://schemas.microsoft.com/office/drawing/2014/main" val="4024071236"/>
-                  </a:ext>
-                </a:extLst>
-              </a:tr>
-            </a:tbl>
-          </a:graphicData>
-        </a:graphic>
-      </p:graphicFrame>
-      <p:pic>
-        <p:nvPicPr>
-          <p:cNvPr id="7" name="[FP]" descr="[FP]">
-            <a:extLst>
-              <a:ext uri="{FF2B5EF4-FFF2-40B4-BE49-F238E27FC236}">
-                <a16:creationId xmlns:a16="http://schemas.microsoft.com/office/drawing/2014/main" id="{C80E713A-27D7-471A-9297-6CD4151A9971}"/>
-              </a:ext>
-            </a:extLst>
-          </p:cNvPr>
-          <p:cNvPicPr>
-            <a:picLocks noChangeAspect="1"/>
-          </p:cNvPicPr>
-          <p:nvPr/>
-        </p:nvPicPr>
-        <p:blipFill>
-          <a:blip r:embed="R87421a4731324cb0">
-            <a:extLst>
-              <a:ext uri="{28A0092B-C50C-407E-A947-70E740481C1C}">
-                <a14:useLocalDpi xmlns:a14="http://schemas.microsoft.com/office/drawing/2010/main" val="0"/>
-              </a:ext>
-            </a:extLst>
-          </a:blip>
-          <a:stretch>
-            <a:fillRect/>
-          </a:stretch>
-        </p:blipFill>
-        <p:spPr>
-          <a:xfrm>
-            <a:off x="214361" y="1714348"/>
-            <a:ext cx="2902475" cy="4351338"/>
-          </a:xfrm>
-          <a:prstGeom prst="rect">
-            <a:avLst/>
-          </a:prstGeom>
-        </p:spPr>
-      </p:pic>
-      <p:pic>
-        <p:nvPicPr>
-          <p:cNvPr id="11" name="[FV1]" descr="[FV1]">
-            <a:extLst>
-              <a:ext uri="{FF2B5EF4-FFF2-40B4-BE49-F238E27FC236}">
-                <a16:creationId xmlns:a16="http://schemas.microsoft.com/office/drawing/2014/main" id="{95A1EC47-8063-435B-9340-91DBB33FE951}"/>
-              </a:ext>
-            </a:extLst>
-          </p:cNvPr>
-          <p:cNvPicPr>
-            <a:picLocks noChangeAspect="1"/>
-          </p:cNvPicPr>
-          <p:nvPr/>
-        </p:nvPicPr>
-        <p:blipFill>
-          <a:blip r:embed="rId3">
-            <a:extLst>
-              <a:ext uri="{28A0092B-C50C-407E-A947-70E740481C1C}">
-                <a14:useLocalDpi xmlns:a14="http://schemas.microsoft.com/office/drawing/2010/main" val="0"/>
-              </a:ext>
-            </a:extLst>
-          </a:blip>
-          <a:stretch>
-            <a:fillRect/>
-          </a:stretch>
-        </p:blipFill>
-        <p:spPr>
-          <a:xfrm>
-            <a:off x="7584982" y="5672321"/>
-            <a:ext cx="665008" cy="827694"/>
-          </a:xfrm>
-          <a:prstGeom prst="rect">
-            <a:avLst/>
-          </a:prstGeom>
-        </p:spPr>
-      </p:pic>
-      <p:pic>
-        <p:nvPicPr>
-          <p:cNvPr id="13" name="[FV2]" descr="[FV2]">
-            <a:extLst>
-              <a:ext uri="{FF2B5EF4-FFF2-40B4-BE49-F238E27FC236}">
-                <a16:creationId xmlns:a16="http://schemas.microsoft.com/office/drawing/2014/main" id="{65D6E13E-B1E1-4CA4-8F00-9E73059CD0BD}"/>
-              </a:ext>
-            </a:extLst>
-          </p:cNvPr>
-          <p:cNvPicPr>
-            <a:picLocks noChangeAspect="1"/>
-          </p:cNvPicPr>
-          <p:nvPr/>
-        </p:nvPicPr>
-        <p:blipFill>
-          <a:blip r:embed="rId3">
-            <a:extLst>
-              <a:ext uri="{28A0092B-C50C-407E-A947-70E740481C1C}">
-                <a14:useLocalDpi xmlns:a14="http://schemas.microsoft.com/office/drawing/2010/main" val="0"/>
-              </a:ext>
-            </a:extLst>
-          </a:blip>
-          <a:stretch>
-            <a:fillRect/>
-          </a:stretch>
-        </p:blipFill>
-        <p:spPr>
-          <a:xfrm>
-            <a:off x="9993131" y="5680558"/>
-            <a:ext cx="665008" cy="827694"/>
-          </a:xfrm>
-          <a:prstGeom prst="rect">
-            <a:avLst/>
-          </a:prstGeom>
-        </p:spPr>
-      </p:pic>
-    </p:spTree>
-    <p:extLst>
-      <p:ext uri="{BB962C8B-B14F-4D97-AF65-F5344CB8AC3E}">
-        <p14:creationId xmlns:p14="http://schemas.microsoft.com/office/powerpoint/2010/main" val="2124728287"/>
-      </p:ext>
-    </p:extLst>
-  </p:cSld>
-  <p:clrMapOvr>
-    <a:masterClrMapping/>
-  </p:clrMapOvr>
-</p:sld>
-</file>
-
-<file path=ppt/slides/slide6.xml><?xml version="1.0" encoding="utf-8"?>
-<p:sld xmlns:a16="http://schemas.microsoft.com/office/drawing/2014/main" xmlns:p14="http://schemas.microsoft.com/office/powerpoint/2010/main" xmlns:a14="http://schemas.microsoft.com/office/drawing/2010/main" xmlns:a="http://schemas.openxmlformats.org/drawingml/2006/main" xmlns:r="http://schemas.openxmlformats.org/officeDocument/2006/relationships" xmlns:p="http://schemas.openxmlformats.org/presentationml/2006/main">
-  <p:cSld>
-    <p:spTree>
-      <p:nvGrpSpPr>
-        <p:cNvPr id="1" name=""/>
-        <p:cNvGrpSpPr/>
-        <p:nvPr/>
-      </p:nvGrpSpPr>
-      <p:grpSpPr>
-        <a:xfrm>
-          <a:off x="0" y="0"/>
-          <a:ext cx="0" cy="0"/>
-          <a:chOff x="0" y="0"/>
-          <a:chExt cx="0" cy="0"/>
-        </a:xfrm>
-      </p:grpSpPr>
-      <p:pic>
-        <p:nvPicPr>
-          <p:cNvPr id="4" name="[FONDO]" descr="[FONDO]">
-            <a:extLst>
-              <a:ext uri="{FF2B5EF4-FFF2-40B4-BE49-F238E27FC236}">
-                <a16:creationId xmlns:a16="http://schemas.microsoft.com/office/drawing/2014/main" id="{AE2FEBDB-ED54-FF79-0EF8-AA9E7C8EA417}"/>
-              </a:ext>
-            </a:extLst>
-          </p:cNvPr>
-          <p:cNvPicPr>
-            <a:picLocks noChangeAspect="1"/>
-          </p:cNvPicPr>
-          <p:nvPr/>
-        </p:nvPicPr>
-        <p:blipFill>
-          <a:blip r:embed="R6397364da22946f8"/>
-          <a:stretch>
-            <a:fillRect/>
-          </a:stretch>
-        </p:blipFill>
-        <p:spPr>
-          <a:xfrm>
-            <a:off x="1" y="0"/>
-            <a:ext cx="12401280" cy="6969519"/>
-          </a:xfrm>
-          <a:prstGeom prst="rect">
-            <a:avLst/>
-          </a:prstGeom>
-        </p:spPr>
-      </p:pic>
-      <p:graphicFrame>
-        <p:nvGraphicFramePr>
-          <p:cNvPr id="10" name="Tabla 9">
-            <a:extLst>
-              <a:ext uri="{FF2B5EF4-FFF2-40B4-BE49-F238E27FC236}">
-                <a16:creationId xmlns:a16="http://schemas.microsoft.com/office/drawing/2014/main" id="{BC4CEC18-7797-7786-F517-147A6AD7242D}"/>
-              </a:ext>
-            </a:extLst>
-          </p:cNvPr>
-          <p:cNvGraphicFramePr>
-            <a:graphicFrameLocks noGrp="1"/>
-          </p:cNvGraphicFramePr>
-          <p:nvPr>
-            <p:extLst>
-              <p:ext uri="{D42A27DB-BD31-4B8C-83A1-F6EECF244321}">
-                <p14:modId xmlns:p14="http://schemas.microsoft.com/office/powerpoint/2010/main" val="1791400885"/>
-              </p:ext>
-            </p:extLst>
-          </p:nvPr>
-        </p:nvGraphicFramePr>
-        <p:xfrm>
-          <a:off x="3252159" y="1370610"/>
-          <a:ext cx="9149122" cy="5266098"/>
-        </p:xfrm>
-        <a:graphic>
-          <a:graphicData uri="http://schemas.openxmlformats.org/drawingml/2006/table">
-            <a:tbl>
-              <a:tblPr firstRow="1" bandRow="1">
-                <a:tableStyleId>{5C22544A-7EE6-4342-B048-85BDC9FD1C3A}</a:tableStyleId>
-              </a:tblPr>
-              <a:tblGrid>
-                <a:gridCol w="2462314">
-                  <a:extLst>
-                    <a:ext uri="{9D8B030D-6E8A-4147-A177-3AD203B41FA5}">
-                      <a16:colId xmlns:a16="http://schemas.microsoft.com/office/drawing/2014/main" val="2746230745"/>
-                    </a:ext>
-                  </a:extLst>
-                </a:gridCol>
-                <a:gridCol w="3343404">
-                  <a:extLst>
-                    <a:ext uri="{9D8B030D-6E8A-4147-A177-3AD203B41FA5}">
-                      <a16:colId xmlns:a16="http://schemas.microsoft.com/office/drawing/2014/main" val="3075986152"/>
-                    </a:ext>
-                  </a:extLst>
-                </a:gridCol>
-                <a:gridCol w="3343404">
-                  <a:extLst>
-                    <a:ext uri="{9D8B030D-6E8A-4147-A177-3AD203B41FA5}">
-                      <a16:colId xmlns:a16="http://schemas.microsoft.com/office/drawing/2014/main" val="4044500939"/>
-                    </a:ext>
-                  </a:extLst>
-                </a:gridCol>
-              </a:tblGrid>
-              <a:tr h="319663">
-                <a:tc gridSpan="3">
-                  <a:txBody>
-                    <a:bodyPr/>
-                    <a:lstStyle/>
-                    <a:p>
-                      <a:r>
-                        <a:rPr lang="es-MX" sz="1600" dirty="0"/>
-                        <a:t>JOSUE CASTORENA ESPARZA</a:t>
-                      </a:r>
-                    </a:p>
-                  </a:txBody>
-                  <a:tcPr/>
-                </a:tc>
-                <a:tc hMerge="1">
-                  <a:txBody>
-                    <a:bodyPr/>
-                    <a:lstStyle/>
-                    <a:p>
-                      <a:endParaRPr lang="es-MX" dirty="0"/>
-                    </a:p>
-                  </a:txBody>
-                  <a:tcPr/>
-                </a:tc>
-                <a:tc hMerge="1">
-                  <a:txBody>
-                    <a:bodyPr/>
-                    <a:lstStyle/>
-                    <a:p>
-                      <a:endParaRPr lang="es-MX"/>
-                    </a:p>
-                  </a:txBody>
-                  <a:tcPr/>
-                </a:tc>
-                <a:extLst>
-                  <a:ext uri="{0D108BD9-81ED-4DB2-BD59-A6C34878D82A}">
-                    <a16:rowId xmlns:a16="http://schemas.microsoft.com/office/drawing/2014/main" val="3979505418"/>
-                  </a:ext>
-                </a:extLst>
-              </a:tr>
-              <a:tr h="319663">
-                <a:tc>
-                  <a:txBody>
-                    <a:bodyPr/>
-                    <a:lstStyle/>
-                    <a:p>
-                      <a:r>
-                        <a:rPr lang="es-MX" sz="1100" b="1" dirty="0">
-                          <a:solidFill>
-                            <a:schemeClr val="bg1"/>
-                          </a:solidFill>
-                        </a:rPr>
-                        <a:t>GRUPO DELICTIVO</a:t>
-                      </a:r>
-                    </a:p>
-                  </a:txBody>
-                  <a:tcPr>
-                    <a:solidFill>
-                      <a:schemeClr val="accent1">
-                        <a:lumMod val="75000"/>
-                      </a:schemeClr>
-                    </a:solidFill>
-                  </a:tcPr>
-                </a:tc>
-                <a:tc>
-                  <a:txBody>
-                    <a:bodyPr/>
-                    <a:lstStyle/>
-                    <a:p>
-                      <a:r>
-                        <a:rPr lang="es-MX" sz="1200" b="1" dirty="0"/>
-                        <a:t>CJNG</a:t>
-                      </a:r>
-                    </a:p>
-                  </a:txBody>
-                  <a:tcPr/>
-                </a:tc>
-                <a:tc>
-                  <a:txBody>
-                    <a:bodyPr/>
-                    <a:lstStyle/>
-                    <a:p>
-                      <a:pPr marL="0" marR="0" lvl="0" indent="0" algn="l" defTabSz="914400" rtl="0" eaLnBrk="1" fontAlgn="auto" latinLnBrk="0" hangingPunct="1">
-                        <a:lnSpc>
-                          <a:spcPct val="100000"/>
-                        </a:lnSpc>
-                        <a:spcBef>
-                          <a:spcPts val="0"/>
-                        </a:spcBef>
-                        <a:spcAft>
-                          <a:spcPts val="0"/>
-                        </a:spcAft>
-                        <a:buClrTx/>
-                        <a:buSzTx/>
-                        <a:buFontTx/>
-                        <a:buNone/>
-                        <a:tabLst/>
-                        <a:defRPr/>
-                      </a:pPr>
-                      <a:r>
-                        <a:rPr lang="es-MX" sz="1200" b="1" dirty="0"/>
-                        <a:t>EJECUTOR</a:t>
-                      </a:r>
-                    </a:p>
-                  </a:txBody>
-                  <a:tcPr/>
-                </a:tc>
-                <a:extLst>
-                  <a:ext uri="{0D108BD9-81ED-4DB2-BD59-A6C34878D82A}">
-                    <a16:rowId xmlns:a16="http://schemas.microsoft.com/office/drawing/2014/main" val="201189607"/>
-                  </a:ext>
-                </a:extLst>
-              </a:tr>
-              <a:tr h="725435">
-                <a:tc>
-                  <a:txBody>
-                    <a:bodyPr/>
-                    <a:lstStyle/>
-                    <a:p>
-                      <a:r>
-                        <a:rPr lang="es-MX" sz="1100" b="1" kern="1200" dirty="0">
-                          <a:solidFill>
-                            <a:schemeClr val="bg1"/>
-                          </a:solidFill>
-                          <a:latin typeface="+mn-lt"/>
-                          <a:ea typeface="+mn-ea"/>
-                          <a:cs typeface="+mn-cs"/>
-                        </a:rPr>
-                        <a:t>DELITOS / INGRESOS</a:t>
-                      </a:r>
-                    </a:p>
-                  </a:txBody>
-                  <a:tcPr>
-                    <a:solidFill>
-                      <a:schemeClr val="accent1">
-                        <a:lumMod val="75000"/>
-                      </a:schemeClr>
-                    </a:solidFill>
-                  </a:tcPr>
-                </a:tc>
-                <a:tc gridSpan="2">
-                  <a:txBody>
-                    <a:bodyPr/>
-                    <a:lstStyle/>
-                    <a:p>
-                      <a:pPr marL="0" indent="0">
-                        <a:buFont typeface="Arial" panose="020B0604020202020204" pitchFamily="34" charset="0"/>
-                        <a:buNone/>
-                      </a:pPr>
-                      <a:r>
-                        <a:rPr lang="es-MX" sz="1100" dirty="0"/>
-                        <a:t>
-• Contra la Salud — 31/07/2022 14:17
-• Contra la Salud — 06/12/2019 21:20</a:t>
-                      </a:r>
-                    </a:p>
-                  </a:txBody>
-                  <a:tcPr/>
-                </a:tc>
-                <a:tc hMerge="1">
-                  <a:txBody>
-                    <a:bodyPr/>
-                    <a:lstStyle/>
-                    <a:p>
-                      <a:endParaRPr lang="es-MX"/>
-                    </a:p>
-                  </a:txBody>
-                  <a:tcPr/>
-                </a:tc>
-                <a:extLst>
-                  <a:ext uri="{0D108BD9-81ED-4DB2-BD59-A6C34878D82A}">
-                    <a16:rowId xmlns:a16="http://schemas.microsoft.com/office/drawing/2014/main" val="3340689267"/>
-                  </a:ext>
-                </a:extLst>
-              </a:tr>
-              <a:tr h="1044626">
-                <a:tc>
-                  <a:txBody>
-                    <a:bodyPr/>
-                    <a:lstStyle/>
-                    <a:p>
-                      <a:r>
-                        <a:rPr lang="es-MX" sz="1100" b="1" kern="1200" dirty="0">
-                          <a:solidFill>
-                            <a:schemeClr val="bg1"/>
-                          </a:solidFill>
-                          <a:latin typeface="+mn-lt"/>
-                          <a:ea typeface="+mn-ea"/>
-                          <a:cs typeface="+mn-cs"/>
-                        </a:rPr>
-                        <a:t>CARPETAS DE INVESTIGACIÓN</a:t>
-                      </a:r>
-                    </a:p>
-                  </a:txBody>
-                  <a:tcPr>
-                    <a:solidFill>
-                      <a:schemeClr val="accent1">
-                        <a:lumMod val="75000"/>
-                      </a:schemeClr>
-                    </a:solidFill>
-                  </a:tcPr>
-                </a:tc>
-                <a:tc gridSpan="2">
-                  <a:txBody>
-                    <a:bodyPr/>
-                    <a:lstStyle/>
-                    <a:p>
-                      <a:pPr marL="0" indent="0" algn="l" defTabSz="914400" rtl="0" eaLnBrk="1" latinLnBrk="0" hangingPunct="1">
-                        <a:buFont typeface="Arial" panose="020B0604020202020204" pitchFamily="34" charset="0"/>
-                        <a:buNone/>
-                      </a:pPr>
-                      <a:r>
-                        <a:rPr lang="es-MX" sz="1100" kern="1200">
-                          <a:solidFill>
-                            <a:schemeClr val="dk1"/>
-                          </a:solidFill>
-                          <a:latin typeface="+mn-lt"/>
-                          <a:ea typeface="+mn-ea"/>
-                          <a:cs typeface="+mn-cs"/>
-                        </a:rPr>
-                        <a:t>
-• CI/RIN/00425/06-23 Contra la Salud</a:t>
-                      </a:r>
-                      <a:endParaRPr lang="es-MX" sz="1100" kern="1200" dirty="0">
-                        <a:solidFill>
-                          <a:schemeClr val="dk1"/>
-                        </a:solidFill>
-                        <a:latin typeface="+mn-lt"/>
-                        <a:ea typeface="+mn-ea"/>
-                        <a:cs typeface="+mn-cs"/>
-                      </a:endParaRPr>
-                    </a:p>
-                  </a:txBody>
-                  <a:tcPr/>
-                </a:tc>
-                <a:tc hMerge="1">
-                  <a:txBody>
-                    <a:bodyPr/>
-                    <a:lstStyle/>
-                    <a:p>
-                      <a:endParaRPr lang="es-MX"/>
-                    </a:p>
-                  </a:txBody>
-                  <a:tcPr/>
-                </a:tc>
-                <a:extLst>
-                  <a:ext uri="{0D108BD9-81ED-4DB2-BD59-A6C34878D82A}">
-                    <a16:rowId xmlns:a16="http://schemas.microsoft.com/office/drawing/2014/main" val="3218073216"/>
-                  </a:ext>
-                </a:extLst>
-              </a:tr>
-              <a:tr h="159387">
-                <a:tc>
-                  <a:txBody>
-                    <a:bodyPr/>
-                    <a:lstStyle/>
-                    <a:p>
-                      <a:pPr marL="0" marR="0" lvl="0" indent="0" algn="l" defTabSz="914400" rtl="0" eaLnBrk="1" fontAlgn="auto" latinLnBrk="0" hangingPunct="1">
-                        <a:lnSpc>
-                          <a:spcPct val="100000"/>
-                        </a:lnSpc>
-                        <a:spcBef>
-                          <a:spcPts val="0"/>
-                        </a:spcBef>
-                        <a:spcAft>
-                          <a:spcPts val="0"/>
-                        </a:spcAft>
-                        <a:buClrTx/>
-                        <a:buSzTx/>
-                        <a:buFontTx/>
-                        <a:buNone/>
-                        <a:tabLst/>
-                        <a:defRPr/>
-                      </a:pPr>
-                      <a:r>
-                        <a:rPr lang="es-MX" sz="1100" b="1" dirty="0">
-                          <a:solidFill>
-                            <a:schemeClr val="bg1"/>
-                          </a:solidFill>
-                        </a:rPr>
-                        <a:t>ORDENES DE APREHENSIÓN</a:t>
-                      </a:r>
-                    </a:p>
-                  </a:txBody>
-                  <a:tcPr>
-                    <a:solidFill>
-                      <a:schemeClr val="accent1">
-                        <a:lumMod val="75000"/>
-                      </a:schemeClr>
-                    </a:solidFill>
-                  </a:tcPr>
-                </a:tc>
-                <a:tc gridSpan="2">
-                  <a:txBody>
-                    <a:bodyPr/>
-                    <a:lstStyle/>
-                    <a:p>
-                      <a:pPr marL="0" indent="0" algn="l" defTabSz="914400" rtl="0" eaLnBrk="1" latinLnBrk="0" hangingPunct="1">
-                        <a:buFont typeface="Arial" panose="020B0604020202020204" pitchFamily="34" charset="0"/>
-                        <a:buNone/>
-                      </a:pPr>
-                      <a:r>
-                        <a:rPr lang="es-MX" sz="1100" kern="1200" dirty="0">
-                          <a:solidFill>
-                            <a:schemeClr val="dk1"/>
-                          </a:solidFill>
-                          <a:latin typeface="+mn-lt"/>
-                          <a:ea typeface="+mn-ea"/>
-                          <a:cs typeface="+mn-cs"/>
-                        </a:rPr>
-                        <a:t>
-• HOMICIDIO DOLOSO CALIFICADO — CUMPLIMENTADA</a:t>
-                      </a:r>
-                    </a:p>
-                  </a:txBody>
-                  <a:tcPr/>
-                </a:tc>
-                <a:tc hMerge="1">
-                  <a:txBody>
-                    <a:bodyPr/>
-                    <a:lstStyle/>
-                    <a:p>
-                      <a:endParaRPr lang="es-MX"/>
-                    </a:p>
-                  </a:txBody>
-                  <a:tcPr/>
-                </a:tc>
-                <a:extLst>
-                  <a:ext uri="{0D108BD9-81ED-4DB2-BD59-A6C34878D82A}">
-                    <a16:rowId xmlns:a16="http://schemas.microsoft.com/office/drawing/2014/main" val="3169124086"/>
-                  </a:ext>
-                </a:extLst>
-              </a:tr>
-              <a:tr h="795285">
-                <a:tc>
-                  <a:txBody>
-                    <a:bodyPr/>
-                    <a:lstStyle/>
-                    <a:p>
-                      <a:r>
-                        <a:rPr lang="es-MX" sz="1100" b="1" dirty="0"/>
-                        <a:t> </a:t>
-                      </a:r>
-                      <a:r>
-                        <a:rPr lang="es-MX" sz="1100" b="1" dirty="0">
-                          <a:solidFill>
-                            <a:schemeClr val="bg1"/>
-                          </a:solidFill>
-                        </a:rPr>
-                        <a:t>ESTATUS </a:t>
-                      </a:r>
-                    </a:p>
-                  </a:txBody>
-                  <a:tcPr>
-                    <a:solidFill>
-                      <a:schemeClr val="accent1">
-                        <a:lumMod val="75000"/>
-                      </a:schemeClr>
-                    </a:solidFill>
-                  </a:tcPr>
-                </a:tc>
-                <a:tc gridSpan="2">
-                  <a:txBody>
-                    <a:bodyPr/>
-                    <a:lstStyle/>
-                    <a:p>
-                      <a:pPr marL="0" marR="0" lvl="0" indent="0" algn="just" defTabSz="914400" rtl="0" eaLnBrk="1" fontAlgn="auto" latinLnBrk="0" hangingPunct="1">
-                        <a:lnSpc>
-                          <a:spcPct val="100000"/>
-                        </a:lnSpc>
-                        <a:spcBef>
-                          <a:spcPts val="0"/>
-                        </a:spcBef>
-                        <a:spcAft>
-                          <a:spcPts val="0"/>
-                        </a:spcAft>
-                        <a:buClrTx/>
-                        <a:buSzTx/>
-                        <a:buFont typeface="Arial" panose="020B0604020202020204" pitchFamily="34" charset="0"/>
-                        <a:buNone/>
-                        <a:tabLst/>
-                        <a:defRPr/>
-                      </a:pPr>
-                      <a:r>
-                        <a:rPr lang="es-MX" sz="1100" kern="1200" dirty="0">
-                          <a:solidFill>
-                            <a:schemeClr val="dk1"/>
-                          </a:solidFill>
-                          <a:latin typeface="+mn-lt"/>
-                          <a:ea typeface="+mn-ea"/>
-                          <a:cs typeface="+mn-cs"/>
-                        </a:rPr>
-                        <a:t>Sentenciado, se sentencio por violacion</a:t>
-                      </a:r>
-                    </a:p>
-                  </a:txBody>
-                  <a:tcPr/>
-                </a:tc>
-                <a:tc hMerge="1">
-                  <a:txBody>
-                    <a:bodyPr/>
-                    <a:lstStyle/>
-                    <a:p>
-                      <a:endParaRPr lang="es-MX"/>
-                    </a:p>
-                  </a:txBody>
-                  <a:tcPr/>
-                </a:tc>
-                <a:extLst>
-                  <a:ext uri="{0D108BD9-81ED-4DB2-BD59-A6C34878D82A}">
-                    <a16:rowId xmlns:a16="http://schemas.microsoft.com/office/drawing/2014/main" val="3558537792"/>
-                  </a:ext>
-                </a:extLst>
-              </a:tr>
-              <a:tr h="1786729">
-                <a:tc>
-                  <a:txBody>
-                    <a:bodyPr/>
-                    <a:lstStyle/>
-                    <a:p>
-                      <a:r>
-                        <a:rPr lang="es-MX" sz="1100" b="1" kern="1200" dirty="0">
-                          <a:solidFill>
-                            <a:schemeClr val="bg1"/>
-                          </a:solidFill>
-                          <a:latin typeface="+mn-lt"/>
-                          <a:ea typeface="+mn-ea"/>
-                          <a:cs typeface="+mn-cs"/>
-                        </a:rPr>
-                        <a:t>ASUNTOS RELACIONADOS</a:t>
-                      </a:r>
-                    </a:p>
-                  </a:txBody>
-                  <a:tcPr>
-                    <a:solidFill>
-                      <a:schemeClr val="accent1">
-                        <a:lumMod val="75000"/>
-                      </a:schemeClr>
-                    </a:solidFill>
-                  </a:tcPr>
-                </a:tc>
-                <a:tc gridSpan="2">
-                  <a:txBody>
-                    <a:bodyPr/>
-                    <a:lstStyle/>
-                    <a:p>
-                      <a:pPr marL="171450" indent="-171450" algn="just">
-                        <a:buFontTx/>
-                        <a:buChar char="-"/>
-                      </a:pPr>
-                      <a:r>
-                        <a:rPr lang="es-MX" sz="1100" kern="1200" dirty="0">
-                          <a:solidFill>
-                            <a:schemeClr val="dk1"/>
-                          </a:solidFill>
-                          <a:latin typeface="+mn-lt"/>
-                          <a:ea typeface="+mn-ea"/>
-                          <a:cs typeface="+mn-cs"/>
-                        </a:rPr>
-                        <a:t>Caso Jassiel Hechos en agravio de Jassiel Díaz Cardona, el pasado 30 de mayo de 2023, en el rancho conocido como  “la fogata” Potrero Salitrillo Monte, Rincón de Romos, Aguascalientes, cuando la victima viajaba a bordo de su automóvil Ford Focus sobre la carretera 22, fue perseguido por los responsables  Jonathan Josefath Castorena Rodríguez alias patroncito, Javier Esquivel Padilla alias “La Queta” y Ricardo Alberto Navarro Gonzales alias “El Ricas”, quienes lo alcanzaron para herirlo con disparos por arma de fuego, la victima falleció minutos mas tarde en el Hospital General de Rincón de Romos.</a:t>
-                      </a:r>
-                    </a:p>
-                    <a:p>
-                      <a:pPr marL="0" indent="0" algn="just">
-                        <a:buFontTx/>
-                        <a:buNone/>
-                      </a:pPr>
-                      <a:endParaRPr lang="es-MX" sz="1100" kern="1200" dirty="0">
-                        <a:solidFill>
-                          <a:schemeClr val="dk1"/>
-                        </a:solidFill>
-                        <a:latin typeface="+mn-lt"/>
-                        <a:ea typeface="+mn-ea"/>
-                        <a:cs typeface="+mn-cs"/>
-                      </a:endParaRPr>
-                    </a:p>
-                    <a:p>
-                      <a:pPr marL="0" indent="0" algn="just">
-                        <a:buFontTx/>
-                        <a:buNone/>
-                      </a:pPr>
-                      <a:endParaRPr lang="es-MX" sz="1100" kern="1200" dirty="0">
-                        <a:solidFill>
-                          <a:schemeClr val="dk1"/>
-                        </a:solidFill>
-                        <a:latin typeface="+mn-lt"/>
-                        <a:ea typeface="+mn-ea"/>
-                        <a:cs typeface="+mn-cs"/>
-                      </a:endParaRPr>
-                    </a:p>
-                    <a:p>
-                      <a:pPr marL="0" marR="0" lvl="0" indent="0" algn="just" defTabSz="914400" rtl="0" eaLnBrk="1" fontAlgn="auto" latinLnBrk="0" hangingPunct="1">
-                        <a:lnSpc>
-                          <a:spcPct val="100000"/>
-                        </a:lnSpc>
-                        <a:spcBef>
-                          <a:spcPts val="0"/>
-                        </a:spcBef>
-                        <a:spcAft>
-                          <a:spcPts val="0"/>
-                        </a:spcAft>
-                        <a:buClrTx/>
-                        <a:buSzTx/>
-                        <a:buFontTx/>
-                        <a:buNone/>
-                        <a:tabLst/>
-                        <a:defRPr/>
-                      </a:pPr>
-                      <a:r>
-                        <a:rPr lang="es-MX" sz="1100" kern="1200" dirty="0">
-                          <a:solidFill>
-                            <a:schemeClr val="dk1"/>
-                          </a:solidFill>
-                          <a:latin typeface="+mn-lt"/>
-                          <a:ea typeface="+mn-ea"/>
-                          <a:cs typeface="+mn-cs"/>
-                        </a:rPr>
-                        <a:t> </a:t>
-                      </a:r>
-                    </a:p>
-                    <a:p>
-                      <a:pPr marL="0" marR="0" lvl="0" indent="0" algn="just" defTabSz="914400" rtl="0" eaLnBrk="1" fontAlgn="auto" latinLnBrk="0" hangingPunct="1">
-                        <a:lnSpc>
-                          <a:spcPct val="100000"/>
-                        </a:lnSpc>
-                        <a:spcBef>
-                          <a:spcPts val="0"/>
-                        </a:spcBef>
-                        <a:spcAft>
-                          <a:spcPts val="0"/>
-                        </a:spcAft>
-                        <a:buClrTx/>
-                        <a:buSzTx/>
-                        <a:buFontTx/>
-                        <a:buNone/>
-                        <a:tabLst/>
-                        <a:defRPr/>
-                      </a:pPr>
-                      <a:endParaRPr lang="es-MX" sz="1100" kern="1200" dirty="0">
-                        <a:solidFill>
-                          <a:schemeClr val="dk1"/>
-                        </a:solidFill>
-                        <a:latin typeface="+mn-lt"/>
-                        <a:ea typeface="+mn-ea"/>
-                        <a:cs typeface="+mn-cs"/>
-                      </a:endParaRPr>
-                    </a:p>
-                    <a:p>
-                      <a:pPr marL="0" marR="0" lvl="0" indent="0" algn="just" defTabSz="914400" rtl="0" eaLnBrk="1" fontAlgn="auto" latinLnBrk="0" hangingPunct="1">
-                        <a:lnSpc>
-                          <a:spcPct val="100000"/>
-                        </a:lnSpc>
-                        <a:spcBef>
-                          <a:spcPts val="0"/>
-                        </a:spcBef>
-                        <a:spcAft>
-                          <a:spcPts val="0"/>
-                        </a:spcAft>
-                        <a:buClrTx/>
-                        <a:buSzTx/>
-                        <a:buFontTx/>
-                        <a:buNone/>
-                        <a:tabLst/>
-                        <a:defRPr/>
-                      </a:pPr>
-                      <a:r>
-                        <a:rPr lang="es-MX" sz="1100" kern="1200" dirty="0">
-                          <a:solidFill>
-                            <a:schemeClr val="dk1"/>
-                          </a:solidFill>
-                          <a:latin typeface="+mn-lt"/>
-                          <a:ea typeface="+mn-ea"/>
-                          <a:cs typeface="+mn-cs"/>
-                        </a:rPr>
-                        <a:t>[V2] </a:t>
-                      </a:r>
-                    </a:p>
-                    <a:p>
-                      <a:pPr marL="0" indent="0" algn="just">
-                        <a:buFontTx/>
-                        <a:buNone/>
-                      </a:pPr>
-                      <a:endParaRPr lang="es-MX" sz="1100" kern="1200" dirty="0">
-                        <a:solidFill>
-                          <a:schemeClr val="dk1"/>
-                        </a:solidFill>
-                        <a:latin typeface="+mn-lt"/>
-                        <a:ea typeface="+mn-ea"/>
-                        <a:cs typeface="+mn-cs"/>
-                      </a:endParaRPr>
-                    </a:p>
-                  </a:txBody>
-                  <a:tcPr/>
-                </a:tc>
-                <a:tc hMerge="1">
-                  <a:txBody>
-                    <a:bodyPr/>
-                    <a:lstStyle/>
-                    <a:p>
-                      <a:endParaRPr lang="es-MX"/>
-                    </a:p>
-                  </a:txBody>
-                  <a:tcPr/>
-                </a:tc>
-                <a:extLst>
-                  <a:ext uri="{0D108BD9-81ED-4DB2-BD59-A6C34878D82A}">
-                    <a16:rowId xmlns:a16="http://schemas.microsoft.com/office/drawing/2014/main" val="4024071236"/>
-                  </a:ext>
-                </a:extLst>
-              </a:tr>
-            </a:tbl>
-          </a:graphicData>
-        </a:graphic>
-      </p:graphicFrame>
-      <p:pic>
-        <p:nvPicPr>
-          <p:cNvPr id="7" name="[FP]" descr="[FP]">
-            <a:extLst>
-              <a:ext uri="{FF2B5EF4-FFF2-40B4-BE49-F238E27FC236}">
-                <a16:creationId xmlns:a16="http://schemas.microsoft.com/office/drawing/2014/main" id="{C80E713A-27D7-471A-9297-6CD4151A9971}"/>
-              </a:ext>
-            </a:extLst>
-          </p:cNvPr>
-          <p:cNvPicPr>
-            <a:picLocks noChangeAspect="1"/>
-          </p:cNvPicPr>
-          <p:nvPr/>
-        </p:nvPicPr>
-        <p:blipFill>
-          <a:blip r:embed="R3ffa6accbb6749b3">
             <a:extLst>
               <a:ext uri="{28A0092B-C50C-407E-A947-70E740481C1C}">
                 <a14:useLocalDpi xmlns:a14="http://schemas.microsoft.com/office/drawing/2010/main" val="0"/>

--- a/Objetivos Prioritarios/Salidas/informe_detenidos.pptx
+++ b/Objetivos Prioritarios/Salidas/informe_detenidos.pptx
@@ -1,11 +1,15 @@
 
 <file path=ppt/presentation.xml><?xml version="1.0" encoding="utf-8"?>
-<p:presentation xmlns:a="http://schemas.openxmlformats.org/drawingml/2006/main" xmlns:r="http://schemas.openxmlformats.org/officeDocument/2006/relationships" xmlns:p="http://schemas.openxmlformats.org/presentationml/2006/main" saveSubsetFonts="1">
+<p:presentation xmlns:p15="http://schemas.microsoft.com/office/powerpoint/2012/main" xmlns:a="http://schemas.openxmlformats.org/drawingml/2006/main" xmlns:r="http://schemas.openxmlformats.org/officeDocument/2006/relationships" xmlns:p="http://schemas.openxmlformats.org/presentationml/2006/main" saveSubsetFonts="1">
   <p:sldMasterIdLst>
     <p:sldMasterId id="2147483648" r:id="rId1"/>
   </p:sldMasterIdLst>
   <p:sldIdLst>
-    <p:sldId id="305" r:id="rId2"/>
+    <p:sldId id="306" r:id="Rbcd760619b5746f2"/>
+    <p:sldId id="307" r:id="R0beceae613bb4902"/>
+    <p:sldId id="308" r:id="Re3a5ce31a0f04d3b"/>
+    <p:sldId id="309" r:id="Rbc85f29568024fc5"/>
+    <p:sldId id="310" r:id="R9841bbb94f4a48e2"/>
   </p:sldIdLst>
   <p:sldSz cx="12192000" cy="6858000"/>
   <p:notesSz cx="6858000" cy="9144000"/>
@@ -745,7 +749,7 @@
 </file>
 
 <file path=ppt/slideLayouts/slideLayout2.xml><?xml version="1.0" encoding="utf-8"?>
-<p:sldLayout xmlns:a="http://schemas.openxmlformats.org/drawingml/2006/main" xmlns:r="http://schemas.openxmlformats.org/officeDocument/2006/relationships" xmlns:p="http://schemas.openxmlformats.org/presentationml/2006/main" type="obj" preserve="1">
+<p:sldLayout xmlns:a16="http://schemas.microsoft.com/office/drawing/2014/main" xmlns:p14="http://schemas.microsoft.com/office/powerpoint/2010/main" xmlns:a="http://schemas.openxmlformats.org/drawingml/2006/main" xmlns:r="http://schemas.openxmlformats.org/officeDocument/2006/relationships" xmlns:p="http://schemas.openxmlformats.org/presentationml/2006/main" type="obj" preserve="1">
   <p:cSld name="Título y objetos">
     <p:spTree>
       <p:nvGrpSpPr>
@@ -2761,7 +2765,7 @@
 </file>
 
 <file path=ppt/slideMasters/slideMaster1.xml><?xml version="1.0" encoding="utf-8"?>
-<p:sldMaster xmlns:a="http://schemas.openxmlformats.org/drawingml/2006/main" xmlns:r="http://schemas.openxmlformats.org/officeDocument/2006/relationships" xmlns:p="http://schemas.openxmlformats.org/presentationml/2006/main">
+<p:sldMaster xmlns:a16="http://schemas.microsoft.com/office/drawing/2014/main" xmlns:p14="http://schemas.microsoft.com/office/powerpoint/2010/main" xmlns:a="http://schemas.openxmlformats.org/drawingml/2006/main" xmlns:r="http://schemas.openxmlformats.org/officeDocument/2006/relationships" xmlns:p="http://schemas.openxmlformats.org/presentationml/2006/main">
   <p:cSld>
     <p:bg>
       <p:bgRef idx="1001">
@@ -4162,7 +4166,7 @@
 </file>
 
 <file path=ppt/slides/slide2.xml><?xml version="1.0" encoding="utf-8"?>
-<p:sld xmlns:a="http://schemas.openxmlformats.org/drawingml/2006/main" xmlns:r="http://schemas.openxmlformats.org/officeDocument/2006/relationships" xmlns:p="http://schemas.openxmlformats.org/presentationml/2006/main">
+<p:sld xmlns:a16="http://schemas.microsoft.com/office/drawing/2014/main" xmlns:p14="http://schemas.microsoft.com/office/powerpoint/2010/main" xmlns:a14="http://schemas.microsoft.com/office/drawing/2010/main" xmlns:a="http://schemas.openxmlformats.org/drawingml/2006/main" xmlns:r="http://schemas.openxmlformats.org/officeDocument/2006/relationships" xmlns:p="http://schemas.openxmlformats.org/presentationml/2006/main">
   <p:cSld>
     <p:spTree>
       <p:nvGrpSpPr>
@@ -4193,7 +4197,7 @@
           <p:nvPr/>
         </p:nvPicPr>
         <p:blipFill>
-          <a:blip r:embed="rId2"/>
+          <a:blip r:embed="R2dd93ea32b9e45ef"/>
           <a:stretch>
             <a:fillRect/>
           </a:stretch>
@@ -4269,7 +4273,7 @@
                     <a:p>
                       <a:r>
                         <a:rPr lang="es-MX" sz="1600" dirty="0"/>
-                        <a:t>[C1]</a:t>
+                        <a:t>LUIS ARTURO PADILLA HERNANDEZ</a:t>
                       </a:r>
                     </a:p>
                   </a:txBody>
@@ -4332,7 +4336,7 @@
                     <a:p>
                       <a:r>
                         <a:rPr lang="es-MX" sz="1200" b="1" dirty="0"/>
-                        <a:t>[C2]</a:t>
+                        <a:t>CJNG</a:t>
                       </a:r>
                     </a:p>
                   </a:txBody>
@@ -4362,7 +4366,7 @@
                       </a:pPr>
                       <a:r>
                         <a:rPr lang="es-MX" sz="1200" b="1" dirty="0"/>
-                        <a:t>[C3]</a:t>
+                        <a:t>EJECUTOR</a:t>
                       </a:r>
                     </a:p>
                   </a:txBody>
@@ -4412,7 +4416,12 @@
                       </a:pPr>
                       <a:r>
                         <a:rPr lang="es-MX" sz="1100" dirty="0"/>
-                        <a:t>[C4]</a:t>
+                        <a:t>
+• Contra la Salud — 22/05/2020 17:50
+• Abigeato (Robo rual) — 19/05/2011 20:30
+• Abigeato (Robo rual) — 19/05/2011 20:00
+• Robo calificado / Sin Detalle — 08/11/2004 12:30
+• Robo calificado / Sin Detalle — 10/04/2003 16:00</a:t>
                       </a:r>
                     </a:p>
                   </a:txBody>
@@ -4479,7 +4488,12 @@
                           <a:ea typeface="+mn-ea"/>
                           <a:cs typeface="+mn-cs"/>
                         </a:rPr>
-                        <a:t>[C5]</a:t>
+                        <a:t>
+• CI/AGS/01228/01-23 Privación ilegal de la libertad
+• CI/AGS/01718/01-23 Contra la Salud
+• CI/AGS/06518/03-23 Privación ilegal de la libertad
+• CI/AGS/11529/05-20 Contra la Salud
+• DGAP/AGS/06938/05-11 Robo calificado</a:t>
                       </a:r>
                       <a:endParaRPr lang="es-MX" sz="1100" kern="1200" dirty="0">
                         <a:solidFill>
@@ -4568,7 +4582,12 @@
                           <a:ea typeface="+mn-ea"/>
                           <a:cs typeface="+mn-cs"/>
                         </a:rPr>
-                        <a:t>[C6]</a:t>
+                        <a:t>
+• ROBO CALIFICADO — CUMPLIMENTADA
+• ROBO CALIFICADO — CANCELADO
+• DESAPARICION FORZADA DE PERSONAS — CUMPLIMENTADA
+• CONTRA LA SALUD — CUMPLIMENTADA
+• PRIVACION ILEGAL DE LA LIBERTAD — CUMPLIMENTADA</a:t>
                       </a:r>
                     </a:p>
                   </a:txBody>
@@ -4649,7 +4668,7 @@
                           <a:ea typeface="+mn-ea"/>
                           <a:cs typeface="+mn-cs"/>
                         </a:rPr>
-                        <a:t>[C7], [C8]</a:t>
+                        <a:t>Sentenciado, Se sentencio por violación a la persona</a:t>
                       </a:r>
                     </a:p>
                   </a:txBody>
@@ -4716,7 +4735,8 @@
                           <a:ea typeface="+mn-ea"/>
                           <a:cs typeface="+mn-cs"/>
                         </a:rPr>
-                        <a:t>[C9]</a:t>
+                        <a:t>Caso doña Juana  LEO Occisos Ma. Juana Montoya Gonzáles y Juan Gabriel Gutiérrez Marín, hechos ocurridos el 27 de junio de 2022, cuando las victimas en primera instancia fueron privados de su libertad en su domicilio ubicado en el municipio de Rincón de Romos y posteriormente  localizados sin vida en las inmediaciones del predio rustico “el charquito
+LEO 588</a:t>
                       </a:r>
                     </a:p>
                     <a:p>
@@ -4774,7 +4794,7 @@
                           <a:ea typeface="+mn-ea"/>
                           <a:cs typeface="+mn-cs"/>
                         </a:rPr>
-                        <a:t>[V1] </a:t>
+                        <a:t>LEONARDO MORFIN ESQUIVEL </a:t>
                       </a:r>
                     </a:p>
                     <a:p>
@@ -4831,7 +4851,7 @@
                           <a:ea typeface="+mn-ea"/>
                           <a:cs typeface="+mn-cs"/>
                         </a:rPr>
-                        <a:t>[V2] </a:t>
+                        <a:t>CARLOS LEONARDO CRUZ CARRILLO </a:t>
                       </a:r>
                     </a:p>
                     <a:p>
@@ -4886,7 +4906,3364 @@
           <p:nvPr/>
         </p:nvPicPr>
         <p:blipFill>
+          <a:blip r:embed="R277d8d8277f24ff1">
+            <a:extLst>
+              <a:ext uri="{28A0092B-C50C-407E-A947-70E740481C1C}">
+                <a14:useLocalDpi xmlns:a14="http://schemas.microsoft.com/office/drawing/2010/main" val="0"/>
+              </a:ext>
+            </a:extLst>
+          </a:blip>
+          <a:stretch>
+            <a:fillRect/>
+          </a:stretch>
+        </p:blipFill>
+        <p:spPr>
+          <a:xfrm>
+            <a:off x="214361" y="1714348"/>
+            <a:ext cx="2902475" cy="4351338"/>
+          </a:xfrm>
+          <a:prstGeom prst="rect">
+            <a:avLst/>
+          </a:prstGeom>
+        </p:spPr>
+      </p:pic>
+      <p:pic>
+        <p:nvPicPr>
+          <p:cNvPr id="11" name="[FV1]" descr="[FV1]">
+            <a:extLst>
+              <a:ext uri="{FF2B5EF4-FFF2-40B4-BE49-F238E27FC236}">
+                <a16:creationId xmlns:a16="http://schemas.microsoft.com/office/drawing/2014/main" id="{95A1EC47-8063-435B-9340-91DBB33FE951}"/>
+              </a:ext>
+            </a:extLst>
+          </p:cNvPr>
+          <p:cNvPicPr>
+            <a:picLocks noChangeAspect="1"/>
+          </p:cNvPicPr>
+          <p:nvPr/>
+        </p:nvPicPr>
+        <p:blipFill>
           <a:blip r:embed="rId3">
+            <a:extLst>
+              <a:ext uri="{28A0092B-C50C-407E-A947-70E740481C1C}">
+                <a14:useLocalDpi xmlns:a14="http://schemas.microsoft.com/office/drawing/2010/main" val="0"/>
+              </a:ext>
+            </a:extLst>
+          </a:blip>
+          <a:stretch>
+            <a:fillRect/>
+          </a:stretch>
+        </p:blipFill>
+        <p:spPr>
+          <a:xfrm>
+            <a:off x="7584982" y="5672321"/>
+            <a:ext cx="665008" cy="827694"/>
+          </a:xfrm>
+          <a:prstGeom prst="rect">
+            <a:avLst/>
+          </a:prstGeom>
+        </p:spPr>
+      </p:pic>
+      <p:pic>
+        <p:nvPicPr>
+          <p:cNvPr id="13" name="[FV2]" descr="[FV2]">
+            <a:extLst>
+              <a:ext uri="{FF2B5EF4-FFF2-40B4-BE49-F238E27FC236}">
+                <a16:creationId xmlns:a16="http://schemas.microsoft.com/office/drawing/2014/main" id="{65D6E13E-B1E1-4CA4-8F00-9E73059CD0BD}"/>
+              </a:ext>
+            </a:extLst>
+          </p:cNvPr>
+          <p:cNvPicPr>
+            <a:picLocks noChangeAspect="1"/>
+          </p:cNvPicPr>
+          <p:nvPr/>
+        </p:nvPicPr>
+        <p:blipFill>
+          <a:blip r:embed="rId3">
+            <a:extLst>
+              <a:ext uri="{28A0092B-C50C-407E-A947-70E740481C1C}">
+                <a14:useLocalDpi xmlns:a14="http://schemas.microsoft.com/office/drawing/2010/main" val="0"/>
+              </a:ext>
+            </a:extLst>
+          </a:blip>
+          <a:stretch>
+            <a:fillRect/>
+          </a:stretch>
+        </p:blipFill>
+        <p:spPr>
+          <a:xfrm>
+            <a:off x="9993131" y="5680558"/>
+            <a:ext cx="665008" cy="827694"/>
+          </a:xfrm>
+          <a:prstGeom prst="rect">
+            <a:avLst/>
+          </a:prstGeom>
+        </p:spPr>
+      </p:pic>
+    </p:spTree>
+    <p:extLst>
+      <p:ext uri="{BB962C8B-B14F-4D97-AF65-F5344CB8AC3E}">
+        <p14:creationId xmlns:p14="http://schemas.microsoft.com/office/powerpoint/2010/main" val="2124728287"/>
+      </p:ext>
+    </p:extLst>
+  </p:cSld>
+  <p:clrMapOvr>
+    <a:masterClrMapping/>
+  </p:clrMapOvr>
+</p:sld>
+</file>
+
+<file path=ppt/slides/slide3.xml><?xml version="1.0" encoding="utf-8"?>
+<p:sld xmlns:a16="http://schemas.microsoft.com/office/drawing/2014/main" xmlns:p14="http://schemas.microsoft.com/office/powerpoint/2010/main" xmlns:a14="http://schemas.microsoft.com/office/drawing/2010/main" xmlns:a="http://schemas.openxmlformats.org/drawingml/2006/main" xmlns:r="http://schemas.openxmlformats.org/officeDocument/2006/relationships" xmlns:p="http://schemas.openxmlformats.org/presentationml/2006/main">
+  <p:cSld>
+    <p:spTree>
+      <p:nvGrpSpPr>
+        <p:cNvPr id="1" name=""/>
+        <p:cNvGrpSpPr/>
+        <p:nvPr/>
+      </p:nvGrpSpPr>
+      <p:grpSpPr>
+        <a:xfrm>
+          <a:off x="0" y="0"/>
+          <a:ext cx="0" cy="0"/>
+          <a:chOff x="0" y="0"/>
+          <a:chExt cx="0" cy="0"/>
+        </a:xfrm>
+      </p:grpSpPr>
+      <p:pic>
+        <p:nvPicPr>
+          <p:cNvPr id="4" name="[FONDO]" descr="[FONDO]">
+            <a:extLst>
+              <a:ext uri="{FF2B5EF4-FFF2-40B4-BE49-F238E27FC236}">
+                <a16:creationId xmlns:a16="http://schemas.microsoft.com/office/drawing/2014/main" id="{AE2FEBDB-ED54-FF79-0EF8-AA9E7C8EA417}"/>
+              </a:ext>
+            </a:extLst>
+          </p:cNvPr>
+          <p:cNvPicPr>
+            <a:picLocks noChangeAspect="1"/>
+          </p:cNvPicPr>
+          <p:nvPr/>
+        </p:nvPicPr>
+        <p:blipFill>
+          <a:blip r:embed="R2cbd285bd5b64c0d"/>
+          <a:stretch>
+            <a:fillRect/>
+          </a:stretch>
+        </p:blipFill>
+        <p:spPr>
+          <a:xfrm>
+            <a:off x="1" y="0"/>
+            <a:ext cx="12401280" cy="6969519"/>
+          </a:xfrm>
+          <a:prstGeom prst="rect">
+            <a:avLst/>
+          </a:prstGeom>
+        </p:spPr>
+      </p:pic>
+      <p:graphicFrame>
+        <p:nvGraphicFramePr>
+          <p:cNvPr id="10" name="Tabla 9">
+            <a:extLst>
+              <a:ext uri="{FF2B5EF4-FFF2-40B4-BE49-F238E27FC236}">
+                <a16:creationId xmlns:a16="http://schemas.microsoft.com/office/drawing/2014/main" id="{BC4CEC18-7797-7786-F517-147A6AD7242D}"/>
+              </a:ext>
+            </a:extLst>
+          </p:cNvPr>
+          <p:cNvGraphicFramePr>
+            <a:graphicFrameLocks noGrp="1"/>
+          </p:cNvGraphicFramePr>
+          <p:nvPr>
+            <p:extLst>
+              <p:ext uri="{D42A27DB-BD31-4B8C-83A1-F6EECF244321}">
+                <p14:modId xmlns:p14="http://schemas.microsoft.com/office/powerpoint/2010/main" val="1791400885"/>
+              </p:ext>
+            </p:extLst>
+          </p:nvPr>
+        </p:nvGraphicFramePr>
+        <p:xfrm>
+          <a:off x="3252159" y="1370610"/>
+          <a:ext cx="9149122" cy="5266098"/>
+        </p:xfrm>
+        <a:graphic>
+          <a:graphicData uri="http://schemas.openxmlformats.org/drawingml/2006/table">
+            <a:tbl>
+              <a:tblPr firstRow="1" bandRow="1">
+                <a:tableStyleId>{5C22544A-7EE6-4342-B048-85BDC9FD1C3A}</a:tableStyleId>
+              </a:tblPr>
+              <a:tblGrid>
+                <a:gridCol w="2462314">
+                  <a:extLst>
+                    <a:ext uri="{9D8B030D-6E8A-4147-A177-3AD203B41FA5}">
+                      <a16:colId xmlns:a16="http://schemas.microsoft.com/office/drawing/2014/main" val="2746230745"/>
+                    </a:ext>
+                  </a:extLst>
+                </a:gridCol>
+                <a:gridCol w="3343404">
+                  <a:extLst>
+                    <a:ext uri="{9D8B030D-6E8A-4147-A177-3AD203B41FA5}">
+                      <a16:colId xmlns:a16="http://schemas.microsoft.com/office/drawing/2014/main" val="3075986152"/>
+                    </a:ext>
+                  </a:extLst>
+                </a:gridCol>
+                <a:gridCol w="3343404">
+                  <a:extLst>
+                    <a:ext uri="{9D8B030D-6E8A-4147-A177-3AD203B41FA5}">
+                      <a16:colId xmlns:a16="http://schemas.microsoft.com/office/drawing/2014/main" val="4044500939"/>
+                    </a:ext>
+                  </a:extLst>
+                </a:gridCol>
+              </a:tblGrid>
+              <a:tr h="319663">
+                <a:tc gridSpan="3">
+                  <a:txBody>
+                    <a:bodyPr/>
+                    <a:lstStyle/>
+                    <a:p>
+                      <a:r>
+                        <a:rPr lang="es-MX" sz="1600" dirty="0"/>
+                        <a:t>RICARDO OMAR HERRERA GUERRERO</a:t>
+                      </a:r>
+                    </a:p>
+                  </a:txBody>
+                  <a:tcPr/>
+                </a:tc>
+                <a:tc hMerge="1">
+                  <a:txBody>
+                    <a:bodyPr/>
+                    <a:lstStyle/>
+                    <a:p>
+                      <a:endParaRPr lang="es-MX" dirty="0"/>
+                    </a:p>
+                  </a:txBody>
+                  <a:tcPr/>
+                </a:tc>
+                <a:tc hMerge="1">
+                  <a:txBody>
+                    <a:bodyPr/>
+                    <a:lstStyle/>
+                    <a:p>
+                      <a:endParaRPr lang="es-MX"/>
+                    </a:p>
+                  </a:txBody>
+                  <a:tcPr/>
+                </a:tc>
+                <a:extLst>
+                  <a:ext uri="{0D108BD9-81ED-4DB2-BD59-A6C34878D82A}">
+                    <a16:rowId xmlns:a16="http://schemas.microsoft.com/office/drawing/2014/main" val="3979505418"/>
+                  </a:ext>
+                </a:extLst>
+              </a:tr>
+              <a:tr h="319663">
+                <a:tc>
+                  <a:txBody>
+                    <a:bodyPr/>
+                    <a:lstStyle/>
+                    <a:p>
+                      <a:r>
+                        <a:rPr lang="es-MX" sz="1100" b="1" dirty="0">
+                          <a:solidFill>
+                            <a:schemeClr val="bg1"/>
+                          </a:solidFill>
+                        </a:rPr>
+                        <a:t>GRUPO DELICTIVO</a:t>
+                      </a:r>
+                    </a:p>
+                  </a:txBody>
+                  <a:tcPr>
+                    <a:solidFill>
+                      <a:schemeClr val="accent1">
+                        <a:lumMod val="75000"/>
+                      </a:schemeClr>
+                    </a:solidFill>
+                  </a:tcPr>
+                </a:tc>
+                <a:tc>
+                  <a:txBody>
+                    <a:bodyPr/>
+                    <a:lstStyle/>
+                    <a:p>
+                      <a:r>
+                        <a:rPr lang="es-MX" sz="1200" b="1" dirty="0"/>
+                        <a:t>CJNG</a:t>
+                      </a:r>
+                    </a:p>
+                  </a:txBody>
+                  <a:tcPr/>
+                </a:tc>
+                <a:tc>
+                  <a:txBody>
+                    <a:bodyPr/>
+                    <a:lstStyle/>
+                    <a:p>
+                      <a:pPr marL="0" marR="0" lvl="0" indent="0" algn="l" defTabSz="914400" rtl="0" eaLnBrk="1" fontAlgn="auto" latinLnBrk="0" hangingPunct="1">
+                        <a:lnSpc>
+                          <a:spcPct val="100000"/>
+                        </a:lnSpc>
+                        <a:spcBef>
+                          <a:spcPts val="0"/>
+                        </a:spcBef>
+                        <a:spcAft>
+                          <a:spcPts val="0"/>
+                        </a:spcAft>
+                        <a:buClrTx/>
+                        <a:buSzTx/>
+                        <a:buFontTx/>
+                        <a:buNone/>
+                        <a:tabLst/>
+                        <a:defRPr/>
+                      </a:pPr>
+                      <a:r>
+                        <a:rPr lang="es-MX" sz="1200" b="1" dirty="0"/>
+                        <a:t>EJECUTOR</a:t>
+                      </a:r>
+                    </a:p>
+                  </a:txBody>
+                  <a:tcPr/>
+                </a:tc>
+                <a:extLst>
+                  <a:ext uri="{0D108BD9-81ED-4DB2-BD59-A6C34878D82A}">
+                    <a16:rowId xmlns:a16="http://schemas.microsoft.com/office/drawing/2014/main" val="201189607"/>
+                  </a:ext>
+                </a:extLst>
+              </a:tr>
+              <a:tr h="725435">
+                <a:tc>
+                  <a:txBody>
+                    <a:bodyPr/>
+                    <a:lstStyle/>
+                    <a:p>
+                      <a:r>
+                        <a:rPr lang="es-MX" sz="1100" b="1" kern="1200" dirty="0">
+                          <a:solidFill>
+                            <a:schemeClr val="bg1"/>
+                          </a:solidFill>
+                          <a:latin typeface="+mn-lt"/>
+                          <a:ea typeface="+mn-ea"/>
+                          <a:cs typeface="+mn-cs"/>
+                        </a:rPr>
+                        <a:t>DELITOS / INGRESOS</a:t>
+                      </a:r>
+                    </a:p>
+                  </a:txBody>
+                  <a:tcPr>
+                    <a:solidFill>
+                      <a:schemeClr val="accent1">
+                        <a:lumMod val="75000"/>
+                      </a:schemeClr>
+                    </a:solidFill>
+                  </a:tcPr>
+                </a:tc>
+                <a:tc gridSpan="2">
+                  <a:txBody>
+                    <a:bodyPr/>
+                    <a:lstStyle/>
+                    <a:p>
+                      <a:pPr marL="0" indent="0">
+                        <a:buFont typeface="Arial" panose="020B0604020202020204" pitchFamily="34" charset="0"/>
+                        <a:buNone/>
+                      </a:pPr>
+                      <a:r>
+                        <a:rPr lang="es-MX" sz="1100" dirty="0"/>
+                        <a:t>
+• Contra la Salud — 11/10/2019 10:10</a:t>
+                      </a:r>
+                    </a:p>
+                  </a:txBody>
+                  <a:tcPr/>
+                </a:tc>
+                <a:tc hMerge="1">
+                  <a:txBody>
+                    <a:bodyPr/>
+                    <a:lstStyle/>
+                    <a:p>
+                      <a:endParaRPr lang="es-MX"/>
+                    </a:p>
+                  </a:txBody>
+                  <a:tcPr/>
+                </a:tc>
+                <a:extLst>
+                  <a:ext uri="{0D108BD9-81ED-4DB2-BD59-A6C34878D82A}">
+                    <a16:rowId xmlns:a16="http://schemas.microsoft.com/office/drawing/2014/main" val="3340689267"/>
+                  </a:ext>
+                </a:extLst>
+              </a:tr>
+              <a:tr h="1044626">
+                <a:tc>
+                  <a:txBody>
+                    <a:bodyPr/>
+                    <a:lstStyle/>
+                    <a:p>
+                      <a:r>
+                        <a:rPr lang="es-MX" sz="1100" b="1" kern="1200" dirty="0">
+                          <a:solidFill>
+                            <a:schemeClr val="bg1"/>
+                          </a:solidFill>
+                          <a:latin typeface="+mn-lt"/>
+                          <a:ea typeface="+mn-ea"/>
+                          <a:cs typeface="+mn-cs"/>
+                        </a:rPr>
+                        <a:t>CARPETAS DE INVESTIGACIÓN</a:t>
+                      </a:r>
+                    </a:p>
+                  </a:txBody>
+                  <a:tcPr>
+                    <a:solidFill>
+                      <a:schemeClr val="accent1">
+                        <a:lumMod val="75000"/>
+                      </a:schemeClr>
+                    </a:solidFill>
+                  </a:tcPr>
+                </a:tc>
+                <a:tc gridSpan="2">
+                  <a:txBody>
+                    <a:bodyPr/>
+                    <a:lstStyle/>
+                    <a:p>
+                      <a:pPr marL="0" indent="0" algn="l" defTabSz="914400" rtl="0" eaLnBrk="1" latinLnBrk="0" hangingPunct="1">
+                        <a:buFont typeface="Arial" panose="020B0604020202020204" pitchFamily="34" charset="0"/>
+                        <a:buNone/>
+                      </a:pPr>
+                      <a:r>
+                        <a:rPr lang="es-MX" sz="1100" kern="1200">
+                          <a:solidFill>
+                            <a:schemeClr val="dk1"/>
+                          </a:solidFill>
+                          <a:latin typeface="+mn-lt"/>
+                          <a:ea typeface="+mn-ea"/>
+                          <a:cs typeface="+mn-cs"/>
+                        </a:rPr>
+                        <a:t>
+• CI/AGS/06518/03-23 Privación ilegal de la libertad
+• CI/RIN/00175/03-23 Contra la Salud
+• CI/RIN/00270/05-17 Robo calificado
+• CI/RIN/00343/05-23 Contra la Salud
+• CI/RIN/00351/06-22 Robo calificado</a:t>
+                      </a:r>
+                      <a:endParaRPr lang="es-MX" sz="1100" kern="1200" dirty="0">
+                        <a:solidFill>
+                          <a:schemeClr val="dk1"/>
+                        </a:solidFill>
+                        <a:latin typeface="+mn-lt"/>
+                        <a:ea typeface="+mn-ea"/>
+                        <a:cs typeface="+mn-cs"/>
+                      </a:endParaRPr>
+                    </a:p>
+                  </a:txBody>
+                  <a:tcPr/>
+                </a:tc>
+                <a:tc hMerge="1">
+                  <a:txBody>
+                    <a:bodyPr/>
+                    <a:lstStyle/>
+                    <a:p>
+                      <a:endParaRPr lang="es-MX"/>
+                    </a:p>
+                  </a:txBody>
+                  <a:tcPr/>
+                </a:tc>
+                <a:extLst>
+                  <a:ext uri="{0D108BD9-81ED-4DB2-BD59-A6C34878D82A}">
+                    <a16:rowId xmlns:a16="http://schemas.microsoft.com/office/drawing/2014/main" val="3218073216"/>
+                  </a:ext>
+                </a:extLst>
+              </a:tr>
+              <a:tr h="159387">
+                <a:tc>
+                  <a:txBody>
+                    <a:bodyPr/>
+                    <a:lstStyle/>
+                    <a:p>
+                      <a:pPr marL="0" marR="0" lvl="0" indent="0" algn="l" defTabSz="914400" rtl="0" eaLnBrk="1" fontAlgn="auto" latinLnBrk="0" hangingPunct="1">
+                        <a:lnSpc>
+                          <a:spcPct val="100000"/>
+                        </a:lnSpc>
+                        <a:spcBef>
+                          <a:spcPts val="0"/>
+                        </a:spcBef>
+                        <a:spcAft>
+                          <a:spcPts val="0"/>
+                        </a:spcAft>
+                        <a:buClrTx/>
+                        <a:buSzTx/>
+                        <a:buFontTx/>
+                        <a:buNone/>
+                        <a:tabLst/>
+                        <a:defRPr/>
+                      </a:pPr>
+                      <a:r>
+                        <a:rPr lang="es-MX" sz="1100" b="1" dirty="0">
+                          <a:solidFill>
+                            <a:schemeClr val="bg1"/>
+                          </a:solidFill>
+                        </a:rPr>
+                        <a:t>ORDENES DE APREHENSIÓN</a:t>
+                      </a:r>
+                    </a:p>
+                  </a:txBody>
+                  <a:tcPr>
+                    <a:solidFill>
+                      <a:schemeClr val="accent1">
+                        <a:lumMod val="75000"/>
+                      </a:schemeClr>
+                    </a:solidFill>
+                  </a:tcPr>
+                </a:tc>
+                <a:tc gridSpan="2">
+                  <a:txBody>
+                    <a:bodyPr/>
+                    <a:lstStyle/>
+                    <a:p>
+                      <a:pPr marL="0" indent="0" algn="l" defTabSz="914400" rtl="0" eaLnBrk="1" latinLnBrk="0" hangingPunct="1">
+                        <a:buFont typeface="Arial" panose="020B0604020202020204" pitchFamily="34" charset="0"/>
+                        <a:buNone/>
+                      </a:pPr>
+                      <a:r>
+                        <a:rPr lang="es-MX" sz="1100" kern="1200" dirty="0">
+                          <a:solidFill>
+                            <a:schemeClr val="dk1"/>
+                          </a:solidFill>
+                          <a:latin typeface="+mn-lt"/>
+                          <a:ea typeface="+mn-ea"/>
+                          <a:cs typeface="+mn-cs"/>
+                        </a:rPr>
+                        <a:t>
+• DESAPARICION FORZADA DE PERSONAS — CUMPLIMENTADA</a:t>
+                      </a:r>
+                    </a:p>
+                  </a:txBody>
+                  <a:tcPr/>
+                </a:tc>
+                <a:tc hMerge="1">
+                  <a:txBody>
+                    <a:bodyPr/>
+                    <a:lstStyle/>
+                    <a:p>
+                      <a:endParaRPr lang="es-MX"/>
+                    </a:p>
+                  </a:txBody>
+                  <a:tcPr/>
+                </a:tc>
+                <a:extLst>
+                  <a:ext uri="{0D108BD9-81ED-4DB2-BD59-A6C34878D82A}">
+                    <a16:rowId xmlns:a16="http://schemas.microsoft.com/office/drawing/2014/main" val="3169124086"/>
+                  </a:ext>
+                </a:extLst>
+              </a:tr>
+              <a:tr h="795285">
+                <a:tc>
+                  <a:txBody>
+                    <a:bodyPr/>
+                    <a:lstStyle/>
+                    <a:p>
+                      <a:r>
+                        <a:rPr lang="es-MX" sz="1100" b="1" dirty="0"/>
+                        <a:t> </a:t>
+                      </a:r>
+                      <a:r>
+                        <a:rPr lang="es-MX" sz="1100" b="1" dirty="0">
+                          <a:solidFill>
+                            <a:schemeClr val="bg1"/>
+                          </a:solidFill>
+                        </a:rPr>
+                        <a:t>ESTATUS </a:t>
+                      </a:r>
+                    </a:p>
+                  </a:txBody>
+                  <a:tcPr>
+                    <a:solidFill>
+                      <a:schemeClr val="accent1">
+                        <a:lumMod val="75000"/>
+                      </a:schemeClr>
+                    </a:solidFill>
+                  </a:tcPr>
+                </a:tc>
+                <a:tc gridSpan="2">
+                  <a:txBody>
+                    <a:bodyPr/>
+                    <a:lstStyle/>
+                    <a:p>
+                      <a:pPr marL="0" marR="0" lvl="0" indent="0" algn="just" defTabSz="914400" rtl="0" eaLnBrk="1" fontAlgn="auto" latinLnBrk="0" hangingPunct="1">
+                        <a:lnSpc>
+                          <a:spcPct val="100000"/>
+                        </a:lnSpc>
+                        <a:spcBef>
+                          <a:spcPts val="0"/>
+                        </a:spcBef>
+                        <a:spcAft>
+                          <a:spcPts val="0"/>
+                        </a:spcAft>
+                        <a:buClrTx/>
+                        <a:buSzTx/>
+                        <a:buFont typeface="Arial" panose="020B0604020202020204" pitchFamily="34" charset="0"/>
+                        <a:buNone/>
+                        <a:tabLst/>
+                        <a:defRPr/>
+                      </a:pPr>
+                      <a:r>
+                        <a:rPr lang="es-MX" sz="1100" kern="1200" dirty="0">
+                          <a:solidFill>
+                            <a:schemeClr val="dk1"/>
+                          </a:solidFill>
+                          <a:latin typeface="+mn-lt"/>
+                          <a:ea typeface="+mn-ea"/>
+                          <a:cs typeface="+mn-cs"/>
+                        </a:rPr>
+                        <a:t>Sentenciado, se sentencio por violacion</a:t>
+                      </a:r>
+                    </a:p>
+                  </a:txBody>
+                  <a:tcPr/>
+                </a:tc>
+                <a:tc hMerge="1">
+                  <a:txBody>
+                    <a:bodyPr/>
+                    <a:lstStyle/>
+                    <a:p>
+                      <a:endParaRPr lang="es-MX"/>
+                    </a:p>
+                  </a:txBody>
+                  <a:tcPr/>
+                </a:tc>
+                <a:extLst>
+                  <a:ext uri="{0D108BD9-81ED-4DB2-BD59-A6C34878D82A}">
+                    <a16:rowId xmlns:a16="http://schemas.microsoft.com/office/drawing/2014/main" val="3558537792"/>
+                  </a:ext>
+                </a:extLst>
+              </a:tr>
+              <a:tr h="1786729">
+                <a:tc>
+                  <a:txBody>
+                    <a:bodyPr/>
+                    <a:lstStyle/>
+                    <a:p>
+                      <a:r>
+                        <a:rPr lang="es-MX" sz="1100" b="1" kern="1200" dirty="0">
+                          <a:solidFill>
+                            <a:schemeClr val="bg1"/>
+                          </a:solidFill>
+                          <a:latin typeface="+mn-lt"/>
+                          <a:ea typeface="+mn-ea"/>
+                          <a:cs typeface="+mn-cs"/>
+                        </a:rPr>
+                        <a:t>ASUNTOS RELACIONADOS</a:t>
+                      </a:r>
+                    </a:p>
+                  </a:txBody>
+                  <a:tcPr>
+                    <a:solidFill>
+                      <a:schemeClr val="accent1">
+                        <a:lumMod val="75000"/>
+                      </a:schemeClr>
+                    </a:solidFill>
+                  </a:tcPr>
+                </a:tc>
+                <a:tc gridSpan="2">
+                  <a:txBody>
+                    <a:bodyPr/>
+                    <a:lstStyle/>
+                    <a:p>
+                      <a:pPr marL="171450" indent="-171450" algn="just">
+                        <a:buFontTx/>
+                        <a:buChar char="-"/>
+                      </a:pPr>
+                      <a:r>
+                        <a:rPr lang="es-MX" sz="1100" kern="1200" dirty="0">
+                          <a:solidFill>
+                            <a:schemeClr val="dk1"/>
+                          </a:solidFill>
+                          <a:latin typeface="+mn-lt"/>
+                          <a:ea typeface="+mn-ea"/>
+                          <a:cs typeface="+mn-cs"/>
+                        </a:rPr>
+                        <a:t>Sin Alias del Caso Hechos ocurridos el día 09 de marzo del 2023, cuando RICARDO OMAR HERRERA GUERRERO ALÍAS “PIOJO” Y/O “EL CHASCAS” Y/O “CHASQUERO”, irrumpió en el domicilio  ubicado en  calle 16 de septiembre Sur, número 706, en la Colonia Independencia, perteneciente al Municipio de Rincón de Romos, Aguascalientes, cuando las victimas de identidad reservada Victimas de identidad reservada A.G.P.H. y U.F.R.O. (Aún no localizadas) se encontraban en el interior. Sacándolas de dicho domicilio y llevándoselas a bordo de un vehículo, esto haciendo uso de la violencia, sin que hasta el momento se conozca su paradero. 
+</a:t>
+                      </a:r>
+                    </a:p>
+                    <a:p>
+                      <a:pPr marL="0" indent="0" algn="just">
+                        <a:buFontTx/>
+                        <a:buNone/>
+                      </a:pPr>
+                      <a:endParaRPr lang="es-MX" sz="1100" kern="1200" dirty="0">
+                        <a:solidFill>
+                          <a:schemeClr val="dk1"/>
+                        </a:solidFill>
+                        <a:latin typeface="+mn-lt"/>
+                        <a:ea typeface="+mn-ea"/>
+                        <a:cs typeface="+mn-cs"/>
+                      </a:endParaRPr>
+                    </a:p>
+                    <a:p>
+                      <a:pPr marL="0" indent="0" algn="just">
+                        <a:buFontTx/>
+                        <a:buNone/>
+                      </a:pPr>
+                      <a:endParaRPr lang="es-MX" sz="1100" kern="1200" dirty="0">
+                        <a:solidFill>
+                          <a:schemeClr val="dk1"/>
+                        </a:solidFill>
+                        <a:latin typeface="+mn-lt"/>
+                        <a:ea typeface="+mn-ea"/>
+                        <a:cs typeface="+mn-cs"/>
+                      </a:endParaRPr>
+                    </a:p>
+                    <a:p>
+                      <a:pPr marL="0" marR="0" lvl="0" indent="0" algn="just" defTabSz="914400" rtl="0" eaLnBrk="1" fontAlgn="auto" latinLnBrk="0" hangingPunct="1">
+                        <a:lnSpc>
+                          <a:spcPct val="100000"/>
+                        </a:lnSpc>
+                        <a:spcBef>
+                          <a:spcPts val="0"/>
+                        </a:spcBef>
+                        <a:spcAft>
+                          <a:spcPts val="0"/>
+                        </a:spcAft>
+                        <a:buClrTx/>
+                        <a:buSzTx/>
+                        <a:buFontTx/>
+                        <a:buNone/>
+                        <a:tabLst/>
+                        <a:defRPr/>
+                      </a:pPr>
+                      <a:r>
+                        <a:rPr lang="es-MX" sz="1100" kern="1200" dirty="0">
+                          <a:solidFill>
+                            <a:schemeClr val="dk1"/>
+                          </a:solidFill>
+                          <a:latin typeface="+mn-lt"/>
+                          <a:ea typeface="+mn-ea"/>
+                          <a:cs typeface="+mn-cs"/>
+                        </a:rPr>
+                        <a:t> </a:t>
+                      </a:r>
+                    </a:p>
+                    <a:p>
+                      <a:pPr marL="0" marR="0" lvl="0" indent="0" algn="just" defTabSz="914400" rtl="0" eaLnBrk="1" fontAlgn="auto" latinLnBrk="0" hangingPunct="1">
+                        <a:lnSpc>
+                          <a:spcPct val="100000"/>
+                        </a:lnSpc>
+                        <a:spcBef>
+                          <a:spcPts val="0"/>
+                        </a:spcBef>
+                        <a:spcAft>
+                          <a:spcPts val="0"/>
+                        </a:spcAft>
+                        <a:buClrTx/>
+                        <a:buSzTx/>
+                        <a:buFontTx/>
+                        <a:buNone/>
+                        <a:tabLst/>
+                        <a:defRPr/>
+                      </a:pPr>
+                      <a:endParaRPr lang="es-MX" sz="1100" kern="1200" dirty="0">
+                        <a:solidFill>
+                          <a:schemeClr val="dk1"/>
+                        </a:solidFill>
+                        <a:latin typeface="+mn-lt"/>
+                        <a:ea typeface="+mn-ea"/>
+                        <a:cs typeface="+mn-cs"/>
+                      </a:endParaRPr>
+                    </a:p>
+                    <a:p>
+                      <a:pPr marL="0" marR="0" lvl="0" indent="0" algn="just" defTabSz="914400" rtl="0" eaLnBrk="1" fontAlgn="auto" latinLnBrk="0" hangingPunct="1">
+                        <a:lnSpc>
+                          <a:spcPct val="100000"/>
+                        </a:lnSpc>
+                        <a:spcBef>
+                          <a:spcPts val="0"/>
+                        </a:spcBef>
+                        <a:spcAft>
+                          <a:spcPts val="0"/>
+                        </a:spcAft>
+                        <a:buClrTx/>
+                        <a:buSzTx/>
+                        <a:buFontTx/>
+                        <a:buNone/>
+                        <a:tabLst/>
+                        <a:defRPr/>
+                      </a:pPr>
+                      <a:r>
+                        <a:rPr lang="es-MX" sz="1100" kern="1200" dirty="0">
+                          <a:solidFill>
+                            <a:schemeClr val="dk1"/>
+                          </a:solidFill>
+                          <a:latin typeface="+mn-lt"/>
+                          <a:ea typeface="+mn-ea"/>
+                          <a:cs typeface="+mn-cs"/>
+                        </a:rPr>
+                        <a:t>[V2] </a:t>
+                      </a:r>
+                    </a:p>
+                    <a:p>
+                      <a:pPr marL="0" indent="0" algn="just">
+                        <a:buFontTx/>
+                        <a:buNone/>
+                      </a:pPr>
+                      <a:endParaRPr lang="es-MX" sz="1100" kern="1200" dirty="0">
+                        <a:solidFill>
+                          <a:schemeClr val="dk1"/>
+                        </a:solidFill>
+                        <a:latin typeface="+mn-lt"/>
+                        <a:ea typeface="+mn-ea"/>
+                        <a:cs typeface="+mn-cs"/>
+                      </a:endParaRPr>
+                    </a:p>
+                  </a:txBody>
+                  <a:tcPr/>
+                </a:tc>
+                <a:tc hMerge="1">
+                  <a:txBody>
+                    <a:bodyPr/>
+                    <a:lstStyle/>
+                    <a:p>
+                      <a:endParaRPr lang="es-MX"/>
+                    </a:p>
+                  </a:txBody>
+                  <a:tcPr/>
+                </a:tc>
+                <a:extLst>
+                  <a:ext uri="{0D108BD9-81ED-4DB2-BD59-A6C34878D82A}">
+                    <a16:rowId xmlns:a16="http://schemas.microsoft.com/office/drawing/2014/main" val="4024071236"/>
+                  </a:ext>
+                </a:extLst>
+              </a:tr>
+            </a:tbl>
+          </a:graphicData>
+        </a:graphic>
+      </p:graphicFrame>
+      <p:pic>
+        <p:nvPicPr>
+          <p:cNvPr id="7" name="[FP]" descr="[FP]">
+            <a:extLst>
+              <a:ext uri="{FF2B5EF4-FFF2-40B4-BE49-F238E27FC236}">
+                <a16:creationId xmlns:a16="http://schemas.microsoft.com/office/drawing/2014/main" id="{C80E713A-27D7-471A-9297-6CD4151A9971}"/>
+              </a:ext>
+            </a:extLst>
+          </p:cNvPr>
+          <p:cNvPicPr>
+            <a:picLocks noChangeAspect="1"/>
+          </p:cNvPicPr>
+          <p:nvPr/>
+        </p:nvPicPr>
+        <p:blipFill>
+          <a:blip r:embed="Rb732f1a38ca04858">
+            <a:extLst>
+              <a:ext uri="{28A0092B-C50C-407E-A947-70E740481C1C}">
+                <a14:useLocalDpi xmlns:a14="http://schemas.microsoft.com/office/drawing/2010/main" val="0"/>
+              </a:ext>
+            </a:extLst>
+          </a:blip>
+          <a:stretch>
+            <a:fillRect/>
+          </a:stretch>
+        </p:blipFill>
+        <p:spPr>
+          <a:xfrm>
+            <a:off x="214361" y="1714348"/>
+            <a:ext cx="2902475" cy="4351338"/>
+          </a:xfrm>
+          <a:prstGeom prst="rect">
+            <a:avLst/>
+          </a:prstGeom>
+        </p:spPr>
+      </p:pic>
+      <p:pic>
+        <p:nvPicPr>
+          <p:cNvPr id="11" name="[FV1]" descr="[FV1]">
+            <a:extLst>
+              <a:ext uri="{FF2B5EF4-FFF2-40B4-BE49-F238E27FC236}">
+                <a16:creationId xmlns:a16="http://schemas.microsoft.com/office/drawing/2014/main" id="{95A1EC47-8063-435B-9340-91DBB33FE951}"/>
+              </a:ext>
+            </a:extLst>
+          </p:cNvPr>
+          <p:cNvPicPr>
+            <a:picLocks noChangeAspect="1"/>
+          </p:cNvPicPr>
+          <p:nvPr/>
+        </p:nvPicPr>
+        <p:blipFill>
+          <a:blip r:embed="rId3">
+            <a:extLst>
+              <a:ext uri="{28A0092B-C50C-407E-A947-70E740481C1C}">
+                <a14:useLocalDpi xmlns:a14="http://schemas.microsoft.com/office/drawing/2010/main" val="0"/>
+              </a:ext>
+            </a:extLst>
+          </a:blip>
+          <a:stretch>
+            <a:fillRect/>
+          </a:stretch>
+        </p:blipFill>
+        <p:spPr>
+          <a:xfrm>
+            <a:off x="7584982" y="5672321"/>
+            <a:ext cx="665008" cy="827694"/>
+          </a:xfrm>
+          <a:prstGeom prst="rect">
+            <a:avLst/>
+          </a:prstGeom>
+        </p:spPr>
+      </p:pic>
+      <p:pic>
+        <p:nvPicPr>
+          <p:cNvPr id="13" name="[FV2]" descr="[FV2]">
+            <a:extLst>
+              <a:ext uri="{FF2B5EF4-FFF2-40B4-BE49-F238E27FC236}">
+                <a16:creationId xmlns:a16="http://schemas.microsoft.com/office/drawing/2014/main" id="{65D6E13E-B1E1-4CA4-8F00-9E73059CD0BD}"/>
+              </a:ext>
+            </a:extLst>
+          </p:cNvPr>
+          <p:cNvPicPr>
+            <a:picLocks noChangeAspect="1"/>
+          </p:cNvPicPr>
+          <p:nvPr/>
+        </p:nvPicPr>
+        <p:blipFill>
+          <a:blip r:embed="rId3">
+            <a:extLst>
+              <a:ext uri="{28A0092B-C50C-407E-A947-70E740481C1C}">
+                <a14:useLocalDpi xmlns:a14="http://schemas.microsoft.com/office/drawing/2010/main" val="0"/>
+              </a:ext>
+            </a:extLst>
+          </a:blip>
+          <a:stretch>
+            <a:fillRect/>
+          </a:stretch>
+        </p:blipFill>
+        <p:spPr>
+          <a:xfrm>
+            <a:off x="9993131" y="5680558"/>
+            <a:ext cx="665008" cy="827694"/>
+          </a:xfrm>
+          <a:prstGeom prst="rect">
+            <a:avLst/>
+          </a:prstGeom>
+        </p:spPr>
+      </p:pic>
+    </p:spTree>
+    <p:extLst>
+      <p:ext uri="{BB962C8B-B14F-4D97-AF65-F5344CB8AC3E}">
+        <p14:creationId xmlns:p14="http://schemas.microsoft.com/office/powerpoint/2010/main" val="2124728287"/>
+      </p:ext>
+    </p:extLst>
+  </p:cSld>
+  <p:clrMapOvr>
+    <a:masterClrMapping/>
+  </p:clrMapOvr>
+</p:sld>
+</file>
+
+<file path=ppt/slides/slide4.xml><?xml version="1.0" encoding="utf-8"?>
+<p:sld xmlns:a16="http://schemas.microsoft.com/office/drawing/2014/main" xmlns:p14="http://schemas.microsoft.com/office/powerpoint/2010/main" xmlns:a14="http://schemas.microsoft.com/office/drawing/2010/main" xmlns:a="http://schemas.openxmlformats.org/drawingml/2006/main" xmlns:r="http://schemas.openxmlformats.org/officeDocument/2006/relationships" xmlns:p="http://schemas.openxmlformats.org/presentationml/2006/main">
+  <p:cSld>
+    <p:spTree>
+      <p:nvGrpSpPr>
+        <p:cNvPr id="1" name=""/>
+        <p:cNvGrpSpPr/>
+        <p:nvPr/>
+      </p:nvGrpSpPr>
+      <p:grpSpPr>
+        <a:xfrm>
+          <a:off x="0" y="0"/>
+          <a:ext cx="0" cy="0"/>
+          <a:chOff x="0" y="0"/>
+          <a:chExt cx="0" cy="0"/>
+        </a:xfrm>
+      </p:grpSpPr>
+      <p:pic>
+        <p:nvPicPr>
+          <p:cNvPr id="4" name="[FONDO]" descr="[FONDO]">
+            <a:extLst>
+              <a:ext uri="{FF2B5EF4-FFF2-40B4-BE49-F238E27FC236}">
+                <a16:creationId xmlns:a16="http://schemas.microsoft.com/office/drawing/2014/main" id="{AE2FEBDB-ED54-FF79-0EF8-AA9E7C8EA417}"/>
+              </a:ext>
+            </a:extLst>
+          </p:cNvPr>
+          <p:cNvPicPr>
+            <a:picLocks noChangeAspect="1"/>
+          </p:cNvPicPr>
+          <p:nvPr/>
+        </p:nvPicPr>
+        <p:blipFill>
+          <a:blip r:embed="R4bd425e858be4fdc"/>
+          <a:stretch>
+            <a:fillRect/>
+          </a:stretch>
+        </p:blipFill>
+        <p:spPr>
+          <a:xfrm>
+            <a:off x="1" y="0"/>
+            <a:ext cx="12401280" cy="6969519"/>
+          </a:xfrm>
+          <a:prstGeom prst="rect">
+            <a:avLst/>
+          </a:prstGeom>
+        </p:spPr>
+      </p:pic>
+      <p:graphicFrame>
+        <p:nvGraphicFramePr>
+          <p:cNvPr id="10" name="Tabla 9">
+            <a:extLst>
+              <a:ext uri="{FF2B5EF4-FFF2-40B4-BE49-F238E27FC236}">
+                <a16:creationId xmlns:a16="http://schemas.microsoft.com/office/drawing/2014/main" id="{BC4CEC18-7797-7786-F517-147A6AD7242D}"/>
+              </a:ext>
+            </a:extLst>
+          </p:cNvPr>
+          <p:cNvGraphicFramePr>
+            <a:graphicFrameLocks noGrp="1"/>
+          </p:cNvGraphicFramePr>
+          <p:nvPr>
+            <p:extLst>
+              <p:ext uri="{D42A27DB-BD31-4B8C-83A1-F6EECF244321}">
+                <p14:modId xmlns:p14="http://schemas.microsoft.com/office/powerpoint/2010/main" val="1791400885"/>
+              </p:ext>
+            </p:extLst>
+          </p:nvPr>
+        </p:nvGraphicFramePr>
+        <p:xfrm>
+          <a:off x="3252159" y="1370610"/>
+          <a:ext cx="9149122" cy="5266098"/>
+        </p:xfrm>
+        <a:graphic>
+          <a:graphicData uri="http://schemas.openxmlformats.org/drawingml/2006/table">
+            <a:tbl>
+              <a:tblPr firstRow="1" bandRow="1">
+                <a:tableStyleId>{5C22544A-7EE6-4342-B048-85BDC9FD1C3A}</a:tableStyleId>
+              </a:tblPr>
+              <a:tblGrid>
+                <a:gridCol w="2462314">
+                  <a:extLst>
+                    <a:ext uri="{9D8B030D-6E8A-4147-A177-3AD203B41FA5}">
+                      <a16:colId xmlns:a16="http://schemas.microsoft.com/office/drawing/2014/main" val="2746230745"/>
+                    </a:ext>
+                  </a:extLst>
+                </a:gridCol>
+                <a:gridCol w="3343404">
+                  <a:extLst>
+                    <a:ext uri="{9D8B030D-6E8A-4147-A177-3AD203B41FA5}">
+                      <a16:colId xmlns:a16="http://schemas.microsoft.com/office/drawing/2014/main" val="3075986152"/>
+                    </a:ext>
+                  </a:extLst>
+                </a:gridCol>
+                <a:gridCol w="3343404">
+                  <a:extLst>
+                    <a:ext uri="{9D8B030D-6E8A-4147-A177-3AD203B41FA5}">
+                      <a16:colId xmlns:a16="http://schemas.microsoft.com/office/drawing/2014/main" val="4044500939"/>
+                    </a:ext>
+                  </a:extLst>
+                </a:gridCol>
+              </a:tblGrid>
+              <a:tr h="319663">
+                <a:tc gridSpan="3">
+                  <a:txBody>
+                    <a:bodyPr/>
+                    <a:lstStyle/>
+                    <a:p>
+                      <a:r>
+                        <a:rPr lang="es-MX" sz="1600" dirty="0"/>
+                        <a:t>JAVIER ESQUIVEL PADILLA</a:t>
+                      </a:r>
+                    </a:p>
+                  </a:txBody>
+                  <a:tcPr/>
+                </a:tc>
+                <a:tc hMerge="1">
+                  <a:txBody>
+                    <a:bodyPr/>
+                    <a:lstStyle/>
+                    <a:p>
+                      <a:endParaRPr lang="es-MX" dirty="0"/>
+                    </a:p>
+                  </a:txBody>
+                  <a:tcPr/>
+                </a:tc>
+                <a:tc hMerge="1">
+                  <a:txBody>
+                    <a:bodyPr/>
+                    <a:lstStyle/>
+                    <a:p>
+                      <a:endParaRPr lang="es-MX"/>
+                    </a:p>
+                  </a:txBody>
+                  <a:tcPr/>
+                </a:tc>
+                <a:extLst>
+                  <a:ext uri="{0D108BD9-81ED-4DB2-BD59-A6C34878D82A}">
+                    <a16:rowId xmlns:a16="http://schemas.microsoft.com/office/drawing/2014/main" val="3979505418"/>
+                  </a:ext>
+                </a:extLst>
+              </a:tr>
+              <a:tr h="319663">
+                <a:tc>
+                  <a:txBody>
+                    <a:bodyPr/>
+                    <a:lstStyle/>
+                    <a:p>
+                      <a:r>
+                        <a:rPr lang="es-MX" sz="1100" b="1" dirty="0">
+                          <a:solidFill>
+                            <a:schemeClr val="bg1"/>
+                          </a:solidFill>
+                        </a:rPr>
+                        <a:t>GRUPO DELICTIVO</a:t>
+                      </a:r>
+                    </a:p>
+                  </a:txBody>
+                  <a:tcPr>
+                    <a:solidFill>
+                      <a:schemeClr val="accent1">
+                        <a:lumMod val="75000"/>
+                      </a:schemeClr>
+                    </a:solidFill>
+                  </a:tcPr>
+                </a:tc>
+                <a:tc>
+                  <a:txBody>
+                    <a:bodyPr/>
+                    <a:lstStyle/>
+                    <a:p>
+                      <a:r>
+                        <a:rPr lang="es-MX" sz="1200" b="1" dirty="0"/>
+                        <a:t>CJNG</a:t>
+                      </a:r>
+                    </a:p>
+                  </a:txBody>
+                  <a:tcPr/>
+                </a:tc>
+                <a:tc>
+                  <a:txBody>
+                    <a:bodyPr/>
+                    <a:lstStyle/>
+                    <a:p>
+                      <a:pPr marL="0" marR="0" lvl="0" indent="0" algn="l" defTabSz="914400" rtl="0" eaLnBrk="1" fontAlgn="auto" latinLnBrk="0" hangingPunct="1">
+                        <a:lnSpc>
+                          <a:spcPct val="100000"/>
+                        </a:lnSpc>
+                        <a:spcBef>
+                          <a:spcPts val="0"/>
+                        </a:spcBef>
+                        <a:spcAft>
+                          <a:spcPts val="0"/>
+                        </a:spcAft>
+                        <a:buClrTx/>
+                        <a:buSzTx/>
+                        <a:buFontTx/>
+                        <a:buNone/>
+                        <a:tabLst/>
+                        <a:defRPr/>
+                      </a:pPr>
+                      <a:r>
+                        <a:rPr lang="es-MX" sz="1200" b="1" dirty="0"/>
+                        <a:t>EJECUTOR</a:t>
+                      </a:r>
+                    </a:p>
+                  </a:txBody>
+                  <a:tcPr/>
+                </a:tc>
+                <a:extLst>
+                  <a:ext uri="{0D108BD9-81ED-4DB2-BD59-A6C34878D82A}">
+                    <a16:rowId xmlns:a16="http://schemas.microsoft.com/office/drawing/2014/main" val="201189607"/>
+                  </a:ext>
+                </a:extLst>
+              </a:tr>
+              <a:tr h="725435">
+                <a:tc>
+                  <a:txBody>
+                    <a:bodyPr/>
+                    <a:lstStyle/>
+                    <a:p>
+                      <a:r>
+                        <a:rPr lang="es-MX" sz="1100" b="1" kern="1200" dirty="0">
+                          <a:solidFill>
+                            <a:schemeClr val="bg1"/>
+                          </a:solidFill>
+                          <a:latin typeface="+mn-lt"/>
+                          <a:ea typeface="+mn-ea"/>
+                          <a:cs typeface="+mn-cs"/>
+                        </a:rPr>
+                        <a:t>DELITOS / INGRESOS</a:t>
+                      </a:r>
+                    </a:p>
+                  </a:txBody>
+                  <a:tcPr>
+                    <a:solidFill>
+                      <a:schemeClr val="accent1">
+                        <a:lumMod val="75000"/>
+                      </a:schemeClr>
+                    </a:solidFill>
+                  </a:tcPr>
+                </a:tc>
+                <a:tc gridSpan="2">
+                  <a:txBody>
+                    <a:bodyPr/>
+                    <a:lstStyle/>
+                    <a:p>
+                      <a:pPr marL="0" indent="0">
+                        <a:buFont typeface="Arial" panose="020B0604020202020204" pitchFamily="34" charset="0"/>
+                        <a:buNone/>
+                      </a:pPr>
+                      <a:r>
+                        <a:rPr lang="es-MX" sz="1100" dirty="0"/>
+                        <a:t>
+• Lesiones Dolosas — 07/03/2008 21:12
+• Lesiones Dolosas — 22/01/2007 13:00
+• Mariposero — 13/05/2006 19:20
+• Lesiones Dolosas — 03/04/2004 15:00
+• Robo Simple — 28/06/1995 16:53</a:t>
+                      </a:r>
+                    </a:p>
+                  </a:txBody>
+                  <a:tcPr/>
+                </a:tc>
+                <a:tc hMerge="1">
+                  <a:txBody>
+                    <a:bodyPr/>
+                    <a:lstStyle/>
+                    <a:p>
+                      <a:endParaRPr lang="es-MX"/>
+                    </a:p>
+                  </a:txBody>
+                  <a:tcPr/>
+                </a:tc>
+                <a:extLst>
+                  <a:ext uri="{0D108BD9-81ED-4DB2-BD59-A6C34878D82A}">
+                    <a16:rowId xmlns:a16="http://schemas.microsoft.com/office/drawing/2014/main" val="3340689267"/>
+                  </a:ext>
+                </a:extLst>
+              </a:tr>
+              <a:tr h="1044626">
+                <a:tc>
+                  <a:txBody>
+                    <a:bodyPr/>
+                    <a:lstStyle/>
+                    <a:p>
+                      <a:r>
+                        <a:rPr lang="es-MX" sz="1100" b="1" kern="1200" dirty="0">
+                          <a:solidFill>
+                            <a:schemeClr val="bg1"/>
+                          </a:solidFill>
+                          <a:latin typeface="+mn-lt"/>
+                          <a:ea typeface="+mn-ea"/>
+                          <a:cs typeface="+mn-cs"/>
+                        </a:rPr>
+                        <a:t>CARPETAS DE INVESTIGACIÓN</a:t>
+                      </a:r>
+                    </a:p>
+                  </a:txBody>
+                  <a:tcPr>
+                    <a:solidFill>
+                      <a:schemeClr val="accent1">
+                        <a:lumMod val="75000"/>
+                      </a:schemeClr>
+                    </a:solidFill>
+                  </a:tcPr>
+                </a:tc>
+                <a:tc gridSpan="2">
+                  <a:txBody>
+                    <a:bodyPr/>
+                    <a:lstStyle/>
+                    <a:p>
+                      <a:pPr marL="0" indent="0" algn="l" defTabSz="914400" rtl="0" eaLnBrk="1" latinLnBrk="0" hangingPunct="1">
+                        <a:buFont typeface="Arial" panose="020B0604020202020204" pitchFamily="34" charset="0"/>
+                        <a:buNone/>
+                      </a:pPr>
+                      <a:r>
+                        <a:rPr lang="es-MX" sz="1100" kern="1200">
+                          <a:solidFill>
+                            <a:schemeClr val="dk1"/>
+                          </a:solidFill>
+                          <a:latin typeface="+mn-lt"/>
+                          <a:ea typeface="+mn-ea"/>
+                          <a:cs typeface="+mn-cs"/>
+                        </a:rPr>
+                        <a:t>
+• A-08/02876 Violacion equiparada
+• CI/PAB/00072/01-21 Amenazas
+• CI/RIN/00542/09-22 Violencia familiar
+• R-07/00017 Daño en las cosas doloso
+• R-07/00019 Robo calificado
+• R-07/00031 Daño en las cosas doloso
+• R-07/00102 Robo calificado
+• R-07/00147 Robo calificado
+• R-07/00182 Daño en las cosas doloso
+• R-07/00227 Lesiones dolosas calificadas por golpes</a:t>
+                      </a:r>
+                      <a:endParaRPr lang="es-MX" sz="1100" kern="1200" dirty="0">
+                        <a:solidFill>
+                          <a:schemeClr val="dk1"/>
+                        </a:solidFill>
+                        <a:latin typeface="+mn-lt"/>
+                        <a:ea typeface="+mn-ea"/>
+                        <a:cs typeface="+mn-cs"/>
+                      </a:endParaRPr>
+                    </a:p>
+                  </a:txBody>
+                  <a:tcPr/>
+                </a:tc>
+                <a:tc hMerge="1">
+                  <a:txBody>
+                    <a:bodyPr/>
+                    <a:lstStyle/>
+                    <a:p>
+                      <a:endParaRPr lang="es-MX"/>
+                    </a:p>
+                  </a:txBody>
+                  <a:tcPr/>
+                </a:tc>
+                <a:extLst>
+                  <a:ext uri="{0D108BD9-81ED-4DB2-BD59-A6C34878D82A}">
+                    <a16:rowId xmlns:a16="http://schemas.microsoft.com/office/drawing/2014/main" val="3218073216"/>
+                  </a:ext>
+                </a:extLst>
+              </a:tr>
+              <a:tr h="159387">
+                <a:tc>
+                  <a:txBody>
+                    <a:bodyPr/>
+                    <a:lstStyle/>
+                    <a:p>
+                      <a:pPr marL="0" marR="0" lvl="0" indent="0" algn="l" defTabSz="914400" rtl="0" eaLnBrk="1" fontAlgn="auto" latinLnBrk="0" hangingPunct="1">
+                        <a:lnSpc>
+                          <a:spcPct val="100000"/>
+                        </a:lnSpc>
+                        <a:spcBef>
+                          <a:spcPts val="0"/>
+                        </a:spcBef>
+                        <a:spcAft>
+                          <a:spcPts val="0"/>
+                        </a:spcAft>
+                        <a:buClrTx/>
+                        <a:buSzTx/>
+                        <a:buFontTx/>
+                        <a:buNone/>
+                        <a:tabLst/>
+                        <a:defRPr/>
+                      </a:pPr>
+                      <a:r>
+                        <a:rPr lang="es-MX" sz="1100" b="1" dirty="0">
+                          <a:solidFill>
+                            <a:schemeClr val="bg1"/>
+                          </a:solidFill>
+                        </a:rPr>
+                        <a:t>ORDENES DE APREHENSIÓN</a:t>
+                      </a:r>
+                    </a:p>
+                  </a:txBody>
+                  <a:tcPr>
+                    <a:solidFill>
+                      <a:schemeClr val="accent1">
+                        <a:lumMod val="75000"/>
+                      </a:schemeClr>
+                    </a:solidFill>
+                  </a:tcPr>
+                </a:tc>
+                <a:tc gridSpan="2">
+                  <a:txBody>
+                    <a:bodyPr/>
+                    <a:lstStyle/>
+                    <a:p>
+                      <a:pPr marL="0" indent="0" algn="l" defTabSz="914400" rtl="0" eaLnBrk="1" latinLnBrk="0" hangingPunct="1">
+                        <a:buFont typeface="Arial" panose="020B0604020202020204" pitchFamily="34" charset="0"/>
+                        <a:buNone/>
+                      </a:pPr>
+                      <a:r>
+                        <a:rPr lang="es-MX" sz="1100" kern="1200" dirty="0">
+                          <a:solidFill>
+                            <a:schemeClr val="dk1"/>
+                          </a:solidFill>
+                          <a:latin typeface="+mn-lt"/>
+                          <a:ea typeface="+mn-ea"/>
+                          <a:cs typeface="+mn-cs"/>
+                        </a:rPr>
+                        <a:t>
+• LESIONES DOLOSAS POR GOLPES — CUMPLIMENTADA
+• ROBO CALIFICADO — CUMPLIMENTADA</a:t>
+                      </a:r>
+                    </a:p>
+                  </a:txBody>
+                  <a:tcPr/>
+                </a:tc>
+                <a:tc hMerge="1">
+                  <a:txBody>
+                    <a:bodyPr/>
+                    <a:lstStyle/>
+                    <a:p>
+                      <a:endParaRPr lang="es-MX"/>
+                    </a:p>
+                  </a:txBody>
+                  <a:tcPr/>
+                </a:tc>
+                <a:extLst>
+                  <a:ext uri="{0D108BD9-81ED-4DB2-BD59-A6C34878D82A}">
+                    <a16:rowId xmlns:a16="http://schemas.microsoft.com/office/drawing/2014/main" val="3169124086"/>
+                  </a:ext>
+                </a:extLst>
+              </a:tr>
+              <a:tr h="795285">
+                <a:tc>
+                  <a:txBody>
+                    <a:bodyPr/>
+                    <a:lstStyle/>
+                    <a:p>
+                      <a:r>
+                        <a:rPr lang="es-MX" sz="1100" b="1" dirty="0"/>
+                        <a:t> </a:t>
+                      </a:r>
+                      <a:r>
+                        <a:rPr lang="es-MX" sz="1100" b="1" dirty="0">
+                          <a:solidFill>
+                            <a:schemeClr val="bg1"/>
+                          </a:solidFill>
+                        </a:rPr>
+                        <a:t>ESTATUS </a:t>
+                      </a:r>
+                    </a:p>
+                  </a:txBody>
+                  <a:tcPr>
+                    <a:solidFill>
+                      <a:schemeClr val="accent1">
+                        <a:lumMod val="75000"/>
+                      </a:schemeClr>
+                    </a:solidFill>
+                  </a:tcPr>
+                </a:tc>
+                <a:tc gridSpan="2">
+                  <a:txBody>
+                    <a:bodyPr/>
+                    <a:lstStyle/>
+                    <a:p>
+                      <a:pPr marL="0" marR="0" lvl="0" indent="0" algn="just" defTabSz="914400" rtl="0" eaLnBrk="1" fontAlgn="auto" latinLnBrk="0" hangingPunct="1">
+                        <a:lnSpc>
+                          <a:spcPct val="100000"/>
+                        </a:lnSpc>
+                        <a:spcBef>
+                          <a:spcPts val="0"/>
+                        </a:spcBef>
+                        <a:spcAft>
+                          <a:spcPts val="0"/>
+                        </a:spcAft>
+                        <a:buClrTx/>
+                        <a:buSzTx/>
+                        <a:buFont typeface="Arial" panose="020B0604020202020204" pitchFamily="34" charset="0"/>
+                        <a:buNone/>
+                        <a:tabLst/>
+                        <a:defRPr/>
+                      </a:pPr>
+                      <a:r>
+                        <a:rPr lang="es-MX" sz="1100" kern="1200" dirty="0">
+                          <a:solidFill>
+                            <a:schemeClr val="dk1"/>
+                          </a:solidFill>
+                          <a:latin typeface="+mn-lt"/>
+                          <a:ea typeface="+mn-ea"/>
+                          <a:cs typeface="+mn-cs"/>
+                        </a:rPr>
+                        <a:t>Sentenciado, se sentencio por violacion</a:t>
+                      </a:r>
+                    </a:p>
+                  </a:txBody>
+                  <a:tcPr/>
+                </a:tc>
+                <a:tc hMerge="1">
+                  <a:txBody>
+                    <a:bodyPr/>
+                    <a:lstStyle/>
+                    <a:p>
+                      <a:endParaRPr lang="es-MX"/>
+                    </a:p>
+                  </a:txBody>
+                  <a:tcPr/>
+                </a:tc>
+                <a:extLst>
+                  <a:ext uri="{0D108BD9-81ED-4DB2-BD59-A6C34878D82A}">
+                    <a16:rowId xmlns:a16="http://schemas.microsoft.com/office/drawing/2014/main" val="3558537792"/>
+                  </a:ext>
+                </a:extLst>
+              </a:tr>
+              <a:tr h="1786729">
+                <a:tc>
+                  <a:txBody>
+                    <a:bodyPr/>
+                    <a:lstStyle/>
+                    <a:p>
+                      <a:r>
+                        <a:rPr lang="es-MX" sz="1100" b="1" kern="1200" dirty="0">
+                          <a:solidFill>
+                            <a:schemeClr val="bg1"/>
+                          </a:solidFill>
+                          <a:latin typeface="+mn-lt"/>
+                          <a:ea typeface="+mn-ea"/>
+                          <a:cs typeface="+mn-cs"/>
+                        </a:rPr>
+                        <a:t>ASUNTOS RELACIONADOS</a:t>
+                      </a:r>
+                    </a:p>
+                  </a:txBody>
+                  <a:tcPr>
+                    <a:solidFill>
+                      <a:schemeClr val="accent1">
+                        <a:lumMod val="75000"/>
+                      </a:schemeClr>
+                    </a:solidFill>
+                  </a:tcPr>
+                </a:tc>
+                <a:tc gridSpan="2">
+                  <a:txBody>
+                    <a:bodyPr/>
+                    <a:lstStyle/>
+                    <a:p>
+                      <a:pPr marL="171450" indent="-171450" algn="just">
+                        <a:buFontTx/>
+                        <a:buChar char="-"/>
+                      </a:pPr>
+                      <a:r>
+                        <a:rPr lang="es-MX" sz="1100" kern="1200" dirty="0">
+                          <a:solidFill>
+                            <a:schemeClr val="dk1"/>
+                          </a:solidFill>
+                          <a:latin typeface="+mn-lt"/>
+                          <a:ea typeface="+mn-ea"/>
+                          <a:cs typeface="+mn-cs"/>
+                        </a:rPr>
+                        <a:t>Caso Jassiel Hechos en agravio de Jassiel Díaz Cardona, el pasado 30 de mayo de 2023, en el rancho conocido como  “la fogata” Potrero Salitrillo Monte, Rincón de Romos, Aguascalientes, cuando la victima viajaba a bordo de su automóvil Ford Focus sobre la carretera 22, fue perseguido por los responsables  Jonathan Josefath Castorena Rodríguez alias patroncito, Javier Esquivel Padilla alias “La Queta” y Ricardo Alberto Navarro Gonzales alias “El Ricas”, quienes lo alcanzaron para herirlo con disparos por arma de fuego, la victima falleció minutos mas tarde en el Hospital General de Rincón de Romos.</a:t>
+                      </a:r>
+                    </a:p>
+                    <a:p>
+                      <a:pPr marL="0" indent="0" algn="just">
+                        <a:buFontTx/>
+                        <a:buNone/>
+                      </a:pPr>
+                      <a:endParaRPr lang="es-MX" sz="1100" kern="1200" dirty="0">
+                        <a:solidFill>
+                          <a:schemeClr val="dk1"/>
+                        </a:solidFill>
+                        <a:latin typeface="+mn-lt"/>
+                        <a:ea typeface="+mn-ea"/>
+                        <a:cs typeface="+mn-cs"/>
+                      </a:endParaRPr>
+                    </a:p>
+                    <a:p>
+                      <a:pPr marL="0" indent="0" algn="just">
+                        <a:buFontTx/>
+                        <a:buNone/>
+                      </a:pPr>
+                      <a:endParaRPr lang="es-MX" sz="1100" kern="1200" dirty="0">
+                        <a:solidFill>
+                          <a:schemeClr val="dk1"/>
+                        </a:solidFill>
+                        <a:latin typeface="+mn-lt"/>
+                        <a:ea typeface="+mn-ea"/>
+                        <a:cs typeface="+mn-cs"/>
+                      </a:endParaRPr>
+                    </a:p>
+                    <a:p>
+                      <a:pPr marL="0" marR="0" lvl="0" indent="0" algn="just" defTabSz="914400" rtl="0" eaLnBrk="1" fontAlgn="auto" latinLnBrk="0" hangingPunct="1">
+                        <a:lnSpc>
+                          <a:spcPct val="100000"/>
+                        </a:lnSpc>
+                        <a:spcBef>
+                          <a:spcPts val="0"/>
+                        </a:spcBef>
+                        <a:spcAft>
+                          <a:spcPts val="0"/>
+                        </a:spcAft>
+                        <a:buClrTx/>
+                        <a:buSzTx/>
+                        <a:buFontTx/>
+                        <a:buNone/>
+                        <a:tabLst/>
+                        <a:defRPr/>
+                      </a:pPr>
+                      <a:r>
+                        <a:rPr lang="es-MX" sz="1100" kern="1200" dirty="0">
+                          <a:solidFill>
+                            <a:schemeClr val="dk1"/>
+                          </a:solidFill>
+                          <a:latin typeface="+mn-lt"/>
+                          <a:ea typeface="+mn-ea"/>
+                          <a:cs typeface="+mn-cs"/>
+                        </a:rPr>
+                        <a:t> </a:t>
+                      </a:r>
+                    </a:p>
+                    <a:p>
+                      <a:pPr marL="0" marR="0" lvl="0" indent="0" algn="just" defTabSz="914400" rtl="0" eaLnBrk="1" fontAlgn="auto" latinLnBrk="0" hangingPunct="1">
+                        <a:lnSpc>
+                          <a:spcPct val="100000"/>
+                        </a:lnSpc>
+                        <a:spcBef>
+                          <a:spcPts val="0"/>
+                        </a:spcBef>
+                        <a:spcAft>
+                          <a:spcPts val="0"/>
+                        </a:spcAft>
+                        <a:buClrTx/>
+                        <a:buSzTx/>
+                        <a:buFontTx/>
+                        <a:buNone/>
+                        <a:tabLst/>
+                        <a:defRPr/>
+                      </a:pPr>
+                      <a:endParaRPr lang="es-MX" sz="1100" kern="1200" dirty="0">
+                        <a:solidFill>
+                          <a:schemeClr val="dk1"/>
+                        </a:solidFill>
+                        <a:latin typeface="+mn-lt"/>
+                        <a:ea typeface="+mn-ea"/>
+                        <a:cs typeface="+mn-cs"/>
+                      </a:endParaRPr>
+                    </a:p>
+                    <a:p>
+                      <a:pPr marL="0" marR="0" lvl="0" indent="0" algn="just" defTabSz="914400" rtl="0" eaLnBrk="1" fontAlgn="auto" latinLnBrk="0" hangingPunct="1">
+                        <a:lnSpc>
+                          <a:spcPct val="100000"/>
+                        </a:lnSpc>
+                        <a:spcBef>
+                          <a:spcPts val="0"/>
+                        </a:spcBef>
+                        <a:spcAft>
+                          <a:spcPts val="0"/>
+                        </a:spcAft>
+                        <a:buClrTx/>
+                        <a:buSzTx/>
+                        <a:buFontTx/>
+                        <a:buNone/>
+                        <a:tabLst/>
+                        <a:defRPr/>
+                      </a:pPr>
+                      <a:r>
+                        <a:rPr lang="es-MX" sz="1100" kern="1200" dirty="0">
+                          <a:solidFill>
+                            <a:schemeClr val="dk1"/>
+                          </a:solidFill>
+                          <a:latin typeface="+mn-lt"/>
+                          <a:ea typeface="+mn-ea"/>
+                          <a:cs typeface="+mn-cs"/>
+                        </a:rPr>
+                        <a:t>[V2] </a:t>
+                      </a:r>
+                    </a:p>
+                    <a:p>
+                      <a:pPr marL="0" indent="0" algn="just">
+                        <a:buFontTx/>
+                        <a:buNone/>
+                      </a:pPr>
+                      <a:endParaRPr lang="es-MX" sz="1100" kern="1200" dirty="0">
+                        <a:solidFill>
+                          <a:schemeClr val="dk1"/>
+                        </a:solidFill>
+                        <a:latin typeface="+mn-lt"/>
+                        <a:ea typeface="+mn-ea"/>
+                        <a:cs typeface="+mn-cs"/>
+                      </a:endParaRPr>
+                    </a:p>
+                  </a:txBody>
+                  <a:tcPr/>
+                </a:tc>
+                <a:tc hMerge="1">
+                  <a:txBody>
+                    <a:bodyPr/>
+                    <a:lstStyle/>
+                    <a:p>
+                      <a:endParaRPr lang="es-MX"/>
+                    </a:p>
+                  </a:txBody>
+                  <a:tcPr/>
+                </a:tc>
+                <a:extLst>
+                  <a:ext uri="{0D108BD9-81ED-4DB2-BD59-A6C34878D82A}">
+                    <a16:rowId xmlns:a16="http://schemas.microsoft.com/office/drawing/2014/main" val="4024071236"/>
+                  </a:ext>
+                </a:extLst>
+              </a:tr>
+            </a:tbl>
+          </a:graphicData>
+        </a:graphic>
+      </p:graphicFrame>
+      <p:pic>
+        <p:nvPicPr>
+          <p:cNvPr id="7" name="[FP]" descr="[FP]">
+            <a:extLst>
+              <a:ext uri="{FF2B5EF4-FFF2-40B4-BE49-F238E27FC236}">
+                <a16:creationId xmlns:a16="http://schemas.microsoft.com/office/drawing/2014/main" id="{C80E713A-27D7-471A-9297-6CD4151A9971}"/>
+              </a:ext>
+            </a:extLst>
+          </p:cNvPr>
+          <p:cNvPicPr>
+            <a:picLocks noChangeAspect="1"/>
+          </p:cNvPicPr>
+          <p:nvPr/>
+        </p:nvPicPr>
+        <p:blipFill>
+          <a:blip r:embed="Rc3d59b526ab544ba">
+            <a:extLst>
+              <a:ext uri="{28A0092B-C50C-407E-A947-70E740481C1C}">
+                <a14:useLocalDpi xmlns:a14="http://schemas.microsoft.com/office/drawing/2010/main" val="0"/>
+              </a:ext>
+            </a:extLst>
+          </a:blip>
+          <a:stretch>
+            <a:fillRect/>
+          </a:stretch>
+        </p:blipFill>
+        <p:spPr>
+          <a:xfrm>
+            <a:off x="214361" y="1714348"/>
+            <a:ext cx="2902475" cy="4351338"/>
+          </a:xfrm>
+          <a:prstGeom prst="rect">
+            <a:avLst/>
+          </a:prstGeom>
+        </p:spPr>
+      </p:pic>
+      <p:pic>
+        <p:nvPicPr>
+          <p:cNvPr id="11" name="[FV1]" descr="[FV1]">
+            <a:extLst>
+              <a:ext uri="{FF2B5EF4-FFF2-40B4-BE49-F238E27FC236}">
+                <a16:creationId xmlns:a16="http://schemas.microsoft.com/office/drawing/2014/main" id="{95A1EC47-8063-435B-9340-91DBB33FE951}"/>
+              </a:ext>
+            </a:extLst>
+          </p:cNvPr>
+          <p:cNvPicPr>
+            <a:picLocks noChangeAspect="1"/>
+          </p:cNvPicPr>
+          <p:nvPr/>
+        </p:nvPicPr>
+        <p:blipFill>
+          <a:blip r:embed="rId3">
+            <a:extLst>
+              <a:ext uri="{28A0092B-C50C-407E-A947-70E740481C1C}">
+                <a14:useLocalDpi xmlns:a14="http://schemas.microsoft.com/office/drawing/2010/main" val="0"/>
+              </a:ext>
+            </a:extLst>
+          </a:blip>
+          <a:stretch>
+            <a:fillRect/>
+          </a:stretch>
+        </p:blipFill>
+        <p:spPr>
+          <a:xfrm>
+            <a:off x="7584982" y="5672321"/>
+            <a:ext cx="665008" cy="827694"/>
+          </a:xfrm>
+          <a:prstGeom prst="rect">
+            <a:avLst/>
+          </a:prstGeom>
+        </p:spPr>
+      </p:pic>
+      <p:pic>
+        <p:nvPicPr>
+          <p:cNvPr id="13" name="[FV2]" descr="[FV2]">
+            <a:extLst>
+              <a:ext uri="{FF2B5EF4-FFF2-40B4-BE49-F238E27FC236}">
+                <a16:creationId xmlns:a16="http://schemas.microsoft.com/office/drawing/2014/main" id="{65D6E13E-B1E1-4CA4-8F00-9E73059CD0BD}"/>
+              </a:ext>
+            </a:extLst>
+          </p:cNvPr>
+          <p:cNvPicPr>
+            <a:picLocks noChangeAspect="1"/>
+          </p:cNvPicPr>
+          <p:nvPr/>
+        </p:nvPicPr>
+        <p:blipFill>
+          <a:blip r:embed="rId3">
+            <a:extLst>
+              <a:ext uri="{28A0092B-C50C-407E-A947-70E740481C1C}">
+                <a14:useLocalDpi xmlns:a14="http://schemas.microsoft.com/office/drawing/2010/main" val="0"/>
+              </a:ext>
+            </a:extLst>
+          </a:blip>
+          <a:stretch>
+            <a:fillRect/>
+          </a:stretch>
+        </p:blipFill>
+        <p:spPr>
+          <a:xfrm>
+            <a:off x="9993131" y="5680558"/>
+            <a:ext cx="665008" cy="827694"/>
+          </a:xfrm>
+          <a:prstGeom prst="rect">
+            <a:avLst/>
+          </a:prstGeom>
+        </p:spPr>
+      </p:pic>
+    </p:spTree>
+    <p:extLst>
+      <p:ext uri="{BB962C8B-B14F-4D97-AF65-F5344CB8AC3E}">
+        <p14:creationId xmlns:p14="http://schemas.microsoft.com/office/powerpoint/2010/main" val="2124728287"/>
+      </p:ext>
+    </p:extLst>
+  </p:cSld>
+  <p:clrMapOvr>
+    <a:masterClrMapping/>
+  </p:clrMapOvr>
+</p:sld>
+</file>
+
+<file path=ppt/slides/slide5.xml><?xml version="1.0" encoding="utf-8"?>
+<p:sld xmlns:a16="http://schemas.microsoft.com/office/drawing/2014/main" xmlns:p14="http://schemas.microsoft.com/office/powerpoint/2010/main" xmlns:a14="http://schemas.microsoft.com/office/drawing/2010/main" xmlns:a="http://schemas.openxmlformats.org/drawingml/2006/main" xmlns:r="http://schemas.openxmlformats.org/officeDocument/2006/relationships" xmlns:p="http://schemas.openxmlformats.org/presentationml/2006/main">
+  <p:cSld>
+    <p:spTree>
+      <p:nvGrpSpPr>
+        <p:cNvPr id="1" name=""/>
+        <p:cNvGrpSpPr/>
+        <p:nvPr/>
+      </p:nvGrpSpPr>
+      <p:grpSpPr>
+        <a:xfrm>
+          <a:off x="0" y="0"/>
+          <a:ext cx="0" cy="0"/>
+          <a:chOff x="0" y="0"/>
+          <a:chExt cx="0" cy="0"/>
+        </a:xfrm>
+      </p:grpSpPr>
+      <p:pic>
+        <p:nvPicPr>
+          <p:cNvPr id="4" name="[FONDO]" descr="[FONDO]">
+            <a:extLst>
+              <a:ext uri="{FF2B5EF4-FFF2-40B4-BE49-F238E27FC236}">
+                <a16:creationId xmlns:a16="http://schemas.microsoft.com/office/drawing/2014/main" id="{AE2FEBDB-ED54-FF79-0EF8-AA9E7C8EA417}"/>
+              </a:ext>
+            </a:extLst>
+          </p:cNvPr>
+          <p:cNvPicPr>
+            <a:picLocks noChangeAspect="1"/>
+          </p:cNvPicPr>
+          <p:nvPr/>
+        </p:nvPicPr>
+        <p:blipFill>
+          <a:blip r:embed="R4178b4c2b19f4315"/>
+          <a:stretch>
+            <a:fillRect/>
+          </a:stretch>
+        </p:blipFill>
+        <p:spPr>
+          <a:xfrm>
+            <a:off x="1" y="0"/>
+            <a:ext cx="12401280" cy="6969519"/>
+          </a:xfrm>
+          <a:prstGeom prst="rect">
+            <a:avLst/>
+          </a:prstGeom>
+        </p:spPr>
+      </p:pic>
+      <p:graphicFrame>
+        <p:nvGraphicFramePr>
+          <p:cNvPr id="10" name="Tabla 9">
+            <a:extLst>
+              <a:ext uri="{FF2B5EF4-FFF2-40B4-BE49-F238E27FC236}">
+                <a16:creationId xmlns:a16="http://schemas.microsoft.com/office/drawing/2014/main" id="{BC4CEC18-7797-7786-F517-147A6AD7242D}"/>
+              </a:ext>
+            </a:extLst>
+          </p:cNvPr>
+          <p:cNvGraphicFramePr>
+            <a:graphicFrameLocks noGrp="1"/>
+          </p:cNvGraphicFramePr>
+          <p:nvPr>
+            <p:extLst>
+              <p:ext uri="{D42A27DB-BD31-4B8C-83A1-F6EECF244321}">
+                <p14:modId xmlns:p14="http://schemas.microsoft.com/office/powerpoint/2010/main" val="1791400885"/>
+              </p:ext>
+            </p:extLst>
+          </p:nvPr>
+        </p:nvGraphicFramePr>
+        <p:xfrm>
+          <a:off x="3252159" y="1370610"/>
+          <a:ext cx="9149122" cy="5266098"/>
+        </p:xfrm>
+        <a:graphic>
+          <a:graphicData uri="http://schemas.openxmlformats.org/drawingml/2006/table">
+            <a:tbl>
+              <a:tblPr firstRow="1" bandRow="1">
+                <a:tableStyleId>{5C22544A-7EE6-4342-B048-85BDC9FD1C3A}</a:tableStyleId>
+              </a:tblPr>
+              <a:tblGrid>
+                <a:gridCol w="2462314">
+                  <a:extLst>
+                    <a:ext uri="{9D8B030D-6E8A-4147-A177-3AD203B41FA5}">
+                      <a16:colId xmlns:a16="http://schemas.microsoft.com/office/drawing/2014/main" val="2746230745"/>
+                    </a:ext>
+                  </a:extLst>
+                </a:gridCol>
+                <a:gridCol w="3343404">
+                  <a:extLst>
+                    <a:ext uri="{9D8B030D-6E8A-4147-A177-3AD203B41FA5}">
+                      <a16:colId xmlns:a16="http://schemas.microsoft.com/office/drawing/2014/main" val="3075986152"/>
+                    </a:ext>
+                  </a:extLst>
+                </a:gridCol>
+                <a:gridCol w="3343404">
+                  <a:extLst>
+                    <a:ext uri="{9D8B030D-6E8A-4147-A177-3AD203B41FA5}">
+                      <a16:colId xmlns:a16="http://schemas.microsoft.com/office/drawing/2014/main" val="4044500939"/>
+                    </a:ext>
+                  </a:extLst>
+                </a:gridCol>
+              </a:tblGrid>
+              <a:tr h="319663">
+                <a:tc gridSpan="3">
+                  <a:txBody>
+                    <a:bodyPr/>
+                    <a:lstStyle/>
+                    <a:p>
+                      <a:r>
+                        <a:rPr lang="es-MX" sz="1600" dirty="0"/>
+                        <a:t>RICARDO ALBERTO NAVARRO GONZALEZ</a:t>
+                      </a:r>
+                    </a:p>
+                  </a:txBody>
+                  <a:tcPr/>
+                </a:tc>
+                <a:tc hMerge="1">
+                  <a:txBody>
+                    <a:bodyPr/>
+                    <a:lstStyle/>
+                    <a:p>
+                      <a:endParaRPr lang="es-MX" dirty="0"/>
+                    </a:p>
+                  </a:txBody>
+                  <a:tcPr/>
+                </a:tc>
+                <a:tc hMerge="1">
+                  <a:txBody>
+                    <a:bodyPr/>
+                    <a:lstStyle/>
+                    <a:p>
+                      <a:endParaRPr lang="es-MX"/>
+                    </a:p>
+                  </a:txBody>
+                  <a:tcPr/>
+                </a:tc>
+                <a:extLst>
+                  <a:ext uri="{0D108BD9-81ED-4DB2-BD59-A6C34878D82A}">
+                    <a16:rowId xmlns:a16="http://schemas.microsoft.com/office/drawing/2014/main" val="3979505418"/>
+                  </a:ext>
+                </a:extLst>
+              </a:tr>
+              <a:tr h="319663">
+                <a:tc>
+                  <a:txBody>
+                    <a:bodyPr/>
+                    <a:lstStyle/>
+                    <a:p>
+                      <a:r>
+                        <a:rPr lang="es-MX" sz="1100" b="1" dirty="0">
+                          <a:solidFill>
+                            <a:schemeClr val="bg1"/>
+                          </a:solidFill>
+                        </a:rPr>
+                        <a:t>GRUPO DELICTIVO</a:t>
+                      </a:r>
+                    </a:p>
+                  </a:txBody>
+                  <a:tcPr>
+                    <a:solidFill>
+                      <a:schemeClr val="accent1">
+                        <a:lumMod val="75000"/>
+                      </a:schemeClr>
+                    </a:solidFill>
+                  </a:tcPr>
+                </a:tc>
+                <a:tc>
+                  <a:txBody>
+                    <a:bodyPr/>
+                    <a:lstStyle/>
+                    <a:p>
+                      <a:r>
+                        <a:rPr lang="es-MX" sz="1200" b="1" dirty="0"/>
+                        <a:t>CJNG</a:t>
+                      </a:r>
+                    </a:p>
+                  </a:txBody>
+                  <a:tcPr/>
+                </a:tc>
+                <a:tc>
+                  <a:txBody>
+                    <a:bodyPr/>
+                    <a:lstStyle/>
+                    <a:p>
+                      <a:pPr marL="0" marR="0" lvl="0" indent="0" algn="l" defTabSz="914400" rtl="0" eaLnBrk="1" fontAlgn="auto" latinLnBrk="0" hangingPunct="1">
+                        <a:lnSpc>
+                          <a:spcPct val="100000"/>
+                        </a:lnSpc>
+                        <a:spcBef>
+                          <a:spcPts val="0"/>
+                        </a:spcBef>
+                        <a:spcAft>
+                          <a:spcPts val="0"/>
+                        </a:spcAft>
+                        <a:buClrTx/>
+                        <a:buSzTx/>
+                        <a:buFontTx/>
+                        <a:buNone/>
+                        <a:tabLst/>
+                        <a:defRPr/>
+                      </a:pPr>
+                      <a:r>
+                        <a:rPr lang="es-MX" sz="1200" b="1" dirty="0"/>
+                        <a:t>EJECUTOR</a:t>
+                      </a:r>
+                    </a:p>
+                  </a:txBody>
+                  <a:tcPr/>
+                </a:tc>
+                <a:extLst>
+                  <a:ext uri="{0D108BD9-81ED-4DB2-BD59-A6C34878D82A}">
+                    <a16:rowId xmlns:a16="http://schemas.microsoft.com/office/drawing/2014/main" val="201189607"/>
+                  </a:ext>
+                </a:extLst>
+              </a:tr>
+              <a:tr h="725435">
+                <a:tc>
+                  <a:txBody>
+                    <a:bodyPr/>
+                    <a:lstStyle/>
+                    <a:p>
+                      <a:r>
+                        <a:rPr lang="es-MX" sz="1100" b="1" kern="1200" dirty="0">
+                          <a:solidFill>
+                            <a:schemeClr val="bg1"/>
+                          </a:solidFill>
+                          <a:latin typeface="+mn-lt"/>
+                          <a:ea typeface="+mn-ea"/>
+                          <a:cs typeface="+mn-cs"/>
+                        </a:rPr>
+                        <a:t>DELITOS / INGRESOS</a:t>
+                      </a:r>
+                    </a:p>
+                  </a:txBody>
+                  <a:tcPr>
+                    <a:solidFill>
+                      <a:schemeClr val="accent1">
+                        <a:lumMod val="75000"/>
+                      </a:schemeClr>
+                    </a:solidFill>
+                  </a:tcPr>
+                </a:tc>
+                <a:tc gridSpan="2">
+                  <a:txBody>
+                    <a:bodyPr/>
+                    <a:lstStyle/>
+                    <a:p>
+                      <a:pPr marL="0" indent="0">
+                        <a:buFont typeface="Arial" panose="020B0604020202020204" pitchFamily="34" charset="0"/>
+                        <a:buNone/>
+                      </a:pPr>
+                      <a:r>
+                        <a:rPr lang="es-MX" sz="1100" dirty="0"/>
+                        <a:t>
+• Homicidio Doloso — 18/06/2020 19:10
+• Lesiones Dolosas — 12/05/2019 21:20</a:t>
+                      </a:r>
+                    </a:p>
+                  </a:txBody>
+                  <a:tcPr/>
+                </a:tc>
+                <a:tc hMerge="1">
+                  <a:txBody>
+                    <a:bodyPr/>
+                    <a:lstStyle/>
+                    <a:p>
+                      <a:endParaRPr lang="es-MX"/>
+                    </a:p>
+                  </a:txBody>
+                  <a:tcPr/>
+                </a:tc>
+                <a:extLst>
+                  <a:ext uri="{0D108BD9-81ED-4DB2-BD59-A6C34878D82A}">
+                    <a16:rowId xmlns:a16="http://schemas.microsoft.com/office/drawing/2014/main" val="3340689267"/>
+                  </a:ext>
+                </a:extLst>
+              </a:tr>
+              <a:tr h="1044626">
+                <a:tc>
+                  <a:txBody>
+                    <a:bodyPr/>
+                    <a:lstStyle/>
+                    <a:p>
+                      <a:r>
+                        <a:rPr lang="es-MX" sz="1100" b="1" kern="1200" dirty="0">
+                          <a:solidFill>
+                            <a:schemeClr val="bg1"/>
+                          </a:solidFill>
+                          <a:latin typeface="+mn-lt"/>
+                          <a:ea typeface="+mn-ea"/>
+                          <a:cs typeface="+mn-cs"/>
+                        </a:rPr>
+                        <a:t>CARPETAS DE INVESTIGACIÓN</a:t>
+                      </a:r>
+                    </a:p>
+                  </a:txBody>
+                  <a:tcPr>
+                    <a:solidFill>
+                      <a:schemeClr val="accent1">
+                        <a:lumMod val="75000"/>
+                      </a:schemeClr>
+                    </a:solidFill>
+                  </a:tcPr>
+                </a:tc>
+                <a:tc gridSpan="2">
+                  <a:txBody>
+                    <a:bodyPr/>
+                    <a:lstStyle/>
+                    <a:p>
+                      <a:pPr marL="0" indent="0" algn="l" defTabSz="914400" rtl="0" eaLnBrk="1" latinLnBrk="0" hangingPunct="1">
+                        <a:buFont typeface="Arial" panose="020B0604020202020204" pitchFamily="34" charset="0"/>
+                        <a:buNone/>
+                      </a:pPr>
+                      <a:r>
+                        <a:rPr lang="es-MX" sz="1100" kern="1200">
+                          <a:solidFill>
+                            <a:schemeClr val="dk1"/>
+                          </a:solidFill>
+                          <a:latin typeface="+mn-lt"/>
+                          <a:ea typeface="+mn-ea"/>
+                          <a:cs typeface="+mn-cs"/>
+                        </a:rPr>
+                        <a:t>
+• CI/AGS/10918/05-19 Lesiones dolosas calificadas por golpes</a:t>
+                      </a:r>
+                      <a:endParaRPr lang="es-MX" sz="1100" kern="1200" dirty="0">
+                        <a:solidFill>
+                          <a:schemeClr val="dk1"/>
+                        </a:solidFill>
+                        <a:latin typeface="+mn-lt"/>
+                        <a:ea typeface="+mn-ea"/>
+                        <a:cs typeface="+mn-cs"/>
+                      </a:endParaRPr>
+                    </a:p>
+                  </a:txBody>
+                  <a:tcPr/>
+                </a:tc>
+                <a:tc hMerge="1">
+                  <a:txBody>
+                    <a:bodyPr/>
+                    <a:lstStyle/>
+                    <a:p>
+                      <a:endParaRPr lang="es-MX"/>
+                    </a:p>
+                  </a:txBody>
+                  <a:tcPr/>
+                </a:tc>
+                <a:extLst>
+                  <a:ext uri="{0D108BD9-81ED-4DB2-BD59-A6C34878D82A}">
+                    <a16:rowId xmlns:a16="http://schemas.microsoft.com/office/drawing/2014/main" val="3218073216"/>
+                  </a:ext>
+                </a:extLst>
+              </a:tr>
+              <a:tr h="159387">
+                <a:tc>
+                  <a:txBody>
+                    <a:bodyPr/>
+                    <a:lstStyle/>
+                    <a:p>
+                      <a:pPr marL="0" marR="0" lvl="0" indent="0" algn="l" defTabSz="914400" rtl="0" eaLnBrk="1" fontAlgn="auto" latinLnBrk="0" hangingPunct="1">
+                        <a:lnSpc>
+                          <a:spcPct val="100000"/>
+                        </a:lnSpc>
+                        <a:spcBef>
+                          <a:spcPts val="0"/>
+                        </a:spcBef>
+                        <a:spcAft>
+                          <a:spcPts val="0"/>
+                        </a:spcAft>
+                        <a:buClrTx/>
+                        <a:buSzTx/>
+                        <a:buFontTx/>
+                        <a:buNone/>
+                        <a:tabLst/>
+                        <a:defRPr/>
+                      </a:pPr>
+                      <a:r>
+                        <a:rPr lang="es-MX" sz="1100" b="1" dirty="0">
+                          <a:solidFill>
+                            <a:schemeClr val="bg1"/>
+                          </a:solidFill>
+                        </a:rPr>
+                        <a:t>ORDENES DE APREHENSIÓN</a:t>
+                      </a:r>
+                    </a:p>
+                  </a:txBody>
+                  <a:tcPr>
+                    <a:solidFill>
+                      <a:schemeClr val="accent1">
+                        <a:lumMod val="75000"/>
+                      </a:schemeClr>
+                    </a:solidFill>
+                  </a:tcPr>
+                </a:tc>
+                <a:tc gridSpan="2">
+                  <a:txBody>
+                    <a:bodyPr/>
+                    <a:lstStyle/>
+                    <a:p>
+                      <a:pPr marL="0" indent="0" algn="l" defTabSz="914400" rtl="0" eaLnBrk="1" latinLnBrk="0" hangingPunct="1">
+                        <a:buFont typeface="Arial" panose="020B0604020202020204" pitchFamily="34" charset="0"/>
+                        <a:buNone/>
+                      </a:pPr>
+                      <a:r>
+                        <a:rPr lang="es-MX" sz="1100" kern="1200" dirty="0">
+                          <a:solidFill>
+                            <a:schemeClr val="dk1"/>
+                          </a:solidFill>
+                          <a:latin typeface="+mn-lt"/>
+                          <a:ea typeface="+mn-ea"/>
+                          <a:cs typeface="+mn-cs"/>
+                        </a:rPr>
+                        <a:t>
+• HOMICIDIO DOLOSO CALIFICADO — CUMPLIMENTADA</a:t>
+                      </a:r>
+                    </a:p>
+                  </a:txBody>
+                  <a:tcPr/>
+                </a:tc>
+                <a:tc hMerge="1">
+                  <a:txBody>
+                    <a:bodyPr/>
+                    <a:lstStyle/>
+                    <a:p>
+                      <a:endParaRPr lang="es-MX"/>
+                    </a:p>
+                  </a:txBody>
+                  <a:tcPr/>
+                </a:tc>
+                <a:extLst>
+                  <a:ext uri="{0D108BD9-81ED-4DB2-BD59-A6C34878D82A}">
+                    <a16:rowId xmlns:a16="http://schemas.microsoft.com/office/drawing/2014/main" val="3169124086"/>
+                  </a:ext>
+                </a:extLst>
+              </a:tr>
+              <a:tr h="795285">
+                <a:tc>
+                  <a:txBody>
+                    <a:bodyPr/>
+                    <a:lstStyle/>
+                    <a:p>
+                      <a:r>
+                        <a:rPr lang="es-MX" sz="1100" b="1" dirty="0"/>
+                        <a:t> </a:t>
+                      </a:r>
+                      <a:r>
+                        <a:rPr lang="es-MX" sz="1100" b="1" dirty="0">
+                          <a:solidFill>
+                            <a:schemeClr val="bg1"/>
+                          </a:solidFill>
+                        </a:rPr>
+                        <a:t>ESTATUS </a:t>
+                      </a:r>
+                    </a:p>
+                  </a:txBody>
+                  <a:tcPr>
+                    <a:solidFill>
+                      <a:schemeClr val="accent1">
+                        <a:lumMod val="75000"/>
+                      </a:schemeClr>
+                    </a:solidFill>
+                  </a:tcPr>
+                </a:tc>
+                <a:tc gridSpan="2">
+                  <a:txBody>
+                    <a:bodyPr/>
+                    <a:lstStyle/>
+                    <a:p>
+                      <a:pPr marL="0" marR="0" lvl="0" indent="0" algn="just" defTabSz="914400" rtl="0" eaLnBrk="1" fontAlgn="auto" latinLnBrk="0" hangingPunct="1">
+                        <a:lnSpc>
+                          <a:spcPct val="100000"/>
+                        </a:lnSpc>
+                        <a:spcBef>
+                          <a:spcPts val="0"/>
+                        </a:spcBef>
+                        <a:spcAft>
+                          <a:spcPts val="0"/>
+                        </a:spcAft>
+                        <a:buClrTx/>
+                        <a:buSzTx/>
+                        <a:buFont typeface="Arial" panose="020B0604020202020204" pitchFamily="34" charset="0"/>
+                        <a:buNone/>
+                        <a:tabLst/>
+                        <a:defRPr/>
+                      </a:pPr>
+                      <a:r>
+                        <a:rPr lang="es-MX" sz="1100" kern="1200" dirty="0">
+                          <a:solidFill>
+                            <a:schemeClr val="dk1"/>
+                          </a:solidFill>
+                          <a:latin typeface="+mn-lt"/>
+                          <a:ea typeface="+mn-ea"/>
+                          <a:cs typeface="+mn-cs"/>
+                        </a:rPr>
+                        <a:t>Sentenciado, se sentencio por violacion</a:t>
+                      </a:r>
+                    </a:p>
+                  </a:txBody>
+                  <a:tcPr/>
+                </a:tc>
+                <a:tc hMerge="1">
+                  <a:txBody>
+                    <a:bodyPr/>
+                    <a:lstStyle/>
+                    <a:p>
+                      <a:endParaRPr lang="es-MX"/>
+                    </a:p>
+                  </a:txBody>
+                  <a:tcPr/>
+                </a:tc>
+                <a:extLst>
+                  <a:ext uri="{0D108BD9-81ED-4DB2-BD59-A6C34878D82A}">
+                    <a16:rowId xmlns:a16="http://schemas.microsoft.com/office/drawing/2014/main" val="3558537792"/>
+                  </a:ext>
+                </a:extLst>
+              </a:tr>
+              <a:tr h="1786729">
+                <a:tc>
+                  <a:txBody>
+                    <a:bodyPr/>
+                    <a:lstStyle/>
+                    <a:p>
+                      <a:r>
+                        <a:rPr lang="es-MX" sz="1100" b="1" kern="1200" dirty="0">
+                          <a:solidFill>
+                            <a:schemeClr val="bg1"/>
+                          </a:solidFill>
+                          <a:latin typeface="+mn-lt"/>
+                          <a:ea typeface="+mn-ea"/>
+                          <a:cs typeface="+mn-cs"/>
+                        </a:rPr>
+                        <a:t>ASUNTOS RELACIONADOS</a:t>
+                      </a:r>
+                    </a:p>
+                  </a:txBody>
+                  <a:tcPr>
+                    <a:solidFill>
+                      <a:schemeClr val="accent1">
+                        <a:lumMod val="75000"/>
+                      </a:schemeClr>
+                    </a:solidFill>
+                  </a:tcPr>
+                </a:tc>
+                <a:tc gridSpan="2">
+                  <a:txBody>
+                    <a:bodyPr/>
+                    <a:lstStyle/>
+                    <a:p>
+                      <a:pPr marL="171450" indent="-171450" algn="just">
+                        <a:buFontTx/>
+                        <a:buChar char="-"/>
+                      </a:pPr>
+                      <a:r>
+                        <a:rPr lang="es-MX" sz="1100" kern="1200" dirty="0">
+                          <a:solidFill>
+                            <a:schemeClr val="dk1"/>
+                          </a:solidFill>
+                          <a:latin typeface="+mn-lt"/>
+                          <a:ea typeface="+mn-ea"/>
+                          <a:cs typeface="+mn-cs"/>
+                        </a:rPr>
+                        <a:t>Caso Jassiel Hechos en agravio de Jassiel Díaz Cardona, el pasado 30 de mayo de 2023, en el rancho conocido como  “la fogata” Potrero Salitrillo Monte, Rincón de Romos, Aguascalientes, cuando la victima viajaba a bordo de su automóvil Ford Focus sobre la carretera 22, fue perseguido por los responsables  Jonathan Josefath Castorena Rodríguez alias patroncito, Javier Esquivel Padilla alias “La Queta” y Ricardo Alberto Navarro Gonzales alias “El Ricas”, quienes lo alcanzaron para herirlo con disparos por arma de fuego, la victima falleció minutos mas tarde en el Hospital General de Rincón de Romos.</a:t>
+                      </a:r>
+                    </a:p>
+                    <a:p>
+                      <a:pPr marL="0" indent="0" algn="just">
+                        <a:buFontTx/>
+                        <a:buNone/>
+                      </a:pPr>
+                      <a:endParaRPr lang="es-MX" sz="1100" kern="1200" dirty="0">
+                        <a:solidFill>
+                          <a:schemeClr val="dk1"/>
+                        </a:solidFill>
+                        <a:latin typeface="+mn-lt"/>
+                        <a:ea typeface="+mn-ea"/>
+                        <a:cs typeface="+mn-cs"/>
+                      </a:endParaRPr>
+                    </a:p>
+                    <a:p>
+                      <a:pPr marL="0" indent="0" algn="just">
+                        <a:buFontTx/>
+                        <a:buNone/>
+                      </a:pPr>
+                      <a:endParaRPr lang="es-MX" sz="1100" kern="1200" dirty="0">
+                        <a:solidFill>
+                          <a:schemeClr val="dk1"/>
+                        </a:solidFill>
+                        <a:latin typeface="+mn-lt"/>
+                        <a:ea typeface="+mn-ea"/>
+                        <a:cs typeface="+mn-cs"/>
+                      </a:endParaRPr>
+                    </a:p>
+                    <a:p>
+                      <a:pPr marL="0" marR="0" lvl="0" indent="0" algn="just" defTabSz="914400" rtl="0" eaLnBrk="1" fontAlgn="auto" latinLnBrk="0" hangingPunct="1">
+                        <a:lnSpc>
+                          <a:spcPct val="100000"/>
+                        </a:lnSpc>
+                        <a:spcBef>
+                          <a:spcPts val="0"/>
+                        </a:spcBef>
+                        <a:spcAft>
+                          <a:spcPts val="0"/>
+                        </a:spcAft>
+                        <a:buClrTx/>
+                        <a:buSzTx/>
+                        <a:buFontTx/>
+                        <a:buNone/>
+                        <a:tabLst/>
+                        <a:defRPr/>
+                      </a:pPr>
+                      <a:r>
+                        <a:rPr lang="es-MX" sz="1100" kern="1200" dirty="0">
+                          <a:solidFill>
+                            <a:schemeClr val="dk1"/>
+                          </a:solidFill>
+                          <a:latin typeface="+mn-lt"/>
+                          <a:ea typeface="+mn-ea"/>
+                          <a:cs typeface="+mn-cs"/>
+                        </a:rPr>
+                        <a:t> </a:t>
+                      </a:r>
+                    </a:p>
+                    <a:p>
+                      <a:pPr marL="0" marR="0" lvl="0" indent="0" algn="just" defTabSz="914400" rtl="0" eaLnBrk="1" fontAlgn="auto" latinLnBrk="0" hangingPunct="1">
+                        <a:lnSpc>
+                          <a:spcPct val="100000"/>
+                        </a:lnSpc>
+                        <a:spcBef>
+                          <a:spcPts val="0"/>
+                        </a:spcBef>
+                        <a:spcAft>
+                          <a:spcPts val="0"/>
+                        </a:spcAft>
+                        <a:buClrTx/>
+                        <a:buSzTx/>
+                        <a:buFontTx/>
+                        <a:buNone/>
+                        <a:tabLst/>
+                        <a:defRPr/>
+                      </a:pPr>
+                      <a:endParaRPr lang="es-MX" sz="1100" kern="1200" dirty="0">
+                        <a:solidFill>
+                          <a:schemeClr val="dk1"/>
+                        </a:solidFill>
+                        <a:latin typeface="+mn-lt"/>
+                        <a:ea typeface="+mn-ea"/>
+                        <a:cs typeface="+mn-cs"/>
+                      </a:endParaRPr>
+                    </a:p>
+                    <a:p>
+                      <a:pPr marL="0" marR="0" lvl="0" indent="0" algn="just" defTabSz="914400" rtl="0" eaLnBrk="1" fontAlgn="auto" latinLnBrk="0" hangingPunct="1">
+                        <a:lnSpc>
+                          <a:spcPct val="100000"/>
+                        </a:lnSpc>
+                        <a:spcBef>
+                          <a:spcPts val="0"/>
+                        </a:spcBef>
+                        <a:spcAft>
+                          <a:spcPts val="0"/>
+                        </a:spcAft>
+                        <a:buClrTx/>
+                        <a:buSzTx/>
+                        <a:buFontTx/>
+                        <a:buNone/>
+                        <a:tabLst/>
+                        <a:defRPr/>
+                      </a:pPr>
+                      <a:r>
+                        <a:rPr lang="es-MX" sz="1100" kern="1200" dirty="0">
+                          <a:solidFill>
+                            <a:schemeClr val="dk1"/>
+                          </a:solidFill>
+                          <a:latin typeface="+mn-lt"/>
+                          <a:ea typeface="+mn-ea"/>
+                          <a:cs typeface="+mn-cs"/>
+                        </a:rPr>
+                        <a:t>[V2] </a:t>
+                      </a:r>
+                    </a:p>
+                    <a:p>
+                      <a:pPr marL="0" indent="0" algn="just">
+                        <a:buFontTx/>
+                        <a:buNone/>
+                      </a:pPr>
+                      <a:endParaRPr lang="es-MX" sz="1100" kern="1200" dirty="0">
+                        <a:solidFill>
+                          <a:schemeClr val="dk1"/>
+                        </a:solidFill>
+                        <a:latin typeface="+mn-lt"/>
+                        <a:ea typeface="+mn-ea"/>
+                        <a:cs typeface="+mn-cs"/>
+                      </a:endParaRPr>
+                    </a:p>
+                  </a:txBody>
+                  <a:tcPr/>
+                </a:tc>
+                <a:tc hMerge="1">
+                  <a:txBody>
+                    <a:bodyPr/>
+                    <a:lstStyle/>
+                    <a:p>
+                      <a:endParaRPr lang="es-MX"/>
+                    </a:p>
+                  </a:txBody>
+                  <a:tcPr/>
+                </a:tc>
+                <a:extLst>
+                  <a:ext uri="{0D108BD9-81ED-4DB2-BD59-A6C34878D82A}">
+                    <a16:rowId xmlns:a16="http://schemas.microsoft.com/office/drawing/2014/main" val="4024071236"/>
+                  </a:ext>
+                </a:extLst>
+              </a:tr>
+            </a:tbl>
+          </a:graphicData>
+        </a:graphic>
+      </p:graphicFrame>
+      <p:pic>
+        <p:nvPicPr>
+          <p:cNvPr id="7" name="[FP]" descr="[FP]">
+            <a:extLst>
+              <a:ext uri="{FF2B5EF4-FFF2-40B4-BE49-F238E27FC236}">
+                <a16:creationId xmlns:a16="http://schemas.microsoft.com/office/drawing/2014/main" id="{C80E713A-27D7-471A-9297-6CD4151A9971}"/>
+              </a:ext>
+            </a:extLst>
+          </p:cNvPr>
+          <p:cNvPicPr>
+            <a:picLocks noChangeAspect="1"/>
+          </p:cNvPicPr>
+          <p:nvPr/>
+        </p:nvPicPr>
+        <p:blipFill>
+          <a:blip r:embed="R84d8ef8464324682">
+            <a:extLst>
+              <a:ext uri="{28A0092B-C50C-407E-A947-70E740481C1C}">
+                <a14:useLocalDpi xmlns:a14="http://schemas.microsoft.com/office/drawing/2010/main" val="0"/>
+              </a:ext>
+            </a:extLst>
+          </a:blip>
+          <a:stretch>
+            <a:fillRect/>
+          </a:stretch>
+        </p:blipFill>
+        <p:spPr>
+          <a:xfrm>
+            <a:off x="214361" y="1714348"/>
+            <a:ext cx="2902475" cy="4351338"/>
+          </a:xfrm>
+          <a:prstGeom prst="rect">
+            <a:avLst/>
+          </a:prstGeom>
+        </p:spPr>
+      </p:pic>
+      <p:pic>
+        <p:nvPicPr>
+          <p:cNvPr id="11" name="[FV1]" descr="[FV1]">
+            <a:extLst>
+              <a:ext uri="{FF2B5EF4-FFF2-40B4-BE49-F238E27FC236}">
+                <a16:creationId xmlns:a16="http://schemas.microsoft.com/office/drawing/2014/main" id="{95A1EC47-8063-435B-9340-91DBB33FE951}"/>
+              </a:ext>
+            </a:extLst>
+          </p:cNvPr>
+          <p:cNvPicPr>
+            <a:picLocks noChangeAspect="1"/>
+          </p:cNvPicPr>
+          <p:nvPr/>
+        </p:nvPicPr>
+        <p:blipFill>
+          <a:blip r:embed="rId3">
+            <a:extLst>
+              <a:ext uri="{28A0092B-C50C-407E-A947-70E740481C1C}">
+                <a14:useLocalDpi xmlns:a14="http://schemas.microsoft.com/office/drawing/2010/main" val="0"/>
+              </a:ext>
+            </a:extLst>
+          </a:blip>
+          <a:stretch>
+            <a:fillRect/>
+          </a:stretch>
+        </p:blipFill>
+        <p:spPr>
+          <a:xfrm>
+            <a:off x="7584982" y="5672321"/>
+            <a:ext cx="665008" cy="827694"/>
+          </a:xfrm>
+          <a:prstGeom prst="rect">
+            <a:avLst/>
+          </a:prstGeom>
+        </p:spPr>
+      </p:pic>
+      <p:pic>
+        <p:nvPicPr>
+          <p:cNvPr id="13" name="[FV2]" descr="[FV2]">
+            <a:extLst>
+              <a:ext uri="{FF2B5EF4-FFF2-40B4-BE49-F238E27FC236}">
+                <a16:creationId xmlns:a16="http://schemas.microsoft.com/office/drawing/2014/main" id="{65D6E13E-B1E1-4CA4-8F00-9E73059CD0BD}"/>
+              </a:ext>
+            </a:extLst>
+          </p:cNvPr>
+          <p:cNvPicPr>
+            <a:picLocks noChangeAspect="1"/>
+          </p:cNvPicPr>
+          <p:nvPr/>
+        </p:nvPicPr>
+        <p:blipFill>
+          <a:blip r:embed="rId3">
+            <a:extLst>
+              <a:ext uri="{28A0092B-C50C-407E-A947-70E740481C1C}">
+                <a14:useLocalDpi xmlns:a14="http://schemas.microsoft.com/office/drawing/2010/main" val="0"/>
+              </a:ext>
+            </a:extLst>
+          </a:blip>
+          <a:stretch>
+            <a:fillRect/>
+          </a:stretch>
+        </p:blipFill>
+        <p:spPr>
+          <a:xfrm>
+            <a:off x="9993131" y="5680558"/>
+            <a:ext cx="665008" cy="827694"/>
+          </a:xfrm>
+          <a:prstGeom prst="rect">
+            <a:avLst/>
+          </a:prstGeom>
+        </p:spPr>
+      </p:pic>
+    </p:spTree>
+    <p:extLst>
+      <p:ext uri="{BB962C8B-B14F-4D97-AF65-F5344CB8AC3E}">
+        <p14:creationId xmlns:p14="http://schemas.microsoft.com/office/powerpoint/2010/main" val="2124728287"/>
+      </p:ext>
+    </p:extLst>
+  </p:cSld>
+  <p:clrMapOvr>
+    <a:masterClrMapping/>
+  </p:clrMapOvr>
+</p:sld>
+</file>
+
+<file path=ppt/slides/slide6.xml><?xml version="1.0" encoding="utf-8"?>
+<p:sld xmlns:a16="http://schemas.microsoft.com/office/drawing/2014/main" xmlns:p14="http://schemas.microsoft.com/office/powerpoint/2010/main" xmlns:a14="http://schemas.microsoft.com/office/drawing/2010/main" xmlns:a="http://schemas.openxmlformats.org/drawingml/2006/main" xmlns:r="http://schemas.openxmlformats.org/officeDocument/2006/relationships" xmlns:p="http://schemas.openxmlformats.org/presentationml/2006/main">
+  <p:cSld>
+    <p:spTree>
+      <p:nvGrpSpPr>
+        <p:cNvPr id="1" name=""/>
+        <p:cNvGrpSpPr/>
+        <p:nvPr/>
+      </p:nvGrpSpPr>
+      <p:grpSpPr>
+        <a:xfrm>
+          <a:off x="0" y="0"/>
+          <a:ext cx="0" cy="0"/>
+          <a:chOff x="0" y="0"/>
+          <a:chExt cx="0" cy="0"/>
+        </a:xfrm>
+      </p:grpSpPr>
+      <p:pic>
+        <p:nvPicPr>
+          <p:cNvPr id="4" name="[FONDO]" descr="[FONDO]">
+            <a:extLst>
+              <a:ext uri="{FF2B5EF4-FFF2-40B4-BE49-F238E27FC236}">
+                <a16:creationId xmlns:a16="http://schemas.microsoft.com/office/drawing/2014/main" id="{AE2FEBDB-ED54-FF79-0EF8-AA9E7C8EA417}"/>
+              </a:ext>
+            </a:extLst>
+          </p:cNvPr>
+          <p:cNvPicPr>
+            <a:picLocks noChangeAspect="1"/>
+          </p:cNvPicPr>
+          <p:nvPr/>
+        </p:nvPicPr>
+        <p:blipFill>
+          <a:blip r:embed="R43016081a53941f1"/>
+          <a:stretch>
+            <a:fillRect/>
+          </a:stretch>
+        </p:blipFill>
+        <p:spPr>
+          <a:xfrm>
+            <a:off x="1" y="0"/>
+            <a:ext cx="12401280" cy="6969519"/>
+          </a:xfrm>
+          <a:prstGeom prst="rect">
+            <a:avLst/>
+          </a:prstGeom>
+        </p:spPr>
+      </p:pic>
+      <p:graphicFrame>
+        <p:nvGraphicFramePr>
+          <p:cNvPr id="10" name="Tabla 9">
+            <a:extLst>
+              <a:ext uri="{FF2B5EF4-FFF2-40B4-BE49-F238E27FC236}">
+                <a16:creationId xmlns:a16="http://schemas.microsoft.com/office/drawing/2014/main" id="{BC4CEC18-7797-7786-F517-147A6AD7242D}"/>
+              </a:ext>
+            </a:extLst>
+          </p:cNvPr>
+          <p:cNvGraphicFramePr>
+            <a:graphicFrameLocks noGrp="1"/>
+          </p:cNvGraphicFramePr>
+          <p:nvPr>
+            <p:extLst>
+              <p:ext uri="{D42A27DB-BD31-4B8C-83A1-F6EECF244321}">
+                <p14:modId xmlns:p14="http://schemas.microsoft.com/office/powerpoint/2010/main" val="1791400885"/>
+              </p:ext>
+            </p:extLst>
+          </p:nvPr>
+        </p:nvGraphicFramePr>
+        <p:xfrm>
+          <a:off x="3252159" y="1370610"/>
+          <a:ext cx="9149122" cy="5266098"/>
+        </p:xfrm>
+        <a:graphic>
+          <a:graphicData uri="http://schemas.openxmlformats.org/drawingml/2006/table">
+            <a:tbl>
+              <a:tblPr firstRow="1" bandRow="1">
+                <a:tableStyleId>{5C22544A-7EE6-4342-B048-85BDC9FD1C3A}</a:tableStyleId>
+              </a:tblPr>
+              <a:tblGrid>
+                <a:gridCol w="2462314">
+                  <a:extLst>
+                    <a:ext uri="{9D8B030D-6E8A-4147-A177-3AD203B41FA5}">
+                      <a16:colId xmlns:a16="http://schemas.microsoft.com/office/drawing/2014/main" val="2746230745"/>
+                    </a:ext>
+                  </a:extLst>
+                </a:gridCol>
+                <a:gridCol w="3343404">
+                  <a:extLst>
+                    <a:ext uri="{9D8B030D-6E8A-4147-A177-3AD203B41FA5}">
+                      <a16:colId xmlns:a16="http://schemas.microsoft.com/office/drawing/2014/main" val="3075986152"/>
+                    </a:ext>
+                  </a:extLst>
+                </a:gridCol>
+                <a:gridCol w="3343404">
+                  <a:extLst>
+                    <a:ext uri="{9D8B030D-6E8A-4147-A177-3AD203B41FA5}">
+                      <a16:colId xmlns:a16="http://schemas.microsoft.com/office/drawing/2014/main" val="4044500939"/>
+                    </a:ext>
+                  </a:extLst>
+                </a:gridCol>
+              </a:tblGrid>
+              <a:tr h="319663">
+                <a:tc gridSpan="3">
+                  <a:txBody>
+                    <a:bodyPr/>
+                    <a:lstStyle/>
+                    <a:p>
+                      <a:r>
+                        <a:rPr lang="es-MX" sz="1600" dirty="0"/>
+                        <a:t>JOSUE CASTORENA ESPARZA</a:t>
+                      </a:r>
+                    </a:p>
+                  </a:txBody>
+                  <a:tcPr/>
+                </a:tc>
+                <a:tc hMerge="1">
+                  <a:txBody>
+                    <a:bodyPr/>
+                    <a:lstStyle/>
+                    <a:p>
+                      <a:endParaRPr lang="es-MX" dirty="0"/>
+                    </a:p>
+                  </a:txBody>
+                  <a:tcPr/>
+                </a:tc>
+                <a:tc hMerge="1">
+                  <a:txBody>
+                    <a:bodyPr/>
+                    <a:lstStyle/>
+                    <a:p>
+                      <a:endParaRPr lang="es-MX"/>
+                    </a:p>
+                  </a:txBody>
+                  <a:tcPr/>
+                </a:tc>
+                <a:extLst>
+                  <a:ext uri="{0D108BD9-81ED-4DB2-BD59-A6C34878D82A}">
+                    <a16:rowId xmlns:a16="http://schemas.microsoft.com/office/drawing/2014/main" val="3979505418"/>
+                  </a:ext>
+                </a:extLst>
+              </a:tr>
+              <a:tr h="319663">
+                <a:tc>
+                  <a:txBody>
+                    <a:bodyPr/>
+                    <a:lstStyle/>
+                    <a:p>
+                      <a:r>
+                        <a:rPr lang="es-MX" sz="1100" b="1" dirty="0">
+                          <a:solidFill>
+                            <a:schemeClr val="bg1"/>
+                          </a:solidFill>
+                        </a:rPr>
+                        <a:t>GRUPO DELICTIVO</a:t>
+                      </a:r>
+                    </a:p>
+                  </a:txBody>
+                  <a:tcPr>
+                    <a:solidFill>
+                      <a:schemeClr val="accent1">
+                        <a:lumMod val="75000"/>
+                      </a:schemeClr>
+                    </a:solidFill>
+                  </a:tcPr>
+                </a:tc>
+                <a:tc>
+                  <a:txBody>
+                    <a:bodyPr/>
+                    <a:lstStyle/>
+                    <a:p>
+                      <a:r>
+                        <a:rPr lang="es-MX" sz="1200" b="1" dirty="0"/>
+                        <a:t>CJNG</a:t>
+                      </a:r>
+                    </a:p>
+                  </a:txBody>
+                  <a:tcPr/>
+                </a:tc>
+                <a:tc>
+                  <a:txBody>
+                    <a:bodyPr/>
+                    <a:lstStyle/>
+                    <a:p>
+                      <a:pPr marL="0" marR="0" lvl="0" indent="0" algn="l" defTabSz="914400" rtl="0" eaLnBrk="1" fontAlgn="auto" latinLnBrk="0" hangingPunct="1">
+                        <a:lnSpc>
+                          <a:spcPct val="100000"/>
+                        </a:lnSpc>
+                        <a:spcBef>
+                          <a:spcPts val="0"/>
+                        </a:spcBef>
+                        <a:spcAft>
+                          <a:spcPts val="0"/>
+                        </a:spcAft>
+                        <a:buClrTx/>
+                        <a:buSzTx/>
+                        <a:buFontTx/>
+                        <a:buNone/>
+                        <a:tabLst/>
+                        <a:defRPr/>
+                      </a:pPr>
+                      <a:r>
+                        <a:rPr lang="es-MX" sz="1200" b="1" dirty="0"/>
+                        <a:t>EJECUTOR</a:t>
+                      </a:r>
+                    </a:p>
+                  </a:txBody>
+                  <a:tcPr/>
+                </a:tc>
+                <a:extLst>
+                  <a:ext uri="{0D108BD9-81ED-4DB2-BD59-A6C34878D82A}">
+                    <a16:rowId xmlns:a16="http://schemas.microsoft.com/office/drawing/2014/main" val="201189607"/>
+                  </a:ext>
+                </a:extLst>
+              </a:tr>
+              <a:tr h="725435">
+                <a:tc>
+                  <a:txBody>
+                    <a:bodyPr/>
+                    <a:lstStyle/>
+                    <a:p>
+                      <a:r>
+                        <a:rPr lang="es-MX" sz="1100" b="1" kern="1200" dirty="0">
+                          <a:solidFill>
+                            <a:schemeClr val="bg1"/>
+                          </a:solidFill>
+                          <a:latin typeface="+mn-lt"/>
+                          <a:ea typeface="+mn-ea"/>
+                          <a:cs typeface="+mn-cs"/>
+                        </a:rPr>
+                        <a:t>DELITOS / INGRESOS</a:t>
+                      </a:r>
+                    </a:p>
+                  </a:txBody>
+                  <a:tcPr>
+                    <a:solidFill>
+                      <a:schemeClr val="accent1">
+                        <a:lumMod val="75000"/>
+                      </a:schemeClr>
+                    </a:solidFill>
+                  </a:tcPr>
+                </a:tc>
+                <a:tc gridSpan="2">
+                  <a:txBody>
+                    <a:bodyPr/>
+                    <a:lstStyle/>
+                    <a:p>
+                      <a:pPr marL="0" indent="0">
+                        <a:buFont typeface="Arial" panose="020B0604020202020204" pitchFamily="34" charset="0"/>
+                        <a:buNone/>
+                      </a:pPr>
+                      <a:r>
+                        <a:rPr lang="es-MX" sz="1100" dirty="0"/>
+                        <a:t>
+• Contra la Salud — 31/07/2022 14:17
+• Contra la Salud — 06/12/2019 21:20</a:t>
+                      </a:r>
+                    </a:p>
+                  </a:txBody>
+                  <a:tcPr/>
+                </a:tc>
+                <a:tc hMerge="1">
+                  <a:txBody>
+                    <a:bodyPr/>
+                    <a:lstStyle/>
+                    <a:p>
+                      <a:endParaRPr lang="es-MX"/>
+                    </a:p>
+                  </a:txBody>
+                  <a:tcPr/>
+                </a:tc>
+                <a:extLst>
+                  <a:ext uri="{0D108BD9-81ED-4DB2-BD59-A6C34878D82A}">
+                    <a16:rowId xmlns:a16="http://schemas.microsoft.com/office/drawing/2014/main" val="3340689267"/>
+                  </a:ext>
+                </a:extLst>
+              </a:tr>
+              <a:tr h="1044626">
+                <a:tc>
+                  <a:txBody>
+                    <a:bodyPr/>
+                    <a:lstStyle/>
+                    <a:p>
+                      <a:r>
+                        <a:rPr lang="es-MX" sz="1100" b="1" kern="1200" dirty="0">
+                          <a:solidFill>
+                            <a:schemeClr val="bg1"/>
+                          </a:solidFill>
+                          <a:latin typeface="+mn-lt"/>
+                          <a:ea typeface="+mn-ea"/>
+                          <a:cs typeface="+mn-cs"/>
+                        </a:rPr>
+                        <a:t>CARPETAS DE INVESTIGACIÓN</a:t>
+                      </a:r>
+                    </a:p>
+                  </a:txBody>
+                  <a:tcPr>
+                    <a:solidFill>
+                      <a:schemeClr val="accent1">
+                        <a:lumMod val="75000"/>
+                      </a:schemeClr>
+                    </a:solidFill>
+                  </a:tcPr>
+                </a:tc>
+                <a:tc gridSpan="2">
+                  <a:txBody>
+                    <a:bodyPr/>
+                    <a:lstStyle/>
+                    <a:p>
+                      <a:pPr marL="0" indent="0" algn="l" defTabSz="914400" rtl="0" eaLnBrk="1" latinLnBrk="0" hangingPunct="1">
+                        <a:buFont typeface="Arial" panose="020B0604020202020204" pitchFamily="34" charset="0"/>
+                        <a:buNone/>
+                      </a:pPr>
+                      <a:r>
+                        <a:rPr lang="es-MX" sz="1100" kern="1200">
+                          <a:solidFill>
+                            <a:schemeClr val="dk1"/>
+                          </a:solidFill>
+                          <a:latin typeface="+mn-lt"/>
+                          <a:ea typeface="+mn-ea"/>
+                          <a:cs typeface="+mn-cs"/>
+                        </a:rPr>
+                        <a:t>
+• CI/RIN/00425/06-23 Contra la Salud</a:t>
+                      </a:r>
+                      <a:endParaRPr lang="es-MX" sz="1100" kern="1200" dirty="0">
+                        <a:solidFill>
+                          <a:schemeClr val="dk1"/>
+                        </a:solidFill>
+                        <a:latin typeface="+mn-lt"/>
+                        <a:ea typeface="+mn-ea"/>
+                        <a:cs typeface="+mn-cs"/>
+                      </a:endParaRPr>
+                    </a:p>
+                  </a:txBody>
+                  <a:tcPr/>
+                </a:tc>
+                <a:tc hMerge="1">
+                  <a:txBody>
+                    <a:bodyPr/>
+                    <a:lstStyle/>
+                    <a:p>
+                      <a:endParaRPr lang="es-MX"/>
+                    </a:p>
+                  </a:txBody>
+                  <a:tcPr/>
+                </a:tc>
+                <a:extLst>
+                  <a:ext uri="{0D108BD9-81ED-4DB2-BD59-A6C34878D82A}">
+                    <a16:rowId xmlns:a16="http://schemas.microsoft.com/office/drawing/2014/main" val="3218073216"/>
+                  </a:ext>
+                </a:extLst>
+              </a:tr>
+              <a:tr h="159387">
+                <a:tc>
+                  <a:txBody>
+                    <a:bodyPr/>
+                    <a:lstStyle/>
+                    <a:p>
+                      <a:pPr marL="0" marR="0" lvl="0" indent="0" algn="l" defTabSz="914400" rtl="0" eaLnBrk="1" fontAlgn="auto" latinLnBrk="0" hangingPunct="1">
+                        <a:lnSpc>
+                          <a:spcPct val="100000"/>
+                        </a:lnSpc>
+                        <a:spcBef>
+                          <a:spcPts val="0"/>
+                        </a:spcBef>
+                        <a:spcAft>
+                          <a:spcPts val="0"/>
+                        </a:spcAft>
+                        <a:buClrTx/>
+                        <a:buSzTx/>
+                        <a:buFontTx/>
+                        <a:buNone/>
+                        <a:tabLst/>
+                        <a:defRPr/>
+                      </a:pPr>
+                      <a:r>
+                        <a:rPr lang="es-MX" sz="1100" b="1" dirty="0">
+                          <a:solidFill>
+                            <a:schemeClr val="bg1"/>
+                          </a:solidFill>
+                        </a:rPr>
+                        <a:t>ORDENES DE APREHENSIÓN</a:t>
+                      </a:r>
+                    </a:p>
+                  </a:txBody>
+                  <a:tcPr>
+                    <a:solidFill>
+                      <a:schemeClr val="accent1">
+                        <a:lumMod val="75000"/>
+                      </a:schemeClr>
+                    </a:solidFill>
+                  </a:tcPr>
+                </a:tc>
+                <a:tc gridSpan="2">
+                  <a:txBody>
+                    <a:bodyPr/>
+                    <a:lstStyle/>
+                    <a:p>
+                      <a:pPr marL="0" indent="0" algn="l" defTabSz="914400" rtl="0" eaLnBrk="1" latinLnBrk="0" hangingPunct="1">
+                        <a:buFont typeface="Arial" panose="020B0604020202020204" pitchFamily="34" charset="0"/>
+                        <a:buNone/>
+                      </a:pPr>
+                      <a:r>
+                        <a:rPr lang="es-MX" sz="1100" kern="1200" dirty="0">
+                          <a:solidFill>
+                            <a:schemeClr val="dk1"/>
+                          </a:solidFill>
+                          <a:latin typeface="+mn-lt"/>
+                          <a:ea typeface="+mn-ea"/>
+                          <a:cs typeface="+mn-cs"/>
+                        </a:rPr>
+                        <a:t>
+• HOMICIDIO DOLOSO CALIFICADO — CUMPLIMENTADA</a:t>
+                      </a:r>
+                    </a:p>
+                  </a:txBody>
+                  <a:tcPr/>
+                </a:tc>
+                <a:tc hMerge="1">
+                  <a:txBody>
+                    <a:bodyPr/>
+                    <a:lstStyle/>
+                    <a:p>
+                      <a:endParaRPr lang="es-MX"/>
+                    </a:p>
+                  </a:txBody>
+                  <a:tcPr/>
+                </a:tc>
+                <a:extLst>
+                  <a:ext uri="{0D108BD9-81ED-4DB2-BD59-A6C34878D82A}">
+                    <a16:rowId xmlns:a16="http://schemas.microsoft.com/office/drawing/2014/main" val="3169124086"/>
+                  </a:ext>
+                </a:extLst>
+              </a:tr>
+              <a:tr h="795285">
+                <a:tc>
+                  <a:txBody>
+                    <a:bodyPr/>
+                    <a:lstStyle/>
+                    <a:p>
+                      <a:r>
+                        <a:rPr lang="es-MX" sz="1100" b="1" dirty="0"/>
+                        <a:t> </a:t>
+                      </a:r>
+                      <a:r>
+                        <a:rPr lang="es-MX" sz="1100" b="1" dirty="0">
+                          <a:solidFill>
+                            <a:schemeClr val="bg1"/>
+                          </a:solidFill>
+                        </a:rPr>
+                        <a:t>ESTATUS </a:t>
+                      </a:r>
+                    </a:p>
+                  </a:txBody>
+                  <a:tcPr>
+                    <a:solidFill>
+                      <a:schemeClr val="accent1">
+                        <a:lumMod val="75000"/>
+                      </a:schemeClr>
+                    </a:solidFill>
+                  </a:tcPr>
+                </a:tc>
+                <a:tc gridSpan="2">
+                  <a:txBody>
+                    <a:bodyPr/>
+                    <a:lstStyle/>
+                    <a:p>
+                      <a:pPr marL="0" marR="0" lvl="0" indent="0" algn="just" defTabSz="914400" rtl="0" eaLnBrk="1" fontAlgn="auto" latinLnBrk="0" hangingPunct="1">
+                        <a:lnSpc>
+                          <a:spcPct val="100000"/>
+                        </a:lnSpc>
+                        <a:spcBef>
+                          <a:spcPts val="0"/>
+                        </a:spcBef>
+                        <a:spcAft>
+                          <a:spcPts val="0"/>
+                        </a:spcAft>
+                        <a:buClrTx/>
+                        <a:buSzTx/>
+                        <a:buFont typeface="Arial" panose="020B0604020202020204" pitchFamily="34" charset="0"/>
+                        <a:buNone/>
+                        <a:tabLst/>
+                        <a:defRPr/>
+                      </a:pPr>
+                      <a:r>
+                        <a:rPr lang="es-MX" sz="1100" kern="1200" dirty="0">
+                          <a:solidFill>
+                            <a:schemeClr val="dk1"/>
+                          </a:solidFill>
+                          <a:latin typeface="+mn-lt"/>
+                          <a:ea typeface="+mn-ea"/>
+                          <a:cs typeface="+mn-cs"/>
+                        </a:rPr>
+                        <a:t>Sentenciado, se sentencio por violacion</a:t>
+                      </a:r>
+                    </a:p>
+                  </a:txBody>
+                  <a:tcPr/>
+                </a:tc>
+                <a:tc hMerge="1">
+                  <a:txBody>
+                    <a:bodyPr/>
+                    <a:lstStyle/>
+                    <a:p>
+                      <a:endParaRPr lang="es-MX"/>
+                    </a:p>
+                  </a:txBody>
+                  <a:tcPr/>
+                </a:tc>
+                <a:extLst>
+                  <a:ext uri="{0D108BD9-81ED-4DB2-BD59-A6C34878D82A}">
+                    <a16:rowId xmlns:a16="http://schemas.microsoft.com/office/drawing/2014/main" val="3558537792"/>
+                  </a:ext>
+                </a:extLst>
+              </a:tr>
+              <a:tr h="1786729">
+                <a:tc>
+                  <a:txBody>
+                    <a:bodyPr/>
+                    <a:lstStyle/>
+                    <a:p>
+                      <a:r>
+                        <a:rPr lang="es-MX" sz="1100" b="1" kern="1200" dirty="0">
+                          <a:solidFill>
+                            <a:schemeClr val="bg1"/>
+                          </a:solidFill>
+                          <a:latin typeface="+mn-lt"/>
+                          <a:ea typeface="+mn-ea"/>
+                          <a:cs typeface="+mn-cs"/>
+                        </a:rPr>
+                        <a:t>ASUNTOS RELACIONADOS</a:t>
+                      </a:r>
+                    </a:p>
+                  </a:txBody>
+                  <a:tcPr>
+                    <a:solidFill>
+                      <a:schemeClr val="accent1">
+                        <a:lumMod val="75000"/>
+                      </a:schemeClr>
+                    </a:solidFill>
+                  </a:tcPr>
+                </a:tc>
+                <a:tc gridSpan="2">
+                  <a:txBody>
+                    <a:bodyPr/>
+                    <a:lstStyle/>
+                    <a:p>
+                      <a:pPr marL="171450" indent="-171450" algn="just">
+                        <a:buFontTx/>
+                        <a:buChar char="-"/>
+                      </a:pPr>
+                      <a:r>
+                        <a:rPr lang="es-MX" sz="1100" kern="1200" dirty="0">
+                          <a:solidFill>
+                            <a:schemeClr val="dk1"/>
+                          </a:solidFill>
+                          <a:latin typeface="+mn-lt"/>
+                          <a:ea typeface="+mn-ea"/>
+                          <a:cs typeface="+mn-cs"/>
+                        </a:rPr>
+                        <a:t>Caso Jassiel Hechos en agravio de Jassiel Díaz Cardona, el pasado 30 de mayo de 2023, en el rancho conocido como  “la fogata” Potrero Salitrillo Monte, Rincón de Romos, Aguascalientes, cuando la victima viajaba a bordo de su automóvil Ford Focus sobre la carretera 22, fue perseguido por los responsables  Jonathan Josefath Castorena Rodríguez alias patroncito, Javier Esquivel Padilla alias “La Queta” y Ricardo Alberto Navarro Gonzales alias “El Ricas”, quienes lo alcanzaron para herirlo con disparos por arma de fuego, la victima falleció minutos mas tarde en el Hospital General de Rincón de Romos.</a:t>
+                      </a:r>
+                    </a:p>
+                    <a:p>
+                      <a:pPr marL="0" indent="0" algn="just">
+                        <a:buFontTx/>
+                        <a:buNone/>
+                      </a:pPr>
+                      <a:endParaRPr lang="es-MX" sz="1100" kern="1200" dirty="0">
+                        <a:solidFill>
+                          <a:schemeClr val="dk1"/>
+                        </a:solidFill>
+                        <a:latin typeface="+mn-lt"/>
+                        <a:ea typeface="+mn-ea"/>
+                        <a:cs typeface="+mn-cs"/>
+                      </a:endParaRPr>
+                    </a:p>
+                    <a:p>
+                      <a:pPr marL="0" indent="0" algn="just">
+                        <a:buFontTx/>
+                        <a:buNone/>
+                      </a:pPr>
+                      <a:endParaRPr lang="es-MX" sz="1100" kern="1200" dirty="0">
+                        <a:solidFill>
+                          <a:schemeClr val="dk1"/>
+                        </a:solidFill>
+                        <a:latin typeface="+mn-lt"/>
+                        <a:ea typeface="+mn-ea"/>
+                        <a:cs typeface="+mn-cs"/>
+                      </a:endParaRPr>
+                    </a:p>
+                    <a:p>
+                      <a:pPr marL="0" marR="0" lvl="0" indent="0" algn="just" defTabSz="914400" rtl="0" eaLnBrk="1" fontAlgn="auto" latinLnBrk="0" hangingPunct="1">
+                        <a:lnSpc>
+                          <a:spcPct val="100000"/>
+                        </a:lnSpc>
+                        <a:spcBef>
+                          <a:spcPts val="0"/>
+                        </a:spcBef>
+                        <a:spcAft>
+                          <a:spcPts val="0"/>
+                        </a:spcAft>
+                        <a:buClrTx/>
+                        <a:buSzTx/>
+                        <a:buFontTx/>
+                        <a:buNone/>
+                        <a:tabLst/>
+                        <a:defRPr/>
+                      </a:pPr>
+                      <a:r>
+                        <a:rPr lang="es-MX" sz="1100" kern="1200" dirty="0">
+                          <a:solidFill>
+                            <a:schemeClr val="dk1"/>
+                          </a:solidFill>
+                          <a:latin typeface="+mn-lt"/>
+                          <a:ea typeface="+mn-ea"/>
+                          <a:cs typeface="+mn-cs"/>
+                        </a:rPr>
+                        <a:t> </a:t>
+                      </a:r>
+                    </a:p>
+                    <a:p>
+                      <a:pPr marL="0" marR="0" lvl="0" indent="0" algn="just" defTabSz="914400" rtl="0" eaLnBrk="1" fontAlgn="auto" latinLnBrk="0" hangingPunct="1">
+                        <a:lnSpc>
+                          <a:spcPct val="100000"/>
+                        </a:lnSpc>
+                        <a:spcBef>
+                          <a:spcPts val="0"/>
+                        </a:spcBef>
+                        <a:spcAft>
+                          <a:spcPts val="0"/>
+                        </a:spcAft>
+                        <a:buClrTx/>
+                        <a:buSzTx/>
+                        <a:buFontTx/>
+                        <a:buNone/>
+                        <a:tabLst/>
+                        <a:defRPr/>
+                      </a:pPr>
+                      <a:endParaRPr lang="es-MX" sz="1100" kern="1200" dirty="0">
+                        <a:solidFill>
+                          <a:schemeClr val="dk1"/>
+                        </a:solidFill>
+                        <a:latin typeface="+mn-lt"/>
+                        <a:ea typeface="+mn-ea"/>
+                        <a:cs typeface="+mn-cs"/>
+                      </a:endParaRPr>
+                    </a:p>
+                    <a:p>
+                      <a:pPr marL="0" marR="0" lvl="0" indent="0" algn="just" defTabSz="914400" rtl="0" eaLnBrk="1" fontAlgn="auto" latinLnBrk="0" hangingPunct="1">
+                        <a:lnSpc>
+                          <a:spcPct val="100000"/>
+                        </a:lnSpc>
+                        <a:spcBef>
+                          <a:spcPts val="0"/>
+                        </a:spcBef>
+                        <a:spcAft>
+                          <a:spcPts val="0"/>
+                        </a:spcAft>
+                        <a:buClrTx/>
+                        <a:buSzTx/>
+                        <a:buFontTx/>
+                        <a:buNone/>
+                        <a:tabLst/>
+                        <a:defRPr/>
+                      </a:pPr>
+                      <a:r>
+                        <a:rPr lang="es-MX" sz="1100" kern="1200" dirty="0">
+                          <a:solidFill>
+                            <a:schemeClr val="dk1"/>
+                          </a:solidFill>
+                          <a:latin typeface="+mn-lt"/>
+                          <a:ea typeface="+mn-ea"/>
+                          <a:cs typeface="+mn-cs"/>
+                        </a:rPr>
+                        <a:t>[V2] </a:t>
+                      </a:r>
+                    </a:p>
+                    <a:p>
+                      <a:pPr marL="0" indent="0" algn="just">
+                        <a:buFontTx/>
+                        <a:buNone/>
+                      </a:pPr>
+                      <a:endParaRPr lang="es-MX" sz="1100" kern="1200" dirty="0">
+                        <a:solidFill>
+                          <a:schemeClr val="dk1"/>
+                        </a:solidFill>
+                        <a:latin typeface="+mn-lt"/>
+                        <a:ea typeface="+mn-ea"/>
+                        <a:cs typeface="+mn-cs"/>
+                      </a:endParaRPr>
+                    </a:p>
+                  </a:txBody>
+                  <a:tcPr/>
+                </a:tc>
+                <a:tc hMerge="1">
+                  <a:txBody>
+                    <a:bodyPr/>
+                    <a:lstStyle/>
+                    <a:p>
+                      <a:endParaRPr lang="es-MX"/>
+                    </a:p>
+                  </a:txBody>
+                  <a:tcPr/>
+                </a:tc>
+                <a:extLst>
+                  <a:ext uri="{0D108BD9-81ED-4DB2-BD59-A6C34878D82A}">
+                    <a16:rowId xmlns:a16="http://schemas.microsoft.com/office/drawing/2014/main" val="4024071236"/>
+                  </a:ext>
+                </a:extLst>
+              </a:tr>
+            </a:tbl>
+          </a:graphicData>
+        </a:graphic>
+      </p:graphicFrame>
+      <p:pic>
+        <p:nvPicPr>
+          <p:cNvPr id="7" name="[FP]" descr="[FP]">
+            <a:extLst>
+              <a:ext uri="{FF2B5EF4-FFF2-40B4-BE49-F238E27FC236}">
+                <a16:creationId xmlns:a16="http://schemas.microsoft.com/office/drawing/2014/main" id="{C80E713A-27D7-471A-9297-6CD4151A9971}"/>
+              </a:ext>
+            </a:extLst>
+          </p:cNvPr>
+          <p:cNvPicPr>
+            <a:picLocks noChangeAspect="1"/>
+          </p:cNvPicPr>
+          <p:nvPr/>
+        </p:nvPicPr>
+        <p:blipFill>
+          <a:blip r:embed="Rd063ed8a8f6d46c6">
             <a:extLst>
               <a:ext uri="{28A0092B-C50C-407E-A947-70E740481C1C}">
                 <a14:useLocalDpi xmlns:a14="http://schemas.microsoft.com/office/drawing/2010/main" val="0"/>

--- a/Objetivos Prioritarios/Salidas/informe_detenidos.pptx
+++ b/Objetivos Prioritarios/Salidas/informe_detenidos.pptx
@@ -5,11 +5,7 @@
     <p:sldMasterId id="2147483648" r:id="rId1"/>
   </p:sldMasterIdLst>
   <p:sldIdLst>
-    <p:sldId id="306" r:id="Rbcd760619b5746f2"/>
-    <p:sldId id="307" r:id="R0beceae613bb4902"/>
-    <p:sldId id="308" r:id="Re3a5ce31a0f04d3b"/>
-    <p:sldId id="309" r:id="Rbc85f29568024fc5"/>
-    <p:sldId id="310" r:id="R9841bbb94f4a48e2"/>
+    <p:sldId id="306" r:id="Rdc6f03d1557f4334"/>
   </p:sldIdLst>
   <p:sldSz cx="12192000" cy="6858000"/>
   <p:notesSz cx="6858000" cy="9144000"/>
@@ -4197,7 +4193,7 @@
           <p:nvPr/>
         </p:nvPicPr>
         <p:blipFill>
-          <a:blip r:embed="R2dd93ea32b9e45ef"/>
+          <a:blip r:embed="R18b6c7f8e73f449d"/>
           <a:stretch>
             <a:fillRect/>
           </a:stretch>
@@ -4273,7 +4269,7 @@
                     <a:p>
                       <a:r>
                         <a:rPr lang="es-MX" sz="1600" dirty="0"/>
-                        <a:t>LUIS ARTURO PADILLA HERNANDEZ</a:t>
+                        <a:t>ENRIQUE GUERRERO DIAZ</a:t>
                       </a:r>
                     </a:p>
                   </a:txBody>
@@ -4336,7 +4332,7 @@
                     <a:p>
                       <a:r>
                         <a:rPr lang="es-MX" sz="1200" b="1" dirty="0"/>
-                        <a:t>CJNG</a:t>
+                        <a:t/>
                       </a:r>
                     </a:p>
                   </a:txBody>
@@ -4417,11 +4413,10 @@
                       <a:r>
                         <a:rPr lang="es-MX" sz="1100" dirty="0"/>
                         <a:t>
-• Contra la Salud — 22/05/2020 17:50
-• Abigeato (Robo rual) — 19/05/2011 20:30
-• Abigeato (Robo rual) — 19/05/2011 20:00
-• Robo calificado / Sin Detalle — 08/11/2004 12:30
-• Robo calificado / Sin Detalle — 10/04/2003 16:00</a:t>
+• Contra la Salud — 12/04/2021 15:00
+• Contra la Salud — 17/01/2021 00:00
+• Contra la Salud — 28/08/2020 23:29
+• Lesiones Dolosas — 10/06/2003 15:30</a:t>
                       </a:r>
                     </a:p>
                   </a:txBody>
@@ -4489,11 +4484,8 @@
                           <a:cs typeface="+mn-cs"/>
                         </a:rPr>
                         <a:t>
-• CI/AGS/01228/01-23 Privación ilegal de la libertad
-• CI/AGS/01718/01-23 Contra la Salud
-• CI/AGS/06518/03-23 Privación ilegal de la libertad
-• CI/AGS/11529/05-20 Contra la Salud
-• DGAP/AGS/06938/05-11 Robo calificado</a:t>
+• DGAP/RIN/00199/07-12 Robo calificado
+• CI/AGS/10372/05-22 Contra la Salud</a:t>
                       </a:r>
                       <a:endParaRPr lang="es-MX" sz="1100" kern="1200" dirty="0">
                         <a:solidFill>
@@ -4583,11 +4575,7 @@
                           <a:cs typeface="+mn-cs"/>
                         </a:rPr>
                         <a:t>
-• ROBO CALIFICADO — CUMPLIMENTADA
-• ROBO CALIFICADO — CANCELADO
-• DESAPARICION FORZADA DE PERSONAS — CUMPLIMENTADA
-• CONTRA LA SALUD — CUMPLIMENTADA
-• PRIVACION ILEGAL DE LA LIBERTAD — CUMPLIMENTADA</a:t>
+• SECUESTRO — CUMPLIMENTADA</a:t>
                       </a:r>
                     </a:p>
                   </a:txBody>
@@ -4668,7 +4656,8 @@
                           <a:ea typeface="+mn-ea"/>
                           <a:cs typeface="+mn-cs"/>
                         </a:rPr>
-                        <a:t>Sentenciado, Se sentencio por violación a la persona</a:t>
+                        <a:t>Sentenciado, Sentenciado, pena acumulada de 220 años de prisión, por privación ilegal de la libertad en su modalidad de secuestro agravado en contra de Ma. Juana Montoya Gonzáles y Juan Gabriel Gutiérrez Marín,
+</a:t>
                       </a:r>
                     </a:p>
                   </a:txBody>
@@ -4735,847 +4724,7 @@
                           <a:ea typeface="+mn-ea"/>
                           <a:cs typeface="+mn-cs"/>
                         </a:rPr>
-                        <a:t>Caso doña Juana  LEO Occisos Ma. Juana Montoya Gonzáles y Juan Gabriel Gutiérrez Marín, hechos ocurridos el 27 de junio de 2022, cuando las victimas en primera instancia fueron privados de su libertad en su domicilio ubicado en el municipio de Rincón de Romos y posteriormente  localizados sin vida en las inmediaciones del predio rustico “el charquito
-LEO 588</a:t>
-                      </a:r>
-                    </a:p>
-                    <a:p>
-                      <a:pPr marL="0" indent="0" algn="just">
-                        <a:buFontTx/>
-                        <a:buNone/>
-                      </a:pPr>
-                      <a:endParaRPr lang="es-MX" sz="1100" kern="1200" dirty="0">
-                        <a:solidFill>
-                          <a:schemeClr val="dk1"/>
-                        </a:solidFill>
-                        <a:latin typeface="+mn-lt"/>
-                        <a:ea typeface="+mn-ea"/>
-                        <a:cs typeface="+mn-cs"/>
-                      </a:endParaRPr>
-                    </a:p>
-                    <a:p>
-                      <a:pPr marL="0" indent="0" algn="just">
-                        <a:buFontTx/>
-                        <a:buNone/>
-                      </a:pPr>
-                      <a:endParaRPr lang="es-MX" sz="1100" kern="1200" dirty="0">
-                        <a:solidFill>
-                          <a:schemeClr val="dk1"/>
-                        </a:solidFill>
-                        <a:latin typeface="+mn-lt"/>
-                        <a:ea typeface="+mn-ea"/>
-                        <a:cs typeface="+mn-cs"/>
-                      </a:endParaRPr>
-                    </a:p>
-                    <a:p>
-                      <a:pPr marL="0" marR="0" lvl="0" indent="0" algn="just" defTabSz="914400" rtl="0" eaLnBrk="1" fontAlgn="auto" latinLnBrk="0" hangingPunct="1">
-                        <a:lnSpc>
-                          <a:spcPct val="100000"/>
-                        </a:lnSpc>
-                        <a:spcBef>
-                          <a:spcPts val="0"/>
-                        </a:spcBef>
-                        <a:spcAft>
-                          <a:spcPts val="0"/>
-                        </a:spcAft>
-                        <a:buClrTx/>
-                        <a:buSzTx/>
-                        <a:buFontTx/>
-                        <a:buNone/>
-                        <a:tabLst/>
-                        <a:defRPr/>
-                      </a:pPr>
-                      <a:r>
-                        <a:rPr lang="es-MX" sz="1100" kern="1200" dirty="0">
-                          <a:solidFill>
-                            <a:schemeClr val="dk1"/>
-                          </a:solidFill>
-                          <a:latin typeface="+mn-lt"/>
-                          <a:ea typeface="+mn-ea"/>
-                          <a:cs typeface="+mn-cs"/>
-                        </a:rPr>
-                        <a:t>LEONARDO MORFIN ESQUIVEL </a:t>
-                      </a:r>
-                    </a:p>
-                    <a:p>
-                      <a:pPr marL="0" marR="0" lvl="0" indent="0" algn="just" defTabSz="914400" rtl="0" eaLnBrk="1" fontAlgn="auto" latinLnBrk="0" hangingPunct="1">
-                        <a:lnSpc>
-                          <a:spcPct val="100000"/>
-                        </a:lnSpc>
-                        <a:spcBef>
-                          <a:spcPts val="0"/>
-                        </a:spcBef>
-                        <a:spcAft>
-                          <a:spcPts val="0"/>
-                        </a:spcAft>
-                        <a:buClrTx/>
-                        <a:buSzTx/>
-                        <a:buFontTx/>
-                        <a:buNone/>
-                        <a:tabLst/>
-                        <a:defRPr/>
-                      </a:pPr>
-                      <a:endParaRPr lang="es-MX" sz="1100" kern="1200" dirty="0">
-                        <a:solidFill>
-                          <a:schemeClr val="dk1"/>
-                        </a:solidFill>
-                        <a:latin typeface="+mn-lt"/>
-                        <a:ea typeface="+mn-ea"/>
-                        <a:cs typeface="+mn-cs"/>
-                      </a:endParaRPr>
-                    </a:p>
-                    <a:p>
-                      <a:pPr marL="0" marR="0" lvl="0" indent="0" algn="just" defTabSz="914400" rtl="0" eaLnBrk="1" fontAlgn="auto" latinLnBrk="0" hangingPunct="1">
-                        <a:lnSpc>
-                          <a:spcPct val="100000"/>
-                        </a:lnSpc>
-                        <a:spcBef>
-                          <a:spcPts val="0"/>
-                        </a:spcBef>
-                        <a:spcAft>
-                          <a:spcPts val="0"/>
-                        </a:spcAft>
-                        <a:buClrTx/>
-                        <a:buSzTx/>
-                        <a:buFontTx/>
-                        <a:buNone/>
-                        <a:tabLst/>
-                        <a:defRPr/>
-                      </a:pPr>
-                      <a:r>
-                        <a:rPr lang="es-MX" sz="1100" kern="1200" dirty="0">
-                          <a:solidFill>
-                            <a:schemeClr val="dk1"/>
-                          </a:solidFill>
-                          <a:latin typeface="+mn-lt"/>
-                          <a:ea typeface="+mn-ea"/>
-                          <a:cs typeface="+mn-cs"/>
-                        </a:rPr>
-                        <a:t>CARLOS LEONARDO CRUZ CARRILLO </a:t>
-                      </a:r>
-                    </a:p>
-                    <a:p>
-                      <a:pPr marL="0" indent="0" algn="just">
-                        <a:buFontTx/>
-                        <a:buNone/>
-                      </a:pPr>
-                      <a:endParaRPr lang="es-MX" sz="1100" kern="1200" dirty="0">
-                        <a:solidFill>
-                          <a:schemeClr val="dk1"/>
-                        </a:solidFill>
-                        <a:latin typeface="+mn-lt"/>
-                        <a:ea typeface="+mn-ea"/>
-                        <a:cs typeface="+mn-cs"/>
-                      </a:endParaRPr>
-                    </a:p>
-                  </a:txBody>
-                  <a:tcPr/>
-                </a:tc>
-                <a:tc hMerge="1">
-                  <a:txBody>
-                    <a:bodyPr/>
-                    <a:lstStyle/>
-                    <a:p>
-                      <a:endParaRPr lang="es-MX"/>
-                    </a:p>
-                  </a:txBody>
-                  <a:tcPr/>
-                </a:tc>
-                <a:extLst>
-                  <a:ext uri="{0D108BD9-81ED-4DB2-BD59-A6C34878D82A}">
-                    <a16:rowId xmlns:a16="http://schemas.microsoft.com/office/drawing/2014/main" val="4024071236"/>
-                  </a:ext>
-                </a:extLst>
-              </a:tr>
-            </a:tbl>
-          </a:graphicData>
-        </a:graphic>
-      </p:graphicFrame>
-      <p:pic>
-        <p:nvPicPr>
-          <p:cNvPr id="7" name="[FP]" descr="[FP]">
-            <a:extLst>
-              <a:ext uri="{FF2B5EF4-FFF2-40B4-BE49-F238E27FC236}">
-                <a16:creationId xmlns:a16="http://schemas.microsoft.com/office/drawing/2014/main" id="{C80E713A-27D7-471A-9297-6CD4151A9971}"/>
-              </a:ext>
-            </a:extLst>
-          </p:cNvPr>
-          <p:cNvPicPr>
-            <a:picLocks noChangeAspect="1"/>
-          </p:cNvPicPr>
-          <p:nvPr/>
-        </p:nvPicPr>
-        <p:blipFill>
-          <a:blip r:embed="R277d8d8277f24ff1">
-            <a:extLst>
-              <a:ext uri="{28A0092B-C50C-407E-A947-70E740481C1C}">
-                <a14:useLocalDpi xmlns:a14="http://schemas.microsoft.com/office/drawing/2010/main" val="0"/>
-              </a:ext>
-            </a:extLst>
-          </a:blip>
-          <a:stretch>
-            <a:fillRect/>
-          </a:stretch>
-        </p:blipFill>
-        <p:spPr>
-          <a:xfrm>
-            <a:off x="214361" y="1714348"/>
-            <a:ext cx="2902475" cy="4351338"/>
-          </a:xfrm>
-          <a:prstGeom prst="rect">
-            <a:avLst/>
-          </a:prstGeom>
-        </p:spPr>
-      </p:pic>
-      <p:pic>
-        <p:nvPicPr>
-          <p:cNvPr id="11" name="[FV1]" descr="[FV1]">
-            <a:extLst>
-              <a:ext uri="{FF2B5EF4-FFF2-40B4-BE49-F238E27FC236}">
-                <a16:creationId xmlns:a16="http://schemas.microsoft.com/office/drawing/2014/main" id="{95A1EC47-8063-435B-9340-91DBB33FE951}"/>
-              </a:ext>
-            </a:extLst>
-          </p:cNvPr>
-          <p:cNvPicPr>
-            <a:picLocks noChangeAspect="1"/>
-          </p:cNvPicPr>
-          <p:nvPr/>
-        </p:nvPicPr>
-        <p:blipFill>
-          <a:blip r:embed="rId3">
-            <a:extLst>
-              <a:ext uri="{28A0092B-C50C-407E-A947-70E740481C1C}">
-                <a14:useLocalDpi xmlns:a14="http://schemas.microsoft.com/office/drawing/2010/main" val="0"/>
-              </a:ext>
-            </a:extLst>
-          </a:blip>
-          <a:stretch>
-            <a:fillRect/>
-          </a:stretch>
-        </p:blipFill>
-        <p:spPr>
-          <a:xfrm>
-            <a:off x="7584982" y="5672321"/>
-            <a:ext cx="665008" cy="827694"/>
-          </a:xfrm>
-          <a:prstGeom prst="rect">
-            <a:avLst/>
-          </a:prstGeom>
-        </p:spPr>
-      </p:pic>
-      <p:pic>
-        <p:nvPicPr>
-          <p:cNvPr id="13" name="[FV2]" descr="[FV2]">
-            <a:extLst>
-              <a:ext uri="{FF2B5EF4-FFF2-40B4-BE49-F238E27FC236}">
-                <a16:creationId xmlns:a16="http://schemas.microsoft.com/office/drawing/2014/main" id="{65D6E13E-B1E1-4CA4-8F00-9E73059CD0BD}"/>
-              </a:ext>
-            </a:extLst>
-          </p:cNvPr>
-          <p:cNvPicPr>
-            <a:picLocks noChangeAspect="1"/>
-          </p:cNvPicPr>
-          <p:nvPr/>
-        </p:nvPicPr>
-        <p:blipFill>
-          <a:blip r:embed="rId3">
-            <a:extLst>
-              <a:ext uri="{28A0092B-C50C-407E-A947-70E740481C1C}">
-                <a14:useLocalDpi xmlns:a14="http://schemas.microsoft.com/office/drawing/2010/main" val="0"/>
-              </a:ext>
-            </a:extLst>
-          </a:blip>
-          <a:stretch>
-            <a:fillRect/>
-          </a:stretch>
-        </p:blipFill>
-        <p:spPr>
-          <a:xfrm>
-            <a:off x="9993131" y="5680558"/>
-            <a:ext cx="665008" cy="827694"/>
-          </a:xfrm>
-          <a:prstGeom prst="rect">
-            <a:avLst/>
-          </a:prstGeom>
-        </p:spPr>
-      </p:pic>
-    </p:spTree>
-    <p:extLst>
-      <p:ext uri="{BB962C8B-B14F-4D97-AF65-F5344CB8AC3E}">
-        <p14:creationId xmlns:p14="http://schemas.microsoft.com/office/powerpoint/2010/main" val="2124728287"/>
-      </p:ext>
-    </p:extLst>
-  </p:cSld>
-  <p:clrMapOvr>
-    <a:masterClrMapping/>
-  </p:clrMapOvr>
-</p:sld>
-</file>
-
-<file path=ppt/slides/slide3.xml><?xml version="1.0" encoding="utf-8"?>
-<p:sld xmlns:a16="http://schemas.microsoft.com/office/drawing/2014/main" xmlns:p14="http://schemas.microsoft.com/office/powerpoint/2010/main" xmlns:a14="http://schemas.microsoft.com/office/drawing/2010/main" xmlns:a="http://schemas.openxmlformats.org/drawingml/2006/main" xmlns:r="http://schemas.openxmlformats.org/officeDocument/2006/relationships" xmlns:p="http://schemas.openxmlformats.org/presentationml/2006/main">
-  <p:cSld>
-    <p:spTree>
-      <p:nvGrpSpPr>
-        <p:cNvPr id="1" name=""/>
-        <p:cNvGrpSpPr/>
-        <p:nvPr/>
-      </p:nvGrpSpPr>
-      <p:grpSpPr>
-        <a:xfrm>
-          <a:off x="0" y="0"/>
-          <a:ext cx="0" cy="0"/>
-          <a:chOff x="0" y="0"/>
-          <a:chExt cx="0" cy="0"/>
-        </a:xfrm>
-      </p:grpSpPr>
-      <p:pic>
-        <p:nvPicPr>
-          <p:cNvPr id="4" name="[FONDO]" descr="[FONDO]">
-            <a:extLst>
-              <a:ext uri="{FF2B5EF4-FFF2-40B4-BE49-F238E27FC236}">
-                <a16:creationId xmlns:a16="http://schemas.microsoft.com/office/drawing/2014/main" id="{AE2FEBDB-ED54-FF79-0EF8-AA9E7C8EA417}"/>
-              </a:ext>
-            </a:extLst>
-          </p:cNvPr>
-          <p:cNvPicPr>
-            <a:picLocks noChangeAspect="1"/>
-          </p:cNvPicPr>
-          <p:nvPr/>
-        </p:nvPicPr>
-        <p:blipFill>
-          <a:blip r:embed="R2cbd285bd5b64c0d"/>
-          <a:stretch>
-            <a:fillRect/>
-          </a:stretch>
-        </p:blipFill>
-        <p:spPr>
-          <a:xfrm>
-            <a:off x="1" y="0"/>
-            <a:ext cx="12401280" cy="6969519"/>
-          </a:xfrm>
-          <a:prstGeom prst="rect">
-            <a:avLst/>
-          </a:prstGeom>
-        </p:spPr>
-      </p:pic>
-      <p:graphicFrame>
-        <p:nvGraphicFramePr>
-          <p:cNvPr id="10" name="Tabla 9">
-            <a:extLst>
-              <a:ext uri="{FF2B5EF4-FFF2-40B4-BE49-F238E27FC236}">
-                <a16:creationId xmlns:a16="http://schemas.microsoft.com/office/drawing/2014/main" id="{BC4CEC18-7797-7786-F517-147A6AD7242D}"/>
-              </a:ext>
-            </a:extLst>
-          </p:cNvPr>
-          <p:cNvGraphicFramePr>
-            <a:graphicFrameLocks noGrp="1"/>
-          </p:cNvGraphicFramePr>
-          <p:nvPr>
-            <p:extLst>
-              <p:ext uri="{D42A27DB-BD31-4B8C-83A1-F6EECF244321}">
-                <p14:modId xmlns:p14="http://schemas.microsoft.com/office/powerpoint/2010/main" val="1791400885"/>
-              </p:ext>
-            </p:extLst>
-          </p:nvPr>
-        </p:nvGraphicFramePr>
-        <p:xfrm>
-          <a:off x="3252159" y="1370610"/>
-          <a:ext cx="9149122" cy="5266098"/>
-        </p:xfrm>
-        <a:graphic>
-          <a:graphicData uri="http://schemas.openxmlformats.org/drawingml/2006/table">
-            <a:tbl>
-              <a:tblPr firstRow="1" bandRow="1">
-                <a:tableStyleId>{5C22544A-7EE6-4342-B048-85BDC9FD1C3A}</a:tableStyleId>
-              </a:tblPr>
-              <a:tblGrid>
-                <a:gridCol w="2462314">
-                  <a:extLst>
-                    <a:ext uri="{9D8B030D-6E8A-4147-A177-3AD203B41FA5}">
-                      <a16:colId xmlns:a16="http://schemas.microsoft.com/office/drawing/2014/main" val="2746230745"/>
-                    </a:ext>
-                  </a:extLst>
-                </a:gridCol>
-                <a:gridCol w="3343404">
-                  <a:extLst>
-                    <a:ext uri="{9D8B030D-6E8A-4147-A177-3AD203B41FA5}">
-                      <a16:colId xmlns:a16="http://schemas.microsoft.com/office/drawing/2014/main" val="3075986152"/>
-                    </a:ext>
-                  </a:extLst>
-                </a:gridCol>
-                <a:gridCol w="3343404">
-                  <a:extLst>
-                    <a:ext uri="{9D8B030D-6E8A-4147-A177-3AD203B41FA5}">
-                      <a16:colId xmlns:a16="http://schemas.microsoft.com/office/drawing/2014/main" val="4044500939"/>
-                    </a:ext>
-                  </a:extLst>
-                </a:gridCol>
-              </a:tblGrid>
-              <a:tr h="319663">
-                <a:tc gridSpan="3">
-                  <a:txBody>
-                    <a:bodyPr/>
-                    <a:lstStyle/>
-                    <a:p>
-                      <a:r>
-                        <a:rPr lang="es-MX" sz="1600" dirty="0"/>
-                        <a:t>RICARDO OMAR HERRERA GUERRERO</a:t>
-                      </a:r>
-                    </a:p>
-                  </a:txBody>
-                  <a:tcPr/>
-                </a:tc>
-                <a:tc hMerge="1">
-                  <a:txBody>
-                    <a:bodyPr/>
-                    <a:lstStyle/>
-                    <a:p>
-                      <a:endParaRPr lang="es-MX" dirty="0"/>
-                    </a:p>
-                  </a:txBody>
-                  <a:tcPr/>
-                </a:tc>
-                <a:tc hMerge="1">
-                  <a:txBody>
-                    <a:bodyPr/>
-                    <a:lstStyle/>
-                    <a:p>
-                      <a:endParaRPr lang="es-MX"/>
-                    </a:p>
-                  </a:txBody>
-                  <a:tcPr/>
-                </a:tc>
-                <a:extLst>
-                  <a:ext uri="{0D108BD9-81ED-4DB2-BD59-A6C34878D82A}">
-                    <a16:rowId xmlns:a16="http://schemas.microsoft.com/office/drawing/2014/main" val="3979505418"/>
-                  </a:ext>
-                </a:extLst>
-              </a:tr>
-              <a:tr h="319663">
-                <a:tc>
-                  <a:txBody>
-                    <a:bodyPr/>
-                    <a:lstStyle/>
-                    <a:p>
-                      <a:r>
-                        <a:rPr lang="es-MX" sz="1100" b="1" dirty="0">
-                          <a:solidFill>
-                            <a:schemeClr val="bg1"/>
-                          </a:solidFill>
-                        </a:rPr>
-                        <a:t>GRUPO DELICTIVO</a:t>
-                      </a:r>
-                    </a:p>
-                  </a:txBody>
-                  <a:tcPr>
-                    <a:solidFill>
-                      <a:schemeClr val="accent1">
-                        <a:lumMod val="75000"/>
-                      </a:schemeClr>
-                    </a:solidFill>
-                  </a:tcPr>
-                </a:tc>
-                <a:tc>
-                  <a:txBody>
-                    <a:bodyPr/>
-                    <a:lstStyle/>
-                    <a:p>
-                      <a:r>
-                        <a:rPr lang="es-MX" sz="1200" b="1" dirty="0"/>
-                        <a:t>CJNG</a:t>
-                      </a:r>
-                    </a:p>
-                  </a:txBody>
-                  <a:tcPr/>
-                </a:tc>
-                <a:tc>
-                  <a:txBody>
-                    <a:bodyPr/>
-                    <a:lstStyle/>
-                    <a:p>
-                      <a:pPr marL="0" marR="0" lvl="0" indent="0" algn="l" defTabSz="914400" rtl="0" eaLnBrk="1" fontAlgn="auto" latinLnBrk="0" hangingPunct="1">
-                        <a:lnSpc>
-                          <a:spcPct val="100000"/>
-                        </a:lnSpc>
-                        <a:spcBef>
-                          <a:spcPts val="0"/>
-                        </a:spcBef>
-                        <a:spcAft>
-                          <a:spcPts val="0"/>
-                        </a:spcAft>
-                        <a:buClrTx/>
-                        <a:buSzTx/>
-                        <a:buFontTx/>
-                        <a:buNone/>
-                        <a:tabLst/>
-                        <a:defRPr/>
-                      </a:pPr>
-                      <a:r>
-                        <a:rPr lang="es-MX" sz="1200" b="1" dirty="0"/>
-                        <a:t>EJECUTOR</a:t>
-                      </a:r>
-                    </a:p>
-                  </a:txBody>
-                  <a:tcPr/>
-                </a:tc>
-                <a:extLst>
-                  <a:ext uri="{0D108BD9-81ED-4DB2-BD59-A6C34878D82A}">
-                    <a16:rowId xmlns:a16="http://schemas.microsoft.com/office/drawing/2014/main" val="201189607"/>
-                  </a:ext>
-                </a:extLst>
-              </a:tr>
-              <a:tr h="725435">
-                <a:tc>
-                  <a:txBody>
-                    <a:bodyPr/>
-                    <a:lstStyle/>
-                    <a:p>
-                      <a:r>
-                        <a:rPr lang="es-MX" sz="1100" b="1" kern="1200" dirty="0">
-                          <a:solidFill>
-                            <a:schemeClr val="bg1"/>
-                          </a:solidFill>
-                          <a:latin typeface="+mn-lt"/>
-                          <a:ea typeface="+mn-ea"/>
-                          <a:cs typeface="+mn-cs"/>
-                        </a:rPr>
-                        <a:t>DELITOS / INGRESOS</a:t>
-                      </a:r>
-                    </a:p>
-                  </a:txBody>
-                  <a:tcPr>
-                    <a:solidFill>
-                      <a:schemeClr val="accent1">
-                        <a:lumMod val="75000"/>
-                      </a:schemeClr>
-                    </a:solidFill>
-                  </a:tcPr>
-                </a:tc>
-                <a:tc gridSpan="2">
-                  <a:txBody>
-                    <a:bodyPr/>
-                    <a:lstStyle/>
-                    <a:p>
-                      <a:pPr marL="0" indent="0">
-                        <a:buFont typeface="Arial" panose="020B0604020202020204" pitchFamily="34" charset="0"/>
-                        <a:buNone/>
-                      </a:pPr>
-                      <a:r>
-                        <a:rPr lang="es-MX" sz="1100" dirty="0"/>
-                        <a:t>
-• Contra la Salud — 11/10/2019 10:10</a:t>
-                      </a:r>
-                    </a:p>
-                  </a:txBody>
-                  <a:tcPr/>
-                </a:tc>
-                <a:tc hMerge="1">
-                  <a:txBody>
-                    <a:bodyPr/>
-                    <a:lstStyle/>
-                    <a:p>
-                      <a:endParaRPr lang="es-MX"/>
-                    </a:p>
-                  </a:txBody>
-                  <a:tcPr/>
-                </a:tc>
-                <a:extLst>
-                  <a:ext uri="{0D108BD9-81ED-4DB2-BD59-A6C34878D82A}">
-                    <a16:rowId xmlns:a16="http://schemas.microsoft.com/office/drawing/2014/main" val="3340689267"/>
-                  </a:ext>
-                </a:extLst>
-              </a:tr>
-              <a:tr h="1044626">
-                <a:tc>
-                  <a:txBody>
-                    <a:bodyPr/>
-                    <a:lstStyle/>
-                    <a:p>
-                      <a:r>
-                        <a:rPr lang="es-MX" sz="1100" b="1" kern="1200" dirty="0">
-                          <a:solidFill>
-                            <a:schemeClr val="bg1"/>
-                          </a:solidFill>
-                          <a:latin typeface="+mn-lt"/>
-                          <a:ea typeface="+mn-ea"/>
-                          <a:cs typeface="+mn-cs"/>
-                        </a:rPr>
-                        <a:t>CARPETAS DE INVESTIGACIÓN</a:t>
-                      </a:r>
-                    </a:p>
-                  </a:txBody>
-                  <a:tcPr>
-                    <a:solidFill>
-                      <a:schemeClr val="accent1">
-                        <a:lumMod val="75000"/>
-                      </a:schemeClr>
-                    </a:solidFill>
-                  </a:tcPr>
-                </a:tc>
-                <a:tc gridSpan="2">
-                  <a:txBody>
-                    <a:bodyPr/>
-                    <a:lstStyle/>
-                    <a:p>
-                      <a:pPr marL="0" indent="0" algn="l" defTabSz="914400" rtl="0" eaLnBrk="1" latinLnBrk="0" hangingPunct="1">
-                        <a:buFont typeface="Arial" panose="020B0604020202020204" pitchFamily="34" charset="0"/>
-                        <a:buNone/>
-                      </a:pPr>
-                      <a:r>
-                        <a:rPr lang="es-MX" sz="1100" kern="1200">
-                          <a:solidFill>
-                            <a:schemeClr val="dk1"/>
-                          </a:solidFill>
-                          <a:latin typeface="+mn-lt"/>
-                          <a:ea typeface="+mn-ea"/>
-                          <a:cs typeface="+mn-cs"/>
-                        </a:rPr>
-                        <a:t>
-• CI/AGS/06518/03-23 Privación ilegal de la libertad
-• CI/RIN/00175/03-23 Contra la Salud
-• CI/RIN/00270/05-17 Robo calificado
-• CI/RIN/00343/05-23 Contra la Salud
-• CI/RIN/00351/06-22 Robo calificado</a:t>
-                      </a:r>
-                      <a:endParaRPr lang="es-MX" sz="1100" kern="1200" dirty="0">
-                        <a:solidFill>
-                          <a:schemeClr val="dk1"/>
-                        </a:solidFill>
-                        <a:latin typeface="+mn-lt"/>
-                        <a:ea typeface="+mn-ea"/>
-                        <a:cs typeface="+mn-cs"/>
-                      </a:endParaRPr>
-                    </a:p>
-                  </a:txBody>
-                  <a:tcPr/>
-                </a:tc>
-                <a:tc hMerge="1">
-                  <a:txBody>
-                    <a:bodyPr/>
-                    <a:lstStyle/>
-                    <a:p>
-                      <a:endParaRPr lang="es-MX"/>
-                    </a:p>
-                  </a:txBody>
-                  <a:tcPr/>
-                </a:tc>
-                <a:extLst>
-                  <a:ext uri="{0D108BD9-81ED-4DB2-BD59-A6C34878D82A}">
-                    <a16:rowId xmlns:a16="http://schemas.microsoft.com/office/drawing/2014/main" val="3218073216"/>
-                  </a:ext>
-                </a:extLst>
-              </a:tr>
-              <a:tr h="159387">
-                <a:tc>
-                  <a:txBody>
-                    <a:bodyPr/>
-                    <a:lstStyle/>
-                    <a:p>
-                      <a:pPr marL="0" marR="0" lvl="0" indent="0" algn="l" defTabSz="914400" rtl="0" eaLnBrk="1" fontAlgn="auto" latinLnBrk="0" hangingPunct="1">
-                        <a:lnSpc>
-                          <a:spcPct val="100000"/>
-                        </a:lnSpc>
-                        <a:spcBef>
-                          <a:spcPts val="0"/>
-                        </a:spcBef>
-                        <a:spcAft>
-                          <a:spcPts val="0"/>
-                        </a:spcAft>
-                        <a:buClrTx/>
-                        <a:buSzTx/>
-                        <a:buFontTx/>
-                        <a:buNone/>
-                        <a:tabLst/>
-                        <a:defRPr/>
-                      </a:pPr>
-                      <a:r>
-                        <a:rPr lang="es-MX" sz="1100" b="1" dirty="0">
-                          <a:solidFill>
-                            <a:schemeClr val="bg1"/>
-                          </a:solidFill>
-                        </a:rPr>
-                        <a:t>ORDENES DE APREHENSIÓN</a:t>
-                      </a:r>
-                    </a:p>
-                  </a:txBody>
-                  <a:tcPr>
-                    <a:solidFill>
-                      <a:schemeClr val="accent1">
-                        <a:lumMod val="75000"/>
-                      </a:schemeClr>
-                    </a:solidFill>
-                  </a:tcPr>
-                </a:tc>
-                <a:tc gridSpan="2">
-                  <a:txBody>
-                    <a:bodyPr/>
-                    <a:lstStyle/>
-                    <a:p>
-                      <a:pPr marL="0" indent="0" algn="l" defTabSz="914400" rtl="0" eaLnBrk="1" latinLnBrk="0" hangingPunct="1">
-                        <a:buFont typeface="Arial" panose="020B0604020202020204" pitchFamily="34" charset="0"/>
-                        <a:buNone/>
-                      </a:pPr>
-                      <a:r>
-                        <a:rPr lang="es-MX" sz="1100" kern="1200" dirty="0">
-                          <a:solidFill>
-                            <a:schemeClr val="dk1"/>
-                          </a:solidFill>
-                          <a:latin typeface="+mn-lt"/>
-                          <a:ea typeface="+mn-ea"/>
-                          <a:cs typeface="+mn-cs"/>
-                        </a:rPr>
-                        <a:t>
-• DESAPARICION FORZADA DE PERSONAS — CUMPLIMENTADA</a:t>
-                      </a:r>
-                    </a:p>
-                  </a:txBody>
-                  <a:tcPr/>
-                </a:tc>
-                <a:tc hMerge="1">
-                  <a:txBody>
-                    <a:bodyPr/>
-                    <a:lstStyle/>
-                    <a:p>
-                      <a:endParaRPr lang="es-MX"/>
-                    </a:p>
-                  </a:txBody>
-                  <a:tcPr/>
-                </a:tc>
-                <a:extLst>
-                  <a:ext uri="{0D108BD9-81ED-4DB2-BD59-A6C34878D82A}">
-                    <a16:rowId xmlns:a16="http://schemas.microsoft.com/office/drawing/2014/main" val="3169124086"/>
-                  </a:ext>
-                </a:extLst>
-              </a:tr>
-              <a:tr h="795285">
-                <a:tc>
-                  <a:txBody>
-                    <a:bodyPr/>
-                    <a:lstStyle/>
-                    <a:p>
-                      <a:r>
-                        <a:rPr lang="es-MX" sz="1100" b="1" dirty="0"/>
-                        <a:t> </a:t>
-                      </a:r>
-                      <a:r>
-                        <a:rPr lang="es-MX" sz="1100" b="1" dirty="0">
-                          <a:solidFill>
-                            <a:schemeClr val="bg1"/>
-                          </a:solidFill>
-                        </a:rPr>
-                        <a:t>ESTATUS </a:t>
-                      </a:r>
-                    </a:p>
-                  </a:txBody>
-                  <a:tcPr>
-                    <a:solidFill>
-                      <a:schemeClr val="accent1">
-                        <a:lumMod val="75000"/>
-                      </a:schemeClr>
-                    </a:solidFill>
-                  </a:tcPr>
-                </a:tc>
-                <a:tc gridSpan="2">
-                  <a:txBody>
-                    <a:bodyPr/>
-                    <a:lstStyle/>
-                    <a:p>
-                      <a:pPr marL="0" marR="0" lvl="0" indent="0" algn="just" defTabSz="914400" rtl="0" eaLnBrk="1" fontAlgn="auto" latinLnBrk="0" hangingPunct="1">
-                        <a:lnSpc>
-                          <a:spcPct val="100000"/>
-                        </a:lnSpc>
-                        <a:spcBef>
-                          <a:spcPts val="0"/>
-                        </a:spcBef>
-                        <a:spcAft>
-                          <a:spcPts val="0"/>
-                        </a:spcAft>
-                        <a:buClrTx/>
-                        <a:buSzTx/>
-                        <a:buFont typeface="Arial" panose="020B0604020202020204" pitchFamily="34" charset="0"/>
-                        <a:buNone/>
-                        <a:tabLst/>
-                        <a:defRPr/>
-                      </a:pPr>
-                      <a:r>
-                        <a:rPr lang="es-MX" sz="1100" kern="1200" dirty="0">
-                          <a:solidFill>
-                            <a:schemeClr val="dk1"/>
-                          </a:solidFill>
-                          <a:latin typeface="+mn-lt"/>
-                          <a:ea typeface="+mn-ea"/>
-                          <a:cs typeface="+mn-cs"/>
-                        </a:rPr>
-                        <a:t>Sentenciado, se sentencio por violacion</a:t>
-                      </a:r>
-                    </a:p>
-                  </a:txBody>
-                  <a:tcPr/>
-                </a:tc>
-                <a:tc hMerge="1">
-                  <a:txBody>
-                    <a:bodyPr/>
-                    <a:lstStyle/>
-                    <a:p>
-                      <a:endParaRPr lang="es-MX"/>
-                    </a:p>
-                  </a:txBody>
-                  <a:tcPr/>
-                </a:tc>
-                <a:extLst>
-                  <a:ext uri="{0D108BD9-81ED-4DB2-BD59-A6C34878D82A}">
-                    <a16:rowId xmlns:a16="http://schemas.microsoft.com/office/drawing/2014/main" val="3558537792"/>
-                  </a:ext>
-                </a:extLst>
-              </a:tr>
-              <a:tr h="1786729">
-                <a:tc>
-                  <a:txBody>
-                    <a:bodyPr/>
-                    <a:lstStyle/>
-                    <a:p>
-                      <a:r>
-                        <a:rPr lang="es-MX" sz="1100" b="1" kern="1200" dirty="0">
-                          <a:solidFill>
-                            <a:schemeClr val="bg1"/>
-                          </a:solidFill>
-                          <a:latin typeface="+mn-lt"/>
-                          <a:ea typeface="+mn-ea"/>
-                          <a:cs typeface="+mn-cs"/>
-                        </a:rPr>
-                        <a:t>ASUNTOS RELACIONADOS</a:t>
-                      </a:r>
-                    </a:p>
-                  </a:txBody>
-                  <a:tcPr>
-                    <a:solidFill>
-                      <a:schemeClr val="accent1">
-                        <a:lumMod val="75000"/>
-                      </a:schemeClr>
-                    </a:solidFill>
-                  </a:tcPr>
-                </a:tc>
-                <a:tc gridSpan="2">
-                  <a:txBody>
-                    <a:bodyPr/>
-                    <a:lstStyle/>
-                    <a:p>
-                      <a:pPr marL="171450" indent="-171450" algn="just">
-                        <a:buFontTx/>
-                        <a:buChar char="-"/>
-                      </a:pPr>
-                      <a:r>
-                        <a:rPr lang="es-MX" sz="1100" kern="1200" dirty="0">
-                          <a:solidFill>
-                            <a:schemeClr val="dk1"/>
-                          </a:solidFill>
-                          <a:latin typeface="+mn-lt"/>
-                          <a:ea typeface="+mn-ea"/>
-                          <a:cs typeface="+mn-cs"/>
-                        </a:rPr>
-                        <a:t>Sin Alias del Caso Hechos ocurridos el día 09 de marzo del 2023, cuando RICARDO OMAR HERRERA GUERRERO ALÍAS “PIOJO” Y/O “EL CHASCAS” Y/O “CHASQUERO”, irrumpió en el domicilio  ubicado en  calle 16 de septiembre Sur, número 706, en la Colonia Independencia, perteneciente al Municipio de Rincón de Romos, Aguascalientes, cuando las victimas de identidad reservada Victimas de identidad reservada A.G.P.H. y U.F.R.O. (Aún no localizadas) se encontraban en el interior. Sacándolas de dicho domicilio y llevándoselas a bordo de un vehículo, esto haciendo uso de la violencia, sin que hasta el momento se conozca su paradero. 
-</a:t>
+                        <a:t/>
                       </a:r>
                     </a:p>
                     <a:p>
@@ -5745,2525 +4894,7 @@
           <p:nvPr/>
         </p:nvPicPr>
         <p:blipFill>
-          <a:blip r:embed="Rb732f1a38ca04858">
-            <a:extLst>
-              <a:ext uri="{28A0092B-C50C-407E-A947-70E740481C1C}">
-                <a14:useLocalDpi xmlns:a14="http://schemas.microsoft.com/office/drawing/2010/main" val="0"/>
-              </a:ext>
-            </a:extLst>
-          </a:blip>
-          <a:stretch>
-            <a:fillRect/>
-          </a:stretch>
-        </p:blipFill>
-        <p:spPr>
-          <a:xfrm>
-            <a:off x="214361" y="1714348"/>
-            <a:ext cx="2902475" cy="4351338"/>
-          </a:xfrm>
-          <a:prstGeom prst="rect">
-            <a:avLst/>
-          </a:prstGeom>
-        </p:spPr>
-      </p:pic>
-      <p:pic>
-        <p:nvPicPr>
-          <p:cNvPr id="11" name="[FV1]" descr="[FV1]">
-            <a:extLst>
-              <a:ext uri="{FF2B5EF4-FFF2-40B4-BE49-F238E27FC236}">
-                <a16:creationId xmlns:a16="http://schemas.microsoft.com/office/drawing/2014/main" id="{95A1EC47-8063-435B-9340-91DBB33FE951}"/>
-              </a:ext>
-            </a:extLst>
-          </p:cNvPr>
-          <p:cNvPicPr>
-            <a:picLocks noChangeAspect="1"/>
-          </p:cNvPicPr>
-          <p:nvPr/>
-        </p:nvPicPr>
-        <p:blipFill>
-          <a:blip r:embed="rId3">
-            <a:extLst>
-              <a:ext uri="{28A0092B-C50C-407E-A947-70E740481C1C}">
-                <a14:useLocalDpi xmlns:a14="http://schemas.microsoft.com/office/drawing/2010/main" val="0"/>
-              </a:ext>
-            </a:extLst>
-          </a:blip>
-          <a:stretch>
-            <a:fillRect/>
-          </a:stretch>
-        </p:blipFill>
-        <p:spPr>
-          <a:xfrm>
-            <a:off x="7584982" y="5672321"/>
-            <a:ext cx="665008" cy="827694"/>
-          </a:xfrm>
-          <a:prstGeom prst="rect">
-            <a:avLst/>
-          </a:prstGeom>
-        </p:spPr>
-      </p:pic>
-      <p:pic>
-        <p:nvPicPr>
-          <p:cNvPr id="13" name="[FV2]" descr="[FV2]">
-            <a:extLst>
-              <a:ext uri="{FF2B5EF4-FFF2-40B4-BE49-F238E27FC236}">
-                <a16:creationId xmlns:a16="http://schemas.microsoft.com/office/drawing/2014/main" id="{65D6E13E-B1E1-4CA4-8F00-9E73059CD0BD}"/>
-              </a:ext>
-            </a:extLst>
-          </p:cNvPr>
-          <p:cNvPicPr>
-            <a:picLocks noChangeAspect="1"/>
-          </p:cNvPicPr>
-          <p:nvPr/>
-        </p:nvPicPr>
-        <p:blipFill>
-          <a:blip r:embed="rId3">
-            <a:extLst>
-              <a:ext uri="{28A0092B-C50C-407E-A947-70E740481C1C}">
-                <a14:useLocalDpi xmlns:a14="http://schemas.microsoft.com/office/drawing/2010/main" val="0"/>
-              </a:ext>
-            </a:extLst>
-          </a:blip>
-          <a:stretch>
-            <a:fillRect/>
-          </a:stretch>
-        </p:blipFill>
-        <p:spPr>
-          <a:xfrm>
-            <a:off x="9993131" y="5680558"/>
-            <a:ext cx="665008" cy="827694"/>
-          </a:xfrm>
-          <a:prstGeom prst="rect">
-            <a:avLst/>
-          </a:prstGeom>
-        </p:spPr>
-      </p:pic>
-    </p:spTree>
-    <p:extLst>
-      <p:ext uri="{BB962C8B-B14F-4D97-AF65-F5344CB8AC3E}">
-        <p14:creationId xmlns:p14="http://schemas.microsoft.com/office/powerpoint/2010/main" val="2124728287"/>
-      </p:ext>
-    </p:extLst>
-  </p:cSld>
-  <p:clrMapOvr>
-    <a:masterClrMapping/>
-  </p:clrMapOvr>
-</p:sld>
-</file>
-
-<file path=ppt/slides/slide4.xml><?xml version="1.0" encoding="utf-8"?>
-<p:sld xmlns:a16="http://schemas.microsoft.com/office/drawing/2014/main" xmlns:p14="http://schemas.microsoft.com/office/powerpoint/2010/main" xmlns:a14="http://schemas.microsoft.com/office/drawing/2010/main" xmlns:a="http://schemas.openxmlformats.org/drawingml/2006/main" xmlns:r="http://schemas.openxmlformats.org/officeDocument/2006/relationships" xmlns:p="http://schemas.openxmlformats.org/presentationml/2006/main">
-  <p:cSld>
-    <p:spTree>
-      <p:nvGrpSpPr>
-        <p:cNvPr id="1" name=""/>
-        <p:cNvGrpSpPr/>
-        <p:nvPr/>
-      </p:nvGrpSpPr>
-      <p:grpSpPr>
-        <a:xfrm>
-          <a:off x="0" y="0"/>
-          <a:ext cx="0" cy="0"/>
-          <a:chOff x="0" y="0"/>
-          <a:chExt cx="0" cy="0"/>
-        </a:xfrm>
-      </p:grpSpPr>
-      <p:pic>
-        <p:nvPicPr>
-          <p:cNvPr id="4" name="[FONDO]" descr="[FONDO]">
-            <a:extLst>
-              <a:ext uri="{FF2B5EF4-FFF2-40B4-BE49-F238E27FC236}">
-                <a16:creationId xmlns:a16="http://schemas.microsoft.com/office/drawing/2014/main" id="{AE2FEBDB-ED54-FF79-0EF8-AA9E7C8EA417}"/>
-              </a:ext>
-            </a:extLst>
-          </p:cNvPr>
-          <p:cNvPicPr>
-            <a:picLocks noChangeAspect="1"/>
-          </p:cNvPicPr>
-          <p:nvPr/>
-        </p:nvPicPr>
-        <p:blipFill>
-          <a:blip r:embed="R4bd425e858be4fdc"/>
-          <a:stretch>
-            <a:fillRect/>
-          </a:stretch>
-        </p:blipFill>
-        <p:spPr>
-          <a:xfrm>
-            <a:off x="1" y="0"/>
-            <a:ext cx="12401280" cy="6969519"/>
-          </a:xfrm>
-          <a:prstGeom prst="rect">
-            <a:avLst/>
-          </a:prstGeom>
-        </p:spPr>
-      </p:pic>
-      <p:graphicFrame>
-        <p:nvGraphicFramePr>
-          <p:cNvPr id="10" name="Tabla 9">
-            <a:extLst>
-              <a:ext uri="{FF2B5EF4-FFF2-40B4-BE49-F238E27FC236}">
-                <a16:creationId xmlns:a16="http://schemas.microsoft.com/office/drawing/2014/main" id="{BC4CEC18-7797-7786-F517-147A6AD7242D}"/>
-              </a:ext>
-            </a:extLst>
-          </p:cNvPr>
-          <p:cNvGraphicFramePr>
-            <a:graphicFrameLocks noGrp="1"/>
-          </p:cNvGraphicFramePr>
-          <p:nvPr>
-            <p:extLst>
-              <p:ext uri="{D42A27DB-BD31-4B8C-83A1-F6EECF244321}">
-                <p14:modId xmlns:p14="http://schemas.microsoft.com/office/powerpoint/2010/main" val="1791400885"/>
-              </p:ext>
-            </p:extLst>
-          </p:nvPr>
-        </p:nvGraphicFramePr>
-        <p:xfrm>
-          <a:off x="3252159" y="1370610"/>
-          <a:ext cx="9149122" cy="5266098"/>
-        </p:xfrm>
-        <a:graphic>
-          <a:graphicData uri="http://schemas.openxmlformats.org/drawingml/2006/table">
-            <a:tbl>
-              <a:tblPr firstRow="1" bandRow="1">
-                <a:tableStyleId>{5C22544A-7EE6-4342-B048-85BDC9FD1C3A}</a:tableStyleId>
-              </a:tblPr>
-              <a:tblGrid>
-                <a:gridCol w="2462314">
-                  <a:extLst>
-                    <a:ext uri="{9D8B030D-6E8A-4147-A177-3AD203B41FA5}">
-                      <a16:colId xmlns:a16="http://schemas.microsoft.com/office/drawing/2014/main" val="2746230745"/>
-                    </a:ext>
-                  </a:extLst>
-                </a:gridCol>
-                <a:gridCol w="3343404">
-                  <a:extLst>
-                    <a:ext uri="{9D8B030D-6E8A-4147-A177-3AD203B41FA5}">
-                      <a16:colId xmlns:a16="http://schemas.microsoft.com/office/drawing/2014/main" val="3075986152"/>
-                    </a:ext>
-                  </a:extLst>
-                </a:gridCol>
-                <a:gridCol w="3343404">
-                  <a:extLst>
-                    <a:ext uri="{9D8B030D-6E8A-4147-A177-3AD203B41FA5}">
-                      <a16:colId xmlns:a16="http://schemas.microsoft.com/office/drawing/2014/main" val="4044500939"/>
-                    </a:ext>
-                  </a:extLst>
-                </a:gridCol>
-              </a:tblGrid>
-              <a:tr h="319663">
-                <a:tc gridSpan="3">
-                  <a:txBody>
-                    <a:bodyPr/>
-                    <a:lstStyle/>
-                    <a:p>
-                      <a:r>
-                        <a:rPr lang="es-MX" sz="1600" dirty="0"/>
-                        <a:t>JAVIER ESQUIVEL PADILLA</a:t>
-                      </a:r>
-                    </a:p>
-                  </a:txBody>
-                  <a:tcPr/>
-                </a:tc>
-                <a:tc hMerge="1">
-                  <a:txBody>
-                    <a:bodyPr/>
-                    <a:lstStyle/>
-                    <a:p>
-                      <a:endParaRPr lang="es-MX" dirty="0"/>
-                    </a:p>
-                  </a:txBody>
-                  <a:tcPr/>
-                </a:tc>
-                <a:tc hMerge="1">
-                  <a:txBody>
-                    <a:bodyPr/>
-                    <a:lstStyle/>
-                    <a:p>
-                      <a:endParaRPr lang="es-MX"/>
-                    </a:p>
-                  </a:txBody>
-                  <a:tcPr/>
-                </a:tc>
-                <a:extLst>
-                  <a:ext uri="{0D108BD9-81ED-4DB2-BD59-A6C34878D82A}">
-                    <a16:rowId xmlns:a16="http://schemas.microsoft.com/office/drawing/2014/main" val="3979505418"/>
-                  </a:ext>
-                </a:extLst>
-              </a:tr>
-              <a:tr h="319663">
-                <a:tc>
-                  <a:txBody>
-                    <a:bodyPr/>
-                    <a:lstStyle/>
-                    <a:p>
-                      <a:r>
-                        <a:rPr lang="es-MX" sz="1100" b="1" dirty="0">
-                          <a:solidFill>
-                            <a:schemeClr val="bg1"/>
-                          </a:solidFill>
-                        </a:rPr>
-                        <a:t>GRUPO DELICTIVO</a:t>
-                      </a:r>
-                    </a:p>
-                  </a:txBody>
-                  <a:tcPr>
-                    <a:solidFill>
-                      <a:schemeClr val="accent1">
-                        <a:lumMod val="75000"/>
-                      </a:schemeClr>
-                    </a:solidFill>
-                  </a:tcPr>
-                </a:tc>
-                <a:tc>
-                  <a:txBody>
-                    <a:bodyPr/>
-                    <a:lstStyle/>
-                    <a:p>
-                      <a:r>
-                        <a:rPr lang="es-MX" sz="1200" b="1" dirty="0"/>
-                        <a:t>CJNG</a:t>
-                      </a:r>
-                    </a:p>
-                  </a:txBody>
-                  <a:tcPr/>
-                </a:tc>
-                <a:tc>
-                  <a:txBody>
-                    <a:bodyPr/>
-                    <a:lstStyle/>
-                    <a:p>
-                      <a:pPr marL="0" marR="0" lvl="0" indent="0" algn="l" defTabSz="914400" rtl="0" eaLnBrk="1" fontAlgn="auto" latinLnBrk="0" hangingPunct="1">
-                        <a:lnSpc>
-                          <a:spcPct val="100000"/>
-                        </a:lnSpc>
-                        <a:spcBef>
-                          <a:spcPts val="0"/>
-                        </a:spcBef>
-                        <a:spcAft>
-                          <a:spcPts val="0"/>
-                        </a:spcAft>
-                        <a:buClrTx/>
-                        <a:buSzTx/>
-                        <a:buFontTx/>
-                        <a:buNone/>
-                        <a:tabLst/>
-                        <a:defRPr/>
-                      </a:pPr>
-                      <a:r>
-                        <a:rPr lang="es-MX" sz="1200" b="1" dirty="0"/>
-                        <a:t>EJECUTOR</a:t>
-                      </a:r>
-                    </a:p>
-                  </a:txBody>
-                  <a:tcPr/>
-                </a:tc>
-                <a:extLst>
-                  <a:ext uri="{0D108BD9-81ED-4DB2-BD59-A6C34878D82A}">
-                    <a16:rowId xmlns:a16="http://schemas.microsoft.com/office/drawing/2014/main" val="201189607"/>
-                  </a:ext>
-                </a:extLst>
-              </a:tr>
-              <a:tr h="725435">
-                <a:tc>
-                  <a:txBody>
-                    <a:bodyPr/>
-                    <a:lstStyle/>
-                    <a:p>
-                      <a:r>
-                        <a:rPr lang="es-MX" sz="1100" b="1" kern="1200" dirty="0">
-                          <a:solidFill>
-                            <a:schemeClr val="bg1"/>
-                          </a:solidFill>
-                          <a:latin typeface="+mn-lt"/>
-                          <a:ea typeface="+mn-ea"/>
-                          <a:cs typeface="+mn-cs"/>
-                        </a:rPr>
-                        <a:t>DELITOS / INGRESOS</a:t>
-                      </a:r>
-                    </a:p>
-                  </a:txBody>
-                  <a:tcPr>
-                    <a:solidFill>
-                      <a:schemeClr val="accent1">
-                        <a:lumMod val="75000"/>
-                      </a:schemeClr>
-                    </a:solidFill>
-                  </a:tcPr>
-                </a:tc>
-                <a:tc gridSpan="2">
-                  <a:txBody>
-                    <a:bodyPr/>
-                    <a:lstStyle/>
-                    <a:p>
-                      <a:pPr marL="0" indent="0">
-                        <a:buFont typeface="Arial" panose="020B0604020202020204" pitchFamily="34" charset="0"/>
-                        <a:buNone/>
-                      </a:pPr>
-                      <a:r>
-                        <a:rPr lang="es-MX" sz="1100" dirty="0"/>
-                        <a:t>
-• Lesiones Dolosas — 07/03/2008 21:12
-• Lesiones Dolosas — 22/01/2007 13:00
-• Mariposero — 13/05/2006 19:20
-• Lesiones Dolosas — 03/04/2004 15:00
-• Robo Simple — 28/06/1995 16:53</a:t>
-                      </a:r>
-                    </a:p>
-                  </a:txBody>
-                  <a:tcPr/>
-                </a:tc>
-                <a:tc hMerge="1">
-                  <a:txBody>
-                    <a:bodyPr/>
-                    <a:lstStyle/>
-                    <a:p>
-                      <a:endParaRPr lang="es-MX"/>
-                    </a:p>
-                  </a:txBody>
-                  <a:tcPr/>
-                </a:tc>
-                <a:extLst>
-                  <a:ext uri="{0D108BD9-81ED-4DB2-BD59-A6C34878D82A}">
-                    <a16:rowId xmlns:a16="http://schemas.microsoft.com/office/drawing/2014/main" val="3340689267"/>
-                  </a:ext>
-                </a:extLst>
-              </a:tr>
-              <a:tr h="1044626">
-                <a:tc>
-                  <a:txBody>
-                    <a:bodyPr/>
-                    <a:lstStyle/>
-                    <a:p>
-                      <a:r>
-                        <a:rPr lang="es-MX" sz="1100" b="1" kern="1200" dirty="0">
-                          <a:solidFill>
-                            <a:schemeClr val="bg1"/>
-                          </a:solidFill>
-                          <a:latin typeface="+mn-lt"/>
-                          <a:ea typeface="+mn-ea"/>
-                          <a:cs typeface="+mn-cs"/>
-                        </a:rPr>
-                        <a:t>CARPETAS DE INVESTIGACIÓN</a:t>
-                      </a:r>
-                    </a:p>
-                  </a:txBody>
-                  <a:tcPr>
-                    <a:solidFill>
-                      <a:schemeClr val="accent1">
-                        <a:lumMod val="75000"/>
-                      </a:schemeClr>
-                    </a:solidFill>
-                  </a:tcPr>
-                </a:tc>
-                <a:tc gridSpan="2">
-                  <a:txBody>
-                    <a:bodyPr/>
-                    <a:lstStyle/>
-                    <a:p>
-                      <a:pPr marL="0" indent="0" algn="l" defTabSz="914400" rtl="0" eaLnBrk="1" latinLnBrk="0" hangingPunct="1">
-                        <a:buFont typeface="Arial" panose="020B0604020202020204" pitchFamily="34" charset="0"/>
-                        <a:buNone/>
-                      </a:pPr>
-                      <a:r>
-                        <a:rPr lang="es-MX" sz="1100" kern="1200">
-                          <a:solidFill>
-                            <a:schemeClr val="dk1"/>
-                          </a:solidFill>
-                          <a:latin typeface="+mn-lt"/>
-                          <a:ea typeface="+mn-ea"/>
-                          <a:cs typeface="+mn-cs"/>
-                        </a:rPr>
-                        <a:t>
-• A-08/02876 Violacion equiparada
-• CI/PAB/00072/01-21 Amenazas
-• CI/RIN/00542/09-22 Violencia familiar
-• R-07/00017 Daño en las cosas doloso
-• R-07/00019 Robo calificado
-• R-07/00031 Daño en las cosas doloso
-• R-07/00102 Robo calificado
-• R-07/00147 Robo calificado
-• R-07/00182 Daño en las cosas doloso
-• R-07/00227 Lesiones dolosas calificadas por golpes</a:t>
-                      </a:r>
-                      <a:endParaRPr lang="es-MX" sz="1100" kern="1200" dirty="0">
-                        <a:solidFill>
-                          <a:schemeClr val="dk1"/>
-                        </a:solidFill>
-                        <a:latin typeface="+mn-lt"/>
-                        <a:ea typeface="+mn-ea"/>
-                        <a:cs typeface="+mn-cs"/>
-                      </a:endParaRPr>
-                    </a:p>
-                  </a:txBody>
-                  <a:tcPr/>
-                </a:tc>
-                <a:tc hMerge="1">
-                  <a:txBody>
-                    <a:bodyPr/>
-                    <a:lstStyle/>
-                    <a:p>
-                      <a:endParaRPr lang="es-MX"/>
-                    </a:p>
-                  </a:txBody>
-                  <a:tcPr/>
-                </a:tc>
-                <a:extLst>
-                  <a:ext uri="{0D108BD9-81ED-4DB2-BD59-A6C34878D82A}">
-                    <a16:rowId xmlns:a16="http://schemas.microsoft.com/office/drawing/2014/main" val="3218073216"/>
-                  </a:ext>
-                </a:extLst>
-              </a:tr>
-              <a:tr h="159387">
-                <a:tc>
-                  <a:txBody>
-                    <a:bodyPr/>
-                    <a:lstStyle/>
-                    <a:p>
-                      <a:pPr marL="0" marR="0" lvl="0" indent="0" algn="l" defTabSz="914400" rtl="0" eaLnBrk="1" fontAlgn="auto" latinLnBrk="0" hangingPunct="1">
-                        <a:lnSpc>
-                          <a:spcPct val="100000"/>
-                        </a:lnSpc>
-                        <a:spcBef>
-                          <a:spcPts val="0"/>
-                        </a:spcBef>
-                        <a:spcAft>
-                          <a:spcPts val="0"/>
-                        </a:spcAft>
-                        <a:buClrTx/>
-                        <a:buSzTx/>
-                        <a:buFontTx/>
-                        <a:buNone/>
-                        <a:tabLst/>
-                        <a:defRPr/>
-                      </a:pPr>
-                      <a:r>
-                        <a:rPr lang="es-MX" sz="1100" b="1" dirty="0">
-                          <a:solidFill>
-                            <a:schemeClr val="bg1"/>
-                          </a:solidFill>
-                        </a:rPr>
-                        <a:t>ORDENES DE APREHENSIÓN</a:t>
-                      </a:r>
-                    </a:p>
-                  </a:txBody>
-                  <a:tcPr>
-                    <a:solidFill>
-                      <a:schemeClr val="accent1">
-                        <a:lumMod val="75000"/>
-                      </a:schemeClr>
-                    </a:solidFill>
-                  </a:tcPr>
-                </a:tc>
-                <a:tc gridSpan="2">
-                  <a:txBody>
-                    <a:bodyPr/>
-                    <a:lstStyle/>
-                    <a:p>
-                      <a:pPr marL="0" indent="0" algn="l" defTabSz="914400" rtl="0" eaLnBrk="1" latinLnBrk="0" hangingPunct="1">
-                        <a:buFont typeface="Arial" panose="020B0604020202020204" pitchFamily="34" charset="0"/>
-                        <a:buNone/>
-                      </a:pPr>
-                      <a:r>
-                        <a:rPr lang="es-MX" sz="1100" kern="1200" dirty="0">
-                          <a:solidFill>
-                            <a:schemeClr val="dk1"/>
-                          </a:solidFill>
-                          <a:latin typeface="+mn-lt"/>
-                          <a:ea typeface="+mn-ea"/>
-                          <a:cs typeface="+mn-cs"/>
-                        </a:rPr>
-                        <a:t>
-• LESIONES DOLOSAS POR GOLPES — CUMPLIMENTADA
-• ROBO CALIFICADO — CUMPLIMENTADA</a:t>
-                      </a:r>
-                    </a:p>
-                  </a:txBody>
-                  <a:tcPr/>
-                </a:tc>
-                <a:tc hMerge="1">
-                  <a:txBody>
-                    <a:bodyPr/>
-                    <a:lstStyle/>
-                    <a:p>
-                      <a:endParaRPr lang="es-MX"/>
-                    </a:p>
-                  </a:txBody>
-                  <a:tcPr/>
-                </a:tc>
-                <a:extLst>
-                  <a:ext uri="{0D108BD9-81ED-4DB2-BD59-A6C34878D82A}">
-                    <a16:rowId xmlns:a16="http://schemas.microsoft.com/office/drawing/2014/main" val="3169124086"/>
-                  </a:ext>
-                </a:extLst>
-              </a:tr>
-              <a:tr h="795285">
-                <a:tc>
-                  <a:txBody>
-                    <a:bodyPr/>
-                    <a:lstStyle/>
-                    <a:p>
-                      <a:r>
-                        <a:rPr lang="es-MX" sz="1100" b="1" dirty="0"/>
-                        <a:t> </a:t>
-                      </a:r>
-                      <a:r>
-                        <a:rPr lang="es-MX" sz="1100" b="1" dirty="0">
-                          <a:solidFill>
-                            <a:schemeClr val="bg1"/>
-                          </a:solidFill>
-                        </a:rPr>
-                        <a:t>ESTATUS </a:t>
-                      </a:r>
-                    </a:p>
-                  </a:txBody>
-                  <a:tcPr>
-                    <a:solidFill>
-                      <a:schemeClr val="accent1">
-                        <a:lumMod val="75000"/>
-                      </a:schemeClr>
-                    </a:solidFill>
-                  </a:tcPr>
-                </a:tc>
-                <a:tc gridSpan="2">
-                  <a:txBody>
-                    <a:bodyPr/>
-                    <a:lstStyle/>
-                    <a:p>
-                      <a:pPr marL="0" marR="0" lvl="0" indent="0" algn="just" defTabSz="914400" rtl="0" eaLnBrk="1" fontAlgn="auto" latinLnBrk="0" hangingPunct="1">
-                        <a:lnSpc>
-                          <a:spcPct val="100000"/>
-                        </a:lnSpc>
-                        <a:spcBef>
-                          <a:spcPts val="0"/>
-                        </a:spcBef>
-                        <a:spcAft>
-                          <a:spcPts val="0"/>
-                        </a:spcAft>
-                        <a:buClrTx/>
-                        <a:buSzTx/>
-                        <a:buFont typeface="Arial" panose="020B0604020202020204" pitchFamily="34" charset="0"/>
-                        <a:buNone/>
-                        <a:tabLst/>
-                        <a:defRPr/>
-                      </a:pPr>
-                      <a:r>
-                        <a:rPr lang="es-MX" sz="1100" kern="1200" dirty="0">
-                          <a:solidFill>
-                            <a:schemeClr val="dk1"/>
-                          </a:solidFill>
-                          <a:latin typeface="+mn-lt"/>
-                          <a:ea typeface="+mn-ea"/>
-                          <a:cs typeface="+mn-cs"/>
-                        </a:rPr>
-                        <a:t>Sentenciado, se sentencio por violacion</a:t>
-                      </a:r>
-                    </a:p>
-                  </a:txBody>
-                  <a:tcPr/>
-                </a:tc>
-                <a:tc hMerge="1">
-                  <a:txBody>
-                    <a:bodyPr/>
-                    <a:lstStyle/>
-                    <a:p>
-                      <a:endParaRPr lang="es-MX"/>
-                    </a:p>
-                  </a:txBody>
-                  <a:tcPr/>
-                </a:tc>
-                <a:extLst>
-                  <a:ext uri="{0D108BD9-81ED-4DB2-BD59-A6C34878D82A}">
-                    <a16:rowId xmlns:a16="http://schemas.microsoft.com/office/drawing/2014/main" val="3558537792"/>
-                  </a:ext>
-                </a:extLst>
-              </a:tr>
-              <a:tr h="1786729">
-                <a:tc>
-                  <a:txBody>
-                    <a:bodyPr/>
-                    <a:lstStyle/>
-                    <a:p>
-                      <a:r>
-                        <a:rPr lang="es-MX" sz="1100" b="1" kern="1200" dirty="0">
-                          <a:solidFill>
-                            <a:schemeClr val="bg1"/>
-                          </a:solidFill>
-                          <a:latin typeface="+mn-lt"/>
-                          <a:ea typeface="+mn-ea"/>
-                          <a:cs typeface="+mn-cs"/>
-                        </a:rPr>
-                        <a:t>ASUNTOS RELACIONADOS</a:t>
-                      </a:r>
-                    </a:p>
-                  </a:txBody>
-                  <a:tcPr>
-                    <a:solidFill>
-                      <a:schemeClr val="accent1">
-                        <a:lumMod val="75000"/>
-                      </a:schemeClr>
-                    </a:solidFill>
-                  </a:tcPr>
-                </a:tc>
-                <a:tc gridSpan="2">
-                  <a:txBody>
-                    <a:bodyPr/>
-                    <a:lstStyle/>
-                    <a:p>
-                      <a:pPr marL="171450" indent="-171450" algn="just">
-                        <a:buFontTx/>
-                        <a:buChar char="-"/>
-                      </a:pPr>
-                      <a:r>
-                        <a:rPr lang="es-MX" sz="1100" kern="1200" dirty="0">
-                          <a:solidFill>
-                            <a:schemeClr val="dk1"/>
-                          </a:solidFill>
-                          <a:latin typeface="+mn-lt"/>
-                          <a:ea typeface="+mn-ea"/>
-                          <a:cs typeface="+mn-cs"/>
-                        </a:rPr>
-                        <a:t>Caso Jassiel Hechos en agravio de Jassiel Díaz Cardona, el pasado 30 de mayo de 2023, en el rancho conocido como  “la fogata” Potrero Salitrillo Monte, Rincón de Romos, Aguascalientes, cuando la victima viajaba a bordo de su automóvil Ford Focus sobre la carretera 22, fue perseguido por los responsables  Jonathan Josefath Castorena Rodríguez alias patroncito, Javier Esquivel Padilla alias “La Queta” y Ricardo Alberto Navarro Gonzales alias “El Ricas”, quienes lo alcanzaron para herirlo con disparos por arma de fuego, la victima falleció minutos mas tarde en el Hospital General de Rincón de Romos.</a:t>
-                      </a:r>
-                    </a:p>
-                    <a:p>
-                      <a:pPr marL="0" indent="0" algn="just">
-                        <a:buFontTx/>
-                        <a:buNone/>
-                      </a:pPr>
-                      <a:endParaRPr lang="es-MX" sz="1100" kern="1200" dirty="0">
-                        <a:solidFill>
-                          <a:schemeClr val="dk1"/>
-                        </a:solidFill>
-                        <a:latin typeface="+mn-lt"/>
-                        <a:ea typeface="+mn-ea"/>
-                        <a:cs typeface="+mn-cs"/>
-                      </a:endParaRPr>
-                    </a:p>
-                    <a:p>
-                      <a:pPr marL="0" indent="0" algn="just">
-                        <a:buFontTx/>
-                        <a:buNone/>
-                      </a:pPr>
-                      <a:endParaRPr lang="es-MX" sz="1100" kern="1200" dirty="0">
-                        <a:solidFill>
-                          <a:schemeClr val="dk1"/>
-                        </a:solidFill>
-                        <a:latin typeface="+mn-lt"/>
-                        <a:ea typeface="+mn-ea"/>
-                        <a:cs typeface="+mn-cs"/>
-                      </a:endParaRPr>
-                    </a:p>
-                    <a:p>
-                      <a:pPr marL="0" marR="0" lvl="0" indent="0" algn="just" defTabSz="914400" rtl="0" eaLnBrk="1" fontAlgn="auto" latinLnBrk="0" hangingPunct="1">
-                        <a:lnSpc>
-                          <a:spcPct val="100000"/>
-                        </a:lnSpc>
-                        <a:spcBef>
-                          <a:spcPts val="0"/>
-                        </a:spcBef>
-                        <a:spcAft>
-                          <a:spcPts val="0"/>
-                        </a:spcAft>
-                        <a:buClrTx/>
-                        <a:buSzTx/>
-                        <a:buFontTx/>
-                        <a:buNone/>
-                        <a:tabLst/>
-                        <a:defRPr/>
-                      </a:pPr>
-                      <a:r>
-                        <a:rPr lang="es-MX" sz="1100" kern="1200" dirty="0">
-                          <a:solidFill>
-                            <a:schemeClr val="dk1"/>
-                          </a:solidFill>
-                          <a:latin typeface="+mn-lt"/>
-                          <a:ea typeface="+mn-ea"/>
-                          <a:cs typeface="+mn-cs"/>
-                        </a:rPr>
-                        <a:t> </a:t>
-                      </a:r>
-                    </a:p>
-                    <a:p>
-                      <a:pPr marL="0" marR="0" lvl="0" indent="0" algn="just" defTabSz="914400" rtl="0" eaLnBrk="1" fontAlgn="auto" latinLnBrk="0" hangingPunct="1">
-                        <a:lnSpc>
-                          <a:spcPct val="100000"/>
-                        </a:lnSpc>
-                        <a:spcBef>
-                          <a:spcPts val="0"/>
-                        </a:spcBef>
-                        <a:spcAft>
-                          <a:spcPts val="0"/>
-                        </a:spcAft>
-                        <a:buClrTx/>
-                        <a:buSzTx/>
-                        <a:buFontTx/>
-                        <a:buNone/>
-                        <a:tabLst/>
-                        <a:defRPr/>
-                      </a:pPr>
-                      <a:endParaRPr lang="es-MX" sz="1100" kern="1200" dirty="0">
-                        <a:solidFill>
-                          <a:schemeClr val="dk1"/>
-                        </a:solidFill>
-                        <a:latin typeface="+mn-lt"/>
-                        <a:ea typeface="+mn-ea"/>
-                        <a:cs typeface="+mn-cs"/>
-                      </a:endParaRPr>
-                    </a:p>
-                    <a:p>
-                      <a:pPr marL="0" marR="0" lvl="0" indent="0" algn="just" defTabSz="914400" rtl="0" eaLnBrk="1" fontAlgn="auto" latinLnBrk="0" hangingPunct="1">
-                        <a:lnSpc>
-                          <a:spcPct val="100000"/>
-                        </a:lnSpc>
-                        <a:spcBef>
-                          <a:spcPts val="0"/>
-                        </a:spcBef>
-                        <a:spcAft>
-                          <a:spcPts val="0"/>
-                        </a:spcAft>
-                        <a:buClrTx/>
-                        <a:buSzTx/>
-                        <a:buFontTx/>
-                        <a:buNone/>
-                        <a:tabLst/>
-                        <a:defRPr/>
-                      </a:pPr>
-                      <a:r>
-                        <a:rPr lang="es-MX" sz="1100" kern="1200" dirty="0">
-                          <a:solidFill>
-                            <a:schemeClr val="dk1"/>
-                          </a:solidFill>
-                          <a:latin typeface="+mn-lt"/>
-                          <a:ea typeface="+mn-ea"/>
-                          <a:cs typeface="+mn-cs"/>
-                        </a:rPr>
-                        <a:t>[V2] </a:t>
-                      </a:r>
-                    </a:p>
-                    <a:p>
-                      <a:pPr marL="0" indent="0" algn="just">
-                        <a:buFontTx/>
-                        <a:buNone/>
-                      </a:pPr>
-                      <a:endParaRPr lang="es-MX" sz="1100" kern="1200" dirty="0">
-                        <a:solidFill>
-                          <a:schemeClr val="dk1"/>
-                        </a:solidFill>
-                        <a:latin typeface="+mn-lt"/>
-                        <a:ea typeface="+mn-ea"/>
-                        <a:cs typeface="+mn-cs"/>
-                      </a:endParaRPr>
-                    </a:p>
-                  </a:txBody>
-                  <a:tcPr/>
-                </a:tc>
-                <a:tc hMerge="1">
-                  <a:txBody>
-                    <a:bodyPr/>
-                    <a:lstStyle/>
-                    <a:p>
-                      <a:endParaRPr lang="es-MX"/>
-                    </a:p>
-                  </a:txBody>
-                  <a:tcPr/>
-                </a:tc>
-                <a:extLst>
-                  <a:ext uri="{0D108BD9-81ED-4DB2-BD59-A6C34878D82A}">
-                    <a16:rowId xmlns:a16="http://schemas.microsoft.com/office/drawing/2014/main" val="4024071236"/>
-                  </a:ext>
-                </a:extLst>
-              </a:tr>
-            </a:tbl>
-          </a:graphicData>
-        </a:graphic>
-      </p:graphicFrame>
-      <p:pic>
-        <p:nvPicPr>
-          <p:cNvPr id="7" name="[FP]" descr="[FP]">
-            <a:extLst>
-              <a:ext uri="{FF2B5EF4-FFF2-40B4-BE49-F238E27FC236}">
-                <a16:creationId xmlns:a16="http://schemas.microsoft.com/office/drawing/2014/main" id="{C80E713A-27D7-471A-9297-6CD4151A9971}"/>
-              </a:ext>
-            </a:extLst>
-          </p:cNvPr>
-          <p:cNvPicPr>
-            <a:picLocks noChangeAspect="1"/>
-          </p:cNvPicPr>
-          <p:nvPr/>
-        </p:nvPicPr>
-        <p:blipFill>
-          <a:blip r:embed="Rc3d59b526ab544ba">
-            <a:extLst>
-              <a:ext uri="{28A0092B-C50C-407E-A947-70E740481C1C}">
-                <a14:useLocalDpi xmlns:a14="http://schemas.microsoft.com/office/drawing/2010/main" val="0"/>
-              </a:ext>
-            </a:extLst>
-          </a:blip>
-          <a:stretch>
-            <a:fillRect/>
-          </a:stretch>
-        </p:blipFill>
-        <p:spPr>
-          <a:xfrm>
-            <a:off x="214361" y="1714348"/>
-            <a:ext cx="2902475" cy="4351338"/>
-          </a:xfrm>
-          <a:prstGeom prst="rect">
-            <a:avLst/>
-          </a:prstGeom>
-        </p:spPr>
-      </p:pic>
-      <p:pic>
-        <p:nvPicPr>
-          <p:cNvPr id="11" name="[FV1]" descr="[FV1]">
-            <a:extLst>
-              <a:ext uri="{FF2B5EF4-FFF2-40B4-BE49-F238E27FC236}">
-                <a16:creationId xmlns:a16="http://schemas.microsoft.com/office/drawing/2014/main" id="{95A1EC47-8063-435B-9340-91DBB33FE951}"/>
-              </a:ext>
-            </a:extLst>
-          </p:cNvPr>
-          <p:cNvPicPr>
-            <a:picLocks noChangeAspect="1"/>
-          </p:cNvPicPr>
-          <p:nvPr/>
-        </p:nvPicPr>
-        <p:blipFill>
-          <a:blip r:embed="rId3">
-            <a:extLst>
-              <a:ext uri="{28A0092B-C50C-407E-A947-70E740481C1C}">
-                <a14:useLocalDpi xmlns:a14="http://schemas.microsoft.com/office/drawing/2010/main" val="0"/>
-              </a:ext>
-            </a:extLst>
-          </a:blip>
-          <a:stretch>
-            <a:fillRect/>
-          </a:stretch>
-        </p:blipFill>
-        <p:spPr>
-          <a:xfrm>
-            <a:off x="7584982" y="5672321"/>
-            <a:ext cx="665008" cy="827694"/>
-          </a:xfrm>
-          <a:prstGeom prst="rect">
-            <a:avLst/>
-          </a:prstGeom>
-        </p:spPr>
-      </p:pic>
-      <p:pic>
-        <p:nvPicPr>
-          <p:cNvPr id="13" name="[FV2]" descr="[FV2]">
-            <a:extLst>
-              <a:ext uri="{FF2B5EF4-FFF2-40B4-BE49-F238E27FC236}">
-                <a16:creationId xmlns:a16="http://schemas.microsoft.com/office/drawing/2014/main" id="{65D6E13E-B1E1-4CA4-8F00-9E73059CD0BD}"/>
-              </a:ext>
-            </a:extLst>
-          </p:cNvPr>
-          <p:cNvPicPr>
-            <a:picLocks noChangeAspect="1"/>
-          </p:cNvPicPr>
-          <p:nvPr/>
-        </p:nvPicPr>
-        <p:blipFill>
-          <a:blip r:embed="rId3">
-            <a:extLst>
-              <a:ext uri="{28A0092B-C50C-407E-A947-70E740481C1C}">
-                <a14:useLocalDpi xmlns:a14="http://schemas.microsoft.com/office/drawing/2010/main" val="0"/>
-              </a:ext>
-            </a:extLst>
-          </a:blip>
-          <a:stretch>
-            <a:fillRect/>
-          </a:stretch>
-        </p:blipFill>
-        <p:spPr>
-          <a:xfrm>
-            <a:off x="9993131" y="5680558"/>
-            <a:ext cx="665008" cy="827694"/>
-          </a:xfrm>
-          <a:prstGeom prst="rect">
-            <a:avLst/>
-          </a:prstGeom>
-        </p:spPr>
-      </p:pic>
-    </p:spTree>
-    <p:extLst>
-      <p:ext uri="{BB962C8B-B14F-4D97-AF65-F5344CB8AC3E}">
-        <p14:creationId xmlns:p14="http://schemas.microsoft.com/office/powerpoint/2010/main" val="2124728287"/>
-      </p:ext>
-    </p:extLst>
-  </p:cSld>
-  <p:clrMapOvr>
-    <a:masterClrMapping/>
-  </p:clrMapOvr>
-</p:sld>
-</file>
-
-<file path=ppt/slides/slide5.xml><?xml version="1.0" encoding="utf-8"?>
-<p:sld xmlns:a16="http://schemas.microsoft.com/office/drawing/2014/main" xmlns:p14="http://schemas.microsoft.com/office/powerpoint/2010/main" xmlns:a14="http://schemas.microsoft.com/office/drawing/2010/main" xmlns:a="http://schemas.openxmlformats.org/drawingml/2006/main" xmlns:r="http://schemas.openxmlformats.org/officeDocument/2006/relationships" xmlns:p="http://schemas.openxmlformats.org/presentationml/2006/main">
-  <p:cSld>
-    <p:spTree>
-      <p:nvGrpSpPr>
-        <p:cNvPr id="1" name=""/>
-        <p:cNvGrpSpPr/>
-        <p:nvPr/>
-      </p:nvGrpSpPr>
-      <p:grpSpPr>
-        <a:xfrm>
-          <a:off x="0" y="0"/>
-          <a:ext cx="0" cy="0"/>
-          <a:chOff x="0" y="0"/>
-          <a:chExt cx="0" cy="0"/>
-        </a:xfrm>
-      </p:grpSpPr>
-      <p:pic>
-        <p:nvPicPr>
-          <p:cNvPr id="4" name="[FONDO]" descr="[FONDO]">
-            <a:extLst>
-              <a:ext uri="{FF2B5EF4-FFF2-40B4-BE49-F238E27FC236}">
-                <a16:creationId xmlns:a16="http://schemas.microsoft.com/office/drawing/2014/main" id="{AE2FEBDB-ED54-FF79-0EF8-AA9E7C8EA417}"/>
-              </a:ext>
-            </a:extLst>
-          </p:cNvPr>
-          <p:cNvPicPr>
-            <a:picLocks noChangeAspect="1"/>
-          </p:cNvPicPr>
-          <p:nvPr/>
-        </p:nvPicPr>
-        <p:blipFill>
-          <a:blip r:embed="R4178b4c2b19f4315"/>
-          <a:stretch>
-            <a:fillRect/>
-          </a:stretch>
-        </p:blipFill>
-        <p:spPr>
-          <a:xfrm>
-            <a:off x="1" y="0"/>
-            <a:ext cx="12401280" cy="6969519"/>
-          </a:xfrm>
-          <a:prstGeom prst="rect">
-            <a:avLst/>
-          </a:prstGeom>
-        </p:spPr>
-      </p:pic>
-      <p:graphicFrame>
-        <p:nvGraphicFramePr>
-          <p:cNvPr id="10" name="Tabla 9">
-            <a:extLst>
-              <a:ext uri="{FF2B5EF4-FFF2-40B4-BE49-F238E27FC236}">
-                <a16:creationId xmlns:a16="http://schemas.microsoft.com/office/drawing/2014/main" id="{BC4CEC18-7797-7786-F517-147A6AD7242D}"/>
-              </a:ext>
-            </a:extLst>
-          </p:cNvPr>
-          <p:cNvGraphicFramePr>
-            <a:graphicFrameLocks noGrp="1"/>
-          </p:cNvGraphicFramePr>
-          <p:nvPr>
-            <p:extLst>
-              <p:ext uri="{D42A27DB-BD31-4B8C-83A1-F6EECF244321}">
-                <p14:modId xmlns:p14="http://schemas.microsoft.com/office/powerpoint/2010/main" val="1791400885"/>
-              </p:ext>
-            </p:extLst>
-          </p:nvPr>
-        </p:nvGraphicFramePr>
-        <p:xfrm>
-          <a:off x="3252159" y="1370610"/>
-          <a:ext cx="9149122" cy="5266098"/>
-        </p:xfrm>
-        <a:graphic>
-          <a:graphicData uri="http://schemas.openxmlformats.org/drawingml/2006/table">
-            <a:tbl>
-              <a:tblPr firstRow="1" bandRow="1">
-                <a:tableStyleId>{5C22544A-7EE6-4342-B048-85BDC9FD1C3A}</a:tableStyleId>
-              </a:tblPr>
-              <a:tblGrid>
-                <a:gridCol w="2462314">
-                  <a:extLst>
-                    <a:ext uri="{9D8B030D-6E8A-4147-A177-3AD203B41FA5}">
-                      <a16:colId xmlns:a16="http://schemas.microsoft.com/office/drawing/2014/main" val="2746230745"/>
-                    </a:ext>
-                  </a:extLst>
-                </a:gridCol>
-                <a:gridCol w="3343404">
-                  <a:extLst>
-                    <a:ext uri="{9D8B030D-6E8A-4147-A177-3AD203B41FA5}">
-                      <a16:colId xmlns:a16="http://schemas.microsoft.com/office/drawing/2014/main" val="3075986152"/>
-                    </a:ext>
-                  </a:extLst>
-                </a:gridCol>
-                <a:gridCol w="3343404">
-                  <a:extLst>
-                    <a:ext uri="{9D8B030D-6E8A-4147-A177-3AD203B41FA5}">
-                      <a16:colId xmlns:a16="http://schemas.microsoft.com/office/drawing/2014/main" val="4044500939"/>
-                    </a:ext>
-                  </a:extLst>
-                </a:gridCol>
-              </a:tblGrid>
-              <a:tr h="319663">
-                <a:tc gridSpan="3">
-                  <a:txBody>
-                    <a:bodyPr/>
-                    <a:lstStyle/>
-                    <a:p>
-                      <a:r>
-                        <a:rPr lang="es-MX" sz="1600" dirty="0"/>
-                        <a:t>RICARDO ALBERTO NAVARRO GONZALEZ</a:t>
-                      </a:r>
-                    </a:p>
-                  </a:txBody>
-                  <a:tcPr/>
-                </a:tc>
-                <a:tc hMerge="1">
-                  <a:txBody>
-                    <a:bodyPr/>
-                    <a:lstStyle/>
-                    <a:p>
-                      <a:endParaRPr lang="es-MX" dirty="0"/>
-                    </a:p>
-                  </a:txBody>
-                  <a:tcPr/>
-                </a:tc>
-                <a:tc hMerge="1">
-                  <a:txBody>
-                    <a:bodyPr/>
-                    <a:lstStyle/>
-                    <a:p>
-                      <a:endParaRPr lang="es-MX"/>
-                    </a:p>
-                  </a:txBody>
-                  <a:tcPr/>
-                </a:tc>
-                <a:extLst>
-                  <a:ext uri="{0D108BD9-81ED-4DB2-BD59-A6C34878D82A}">
-                    <a16:rowId xmlns:a16="http://schemas.microsoft.com/office/drawing/2014/main" val="3979505418"/>
-                  </a:ext>
-                </a:extLst>
-              </a:tr>
-              <a:tr h="319663">
-                <a:tc>
-                  <a:txBody>
-                    <a:bodyPr/>
-                    <a:lstStyle/>
-                    <a:p>
-                      <a:r>
-                        <a:rPr lang="es-MX" sz="1100" b="1" dirty="0">
-                          <a:solidFill>
-                            <a:schemeClr val="bg1"/>
-                          </a:solidFill>
-                        </a:rPr>
-                        <a:t>GRUPO DELICTIVO</a:t>
-                      </a:r>
-                    </a:p>
-                  </a:txBody>
-                  <a:tcPr>
-                    <a:solidFill>
-                      <a:schemeClr val="accent1">
-                        <a:lumMod val="75000"/>
-                      </a:schemeClr>
-                    </a:solidFill>
-                  </a:tcPr>
-                </a:tc>
-                <a:tc>
-                  <a:txBody>
-                    <a:bodyPr/>
-                    <a:lstStyle/>
-                    <a:p>
-                      <a:r>
-                        <a:rPr lang="es-MX" sz="1200" b="1" dirty="0"/>
-                        <a:t>CJNG</a:t>
-                      </a:r>
-                    </a:p>
-                  </a:txBody>
-                  <a:tcPr/>
-                </a:tc>
-                <a:tc>
-                  <a:txBody>
-                    <a:bodyPr/>
-                    <a:lstStyle/>
-                    <a:p>
-                      <a:pPr marL="0" marR="0" lvl="0" indent="0" algn="l" defTabSz="914400" rtl="0" eaLnBrk="1" fontAlgn="auto" latinLnBrk="0" hangingPunct="1">
-                        <a:lnSpc>
-                          <a:spcPct val="100000"/>
-                        </a:lnSpc>
-                        <a:spcBef>
-                          <a:spcPts val="0"/>
-                        </a:spcBef>
-                        <a:spcAft>
-                          <a:spcPts val="0"/>
-                        </a:spcAft>
-                        <a:buClrTx/>
-                        <a:buSzTx/>
-                        <a:buFontTx/>
-                        <a:buNone/>
-                        <a:tabLst/>
-                        <a:defRPr/>
-                      </a:pPr>
-                      <a:r>
-                        <a:rPr lang="es-MX" sz="1200" b="1" dirty="0"/>
-                        <a:t>EJECUTOR</a:t>
-                      </a:r>
-                    </a:p>
-                  </a:txBody>
-                  <a:tcPr/>
-                </a:tc>
-                <a:extLst>
-                  <a:ext uri="{0D108BD9-81ED-4DB2-BD59-A6C34878D82A}">
-                    <a16:rowId xmlns:a16="http://schemas.microsoft.com/office/drawing/2014/main" val="201189607"/>
-                  </a:ext>
-                </a:extLst>
-              </a:tr>
-              <a:tr h="725435">
-                <a:tc>
-                  <a:txBody>
-                    <a:bodyPr/>
-                    <a:lstStyle/>
-                    <a:p>
-                      <a:r>
-                        <a:rPr lang="es-MX" sz="1100" b="1" kern="1200" dirty="0">
-                          <a:solidFill>
-                            <a:schemeClr val="bg1"/>
-                          </a:solidFill>
-                          <a:latin typeface="+mn-lt"/>
-                          <a:ea typeface="+mn-ea"/>
-                          <a:cs typeface="+mn-cs"/>
-                        </a:rPr>
-                        <a:t>DELITOS / INGRESOS</a:t>
-                      </a:r>
-                    </a:p>
-                  </a:txBody>
-                  <a:tcPr>
-                    <a:solidFill>
-                      <a:schemeClr val="accent1">
-                        <a:lumMod val="75000"/>
-                      </a:schemeClr>
-                    </a:solidFill>
-                  </a:tcPr>
-                </a:tc>
-                <a:tc gridSpan="2">
-                  <a:txBody>
-                    <a:bodyPr/>
-                    <a:lstStyle/>
-                    <a:p>
-                      <a:pPr marL="0" indent="0">
-                        <a:buFont typeface="Arial" panose="020B0604020202020204" pitchFamily="34" charset="0"/>
-                        <a:buNone/>
-                      </a:pPr>
-                      <a:r>
-                        <a:rPr lang="es-MX" sz="1100" dirty="0"/>
-                        <a:t>
-• Homicidio Doloso — 18/06/2020 19:10
-• Lesiones Dolosas — 12/05/2019 21:20</a:t>
-                      </a:r>
-                    </a:p>
-                  </a:txBody>
-                  <a:tcPr/>
-                </a:tc>
-                <a:tc hMerge="1">
-                  <a:txBody>
-                    <a:bodyPr/>
-                    <a:lstStyle/>
-                    <a:p>
-                      <a:endParaRPr lang="es-MX"/>
-                    </a:p>
-                  </a:txBody>
-                  <a:tcPr/>
-                </a:tc>
-                <a:extLst>
-                  <a:ext uri="{0D108BD9-81ED-4DB2-BD59-A6C34878D82A}">
-                    <a16:rowId xmlns:a16="http://schemas.microsoft.com/office/drawing/2014/main" val="3340689267"/>
-                  </a:ext>
-                </a:extLst>
-              </a:tr>
-              <a:tr h="1044626">
-                <a:tc>
-                  <a:txBody>
-                    <a:bodyPr/>
-                    <a:lstStyle/>
-                    <a:p>
-                      <a:r>
-                        <a:rPr lang="es-MX" sz="1100" b="1" kern="1200" dirty="0">
-                          <a:solidFill>
-                            <a:schemeClr val="bg1"/>
-                          </a:solidFill>
-                          <a:latin typeface="+mn-lt"/>
-                          <a:ea typeface="+mn-ea"/>
-                          <a:cs typeface="+mn-cs"/>
-                        </a:rPr>
-                        <a:t>CARPETAS DE INVESTIGACIÓN</a:t>
-                      </a:r>
-                    </a:p>
-                  </a:txBody>
-                  <a:tcPr>
-                    <a:solidFill>
-                      <a:schemeClr val="accent1">
-                        <a:lumMod val="75000"/>
-                      </a:schemeClr>
-                    </a:solidFill>
-                  </a:tcPr>
-                </a:tc>
-                <a:tc gridSpan="2">
-                  <a:txBody>
-                    <a:bodyPr/>
-                    <a:lstStyle/>
-                    <a:p>
-                      <a:pPr marL="0" indent="0" algn="l" defTabSz="914400" rtl="0" eaLnBrk="1" latinLnBrk="0" hangingPunct="1">
-                        <a:buFont typeface="Arial" panose="020B0604020202020204" pitchFamily="34" charset="0"/>
-                        <a:buNone/>
-                      </a:pPr>
-                      <a:r>
-                        <a:rPr lang="es-MX" sz="1100" kern="1200">
-                          <a:solidFill>
-                            <a:schemeClr val="dk1"/>
-                          </a:solidFill>
-                          <a:latin typeface="+mn-lt"/>
-                          <a:ea typeface="+mn-ea"/>
-                          <a:cs typeface="+mn-cs"/>
-                        </a:rPr>
-                        <a:t>
-• CI/AGS/10918/05-19 Lesiones dolosas calificadas por golpes</a:t>
-                      </a:r>
-                      <a:endParaRPr lang="es-MX" sz="1100" kern="1200" dirty="0">
-                        <a:solidFill>
-                          <a:schemeClr val="dk1"/>
-                        </a:solidFill>
-                        <a:latin typeface="+mn-lt"/>
-                        <a:ea typeface="+mn-ea"/>
-                        <a:cs typeface="+mn-cs"/>
-                      </a:endParaRPr>
-                    </a:p>
-                  </a:txBody>
-                  <a:tcPr/>
-                </a:tc>
-                <a:tc hMerge="1">
-                  <a:txBody>
-                    <a:bodyPr/>
-                    <a:lstStyle/>
-                    <a:p>
-                      <a:endParaRPr lang="es-MX"/>
-                    </a:p>
-                  </a:txBody>
-                  <a:tcPr/>
-                </a:tc>
-                <a:extLst>
-                  <a:ext uri="{0D108BD9-81ED-4DB2-BD59-A6C34878D82A}">
-                    <a16:rowId xmlns:a16="http://schemas.microsoft.com/office/drawing/2014/main" val="3218073216"/>
-                  </a:ext>
-                </a:extLst>
-              </a:tr>
-              <a:tr h="159387">
-                <a:tc>
-                  <a:txBody>
-                    <a:bodyPr/>
-                    <a:lstStyle/>
-                    <a:p>
-                      <a:pPr marL="0" marR="0" lvl="0" indent="0" algn="l" defTabSz="914400" rtl="0" eaLnBrk="1" fontAlgn="auto" latinLnBrk="0" hangingPunct="1">
-                        <a:lnSpc>
-                          <a:spcPct val="100000"/>
-                        </a:lnSpc>
-                        <a:spcBef>
-                          <a:spcPts val="0"/>
-                        </a:spcBef>
-                        <a:spcAft>
-                          <a:spcPts val="0"/>
-                        </a:spcAft>
-                        <a:buClrTx/>
-                        <a:buSzTx/>
-                        <a:buFontTx/>
-                        <a:buNone/>
-                        <a:tabLst/>
-                        <a:defRPr/>
-                      </a:pPr>
-                      <a:r>
-                        <a:rPr lang="es-MX" sz="1100" b="1" dirty="0">
-                          <a:solidFill>
-                            <a:schemeClr val="bg1"/>
-                          </a:solidFill>
-                        </a:rPr>
-                        <a:t>ORDENES DE APREHENSIÓN</a:t>
-                      </a:r>
-                    </a:p>
-                  </a:txBody>
-                  <a:tcPr>
-                    <a:solidFill>
-                      <a:schemeClr val="accent1">
-                        <a:lumMod val="75000"/>
-                      </a:schemeClr>
-                    </a:solidFill>
-                  </a:tcPr>
-                </a:tc>
-                <a:tc gridSpan="2">
-                  <a:txBody>
-                    <a:bodyPr/>
-                    <a:lstStyle/>
-                    <a:p>
-                      <a:pPr marL="0" indent="0" algn="l" defTabSz="914400" rtl="0" eaLnBrk="1" latinLnBrk="0" hangingPunct="1">
-                        <a:buFont typeface="Arial" panose="020B0604020202020204" pitchFamily="34" charset="0"/>
-                        <a:buNone/>
-                      </a:pPr>
-                      <a:r>
-                        <a:rPr lang="es-MX" sz="1100" kern="1200" dirty="0">
-                          <a:solidFill>
-                            <a:schemeClr val="dk1"/>
-                          </a:solidFill>
-                          <a:latin typeface="+mn-lt"/>
-                          <a:ea typeface="+mn-ea"/>
-                          <a:cs typeface="+mn-cs"/>
-                        </a:rPr>
-                        <a:t>
-• HOMICIDIO DOLOSO CALIFICADO — CUMPLIMENTADA</a:t>
-                      </a:r>
-                    </a:p>
-                  </a:txBody>
-                  <a:tcPr/>
-                </a:tc>
-                <a:tc hMerge="1">
-                  <a:txBody>
-                    <a:bodyPr/>
-                    <a:lstStyle/>
-                    <a:p>
-                      <a:endParaRPr lang="es-MX"/>
-                    </a:p>
-                  </a:txBody>
-                  <a:tcPr/>
-                </a:tc>
-                <a:extLst>
-                  <a:ext uri="{0D108BD9-81ED-4DB2-BD59-A6C34878D82A}">
-                    <a16:rowId xmlns:a16="http://schemas.microsoft.com/office/drawing/2014/main" val="3169124086"/>
-                  </a:ext>
-                </a:extLst>
-              </a:tr>
-              <a:tr h="795285">
-                <a:tc>
-                  <a:txBody>
-                    <a:bodyPr/>
-                    <a:lstStyle/>
-                    <a:p>
-                      <a:r>
-                        <a:rPr lang="es-MX" sz="1100" b="1" dirty="0"/>
-                        <a:t> </a:t>
-                      </a:r>
-                      <a:r>
-                        <a:rPr lang="es-MX" sz="1100" b="1" dirty="0">
-                          <a:solidFill>
-                            <a:schemeClr val="bg1"/>
-                          </a:solidFill>
-                        </a:rPr>
-                        <a:t>ESTATUS </a:t>
-                      </a:r>
-                    </a:p>
-                  </a:txBody>
-                  <a:tcPr>
-                    <a:solidFill>
-                      <a:schemeClr val="accent1">
-                        <a:lumMod val="75000"/>
-                      </a:schemeClr>
-                    </a:solidFill>
-                  </a:tcPr>
-                </a:tc>
-                <a:tc gridSpan="2">
-                  <a:txBody>
-                    <a:bodyPr/>
-                    <a:lstStyle/>
-                    <a:p>
-                      <a:pPr marL="0" marR="0" lvl="0" indent="0" algn="just" defTabSz="914400" rtl="0" eaLnBrk="1" fontAlgn="auto" latinLnBrk="0" hangingPunct="1">
-                        <a:lnSpc>
-                          <a:spcPct val="100000"/>
-                        </a:lnSpc>
-                        <a:spcBef>
-                          <a:spcPts val="0"/>
-                        </a:spcBef>
-                        <a:spcAft>
-                          <a:spcPts val="0"/>
-                        </a:spcAft>
-                        <a:buClrTx/>
-                        <a:buSzTx/>
-                        <a:buFont typeface="Arial" panose="020B0604020202020204" pitchFamily="34" charset="0"/>
-                        <a:buNone/>
-                        <a:tabLst/>
-                        <a:defRPr/>
-                      </a:pPr>
-                      <a:r>
-                        <a:rPr lang="es-MX" sz="1100" kern="1200" dirty="0">
-                          <a:solidFill>
-                            <a:schemeClr val="dk1"/>
-                          </a:solidFill>
-                          <a:latin typeface="+mn-lt"/>
-                          <a:ea typeface="+mn-ea"/>
-                          <a:cs typeface="+mn-cs"/>
-                        </a:rPr>
-                        <a:t>Sentenciado, se sentencio por violacion</a:t>
-                      </a:r>
-                    </a:p>
-                  </a:txBody>
-                  <a:tcPr/>
-                </a:tc>
-                <a:tc hMerge="1">
-                  <a:txBody>
-                    <a:bodyPr/>
-                    <a:lstStyle/>
-                    <a:p>
-                      <a:endParaRPr lang="es-MX"/>
-                    </a:p>
-                  </a:txBody>
-                  <a:tcPr/>
-                </a:tc>
-                <a:extLst>
-                  <a:ext uri="{0D108BD9-81ED-4DB2-BD59-A6C34878D82A}">
-                    <a16:rowId xmlns:a16="http://schemas.microsoft.com/office/drawing/2014/main" val="3558537792"/>
-                  </a:ext>
-                </a:extLst>
-              </a:tr>
-              <a:tr h="1786729">
-                <a:tc>
-                  <a:txBody>
-                    <a:bodyPr/>
-                    <a:lstStyle/>
-                    <a:p>
-                      <a:r>
-                        <a:rPr lang="es-MX" sz="1100" b="1" kern="1200" dirty="0">
-                          <a:solidFill>
-                            <a:schemeClr val="bg1"/>
-                          </a:solidFill>
-                          <a:latin typeface="+mn-lt"/>
-                          <a:ea typeface="+mn-ea"/>
-                          <a:cs typeface="+mn-cs"/>
-                        </a:rPr>
-                        <a:t>ASUNTOS RELACIONADOS</a:t>
-                      </a:r>
-                    </a:p>
-                  </a:txBody>
-                  <a:tcPr>
-                    <a:solidFill>
-                      <a:schemeClr val="accent1">
-                        <a:lumMod val="75000"/>
-                      </a:schemeClr>
-                    </a:solidFill>
-                  </a:tcPr>
-                </a:tc>
-                <a:tc gridSpan="2">
-                  <a:txBody>
-                    <a:bodyPr/>
-                    <a:lstStyle/>
-                    <a:p>
-                      <a:pPr marL="171450" indent="-171450" algn="just">
-                        <a:buFontTx/>
-                        <a:buChar char="-"/>
-                      </a:pPr>
-                      <a:r>
-                        <a:rPr lang="es-MX" sz="1100" kern="1200" dirty="0">
-                          <a:solidFill>
-                            <a:schemeClr val="dk1"/>
-                          </a:solidFill>
-                          <a:latin typeface="+mn-lt"/>
-                          <a:ea typeface="+mn-ea"/>
-                          <a:cs typeface="+mn-cs"/>
-                        </a:rPr>
-                        <a:t>Caso Jassiel Hechos en agravio de Jassiel Díaz Cardona, el pasado 30 de mayo de 2023, en el rancho conocido como  “la fogata” Potrero Salitrillo Monte, Rincón de Romos, Aguascalientes, cuando la victima viajaba a bordo de su automóvil Ford Focus sobre la carretera 22, fue perseguido por los responsables  Jonathan Josefath Castorena Rodríguez alias patroncito, Javier Esquivel Padilla alias “La Queta” y Ricardo Alberto Navarro Gonzales alias “El Ricas”, quienes lo alcanzaron para herirlo con disparos por arma de fuego, la victima falleció minutos mas tarde en el Hospital General de Rincón de Romos.</a:t>
-                      </a:r>
-                    </a:p>
-                    <a:p>
-                      <a:pPr marL="0" indent="0" algn="just">
-                        <a:buFontTx/>
-                        <a:buNone/>
-                      </a:pPr>
-                      <a:endParaRPr lang="es-MX" sz="1100" kern="1200" dirty="0">
-                        <a:solidFill>
-                          <a:schemeClr val="dk1"/>
-                        </a:solidFill>
-                        <a:latin typeface="+mn-lt"/>
-                        <a:ea typeface="+mn-ea"/>
-                        <a:cs typeface="+mn-cs"/>
-                      </a:endParaRPr>
-                    </a:p>
-                    <a:p>
-                      <a:pPr marL="0" indent="0" algn="just">
-                        <a:buFontTx/>
-                        <a:buNone/>
-                      </a:pPr>
-                      <a:endParaRPr lang="es-MX" sz="1100" kern="1200" dirty="0">
-                        <a:solidFill>
-                          <a:schemeClr val="dk1"/>
-                        </a:solidFill>
-                        <a:latin typeface="+mn-lt"/>
-                        <a:ea typeface="+mn-ea"/>
-                        <a:cs typeface="+mn-cs"/>
-                      </a:endParaRPr>
-                    </a:p>
-                    <a:p>
-                      <a:pPr marL="0" marR="0" lvl="0" indent="0" algn="just" defTabSz="914400" rtl="0" eaLnBrk="1" fontAlgn="auto" latinLnBrk="0" hangingPunct="1">
-                        <a:lnSpc>
-                          <a:spcPct val="100000"/>
-                        </a:lnSpc>
-                        <a:spcBef>
-                          <a:spcPts val="0"/>
-                        </a:spcBef>
-                        <a:spcAft>
-                          <a:spcPts val="0"/>
-                        </a:spcAft>
-                        <a:buClrTx/>
-                        <a:buSzTx/>
-                        <a:buFontTx/>
-                        <a:buNone/>
-                        <a:tabLst/>
-                        <a:defRPr/>
-                      </a:pPr>
-                      <a:r>
-                        <a:rPr lang="es-MX" sz="1100" kern="1200" dirty="0">
-                          <a:solidFill>
-                            <a:schemeClr val="dk1"/>
-                          </a:solidFill>
-                          <a:latin typeface="+mn-lt"/>
-                          <a:ea typeface="+mn-ea"/>
-                          <a:cs typeface="+mn-cs"/>
-                        </a:rPr>
-                        <a:t> </a:t>
-                      </a:r>
-                    </a:p>
-                    <a:p>
-                      <a:pPr marL="0" marR="0" lvl="0" indent="0" algn="just" defTabSz="914400" rtl="0" eaLnBrk="1" fontAlgn="auto" latinLnBrk="0" hangingPunct="1">
-                        <a:lnSpc>
-                          <a:spcPct val="100000"/>
-                        </a:lnSpc>
-                        <a:spcBef>
-                          <a:spcPts val="0"/>
-                        </a:spcBef>
-                        <a:spcAft>
-                          <a:spcPts val="0"/>
-                        </a:spcAft>
-                        <a:buClrTx/>
-                        <a:buSzTx/>
-                        <a:buFontTx/>
-                        <a:buNone/>
-                        <a:tabLst/>
-                        <a:defRPr/>
-                      </a:pPr>
-                      <a:endParaRPr lang="es-MX" sz="1100" kern="1200" dirty="0">
-                        <a:solidFill>
-                          <a:schemeClr val="dk1"/>
-                        </a:solidFill>
-                        <a:latin typeface="+mn-lt"/>
-                        <a:ea typeface="+mn-ea"/>
-                        <a:cs typeface="+mn-cs"/>
-                      </a:endParaRPr>
-                    </a:p>
-                    <a:p>
-                      <a:pPr marL="0" marR="0" lvl="0" indent="0" algn="just" defTabSz="914400" rtl="0" eaLnBrk="1" fontAlgn="auto" latinLnBrk="0" hangingPunct="1">
-                        <a:lnSpc>
-                          <a:spcPct val="100000"/>
-                        </a:lnSpc>
-                        <a:spcBef>
-                          <a:spcPts val="0"/>
-                        </a:spcBef>
-                        <a:spcAft>
-                          <a:spcPts val="0"/>
-                        </a:spcAft>
-                        <a:buClrTx/>
-                        <a:buSzTx/>
-                        <a:buFontTx/>
-                        <a:buNone/>
-                        <a:tabLst/>
-                        <a:defRPr/>
-                      </a:pPr>
-                      <a:r>
-                        <a:rPr lang="es-MX" sz="1100" kern="1200" dirty="0">
-                          <a:solidFill>
-                            <a:schemeClr val="dk1"/>
-                          </a:solidFill>
-                          <a:latin typeface="+mn-lt"/>
-                          <a:ea typeface="+mn-ea"/>
-                          <a:cs typeface="+mn-cs"/>
-                        </a:rPr>
-                        <a:t>[V2] </a:t>
-                      </a:r>
-                    </a:p>
-                    <a:p>
-                      <a:pPr marL="0" indent="0" algn="just">
-                        <a:buFontTx/>
-                        <a:buNone/>
-                      </a:pPr>
-                      <a:endParaRPr lang="es-MX" sz="1100" kern="1200" dirty="0">
-                        <a:solidFill>
-                          <a:schemeClr val="dk1"/>
-                        </a:solidFill>
-                        <a:latin typeface="+mn-lt"/>
-                        <a:ea typeface="+mn-ea"/>
-                        <a:cs typeface="+mn-cs"/>
-                      </a:endParaRPr>
-                    </a:p>
-                  </a:txBody>
-                  <a:tcPr/>
-                </a:tc>
-                <a:tc hMerge="1">
-                  <a:txBody>
-                    <a:bodyPr/>
-                    <a:lstStyle/>
-                    <a:p>
-                      <a:endParaRPr lang="es-MX"/>
-                    </a:p>
-                  </a:txBody>
-                  <a:tcPr/>
-                </a:tc>
-                <a:extLst>
-                  <a:ext uri="{0D108BD9-81ED-4DB2-BD59-A6C34878D82A}">
-                    <a16:rowId xmlns:a16="http://schemas.microsoft.com/office/drawing/2014/main" val="4024071236"/>
-                  </a:ext>
-                </a:extLst>
-              </a:tr>
-            </a:tbl>
-          </a:graphicData>
-        </a:graphic>
-      </p:graphicFrame>
-      <p:pic>
-        <p:nvPicPr>
-          <p:cNvPr id="7" name="[FP]" descr="[FP]">
-            <a:extLst>
-              <a:ext uri="{FF2B5EF4-FFF2-40B4-BE49-F238E27FC236}">
-                <a16:creationId xmlns:a16="http://schemas.microsoft.com/office/drawing/2014/main" id="{C80E713A-27D7-471A-9297-6CD4151A9971}"/>
-              </a:ext>
-            </a:extLst>
-          </p:cNvPr>
-          <p:cNvPicPr>
-            <a:picLocks noChangeAspect="1"/>
-          </p:cNvPicPr>
-          <p:nvPr/>
-        </p:nvPicPr>
-        <p:blipFill>
-          <a:blip r:embed="R84d8ef8464324682">
-            <a:extLst>
-              <a:ext uri="{28A0092B-C50C-407E-A947-70E740481C1C}">
-                <a14:useLocalDpi xmlns:a14="http://schemas.microsoft.com/office/drawing/2010/main" val="0"/>
-              </a:ext>
-            </a:extLst>
-          </a:blip>
-          <a:stretch>
-            <a:fillRect/>
-          </a:stretch>
-        </p:blipFill>
-        <p:spPr>
-          <a:xfrm>
-            <a:off x="214361" y="1714348"/>
-            <a:ext cx="2902475" cy="4351338"/>
-          </a:xfrm>
-          <a:prstGeom prst="rect">
-            <a:avLst/>
-          </a:prstGeom>
-        </p:spPr>
-      </p:pic>
-      <p:pic>
-        <p:nvPicPr>
-          <p:cNvPr id="11" name="[FV1]" descr="[FV1]">
-            <a:extLst>
-              <a:ext uri="{FF2B5EF4-FFF2-40B4-BE49-F238E27FC236}">
-                <a16:creationId xmlns:a16="http://schemas.microsoft.com/office/drawing/2014/main" id="{95A1EC47-8063-435B-9340-91DBB33FE951}"/>
-              </a:ext>
-            </a:extLst>
-          </p:cNvPr>
-          <p:cNvPicPr>
-            <a:picLocks noChangeAspect="1"/>
-          </p:cNvPicPr>
-          <p:nvPr/>
-        </p:nvPicPr>
-        <p:blipFill>
-          <a:blip r:embed="rId3">
-            <a:extLst>
-              <a:ext uri="{28A0092B-C50C-407E-A947-70E740481C1C}">
-                <a14:useLocalDpi xmlns:a14="http://schemas.microsoft.com/office/drawing/2010/main" val="0"/>
-              </a:ext>
-            </a:extLst>
-          </a:blip>
-          <a:stretch>
-            <a:fillRect/>
-          </a:stretch>
-        </p:blipFill>
-        <p:spPr>
-          <a:xfrm>
-            <a:off x="7584982" y="5672321"/>
-            <a:ext cx="665008" cy="827694"/>
-          </a:xfrm>
-          <a:prstGeom prst="rect">
-            <a:avLst/>
-          </a:prstGeom>
-        </p:spPr>
-      </p:pic>
-      <p:pic>
-        <p:nvPicPr>
-          <p:cNvPr id="13" name="[FV2]" descr="[FV2]">
-            <a:extLst>
-              <a:ext uri="{FF2B5EF4-FFF2-40B4-BE49-F238E27FC236}">
-                <a16:creationId xmlns:a16="http://schemas.microsoft.com/office/drawing/2014/main" id="{65D6E13E-B1E1-4CA4-8F00-9E73059CD0BD}"/>
-              </a:ext>
-            </a:extLst>
-          </p:cNvPr>
-          <p:cNvPicPr>
-            <a:picLocks noChangeAspect="1"/>
-          </p:cNvPicPr>
-          <p:nvPr/>
-        </p:nvPicPr>
-        <p:blipFill>
-          <a:blip r:embed="rId3">
-            <a:extLst>
-              <a:ext uri="{28A0092B-C50C-407E-A947-70E740481C1C}">
-                <a14:useLocalDpi xmlns:a14="http://schemas.microsoft.com/office/drawing/2010/main" val="0"/>
-              </a:ext>
-            </a:extLst>
-          </a:blip>
-          <a:stretch>
-            <a:fillRect/>
-          </a:stretch>
-        </p:blipFill>
-        <p:spPr>
-          <a:xfrm>
-            <a:off x="9993131" y="5680558"/>
-            <a:ext cx="665008" cy="827694"/>
-          </a:xfrm>
-          <a:prstGeom prst="rect">
-            <a:avLst/>
-          </a:prstGeom>
-        </p:spPr>
-      </p:pic>
-    </p:spTree>
-    <p:extLst>
-      <p:ext uri="{BB962C8B-B14F-4D97-AF65-F5344CB8AC3E}">
-        <p14:creationId xmlns:p14="http://schemas.microsoft.com/office/powerpoint/2010/main" val="2124728287"/>
-      </p:ext>
-    </p:extLst>
-  </p:cSld>
-  <p:clrMapOvr>
-    <a:masterClrMapping/>
-  </p:clrMapOvr>
-</p:sld>
-</file>
-
-<file path=ppt/slides/slide6.xml><?xml version="1.0" encoding="utf-8"?>
-<p:sld xmlns:a16="http://schemas.microsoft.com/office/drawing/2014/main" xmlns:p14="http://schemas.microsoft.com/office/powerpoint/2010/main" xmlns:a14="http://schemas.microsoft.com/office/drawing/2010/main" xmlns:a="http://schemas.openxmlformats.org/drawingml/2006/main" xmlns:r="http://schemas.openxmlformats.org/officeDocument/2006/relationships" xmlns:p="http://schemas.openxmlformats.org/presentationml/2006/main">
-  <p:cSld>
-    <p:spTree>
-      <p:nvGrpSpPr>
-        <p:cNvPr id="1" name=""/>
-        <p:cNvGrpSpPr/>
-        <p:nvPr/>
-      </p:nvGrpSpPr>
-      <p:grpSpPr>
-        <a:xfrm>
-          <a:off x="0" y="0"/>
-          <a:ext cx="0" cy="0"/>
-          <a:chOff x="0" y="0"/>
-          <a:chExt cx="0" cy="0"/>
-        </a:xfrm>
-      </p:grpSpPr>
-      <p:pic>
-        <p:nvPicPr>
-          <p:cNvPr id="4" name="[FONDO]" descr="[FONDO]">
-            <a:extLst>
-              <a:ext uri="{FF2B5EF4-FFF2-40B4-BE49-F238E27FC236}">
-                <a16:creationId xmlns:a16="http://schemas.microsoft.com/office/drawing/2014/main" id="{AE2FEBDB-ED54-FF79-0EF8-AA9E7C8EA417}"/>
-              </a:ext>
-            </a:extLst>
-          </p:cNvPr>
-          <p:cNvPicPr>
-            <a:picLocks noChangeAspect="1"/>
-          </p:cNvPicPr>
-          <p:nvPr/>
-        </p:nvPicPr>
-        <p:blipFill>
-          <a:blip r:embed="R43016081a53941f1"/>
-          <a:stretch>
-            <a:fillRect/>
-          </a:stretch>
-        </p:blipFill>
-        <p:spPr>
-          <a:xfrm>
-            <a:off x="1" y="0"/>
-            <a:ext cx="12401280" cy="6969519"/>
-          </a:xfrm>
-          <a:prstGeom prst="rect">
-            <a:avLst/>
-          </a:prstGeom>
-        </p:spPr>
-      </p:pic>
-      <p:graphicFrame>
-        <p:nvGraphicFramePr>
-          <p:cNvPr id="10" name="Tabla 9">
-            <a:extLst>
-              <a:ext uri="{FF2B5EF4-FFF2-40B4-BE49-F238E27FC236}">
-                <a16:creationId xmlns:a16="http://schemas.microsoft.com/office/drawing/2014/main" id="{BC4CEC18-7797-7786-F517-147A6AD7242D}"/>
-              </a:ext>
-            </a:extLst>
-          </p:cNvPr>
-          <p:cNvGraphicFramePr>
-            <a:graphicFrameLocks noGrp="1"/>
-          </p:cNvGraphicFramePr>
-          <p:nvPr>
-            <p:extLst>
-              <p:ext uri="{D42A27DB-BD31-4B8C-83A1-F6EECF244321}">
-                <p14:modId xmlns:p14="http://schemas.microsoft.com/office/powerpoint/2010/main" val="1791400885"/>
-              </p:ext>
-            </p:extLst>
-          </p:nvPr>
-        </p:nvGraphicFramePr>
-        <p:xfrm>
-          <a:off x="3252159" y="1370610"/>
-          <a:ext cx="9149122" cy="5266098"/>
-        </p:xfrm>
-        <a:graphic>
-          <a:graphicData uri="http://schemas.openxmlformats.org/drawingml/2006/table">
-            <a:tbl>
-              <a:tblPr firstRow="1" bandRow="1">
-                <a:tableStyleId>{5C22544A-7EE6-4342-B048-85BDC9FD1C3A}</a:tableStyleId>
-              </a:tblPr>
-              <a:tblGrid>
-                <a:gridCol w="2462314">
-                  <a:extLst>
-                    <a:ext uri="{9D8B030D-6E8A-4147-A177-3AD203B41FA5}">
-                      <a16:colId xmlns:a16="http://schemas.microsoft.com/office/drawing/2014/main" val="2746230745"/>
-                    </a:ext>
-                  </a:extLst>
-                </a:gridCol>
-                <a:gridCol w="3343404">
-                  <a:extLst>
-                    <a:ext uri="{9D8B030D-6E8A-4147-A177-3AD203B41FA5}">
-                      <a16:colId xmlns:a16="http://schemas.microsoft.com/office/drawing/2014/main" val="3075986152"/>
-                    </a:ext>
-                  </a:extLst>
-                </a:gridCol>
-                <a:gridCol w="3343404">
-                  <a:extLst>
-                    <a:ext uri="{9D8B030D-6E8A-4147-A177-3AD203B41FA5}">
-                      <a16:colId xmlns:a16="http://schemas.microsoft.com/office/drawing/2014/main" val="4044500939"/>
-                    </a:ext>
-                  </a:extLst>
-                </a:gridCol>
-              </a:tblGrid>
-              <a:tr h="319663">
-                <a:tc gridSpan="3">
-                  <a:txBody>
-                    <a:bodyPr/>
-                    <a:lstStyle/>
-                    <a:p>
-                      <a:r>
-                        <a:rPr lang="es-MX" sz="1600" dirty="0"/>
-                        <a:t>JOSUE CASTORENA ESPARZA</a:t>
-                      </a:r>
-                    </a:p>
-                  </a:txBody>
-                  <a:tcPr/>
-                </a:tc>
-                <a:tc hMerge="1">
-                  <a:txBody>
-                    <a:bodyPr/>
-                    <a:lstStyle/>
-                    <a:p>
-                      <a:endParaRPr lang="es-MX" dirty="0"/>
-                    </a:p>
-                  </a:txBody>
-                  <a:tcPr/>
-                </a:tc>
-                <a:tc hMerge="1">
-                  <a:txBody>
-                    <a:bodyPr/>
-                    <a:lstStyle/>
-                    <a:p>
-                      <a:endParaRPr lang="es-MX"/>
-                    </a:p>
-                  </a:txBody>
-                  <a:tcPr/>
-                </a:tc>
-                <a:extLst>
-                  <a:ext uri="{0D108BD9-81ED-4DB2-BD59-A6C34878D82A}">
-                    <a16:rowId xmlns:a16="http://schemas.microsoft.com/office/drawing/2014/main" val="3979505418"/>
-                  </a:ext>
-                </a:extLst>
-              </a:tr>
-              <a:tr h="319663">
-                <a:tc>
-                  <a:txBody>
-                    <a:bodyPr/>
-                    <a:lstStyle/>
-                    <a:p>
-                      <a:r>
-                        <a:rPr lang="es-MX" sz="1100" b="1" dirty="0">
-                          <a:solidFill>
-                            <a:schemeClr val="bg1"/>
-                          </a:solidFill>
-                        </a:rPr>
-                        <a:t>GRUPO DELICTIVO</a:t>
-                      </a:r>
-                    </a:p>
-                  </a:txBody>
-                  <a:tcPr>
-                    <a:solidFill>
-                      <a:schemeClr val="accent1">
-                        <a:lumMod val="75000"/>
-                      </a:schemeClr>
-                    </a:solidFill>
-                  </a:tcPr>
-                </a:tc>
-                <a:tc>
-                  <a:txBody>
-                    <a:bodyPr/>
-                    <a:lstStyle/>
-                    <a:p>
-                      <a:r>
-                        <a:rPr lang="es-MX" sz="1200" b="1" dirty="0"/>
-                        <a:t>CJNG</a:t>
-                      </a:r>
-                    </a:p>
-                  </a:txBody>
-                  <a:tcPr/>
-                </a:tc>
-                <a:tc>
-                  <a:txBody>
-                    <a:bodyPr/>
-                    <a:lstStyle/>
-                    <a:p>
-                      <a:pPr marL="0" marR="0" lvl="0" indent="0" algn="l" defTabSz="914400" rtl="0" eaLnBrk="1" fontAlgn="auto" latinLnBrk="0" hangingPunct="1">
-                        <a:lnSpc>
-                          <a:spcPct val="100000"/>
-                        </a:lnSpc>
-                        <a:spcBef>
-                          <a:spcPts val="0"/>
-                        </a:spcBef>
-                        <a:spcAft>
-                          <a:spcPts val="0"/>
-                        </a:spcAft>
-                        <a:buClrTx/>
-                        <a:buSzTx/>
-                        <a:buFontTx/>
-                        <a:buNone/>
-                        <a:tabLst/>
-                        <a:defRPr/>
-                      </a:pPr>
-                      <a:r>
-                        <a:rPr lang="es-MX" sz="1200" b="1" dirty="0"/>
-                        <a:t>EJECUTOR</a:t>
-                      </a:r>
-                    </a:p>
-                  </a:txBody>
-                  <a:tcPr/>
-                </a:tc>
-                <a:extLst>
-                  <a:ext uri="{0D108BD9-81ED-4DB2-BD59-A6C34878D82A}">
-                    <a16:rowId xmlns:a16="http://schemas.microsoft.com/office/drawing/2014/main" val="201189607"/>
-                  </a:ext>
-                </a:extLst>
-              </a:tr>
-              <a:tr h="725435">
-                <a:tc>
-                  <a:txBody>
-                    <a:bodyPr/>
-                    <a:lstStyle/>
-                    <a:p>
-                      <a:r>
-                        <a:rPr lang="es-MX" sz="1100" b="1" kern="1200" dirty="0">
-                          <a:solidFill>
-                            <a:schemeClr val="bg1"/>
-                          </a:solidFill>
-                          <a:latin typeface="+mn-lt"/>
-                          <a:ea typeface="+mn-ea"/>
-                          <a:cs typeface="+mn-cs"/>
-                        </a:rPr>
-                        <a:t>DELITOS / INGRESOS</a:t>
-                      </a:r>
-                    </a:p>
-                  </a:txBody>
-                  <a:tcPr>
-                    <a:solidFill>
-                      <a:schemeClr val="accent1">
-                        <a:lumMod val="75000"/>
-                      </a:schemeClr>
-                    </a:solidFill>
-                  </a:tcPr>
-                </a:tc>
-                <a:tc gridSpan="2">
-                  <a:txBody>
-                    <a:bodyPr/>
-                    <a:lstStyle/>
-                    <a:p>
-                      <a:pPr marL="0" indent="0">
-                        <a:buFont typeface="Arial" panose="020B0604020202020204" pitchFamily="34" charset="0"/>
-                        <a:buNone/>
-                      </a:pPr>
-                      <a:r>
-                        <a:rPr lang="es-MX" sz="1100" dirty="0"/>
-                        <a:t>
-• Contra la Salud — 31/07/2022 14:17
-• Contra la Salud — 06/12/2019 21:20</a:t>
-                      </a:r>
-                    </a:p>
-                  </a:txBody>
-                  <a:tcPr/>
-                </a:tc>
-                <a:tc hMerge="1">
-                  <a:txBody>
-                    <a:bodyPr/>
-                    <a:lstStyle/>
-                    <a:p>
-                      <a:endParaRPr lang="es-MX"/>
-                    </a:p>
-                  </a:txBody>
-                  <a:tcPr/>
-                </a:tc>
-                <a:extLst>
-                  <a:ext uri="{0D108BD9-81ED-4DB2-BD59-A6C34878D82A}">
-                    <a16:rowId xmlns:a16="http://schemas.microsoft.com/office/drawing/2014/main" val="3340689267"/>
-                  </a:ext>
-                </a:extLst>
-              </a:tr>
-              <a:tr h="1044626">
-                <a:tc>
-                  <a:txBody>
-                    <a:bodyPr/>
-                    <a:lstStyle/>
-                    <a:p>
-                      <a:r>
-                        <a:rPr lang="es-MX" sz="1100" b="1" kern="1200" dirty="0">
-                          <a:solidFill>
-                            <a:schemeClr val="bg1"/>
-                          </a:solidFill>
-                          <a:latin typeface="+mn-lt"/>
-                          <a:ea typeface="+mn-ea"/>
-                          <a:cs typeface="+mn-cs"/>
-                        </a:rPr>
-                        <a:t>CARPETAS DE INVESTIGACIÓN</a:t>
-                      </a:r>
-                    </a:p>
-                  </a:txBody>
-                  <a:tcPr>
-                    <a:solidFill>
-                      <a:schemeClr val="accent1">
-                        <a:lumMod val="75000"/>
-                      </a:schemeClr>
-                    </a:solidFill>
-                  </a:tcPr>
-                </a:tc>
-                <a:tc gridSpan="2">
-                  <a:txBody>
-                    <a:bodyPr/>
-                    <a:lstStyle/>
-                    <a:p>
-                      <a:pPr marL="0" indent="0" algn="l" defTabSz="914400" rtl="0" eaLnBrk="1" latinLnBrk="0" hangingPunct="1">
-                        <a:buFont typeface="Arial" panose="020B0604020202020204" pitchFamily="34" charset="0"/>
-                        <a:buNone/>
-                      </a:pPr>
-                      <a:r>
-                        <a:rPr lang="es-MX" sz="1100" kern="1200">
-                          <a:solidFill>
-                            <a:schemeClr val="dk1"/>
-                          </a:solidFill>
-                          <a:latin typeface="+mn-lt"/>
-                          <a:ea typeface="+mn-ea"/>
-                          <a:cs typeface="+mn-cs"/>
-                        </a:rPr>
-                        <a:t>
-• CI/RIN/00425/06-23 Contra la Salud</a:t>
-                      </a:r>
-                      <a:endParaRPr lang="es-MX" sz="1100" kern="1200" dirty="0">
-                        <a:solidFill>
-                          <a:schemeClr val="dk1"/>
-                        </a:solidFill>
-                        <a:latin typeface="+mn-lt"/>
-                        <a:ea typeface="+mn-ea"/>
-                        <a:cs typeface="+mn-cs"/>
-                      </a:endParaRPr>
-                    </a:p>
-                  </a:txBody>
-                  <a:tcPr/>
-                </a:tc>
-                <a:tc hMerge="1">
-                  <a:txBody>
-                    <a:bodyPr/>
-                    <a:lstStyle/>
-                    <a:p>
-                      <a:endParaRPr lang="es-MX"/>
-                    </a:p>
-                  </a:txBody>
-                  <a:tcPr/>
-                </a:tc>
-                <a:extLst>
-                  <a:ext uri="{0D108BD9-81ED-4DB2-BD59-A6C34878D82A}">
-                    <a16:rowId xmlns:a16="http://schemas.microsoft.com/office/drawing/2014/main" val="3218073216"/>
-                  </a:ext>
-                </a:extLst>
-              </a:tr>
-              <a:tr h="159387">
-                <a:tc>
-                  <a:txBody>
-                    <a:bodyPr/>
-                    <a:lstStyle/>
-                    <a:p>
-                      <a:pPr marL="0" marR="0" lvl="0" indent="0" algn="l" defTabSz="914400" rtl="0" eaLnBrk="1" fontAlgn="auto" latinLnBrk="0" hangingPunct="1">
-                        <a:lnSpc>
-                          <a:spcPct val="100000"/>
-                        </a:lnSpc>
-                        <a:spcBef>
-                          <a:spcPts val="0"/>
-                        </a:spcBef>
-                        <a:spcAft>
-                          <a:spcPts val="0"/>
-                        </a:spcAft>
-                        <a:buClrTx/>
-                        <a:buSzTx/>
-                        <a:buFontTx/>
-                        <a:buNone/>
-                        <a:tabLst/>
-                        <a:defRPr/>
-                      </a:pPr>
-                      <a:r>
-                        <a:rPr lang="es-MX" sz="1100" b="1" dirty="0">
-                          <a:solidFill>
-                            <a:schemeClr val="bg1"/>
-                          </a:solidFill>
-                        </a:rPr>
-                        <a:t>ORDENES DE APREHENSIÓN</a:t>
-                      </a:r>
-                    </a:p>
-                  </a:txBody>
-                  <a:tcPr>
-                    <a:solidFill>
-                      <a:schemeClr val="accent1">
-                        <a:lumMod val="75000"/>
-                      </a:schemeClr>
-                    </a:solidFill>
-                  </a:tcPr>
-                </a:tc>
-                <a:tc gridSpan="2">
-                  <a:txBody>
-                    <a:bodyPr/>
-                    <a:lstStyle/>
-                    <a:p>
-                      <a:pPr marL="0" indent="0" algn="l" defTabSz="914400" rtl="0" eaLnBrk="1" latinLnBrk="0" hangingPunct="1">
-                        <a:buFont typeface="Arial" panose="020B0604020202020204" pitchFamily="34" charset="0"/>
-                        <a:buNone/>
-                      </a:pPr>
-                      <a:r>
-                        <a:rPr lang="es-MX" sz="1100" kern="1200" dirty="0">
-                          <a:solidFill>
-                            <a:schemeClr val="dk1"/>
-                          </a:solidFill>
-                          <a:latin typeface="+mn-lt"/>
-                          <a:ea typeface="+mn-ea"/>
-                          <a:cs typeface="+mn-cs"/>
-                        </a:rPr>
-                        <a:t>
-• HOMICIDIO DOLOSO CALIFICADO — CUMPLIMENTADA</a:t>
-                      </a:r>
-                    </a:p>
-                  </a:txBody>
-                  <a:tcPr/>
-                </a:tc>
-                <a:tc hMerge="1">
-                  <a:txBody>
-                    <a:bodyPr/>
-                    <a:lstStyle/>
-                    <a:p>
-                      <a:endParaRPr lang="es-MX"/>
-                    </a:p>
-                  </a:txBody>
-                  <a:tcPr/>
-                </a:tc>
-                <a:extLst>
-                  <a:ext uri="{0D108BD9-81ED-4DB2-BD59-A6C34878D82A}">
-                    <a16:rowId xmlns:a16="http://schemas.microsoft.com/office/drawing/2014/main" val="3169124086"/>
-                  </a:ext>
-                </a:extLst>
-              </a:tr>
-              <a:tr h="795285">
-                <a:tc>
-                  <a:txBody>
-                    <a:bodyPr/>
-                    <a:lstStyle/>
-                    <a:p>
-                      <a:r>
-                        <a:rPr lang="es-MX" sz="1100" b="1" dirty="0"/>
-                        <a:t> </a:t>
-                      </a:r>
-                      <a:r>
-                        <a:rPr lang="es-MX" sz="1100" b="1" dirty="0">
-                          <a:solidFill>
-                            <a:schemeClr val="bg1"/>
-                          </a:solidFill>
-                        </a:rPr>
-                        <a:t>ESTATUS </a:t>
-                      </a:r>
-                    </a:p>
-                  </a:txBody>
-                  <a:tcPr>
-                    <a:solidFill>
-                      <a:schemeClr val="accent1">
-                        <a:lumMod val="75000"/>
-                      </a:schemeClr>
-                    </a:solidFill>
-                  </a:tcPr>
-                </a:tc>
-                <a:tc gridSpan="2">
-                  <a:txBody>
-                    <a:bodyPr/>
-                    <a:lstStyle/>
-                    <a:p>
-                      <a:pPr marL="0" marR="0" lvl="0" indent="0" algn="just" defTabSz="914400" rtl="0" eaLnBrk="1" fontAlgn="auto" latinLnBrk="0" hangingPunct="1">
-                        <a:lnSpc>
-                          <a:spcPct val="100000"/>
-                        </a:lnSpc>
-                        <a:spcBef>
-                          <a:spcPts val="0"/>
-                        </a:spcBef>
-                        <a:spcAft>
-                          <a:spcPts val="0"/>
-                        </a:spcAft>
-                        <a:buClrTx/>
-                        <a:buSzTx/>
-                        <a:buFont typeface="Arial" panose="020B0604020202020204" pitchFamily="34" charset="0"/>
-                        <a:buNone/>
-                        <a:tabLst/>
-                        <a:defRPr/>
-                      </a:pPr>
-                      <a:r>
-                        <a:rPr lang="es-MX" sz="1100" kern="1200" dirty="0">
-                          <a:solidFill>
-                            <a:schemeClr val="dk1"/>
-                          </a:solidFill>
-                          <a:latin typeface="+mn-lt"/>
-                          <a:ea typeface="+mn-ea"/>
-                          <a:cs typeface="+mn-cs"/>
-                        </a:rPr>
-                        <a:t>Sentenciado, se sentencio por violacion</a:t>
-                      </a:r>
-                    </a:p>
-                  </a:txBody>
-                  <a:tcPr/>
-                </a:tc>
-                <a:tc hMerge="1">
-                  <a:txBody>
-                    <a:bodyPr/>
-                    <a:lstStyle/>
-                    <a:p>
-                      <a:endParaRPr lang="es-MX"/>
-                    </a:p>
-                  </a:txBody>
-                  <a:tcPr/>
-                </a:tc>
-                <a:extLst>
-                  <a:ext uri="{0D108BD9-81ED-4DB2-BD59-A6C34878D82A}">
-                    <a16:rowId xmlns:a16="http://schemas.microsoft.com/office/drawing/2014/main" val="3558537792"/>
-                  </a:ext>
-                </a:extLst>
-              </a:tr>
-              <a:tr h="1786729">
-                <a:tc>
-                  <a:txBody>
-                    <a:bodyPr/>
-                    <a:lstStyle/>
-                    <a:p>
-                      <a:r>
-                        <a:rPr lang="es-MX" sz="1100" b="1" kern="1200" dirty="0">
-                          <a:solidFill>
-                            <a:schemeClr val="bg1"/>
-                          </a:solidFill>
-                          <a:latin typeface="+mn-lt"/>
-                          <a:ea typeface="+mn-ea"/>
-                          <a:cs typeface="+mn-cs"/>
-                        </a:rPr>
-                        <a:t>ASUNTOS RELACIONADOS</a:t>
-                      </a:r>
-                    </a:p>
-                  </a:txBody>
-                  <a:tcPr>
-                    <a:solidFill>
-                      <a:schemeClr val="accent1">
-                        <a:lumMod val="75000"/>
-                      </a:schemeClr>
-                    </a:solidFill>
-                  </a:tcPr>
-                </a:tc>
-                <a:tc gridSpan="2">
-                  <a:txBody>
-                    <a:bodyPr/>
-                    <a:lstStyle/>
-                    <a:p>
-                      <a:pPr marL="171450" indent="-171450" algn="just">
-                        <a:buFontTx/>
-                        <a:buChar char="-"/>
-                      </a:pPr>
-                      <a:r>
-                        <a:rPr lang="es-MX" sz="1100" kern="1200" dirty="0">
-                          <a:solidFill>
-                            <a:schemeClr val="dk1"/>
-                          </a:solidFill>
-                          <a:latin typeface="+mn-lt"/>
-                          <a:ea typeface="+mn-ea"/>
-                          <a:cs typeface="+mn-cs"/>
-                        </a:rPr>
-                        <a:t>Caso Jassiel Hechos en agravio de Jassiel Díaz Cardona, el pasado 30 de mayo de 2023, en el rancho conocido como  “la fogata” Potrero Salitrillo Monte, Rincón de Romos, Aguascalientes, cuando la victima viajaba a bordo de su automóvil Ford Focus sobre la carretera 22, fue perseguido por los responsables  Jonathan Josefath Castorena Rodríguez alias patroncito, Javier Esquivel Padilla alias “La Queta” y Ricardo Alberto Navarro Gonzales alias “El Ricas”, quienes lo alcanzaron para herirlo con disparos por arma de fuego, la victima falleció minutos mas tarde en el Hospital General de Rincón de Romos.</a:t>
-                      </a:r>
-                    </a:p>
-                    <a:p>
-                      <a:pPr marL="0" indent="0" algn="just">
-                        <a:buFontTx/>
-                        <a:buNone/>
-                      </a:pPr>
-                      <a:endParaRPr lang="es-MX" sz="1100" kern="1200" dirty="0">
-                        <a:solidFill>
-                          <a:schemeClr val="dk1"/>
-                        </a:solidFill>
-                        <a:latin typeface="+mn-lt"/>
-                        <a:ea typeface="+mn-ea"/>
-                        <a:cs typeface="+mn-cs"/>
-                      </a:endParaRPr>
-                    </a:p>
-                    <a:p>
-                      <a:pPr marL="0" indent="0" algn="just">
-                        <a:buFontTx/>
-                        <a:buNone/>
-                      </a:pPr>
-                      <a:endParaRPr lang="es-MX" sz="1100" kern="1200" dirty="0">
-                        <a:solidFill>
-                          <a:schemeClr val="dk1"/>
-                        </a:solidFill>
-                        <a:latin typeface="+mn-lt"/>
-                        <a:ea typeface="+mn-ea"/>
-                        <a:cs typeface="+mn-cs"/>
-                      </a:endParaRPr>
-                    </a:p>
-                    <a:p>
-                      <a:pPr marL="0" marR="0" lvl="0" indent="0" algn="just" defTabSz="914400" rtl="0" eaLnBrk="1" fontAlgn="auto" latinLnBrk="0" hangingPunct="1">
-                        <a:lnSpc>
-                          <a:spcPct val="100000"/>
-                        </a:lnSpc>
-                        <a:spcBef>
-                          <a:spcPts val="0"/>
-                        </a:spcBef>
-                        <a:spcAft>
-                          <a:spcPts val="0"/>
-                        </a:spcAft>
-                        <a:buClrTx/>
-                        <a:buSzTx/>
-                        <a:buFontTx/>
-                        <a:buNone/>
-                        <a:tabLst/>
-                        <a:defRPr/>
-                      </a:pPr>
-                      <a:r>
-                        <a:rPr lang="es-MX" sz="1100" kern="1200" dirty="0">
-                          <a:solidFill>
-                            <a:schemeClr val="dk1"/>
-                          </a:solidFill>
-                          <a:latin typeface="+mn-lt"/>
-                          <a:ea typeface="+mn-ea"/>
-                          <a:cs typeface="+mn-cs"/>
-                        </a:rPr>
-                        <a:t> </a:t>
-                      </a:r>
-                    </a:p>
-                    <a:p>
-                      <a:pPr marL="0" marR="0" lvl="0" indent="0" algn="just" defTabSz="914400" rtl="0" eaLnBrk="1" fontAlgn="auto" latinLnBrk="0" hangingPunct="1">
-                        <a:lnSpc>
-                          <a:spcPct val="100000"/>
-                        </a:lnSpc>
-                        <a:spcBef>
-                          <a:spcPts val="0"/>
-                        </a:spcBef>
-                        <a:spcAft>
-                          <a:spcPts val="0"/>
-                        </a:spcAft>
-                        <a:buClrTx/>
-                        <a:buSzTx/>
-                        <a:buFontTx/>
-                        <a:buNone/>
-                        <a:tabLst/>
-                        <a:defRPr/>
-                      </a:pPr>
-                      <a:endParaRPr lang="es-MX" sz="1100" kern="1200" dirty="0">
-                        <a:solidFill>
-                          <a:schemeClr val="dk1"/>
-                        </a:solidFill>
-                        <a:latin typeface="+mn-lt"/>
-                        <a:ea typeface="+mn-ea"/>
-                        <a:cs typeface="+mn-cs"/>
-                      </a:endParaRPr>
-                    </a:p>
-                    <a:p>
-                      <a:pPr marL="0" marR="0" lvl="0" indent="0" algn="just" defTabSz="914400" rtl="0" eaLnBrk="1" fontAlgn="auto" latinLnBrk="0" hangingPunct="1">
-                        <a:lnSpc>
-                          <a:spcPct val="100000"/>
-                        </a:lnSpc>
-                        <a:spcBef>
-                          <a:spcPts val="0"/>
-                        </a:spcBef>
-                        <a:spcAft>
-                          <a:spcPts val="0"/>
-                        </a:spcAft>
-                        <a:buClrTx/>
-                        <a:buSzTx/>
-                        <a:buFontTx/>
-                        <a:buNone/>
-                        <a:tabLst/>
-                        <a:defRPr/>
-                      </a:pPr>
-                      <a:r>
-                        <a:rPr lang="es-MX" sz="1100" kern="1200" dirty="0">
-                          <a:solidFill>
-                            <a:schemeClr val="dk1"/>
-                          </a:solidFill>
-                          <a:latin typeface="+mn-lt"/>
-                          <a:ea typeface="+mn-ea"/>
-                          <a:cs typeface="+mn-cs"/>
-                        </a:rPr>
-                        <a:t>[V2] </a:t>
-                      </a:r>
-                    </a:p>
-                    <a:p>
-                      <a:pPr marL="0" indent="0" algn="just">
-                        <a:buFontTx/>
-                        <a:buNone/>
-                      </a:pPr>
-                      <a:endParaRPr lang="es-MX" sz="1100" kern="1200" dirty="0">
-                        <a:solidFill>
-                          <a:schemeClr val="dk1"/>
-                        </a:solidFill>
-                        <a:latin typeface="+mn-lt"/>
-                        <a:ea typeface="+mn-ea"/>
-                        <a:cs typeface="+mn-cs"/>
-                      </a:endParaRPr>
-                    </a:p>
-                  </a:txBody>
-                  <a:tcPr/>
-                </a:tc>
-                <a:tc hMerge="1">
-                  <a:txBody>
-                    <a:bodyPr/>
-                    <a:lstStyle/>
-                    <a:p>
-                      <a:endParaRPr lang="es-MX"/>
-                    </a:p>
-                  </a:txBody>
-                  <a:tcPr/>
-                </a:tc>
-                <a:extLst>
-                  <a:ext uri="{0D108BD9-81ED-4DB2-BD59-A6C34878D82A}">
-                    <a16:rowId xmlns:a16="http://schemas.microsoft.com/office/drawing/2014/main" val="4024071236"/>
-                  </a:ext>
-                </a:extLst>
-              </a:tr>
-            </a:tbl>
-          </a:graphicData>
-        </a:graphic>
-      </p:graphicFrame>
-      <p:pic>
-        <p:nvPicPr>
-          <p:cNvPr id="7" name="[FP]" descr="[FP]">
-            <a:extLst>
-              <a:ext uri="{FF2B5EF4-FFF2-40B4-BE49-F238E27FC236}">
-                <a16:creationId xmlns:a16="http://schemas.microsoft.com/office/drawing/2014/main" id="{C80E713A-27D7-471A-9297-6CD4151A9971}"/>
-              </a:ext>
-            </a:extLst>
-          </p:cNvPr>
-          <p:cNvPicPr>
-            <a:picLocks noChangeAspect="1"/>
-          </p:cNvPicPr>
-          <p:nvPr/>
-        </p:nvPicPr>
-        <p:blipFill>
-          <a:blip r:embed="Rd063ed8a8f6d46c6">
+          <a:blip r:embed="R77f2b9a92d6743bd">
             <a:extLst>
               <a:ext uri="{28A0092B-C50C-407E-A947-70E740481C1C}">
                 <a14:useLocalDpi xmlns:a14="http://schemas.microsoft.com/office/drawing/2010/main" val="0"/>
